--- a/Programacion II/Clases/Clase 14 - Preparacion de la presentacion final/Presentacion.pptx
+++ b/Programacion II/Clases/Clase 14 - Preparacion de la presentacion final/Presentacion.pptx
@@ -18,6 +18,12 @@
     <p:sldId id="266" r:id="rId17"/>
     <p:sldId id="267" r:id="rId18"/>
     <p:sldId id="268" r:id="rId19"/>
+    <p:sldId id="269" r:id="rId20"/>
+    <p:sldId id="270" r:id="rId21"/>
+    <p:sldId id="271" r:id="rId22"/>
+    <p:sldId id="272" r:id="rId23"/>
+    <p:sldId id="273" r:id="rId24"/>
+    <p:sldId id="274" r:id="rId25"/>
   </p:sldIdLst>
   <p:sldSz cx="12191695" cy="6858000" type="screen4x3"/>
   <p:notesSz cx="6858000" cy="9144000"/>
@@ -3618,154 +3624,21 @@
                 </a:solidFill>
                 <a:latin typeface="Calibri"/>
               </a:rPr>
-              <a:t>Antes de entregar — autochequeo</a:t>
-            </a:r>
-          </a:p>
-        </p:txBody>
-      </p:sp>
-      <p:sp>
-        <p:nvSpPr>
-          <p:cNvPr id="5" name="Rounded Rectangle 4"/>
-          <p:cNvSpPr/>
-          <p:nvPr/>
-        </p:nvSpPr>
-        <p:spPr>
-          <a:xfrm>
-            <a:off x="457200" y="1261872"/>
-            <a:ext cx="11277295" cy="566928"/>
-          </a:xfrm>
-          <a:prstGeom prst="roundRect">
-            <a:avLst>
-              <a:gd name="adj" fmla="val 12000"/>
-            </a:avLst>
-          </a:prstGeom>
-          <a:solidFill>
-            <a:srgbClr val="F2F2F2"/>
-          </a:solidFill>
-          <a:ln>
-            <a:noFill/>
-          </a:ln>
-        </p:spPr>
-        <p:style>
-          <a:lnRef idx="1">
-            <a:schemeClr val="accent1"/>
-          </a:lnRef>
-          <a:fillRef idx="3">
-            <a:schemeClr val="accent1"/>
-          </a:fillRef>
-          <a:effectRef idx="2">
-            <a:schemeClr val="accent1"/>
-          </a:effectRef>
-          <a:fontRef idx="minor">
-            <a:schemeClr val="lt1"/>
-          </a:fontRef>
-        </p:style>
-        <p:txBody>
-          <a:bodyPr rtlCol="0" anchor="ctr"/>
-          <a:lstStyle/>
-          <a:p>
-            <a:pPr algn="ctr"/>
-          </a:p>
-        </p:txBody>
-      </p:sp>
-      <p:sp>
-        <p:nvSpPr>
-          <p:cNvPr id="6" name="Rectangle 5"/>
-          <p:cNvSpPr/>
-          <p:nvPr/>
-        </p:nvSpPr>
-        <p:spPr>
-          <a:xfrm>
-            <a:off x="640080" y="1408175"/>
-            <a:ext cx="274320" cy="274320"/>
-          </a:xfrm>
-          <a:prstGeom prst="rect">
-            <a:avLst/>
-          </a:prstGeom>
-          <a:solidFill>
-            <a:srgbClr val="FFFFFF"/>
-          </a:solidFill>
-          <a:ln>
-            <a:solidFill>
-              <a:srgbClr val="333333"/>
-            </a:solidFill>
-          </a:ln>
-        </p:spPr>
-        <p:style>
-          <a:lnRef idx="1">
-            <a:schemeClr val="accent1"/>
-          </a:lnRef>
-          <a:fillRef idx="3">
-            <a:schemeClr val="accent1"/>
-          </a:fillRef>
-          <a:effectRef idx="2">
-            <a:schemeClr val="accent1"/>
-          </a:effectRef>
-          <a:fontRef idx="minor">
-            <a:schemeClr val="lt1"/>
-          </a:fontRef>
-        </p:style>
-        <p:txBody>
-          <a:bodyPr rtlCol="0" anchor="ctr"/>
-          <a:lstStyle/>
-          <a:p>
-            <a:pPr algn="ctr"/>
-          </a:p>
-        </p:txBody>
-      </p:sp>
-      <p:sp>
-        <p:nvSpPr>
-          <p:cNvPr id="7" name="Rectangle 6"/>
-          <p:cNvSpPr/>
-          <p:nvPr/>
-        </p:nvSpPr>
-        <p:spPr>
-          <a:xfrm>
-            <a:off x="640080" y="1408175"/>
-            <a:ext cx="73152" cy="274320"/>
-          </a:xfrm>
-          <a:prstGeom prst="rect">
-            <a:avLst/>
-          </a:prstGeom>
-          <a:solidFill>
-            <a:srgbClr val="269CCB"/>
-          </a:solidFill>
-          <a:ln>
-            <a:noFill/>
-          </a:ln>
-        </p:spPr>
-        <p:style>
-          <a:lnRef idx="1">
-            <a:schemeClr val="accent1"/>
-          </a:lnRef>
-          <a:fillRef idx="3">
-            <a:schemeClr val="accent1"/>
-          </a:fillRef>
-          <a:effectRef idx="2">
-            <a:schemeClr val="accent1"/>
-          </a:effectRef>
-          <a:fontRef idx="minor">
-            <a:schemeClr val="lt1"/>
-          </a:fontRef>
-        </p:style>
-        <p:txBody>
-          <a:bodyPr rtlCol="0" anchor="ctr"/>
-          <a:lstStyle/>
-          <a:p>
-            <a:pPr algn="ctr"/>
-          </a:p>
-        </p:txBody>
-      </p:sp>
-      <p:sp>
-        <p:nvSpPr>
-          <p:cNvPr id="8" name="TextBox 7"/>
+              <a:t>El manejo del tiempo y del nervio se entrena, no se improvisa</a:t>
+            </a:r>
+          </a:p>
+        </p:txBody>
+      </p:sp>
+      <p:sp>
+        <p:nvSpPr>
+          <p:cNvPr id="5" name="TextBox 4"/>
           <p:cNvSpPr txBox="1"/>
           <p:nvPr/>
         </p:nvSpPr>
         <p:spPr>
           <a:xfrm>
-            <a:off x="1097280" y="1353312"/>
-            <a:ext cx="10362895" cy="402336"/>
+            <a:off x="457200" y="1170432"/>
+            <a:ext cx="11277295" cy="5230368"/>
           </a:xfrm>
           <a:prstGeom prst="rect">
             <a:avLst/>
@@ -3773,354 +3646,111 @@
           <a:noFill/>
         </p:spPr>
         <p:txBody>
-          <a:bodyPr wrap="square" anchor="ctr"/>
-          <a:lstStyle/>
-          <a:p>
-            <a:r>
-              <a:rPr sz="1500" b="0" i="0">
+          <a:bodyPr wrap="square">
+            <a:spAutoFit/>
+          </a:bodyPr>
+          <a:lstStyle/>
+          <a:p>
+            <a:pPr>
+              <a:spcAft>
+                <a:spcPts val="800"/>
+              </a:spcAft>
+            </a:pPr>
+            <a:r>
+              <a:rPr sz="2000" b="0" i="0">
                 <a:solidFill>
                   <a:srgbClr val="333333"/>
                 </a:solidFill>
                 <a:latin typeface="Calibri"/>
               </a:rPr>
-              <a:t>Si el computador no enciende cinco minutos antes de sustentar, ¿que muestra en su lugar y donde lo tiene a la mano?</a:t>
-            </a:r>
-          </a:p>
-        </p:txBody>
-      </p:sp>
-      <p:sp>
-        <p:nvSpPr>
-          <p:cNvPr id="9" name="Rounded Rectangle 8"/>
-          <p:cNvSpPr/>
-          <p:nvPr/>
-        </p:nvSpPr>
-        <p:spPr>
-          <a:xfrm>
-            <a:off x="457200" y="1938528"/>
-            <a:ext cx="11277295" cy="566928"/>
-          </a:xfrm>
-          <a:prstGeom prst="roundRect">
-            <a:avLst>
-              <a:gd name="adj" fmla="val 12000"/>
-            </a:avLst>
-          </a:prstGeom>
-          <a:solidFill>
-            <a:srgbClr val="F2F2F2"/>
-          </a:solidFill>
-          <a:ln>
-            <a:noFill/>
-          </a:ln>
-        </p:spPr>
-        <p:style>
-          <a:lnRef idx="1">
-            <a:schemeClr val="accent1"/>
-          </a:lnRef>
-          <a:fillRef idx="3">
-            <a:schemeClr val="accent1"/>
-          </a:fillRef>
-          <a:effectRef idx="2">
-            <a:schemeClr val="accent1"/>
-          </a:effectRef>
-          <a:fontRef idx="minor">
-            <a:schemeClr val="lt1"/>
-          </a:fontRef>
-        </p:style>
-        <p:txBody>
-          <a:bodyPr rtlCol="0" anchor="ctr"/>
-          <a:lstStyle/>
-          <a:p>
-            <a:pPr algn="ctr"/>
-          </a:p>
-        </p:txBody>
-      </p:sp>
-      <p:sp>
-        <p:nvSpPr>
-          <p:cNvPr id="10" name="Rectangle 9"/>
-          <p:cNvSpPr/>
-          <p:nvPr/>
-        </p:nvSpPr>
-        <p:spPr>
-          <a:xfrm>
-            <a:off x="640080" y="2084832"/>
-            <a:ext cx="274320" cy="274320"/>
-          </a:xfrm>
-          <a:prstGeom prst="rect">
-            <a:avLst/>
-          </a:prstGeom>
-          <a:solidFill>
-            <a:srgbClr val="FFFFFF"/>
-          </a:solidFill>
-          <a:ln>
-            <a:solidFill>
-              <a:srgbClr val="333333"/>
-            </a:solidFill>
-          </a:ln>
-        </p:spPr>
-        <p:style>
-          <a:lnRef idx="1">
-            <a:schemeClr val="accent1"/>
-          </a:lnRef>
-          <a:fillRef idx="3">
-            <a:schemeClr val="accent1"/>
-          </a:fillRef>
-          <a:effectRef idx="2">
-            <a:schemeClr val="accent1"/>
-          </a:effectRef>
-          <a:fontRef idx="minor">
-            <a:schemeClr val="lt1"/>
-          </a:fontRef>
-        </p:style>
-        <p:txBody>
-          <a:bodyPr rtlCol="0" anchor="ctr"/>
-          <a:lstStyle/>
-          <a:p>
-            <a:pPr algn="ctr"/>
-          </a:p>
-        </p:txBody>
-      </p:sp>
-      <p:sp>
-        <p:nvSpPr>
-          <p:cNvPr id="11" name="Rectangle 10"/>
-          <p:cNvSpPr/>
-          <p:nvPr/>
-        </p:nvSpPr>
-        <p:spPr>
-          <a:xfrm>
-            <a:off x="640080" y="2084832"/>
-            <a:ext cx="73152" cy="274320"/>
-          </a:xfrm>
-          <a:prstGeom prst="rect">
-            <a:avLst/>
-          </a:prstGeom>
-          <a:solidFill>
-            <a:srgbClr val="269CCB"/>
-          </a:solidFill>
-          <a:ln>
-            <a:noFill/>
-          </a:ln>
-        </p:spPr>
-        <p:style>
-          <a:lnRef idx="1">
-            <a:schemeClr val="accent1"/>
-          </a:lnRef>
-          <a:fillRef idx="3">
-            <a:schemeClr val="accent1"/>
-          </a:fillRef>
-          <a:effectRef idx="2">
-            <a:schemeClr val="accent1"/>
-          </a:effectRef>
-          <a:fontRef idx="minor">
-            <a:schemeClr val="lt1"/>
-          </a:fontRef>
-        </p:style>
-        <p:txBody>
-          <a:bodyPr rtlCol="0" anchor="ctr"/>
-          <a:lstStyle/>
-          <a:p>
-            <a:pPr algn="ctr"/>
-          </a:p>
-        </p:txBody>
-      </p:sp>
-      <p:sp>
-        <p:nvSpPr>
-          <p:cNvPr id="12" name="TextBox 11"/>
-          <p:cNvSpPr txBox="1"/>
-          <p:nvPr/>
-        </p:nvSpPr>
-        <p:spPr>
-          <a:xfrm>
-            <a:off x="1097280" y="2029968"/>
-            <a:ext cx="10362895" cy="402336"/>
-          </a:xfrm>
-          <a:prstGeom prst="rect">
-            <a:avLst/>
-          </a:prstGeom>
-          <a:noFill/>
-        </p:spPr>
-        <p:txBody>
-          <a:bodyPr wrap="square" anchor="ctr"/>
-          <a:lstStyle/>
-          <a:p>
-            <a:r>
-              <a:rPr sz="1500" b="0" i="0">
+              <a:t>–   El manejo del tiempo y del nervio se entrena, no se improvisa.</a:t>
+            </a:r>
+          </a:p>
+          <a:p>
+            <a:pPr>
+              <a:spcAft>
+                <a:spcPts val="800"/>
+              </a:spcAft>
+            </a:pPr>
+            <a:r>
+              <a:rPr sz="2000" b="0" i="0">
                 <a:solidFill>
                   <a:srgbClr val="333333"/>
                 </a:solidFill>
                 <a:latin typeface="Calibri"/>
               </a:rPr>
-              <a:t>¿Cual es la primera pantalla que ve el jurado y que informacion tiene: hay datos, o una tabla vacia que parece un programa que no sirve?</a:t>
-            </a:r>
-          </a:p>
-        </p:txBody>
-      </p:sp>
-      <p:sp>
-        <p:nvSpPr>
-          <p:cNvPr id="13" name="Rounded Rectangle 12"/>
-          <p:cNvSpPr/>
-          <p:nvPr/>
-        </p:nvSpPr>
-        <p:spPr>
-          <a:xfrm>
-            <a:off x="457200" y="2615184"/>
-            <a:ext cx="11277295" cy="566928"/>
-          </a:xfrm>
-          <a:prstGeom prst="roundRect">
-            <a:avLst>
-              <a:gd name="adj" fmla="val 12000"/>
-            </a:avLst>
-          </a:prstGeom>
-          <a:solidFill>
-            <a:srgbClr val="F2F2F2"/>
-          </a:solidFill>
-          <a:ln>
-            <a:noFill/>
-          </a:ln>
-        </p:spPr>
-        <p:style>
-          <a:lnRef idx="1">
-            <a:schemeClr val="accent1"/>
-          </a:lnRef>
-          <a:fillRef idx="3">
-            <a:schemeClr val="accent1"/>
-          </a:fillRef>
-          <a:effectRef idx="2">
-            <a:schemeClr val="accent1"/>
-          </a:effectRef>
-          <a:fontRef idx="minor">
-            <a:schemeClr val="lt1"/>
-          </a:fontRef>
-        </p:style>
-        <p:txBody>
-          <a:bodyPr rtlCol="0" anchor="ctr"/>
-          <a:lstStyle/>
-          <a:p>
-            <a:pPr algn="ctr"/>
-          </a:p>
-        </p:txBody>
-      </p:sp>
-      <p:sp>
-        <p:nvSpPr>
-          <p:cNvPr id="14" name="Rectangle 13"/>
-          <p:cNvSpPr/>
-          <p:nvPr/>
-        </p:nvSpPr>
-        <p:spPr>
-          <a:xfrm>
-            <a:off x="640080" y="2761488"/>
-            <a:ext cx="274320" cy="274320"/>
-          </a:xfrm>
-          <a:prstGeom prst="rect">
-            <a:avLst/>
-          </a:prstGeom>
-          <a:solidFill>
-            <a:srgbClr val="FFFFFF"/>
-          </a:solidFill>
-          <a:ln>
-            <a:solidFill>
-              <a:srgbClr val="333333"/>
-            </a:solidFill>
-          </a:ln>
-        </p:spPr>
-        <p:style>
-          <a:lnRef idx="1">
-            <a:schemeClr val="accent1"/>
-          </a:lnRef>
-          <a:fillRef idx="3">
-            <a:schemeClr val="accent1"/>
-          </a:fillRef>
-          <a:effectRef idx="2">
-            <a:schemeClr val="accent1"/>
-          </a:effectRef>
-          <a:fontRef idx="minor">
-            <a:schemeClr val="lt1"/>
-          </a:fontRef>
-        </p:style>
-        <p:txBody>
-          <a:bodyPr rtlCol="0" anchor="ctr"/>
-          <a:lstStyle/>
-          <a:p>
-            <a:pPr algn="ctr"/>
-          </a:p>
-        </p:txBody>
-      </p:sp>
-      <p:sp>
-        <p:nvSpPr>
-          <p:cNvPr id="15" name="Rectangle 14"/>
-          <p:cNvSpPr/>
-          <p:nvPr/>
-        </p:nvSpPr>
-        <p:spPr>
-          <a:xfrm>
-            <a:off x="640080" y="2761488"/>
-            <a:ext cx="73152" cy="274320"/>
-          </a:xfrm>
-          <a:prstGeom prst="rect">
-            <a:avLst/>
-          </a:prstGeom>
-          <a:solidFill>
-            <a:srgbClr val="269CCB"/>
-          </a:solidFill>
-          <a:ln>
-            <a:noFill/>
-          </a:ln>
-        </p:spPr>
-        <p:style>
-          <a:lnRef idx="1">
-            <a:schemeClr val="accent1"/>
-          </a:lnRef>
-          <a:fillRef idx="3">
-            <a:schemeClr val="accent1"/>
-          </a:fillRef>
-          <a:effectRef idx="2">
-            <a:schemeClr val="accent1"/>
-          </a:effectRef>
-          <a:fontRef idx="minor">
-            <a:schemeClr val="lt1"/>
-          </a:fontRef>
-        </p:style>
-        <p:txBody>
-          <a:bodyPr rtlCol="0" anchor="ctr"/>
-          <a:lstStyle/>
-          <a:p>
-            <a:pPr algn="ctr"/>
-          </a:p>
-        </p:txBody>
-      </p:sp>
-      <p:sp>
-        <p:nvSpPr>
-          <p:cNvPr id="16" name="TextBox 15"/>
-          <p:cNvSpPr txBox="1"/>
-          <p:nvPr/>
-        </p:nvSpPr>
-        <p:spPr>
-          <a:xfrm>
-            <a:off x="1097280" y="2706624"/>
-            <a:ext cx="10362895" cy="402336"/>
-          </a:xfrm>
-          <a:prstGeom prst="rect">
-            <a:avLst/>
-          </a:prstGeom>
-          <a:noFill/>
-        </p:spPr>
-        <p:txBody>
-          <a:bodyPr wrap="square" anchor="ctr"/>
-          <a:lstStyle/>
-          <a:p>
-            <a:r>
-              <a:rPr sz="1500" b="0" i="0">
+              <a:t>–   Un ensayo cronometrado revela cosas que el papel no muestra: que la introduccion se come tres minutos, que la demo se atasca en un formulario, que el cierre queda cortado.</a:t>
+            </a:r>
+          </a:p>
+          <a:p>
+            <a:pPr>
+              <a:spcAft>
+                <a:spcPts val="800"/>
+              </a:spcAft>
+            </a:pPr>
+            <a:r>
+              <a:rPr sz="2000" b="0" i="0">
                 <a:solidFill>
                   <a:srgbClr val="333333"/>
                 </a:solidFill>
                 <a:latin typeface="Calibri"/>
               </a:rPr>
-              <a:t>Si el jurado pregunta 'donde esta la herencia en su proyecto', ¿en cuantos segundos puede tener ese archivo en pantalla?</a:t>
-            </a:r>
-          </a:p>
-        </p:txBody>
-      </p:sp>
-      <p:sp>
-        <p:nvSpPr>
-          <p:cNvPr id="17" name="TextBox 16"/>
+              <a:t>–   Por eso hoy ensayamos con reloj y anotamos el tiempo real de cada bloque frente al planeado, y se repite hasta que el total caiga entre cinco y ocho minutos con margen.</a:t>
+            </a:r>
+          </a:p>
+          <a:p>
+            <a:pPr>
+              <a:spcAft>
+                <a:spcPts val="800"/>
+              </a:spcAft>
+            </a:pPr>
+            <a:r>
+              <a:rPr sz="2000" b="0" i="0">
+                <a:solidFill>
+                  <a:srgbClr val="333333"/>
+                </a:solidFill>
+                <a:latin typeface="Calibri"/>
+              </a:rPr>
+              <a:t>–   Hay cosas que restan puntos siempre: leer las diapositivas de espaldas al jurado, pedir disculpas por el proyecto antes de mostrarlo, culpar al computador, hablar de lo que 'iban a hacer' en vez de mostrar lo que hicieron</a:t>
+            </a:r>
+          </a:p>
+          <a:p>
+            <a:pPr>
+              <a:spcAft>
+                <a:spcPts val="800"/>
+              </a:spcAft>
+            </a:pPr>
+            <a:r>
+              <a:rPr sz="2000" b="0" i="0">
+                <a:solidFill>
+                  <a:srgbClr val="333333"/>
+                </a:solidFill>
+                <a:latin typeface="Calibri"/>
+              </a:rPr>
+              <a:t>–   Y pasarse del tiempo, porque eso obliga al jurado a cortar justo en la parte que mas les costo.</a:t>
+            </a:r>
+          </a:p>
+          <a:p>
+            <a:pPr>
+              <a:spcAft>
+                <a:spcPts val="800"/>
+              </a:spcAft>
+            </a:pPr>
+            <a:r>
+              <a:rPr sz="2000" b="0" i="0">
+                <a:solidFill>
+                  <a:srgbClr val="333333"/>
+                </a:solidFill>
+                <a:latin typeface="Calibri"/>
+              </a:rPr>
+              <a:t>–   Al reves, suman: hablar mirando al jurado, usar el vocabulario del dominio (dueno, mascota, cita, historia clinica) y reconocer con naturalidad las limitaciones conocidas.</a:t>
+            </a:r>
+          </a:p>
+        </p:txBody>
+      </p:sp>
+      <p:sp>
+        <p:nvSpPr>
+          <p:cNvPr id="6" name="TextBox 5"/>
           <p:cNvSpPr txBox="1"/>
           <p:nvPr/>
         </p:nvSpPr>
@@ -4294,21 +3924,141 @@
                 </a:solidFill>
                 <a:latin typeface="Calibri"/>
               </a:rPr>
-              <a:t>Criterios de exito / entregable</a:t>
-            </a:r>
-          </a:p>
-        </p:txBody>
-      </p:sp>
-      <p:sp>
-        <p:nvSpPr>
-          <p:cNvPr id="5" name="TextBox 4"/>
+              <a:t>Chequeo pre-vuelo: la demo que no falla</a:t>
+            </a:r>
+          </a:p>
+        </p:txBody>
+      </p:sp>
+      <p:sp>
+        <p:nvSpPr>
+          <p:cNvPr id="5" name="Rounded Rectangle 4"/>
+          <p:cNvSpPr/>
+          <p:nvPr/>
+        </p:nvSpPr>
+        <p:spPr>
+          <a:xfrm>
+            <a:off x="457200" y="1261872"/>
+            <a:ext cx="11277295" cy="4773168"/>
+          </a:xfrm>
+          <a:prstGeom prst="roundRect">
+            <a:avLst>
+              <a:gd name="adj" fmla="val 12000"/>
+            </a:avLst>
+          </a:prstGeom>
+          <a:solidFill>
+            <a:srgbClr val="1E2A38"/>
+          </a:solidFill>
+          <a:ln>
+            <a:noFill/>
+          </a:ln>
+        </p:spPr>
+        <p:style>
+          <a:lnRef idx="1">
+            <a:schemeClr val="accent1"/>
+          </a:lnRef>
+          <a:fillRef idx="3">
+            <a:schemeClr val="accent1"/>
+          </a:fillRef>
+          <a:effectRef idx="2">
+            <a:schemeClr val="accent1"/>
+          </a:effectRef>
+          <a:fontRef idx="minor">
+            <a:schemeClr val="lt1"/>
+          </a:fontRef>
+        </p:style>
+        <p:txBody>
+          <a:bodyPr rtlCol="0" anchor="ctr"/>
+          <a:lstStyle/>
+          <a:p>
+            <a:pPr algn="ctr"/>
+          </a:p>
+        </p:txBody>
+      </p:sp>
+      <p:sp>
+        <p:nvSpPr>
+          <p:cNvPr id="6" name="Rectangle 5"/>
+          <p:cNvSpPr/>
+          <p:nvPr/>
+        </p:nvSpPr>
+        <p:spPr>
+          <a:xfrm>
+            <a:off x="457200" y="1261872"/>
+            <a:ext cx="11277295" cy="320040"/>
+          </a:xfrm>
+          <a:prstGeom prst="rect">
+            <a:avLst/>
+          </a:prstGeom>
+          <a:solidFill>
+            <a:srgbClr val="095292"/>
+          </a:solidFill>
+          <a:ln>
+            <a:noFill/>
+          </a:ln>
+        </p:spPr>
+        <p:style>
+          <a:lnRef idx="1">
+            <a:schemeClr val="accent1"/>
+          </a:lnRef>
+          <a:fillRef idx="3">
+            <a:schemeClr val="accent1"/>
+          </a:fillRef>
+          <a:effectRef idx="2">
+            <a:schemeClr val="accent1"/>
+          </a:effectRef>
+          <a:fontRef idx="minor">
+            <a:schemeClr val="lt1"/>
+          </a:fontRef>
+        </p:style>
+        <p:txBody>
+          <a:bodyPr rtlCol="0" anchor="ctr"/>
+          <a:lstStyle/>
+          <a:p>
+            <a:pPr algn="ctr"/>
+          </a:p>
+        </p:txBody>
+      </p:sp>
+      <p:sp>
+        <p:nvSpPr>
+          <p:cNvPr id="7" name="TextBox 6"/>
           <p:cNvSpPr txBox="1"/>
           <p:nvPr/>
         </p:nvSpPr>
         <p:spPr>
           <a:xfrm>
-            <a:off x="457200" y="1170432"/>
-            <a:ext cx="11277295" cy="5230368"/>
+            <a:off x="685800" y="1307592"/>
+            <a:ext cx="10820095" cy="256032"/>
+          </a:xfrm>
+          <a:prstGeom prst="rect">
+            <a:avLst/>
+          </a:prstGeom>
+          <a:noFill/>
+        </p:spPr>
+        <p:txBody>
+          <a:bodyPr wrap="square" anchor="ctr"/>
+          <a:lstStyle/>
+          <a:p>
+            <a:r>
+              <a:rPr sz="1000" b="1" i="0">
+                <a:solidFill>
+                  <a:srgbClr val="269CCB"/>
+                </a:solidFill>
+                <a:latin typeface="Calibri"/>
+              </a:rPr>
+              <a:t>● ● ●</a:t>
+            </a:r>
+          </a:p>
+        </p:txBody>
+      </p:sp>
+      <p:sp>
+        <p:nvSpPr>
+          <p:cNvPr id="8" name="TextBox 7"/>
+          <p:cNvSpPr txBox="1"/>
+          <p:nvPr/>
+        </p:nvSpPr>
+        <p:spPr>
+          <a:xfrm>
+            <a:off x="777240" y="1719072"/>
+            <a:ext cx="10637215" cy="4133087"/>
           </a:xfrm>
           <a:prstGeom prst="rect">
             <a:avLst/>
@@ -4323,212 +4073,235 @@
           <a:p>
             <a:pPr>
               <a:spcAft>
-                <a:spcPts val="800"/>
+                <a:spcPts val="400"/>
               </a:spcAft>
             </a:pPr>
             <a:r>
-              <a:rPr sz="2000" b="0" i="0">
-                <a:solidFill>
-                  <a:srgbClr val="333333"/>
-                </a:solidFill>
-                <a:latin typeface="Calibri"/>
-              </a:rPr>
-              <a:t>–   </a:t>
-            </a:r>
-            <a:r>
-              <a:rPr sz="2000" b="1" i="0">
-                <a:solidFill>
-                  <a:srgbClr val="333333"/>
-                </a:solidFill>
-                <a:latin typeface="Calibri"/>
-              </a:rPr>
-              <a:t>Entregable:</a:t>
-            </a:r>
-            <a:r>
-              <a:rPr sz="2000" b="0" i="0">
-                <a:solidFill>
-                  <a:srgbClr val="333333"/>
-                </a:solidFill>
-                <a:latin typeface="Calibri"/>
-              </a:rPr>
-              <a:t> Guion de sustentacion con bloques, minutos y evidencia que se muestra (mas el responsable nominal solo si el docente autorizo equipo), mas la planilla de tiempos de dos ensayos y el video de respaldo de la ruta feliz, subido a la plataforma del curso.</a:t>
+              <a:rPr sz="1400" b="0" i="0">
+                <a:solidFill>
+                  <a:srgbClr val="FFFFFF"/>
+                </a:solidFill>
+                <a:latin typeface="Calibri"/>
+              </a:rPr>
+              <a:t>private static boolean chequeoPreVuelo() {          // se ejecuta 10 minutos antes de sustentar</a:t>
             </a:r>
           </a:p>
           <a:p>
             <a:pPr>
               <a:spcAft>
-                <a:spcPts val="800"/>
+                <a:spcPts val="400"/>
               </a:spcAft>
             </a:pPr>
             <a:r>
-              <a:rPr sz="2000" b="0" i="0">
-                <a:solidFill>
-                  <a:srgbClr val="333333"/>
-                </a:solidFill>
-                <a:latin typeface="Calibri"/>
-              </a:rPr>
-              <a:t>–   </a:t>
-            </a:r>
-            <a:r>
-              <a:rPr sz="2000" b="1" i="0">
-                <a:solidFill>
-                  <a:srgbClr val="333333"/>
-                </a:solidFill>
-                <a:latin typeface="Calibri"/>
-              </a:rPr>
-              <a:t>Exito:</a:t>
-            </a:r>
-            <a:r>
-              <a:rPr sz="2000" b="0" i="0">
-                <a:solidFill>
-                  <a:srgbClr val="333333"/>
-                </a:solidFill>
-                <a:latin typeface="Calibri"/>
-              </a:rPr>
-              <a:t> El guion escrito cubre los cinco bloques con minutos y evidencia, sin bloques huerfanos; si el docente autorizo equipo, todos los integrantes tienen bloque y ninguno queda sin intervencion.</a:t>
+              <a:rPr sz="1400" b="0" i="0">
+                <a:solidFill>
+                  <a:srgbClr val="FFFFFF"/>
+                </a:solidFill>
+                <a:latin typeface="Calibri"/>
+              </a:rPr>
+              <a:t>    String[] requeridos = {"datos_demo/duenos.csv", "datos_demo/mascotas.csv", "datos_demo/citas.csv"};</a:t>
             </a:r>
           </a:p>
           <a:p>
             <a:pPr>
               <a:spcAft>
-                <a:spcPts val="800"/>
+                <a:spcPts val="400"/>
               </a:spcAft>
             </a:pPr>
             <a:r>
-              <a:rPr sz="2000" b="0" i="0">
-                <a:solidFill>
-                  <a:srgbClr val="333333"/>
-                </a:solidFill>
-                <a:latin typeface="Calibri"/>
-              </a:rPr>
-              <a:t>–   </a:t>
-            </a:r>
-            <a:r>
-              <a:rPr sz="2000" b="1" i="0">
-                <a:solidFill>
-                  <a:srgbClr val="333333"/>
-                </a:solidFill>
-                <a:latin typeface="Calibri"/>
-              </a:rPr>
-              <a:t>Exito:</a:t>
-            </a:r>
-            <a:r>
-              <a:rPr sz="2000" b="0" i="0">
-                <a:solidFill>
-                  <a:srgbClr val="333333"/>
-                </a:solidFill>
-                <a:latin typeface="Calibri"/>
-              </a:rPr>
-              <a:t> El chequeo pre-vuelo devuelve [OK] en los tres archivos de datos_demo y la aplicacion arranca mostrando informacion, nunca una lista vacia.</a:t>
+              <a:rPr sz="1400" b="0" i="0">
+                <a:solidFill>
+                  <a:srgbClr val="FFFFFF"/>
+                </a:solidFill>
+                <a:latin typeface="Calibri"/>
+              </a:rPr>
+              <a:t>    boolean listo = true;</a:t>
             </a:r>
           </a:p>
           <a:p>
             <a:pPr>
               <a:spcAft>
-                <a:spcPts val="800"/>
+                <a:spcPts val="400"/>
               </a:spcAft>
             </a:pPr>
             <a:r>
-              <a:rPr sz="2000" b="0" i="0">
-                <a:solidFill>
-                  <a:srgbClr val="333333"/>
-                </a:solidFill>
-                <a:latin typeface="Calibri"/>
-              </a:rPr>
-              <a:t>–   </a:t>
-            </a:r>
-            <a:r>
-              <a:rPr sz="2000" b="1" i="0">
-                <a:solidFill>
-                  <a:srgbClr val="333333"/>
-                </a:solidFill>
-                <a:latin typeface="Calibri"/>
-              </a:rPr>
-              <a:t>Exito:</a:t>
-            </a:r>
-            <a:r>
-              <a:rPr sz="2000" b="0" i="0">
-                <a:solidFill>
-                  <a:srgbClr val="333333"/>
-                </a:solidFill>
-                <a:latin typeface="Calibri"/>
-              </a:rPr>
-              <a:t> Los dos ensayos quedan cronometrados y el segundo cae entre 5 y 8 minutos, con la demo en vivo ocupando al menos la mitad del tiempo.</a:t>
+              <a:rPr sz="1400" b="0" i="0">
+                <a:solidFill>
+                  <a:srgbClr val="FFFFFF"/>
+                </a:solidFill>
+                <a:latin typeface="Calibri"/>
+              </a:rPr>
+              <a:t>    for (String ruta: requeridos) {</a:t>
             </a:r>
           </a:p>
           <a:p>
             <a:pPr>
               <a:spcAft>
-                <a:spcPts val="800"/>
+                <a:spcPts val="400"/>
               </a:spcAft>
             </a:pPr>
             <a:r>
-              <a:rPr sz="2000" b="0" i="0">
-                <a:solidFill>
-                  <a:srgbClr val="333333"/>
-                </a:solidFill>
-                <a:latin typeface="Calibri"/>
-              </a:rPr>
-              <a:t>–   </a:t>
-            </a:r>
-            <a:r>
-              <a:rPr sz="2000" b="1" i="0">
-                <a:solidFill>
-                  <a:srgbClr val="333333"/>
-                </a:solidFill>
-                <a:latin typeface="Calibri"/>
-              </a:rPr>
-              <a:t>Exito:</a:t>
-            </a:r>
-            <a:r>
-              <a:rPr sz="2000" b="0" i="0">
-                <a:solidFill>
-                  <a:srgbClr val="333333"/>
-                </a:solidFill>
-                <a:latin typeface="Calibri"/>
-              </a:rPr>
-              <a:t> Existe plan B verificado: video de la ruta feliz reproducible sin internet y seis capturas exportadas en la carpeta del proyecto.</a:t>
+              <a:rPr sz="1400" b="0" i="0">
+                <a:solidFill>
+                  <a:srgbClr val="FFFFFF"/>
+                </a:solidFill>
+                <a:latin typeface="Calibri"/>
+              </a:rPr>
+              <a:t>        int filas = contarFilas(ruta);              // 0 filas = pantalla vacia frente al jurado</a:t>
             </a:r>
           </a:p>
           <a:p>
             <a:pPr>
               <a:spcAft>
-                <a:spcPts val="800"/>
+                <a:spcPts val="400"/>
               </a:spcAft>
             </a:pPr>
             <a:r>
-              <a:rPr sz="2000" b="0" i="0">
-                <a:solidFill>
-                  <a:srgbClr val="333333"/>
-                </a:solidFill>
-                <a:latin typeface="Calibri"/>
-              </a:rPr>
-              <a:t>–   </a:t>
-            </a:r>
-            <a:r>
-              <a:rPr sz="2000" b="1" i="0">
-                <a:solidFill>
-                  <a:srgbClr val="333333"/>
-                </a:solidFill>
-                <a:latin typeface="Calibri"/>
-              </a:rPr>
-              <a:t>Entrega en la plataforma del curso</a:t>
-            </a:r>
-            <a:r>
-              <a:rPr sz="2000" b="0" i="0">
-                <a:solidFill>
-                  <a:srgbClr val="333333"/>
-                </a:solidFill>
-                <a:latin typeface="Calibri"/>
-              </a:rPr>
-              <a:t> — en la fecha que indique el docente.</a:t>
-            </a:r>
-          </a:p>
-        </p:txBody>
-      </p:sp>
-      <p:sp>
-        <p:nvSpPr>
-          <p:cNvPr id="6" name="TextBox 5"/>
+              <a:rPr sz="1400" b="0" i="0">
+                <a:solidFill>
+                  <a:srgbClr val="FFFFFF"/>
+                </a:solidFill>
+                <a:latin typeface="Calibri"/>
+              </a:rPr>
+              <a:t>        System.out.println((filas &gt; 0 ? "[OK]    ": "[FALLA] ") + ruta + " -&gt; " + filas + " filas");</a:t>
+            </a:r>
+          </a:p>
+          <a:p>
+            <a:pPr>
+              <a:spcAft>
+                <a:spcPts val="400"/>
+              </a:spcAft>
+            </a:pPr>
+            <a:r>
+              <a:rPr sz="1400" b="0" i="0">
+                <a:solidFill>
+                  <a:srgbClr val="FFFFFF"/>
+                </a:solidFill>
+                <a:latin typeface="Calibri"/>
+              </a:rPr>
+              <a:t>        if (filas == 0) {</a:t>
+            </a:r>
+          </a:p>
+          <a:p>
+            <a:pPr>
+              <a:spcAft>
+                <a:spcPts val="400"/>
+              </a:spcAft>
+            </a:pPr>
+            <a:r>
+              <a:rPr sz="1400" b="0" i="0">
+                <a:solidFill>
+                  <a:srgbClr val="FFFFFF"/>
+                </a:solidFill>
+                <a:latin typeface="Calibri"/>
+              </a:rPr>
+              <a:t>            listo = false;</a:t>
+            </a:r>
+          </a:p>
+          <a:p>
+            <a:pPr>
+              <a:spcAft>
+                <a:spcPts val="400"/>
+              </a:spcAft>
+            </a:pPr>
+            <a:r>
+              <a:rPr sz="1400" b="0" i="0">
+                <a:solidFill>
+                  <a:srgbClr val="FFFFFF"/>
+                </a:solidFill>
+                <a:latin typeface="Calibri"/>
+              </a:rPr>
+              <a:t>        }</a:t>
+            </a:r>
+          </a:p>
+          <a:p>
+            <a:pPr>
+              <a:spcAft>
+                <a:spcPts val="400"/>
+              </a:spcAft>
+            </a:pPr>
+            <a:r>
+              <a:rPr sz="1400" b="0" i="0">
+                <a:solidFill>
+                  <a:srgbClr val="FFFFFF"/>
+                </a:solidFill>
+                <a:latin typeface="Calibri"/>
+              </a:rPr>
+              <a:t>    }</a:t>
+            </a:r>
+          </a:p>
+          <a:p>
+            <a:pPr>
+              <a:spcAft>
+                <a:spcPts val="400"/>
+              </a:spcAft>
+            </a:pPr>
+            <a:r>
+              <a:rPr sz="1400" b="0" i="0">
+                <a:solidFill>
+                  <a:srgbClr val="FFFFFF"/>
+                </a:solidFill>
+                <a:latin typeface="Calibri"/>
+              </a:rPr>
+              <a:t>    return listo;   // si devuelve false, todavia no se sustenta ni se ensaya</a:t>
+            </a:r>
+          </a:p>
+          <a:p>
+            <a:pPr>
+              <a:spcAft>
+                <a:spcPts val="400"/>
+              </a:spcAft>
+            </a:pPr>
+            <a:r>
+              <a:rPr sz="1400" b="0" i="0">
+                <a:solidFill>
+                  <a:srgbClr val="FFFFFF"/>
+                </a:solidFill>
+                <a:latin typeface="Calibri"/>
+              </a:rPr>
+              <a:t>}</a:t>
+            </a:r>
+          </a:p>
+        </p:txBody>
+      </p:sp>
+      <p:sp>
+        <p:nvSpPr>
+          <p:cNvPr id="9" name="TextBox 8"/>
+          <p:cNvSpPr txBox="1"/>
+          <p:nvPr/>
+        </p:nvSpPr>
+        <p:spPr>
+          <a:xfrm>
+            <a:off x="457200" y="6080760"/>
+            <a:ext cx="11277295" cy="320040"/>
+          </a:xfrm>
+          <a:prstGeom prst="rect">
+            <a:avLst/>
+          </a:prstGeom>
+          <a:noFill/>
+        </p:spPr>
+        <p:txBody>
+          <a:bodyPr wrap="square">
+            <a:spAutoFit/>
+          </a:bodyPr>
+          <a:lstStyle/>
+          <a:p>
+            <a:pPr algn="ctr"/>
+            <a:r>
+              <a:rPr sz="1200" b="0" i="1">
+                <a:solidFill>
+                  <a:srgbClr val="666666"/>
+                </a:solidFill>
+                <a:latin typeface="Calibri"/>
+              </a:rPr>
+              <a:t>Una demo se prepara con codigo, no con fe: si el pre-vuelo no da verde, la sustentacion no arranca.</a:t>
+            </a:r>
+          </a:p>
+        </p:txBody>
+      </p:sp>
+      <p:sp>
+        <p:nvSpPr>
+          <p:cNvPr id="10" name="TextBox 9"/>
           <p:cNvSpPr txBox="1"/>
           <p:nvPr/>
         </p:nvSpPr>
@@ -4702,109 +4475,21 @@
                 </a:solidFill>
                 <a:latin typeface="Calibri"/>
               </a:rPr>
-              <a:t>Para el PI esta semana</a:t>
-            </a:r>
-          </a:p>
-        </p:txBody>
-      </p:sp>
-      <p:sp>
-        <p:nvSpPr>
-          <p:cNvPr id="5" name="Rounded Rectangle 4"/>
-          <p:cNvSpPr/>
-          <p:nvPr/>
-        </p:nvSpPr>
-        <p:spPr>
-          <a:xfrm>
-            <a:off x="457200" y="1261872"/>
-            <a:ext cx="11277295" cy="1051560"/>
-          </a:xfrm>
-          <a:prstGeom prst="roundRect">
-            <a:avLst>
-              <a:gd name="adj" fmla="val 12000"/>
-            </a:avLst>
-          </a:prstGeom>
-          <a:solidFill>
-            <a:srgbClr val="E8F4FA"/>
-          </a:solidFill>
-          <a:ln>
-            <a:noFill/>
-          </a:ln>
-        </p:spPr>
-        <p:style>
-          <a:lnRef idx="1">
-            <a:schemeClr val="accent1"/>
-          </a:lnRef>
-          <a:fillRef idx="3">
-            <a:schemeClr val="accent1"/>
-          </a:fillRef>
-          <a:effectRef idx="2">
-            <a:schemeClr val="accent1"/>
-          </a:effectRef>
-          <a:fontRef idx="minor">
-            <a:schemeClr val="lt1"/>
-          </a:fontRef>
-        </p:style>
-        <p:txBody>
-          <a:bodyPr rtlCol="0" anchor="ctr"/>
-          <a:lstStyle/>
-          <a:p>
-            <a:pPr algn="ctr"/>
-          </a:p>
-        </p:txBody>
-      </p:sp>
-      <p:sp>
-        <p:nvSpPr>
-          <p:cNvPr id="6" name="Rectangle 5"/>
-          <p:cNvSpPr/>
-          <p:nvPr/>
-        </p:nvSpPr>
-        <p:spPr>
-          <a:xfrm>
-            <a:off x="457200" y="1261872"/>
-            <a:ext cx="128016" cy="1051560"/>
-          </a:xfrm>
-          <a:prstGeom prst="rect">
-            <a:avLst/>
-          </a:prstGeom>
-          <a:solidFill>
-            <a:srgbClr val="269CCB"/>
-          </a:solidFill>
-          <a:ln>
-            <a:noFill/>
-          </a:ln>
-        </p:spPr>
-        <p:style>
-          <a:lnRef idx="1">
-            <a:schemeClr val="accent1"/>
-          </a:lnRef>
-          <a:fillRef idx="3">
-            <a:schemeClr val="accent1"/>
-          </a:fillRef>
-          <a:effectRef idx="2">
-            <a:schemeClr val="accent1"/>
-          </a:effectRef>
-          <a:fontRef idx="minor">
-            <a:schemeClr val="lt1"/>
-          </a:fontRef>
-        </p:style>
-        <p:txBody>
-          <a:bodyPr rtlCol="0" anchor="ctr"/>
-          <a:lstStyle/>
-          <a:p>
-            <a:pPr algn="ctr"/>
-          </a:p>
-        </p:txBody>
-      </p:sp>
-      <p:sp>
-        <p:nvSpPr>
-          <p:cNvPr id="7" name="TextBox 6"/>
+              <a:t>Demo del dia</a:t>
+            </a:r>
+          </a:p>
+        </p:txBody>
+      </p:sp>
+      <p:sp>
+        <p:nvSpPr>
+          <p:cNvPr id="5" name="TextBox 4"/>
           <p:cNvSpPr txBox="1"/>
           <p:nvPr/>
         </p:nvSpPr>
         <p:spPr>
           <a:xfrm>
-            <a:off x="777240" y="1399031"/>
-            <a:ext cx="10774375" cy="822959"/>
+            <a:off x="457200" y="1170432"/>
+            <a:ext cx="11277295" cy="5230368"/>
           </a:xfrm>
           <a:prstGeom prst="rect">
             <a:avLst/>
@@ -4817,313 +4502,94 @@
           </a:bodyPr>
           <a:lstStyle/>
           <a:p>
-            <a:r>
-              <a:rPr sz="1200" b="1" i="0">
-                <a:solidFill>
-                  <a:srgbClr val="269CCB"/>
-                </a:solidFill>
-                <a:latin typeface="Calibri"/>
-              </a:rPr>
-              <a:t>Info</a:t>
-            </a:r>
-          </a:p>
-          <a:p>
             <a:pPr>
-              <a:spcBef>
-                <a:spcPts val="400"/>
-              </a:spcBef>
+              <a:spcAft>
+                <a:spcPts val="800"/>
+              </a:spcAft>
             </a:pPr>
             <a:r>
-              <a:rPr sz="1400" b="0" i="0">
+              <a:rPr sz="2000" b="0" i="0">
                 <a:solidFill>
                   <a:srgbClr val="333333"/>
                 </a:solidFill>
                 <a:latin typeface="Calibri"/>
               </a:rPr>
-              <a:t>Hito: VetCare queda con guion de sustentacion, juego de datos de demostracion sembrado y ensayo cronometrado dentro de la ventana de 5 a 8 minutos.</a:t>
-            </a:r>
-          </a:p>
-        </p:txBody>
-      </p:sp>
-      <p:sp>
-        <p:nvSpPr>
-          <p:cNvPr id="8" name="Rounded Rectangle 7"/>
-          <p:cNvSpPr/>
-          <p:nvPr/>
-        </p:nvSpPr>
-        <p:spPr>
-          <a:xfrm>
-            <a:off x="457200" y="2478024"/>
-            <a:ext cx="11277295" cy="1051560"/>
-          </a:xfrm>
-          <a:prstGeom prst="roundRect">
-            <a:avLst>
-              <a:gd name="adj" fmla="val 12000"/>
-            </a:avLst>
-          </a:prstGeom>
-          <a:solidFill>
-            <a:srgbClr val="FFF8E1"/>
-          </a:solidFill>
-          <a:ln>
-            <a:noFill/>
-          </a:ln>
-        </p:spPr>
-        <p:style>
-          <a:lnRef idx="1">
-            <a:schemeClr val="accent1"/>
-          </a:lnRef>
-          <a:fillRef idx="3">
-            <a:schemeClr val="accent1"/>
-          </a:fillRef>
-          <a:effectRef idx="2">
-            <a:schemeClr val="accent1"/>
-          </a:effectRef>
-          <a:fontRef idx="minor">
-            <a:schemeClr val="lt1"/>
-          </a:fontRef>
-        </p:style>
-        <p:txBody>
-          <a:bodyPr rtlCol="0" anchor="ctr"/>
-          <a:lstStyle/>
-          <a:p>
-            <a:pPr algn="ctr"/>
-          </a:p>
-        </p:txBody>
-      </p:sp>
-      <p:sp>
-        <p:nvSpPr>
-          <p:cNvPr id="9" name="Rectangle 8"/>
-          <p:cNvSpPr/>
-          <p:nvPr/>
-        </p:nvSpPr>
-        <p:spPr>
-          <a:xfrm>
-            <a:off x="457200" y="2478024"/>
-            <a:ext cx="128016" cy="1051560"/>
-          </a:xfrm>
-          <a:prstGeom prst="rect">
-            <a:avLst/>
-          </a:prstGeom>
-          <a:solidFill>
-            <a:srgbClr val="FFD000"/>
-          </a:solidFill>
-          <a:ln>
-            <a:noFill/>
-          </a:ln>
-        </p:spPr>
-        <p:style>
-          <a:lnRef idx="1">
-            <a:schemeClr val="accent1"/>
-          </a:lnRef>
-          <a:fillRef idx="3">
-            <a:schemeClr val="accent1"/>
-          </a:fillRef>
-          <a:effectRef idx="2">
-            <a:schemeClr val="accent1"/>
-          </a:effectRef>
-          <a:fontRef idx="minor">
-            <a:schemeClr val="lt1"/>
-          </a:fontRef>
-        </p:style>
-        <p:txBody>
-          <a:bodyPr rtlCol="0" anchor="ctr"/>
-          <a:lstStyle/>
-          <a:p>
-            <a:pPr algn="ctr"/>
-          </a:p>
-        </p:txBody>
-      </p:sp>
-      <p:sp>
-        <p:nvSpPr>
-          <p:cNvPr id="10" name="TextBox 9"/>
-          <p:cNvSpPr txBox="1"/>
-          <p:nvPr/>
-        </p:nvSpPr>
-        <p:spPr>
-          <a:xfrm>
-            <a:off x="777240" y="2615184"/>
-            <a:ext cx="10774375" cy="822959"/>
-          </a:xfrm>
-          <a:prstGeom prst="rect">
-            <a:avLst/>
-          </a:prstGeom>
-          <a:noFill/>
-        </p:spPr>
-        <p:txBody>
-          <a:bodyPr wrap="square">
-            <a:spAutoFit/>
-          </a:bodyPr>
-          <a:lstStyle/>
-          <a:p>
-            <a:r>
-              <a:rPr sz="1200" b="1" i="0">
-                <a:solidFill>
-                  <a:srgbClr val="FFD000"/>
-                </a:solidFill>
-                <a:latin typeface="Calibri"/>
-              </a:rPr>
-              <a:t>Aclaración</a:t>
+              <a:t>–   </a:t>
+            </a:r>
+            <a:r>
+              <a:rPr sz="2000" b="1" i="0">
+                <a:solidFill>
+                  <a:srgbClr val="333333"/>
+                </a:solidFill>
+                <a:latin typeface="Calibri"/>
+              </a:rPr>
+              <a:t>Herramienta:</a:t>
+            </a:r>
+            <a:r>
+              <a:rPr sz="2000" b="0" i="0">
+                <a:solidFill>
+                  <a:srgbClr val="333333"/>
+                </a:solidFill>
+                <a:latin typeface="Calibri"/>
+              </a:rPr>
+              <a:t> Visual Studio Code (Java)</a:t>
             </a:r>
           </a:p>
           <a:p>
             <a:pPr>
-              <a:spcBef>
-                <a:spcPts val="400"/>
-              </a:spcBef>
+              <a:spcAft>
+                <a:spcPts val="800"/>
+              </a:spcAft>
             </a:pPr>
             <a:r>
-              <a:rPr sz="1400" b="0" i="0">
+              <a:rPr sz="2000" b="0" i="0">
                 <a:solidFill>
                   <a:srgbClr val="333333"/>
                 </a:solidFill>
                 <a:latin typeface="Calibri"/>
               </a:rPr>
-              <a:t>Enunciado completo: Clases/Proyecto Integrador/ (VetCare).</a:t>
-            </a:r>
-          </a:p>
-        </p:txBody>
-      </p:sp>
-      <p:sp>
-        <p:nvSpPr>
-          <p:cNvPr id="11" name="Rounded Rectangle 10"/>
-          <p:cNvSpPr/>
-          <p:nvPr/>
-        </p:nvSpPr>
-        <p:spPr>
-          <a:xfrm>
-            <a:off x="457200" y="3694176"/>
-            <a:ext cx="11277295" cy="1051560"/>
-          </a:xfrm>
-          <a:prstGeom prst="roundRect">
-            <a:avLst>
-              <a:gd name="adj" fmla="val 12000"/>
-            </a:avLst>
-          </a:prstGeom>
-          <a:solidFill>
-            <a:srgbClr val="FBE4E4"/>
-          </a:solidFill>
-          <a:ln>
-            <a:noFill/>
-          </a:ln>
-        </p:spPr>
-        <p:style>
-          <a:lnRef idx="1">
-            <a:schemeClr val="accent1"/>
-          </a:lnRef>
-          <a:fillRef idx="3">
-            <a:schemeClr val="accent1"/>
-          </a:fillRef>
-          <a:effectRef idx="2">
-            <a:schemeClr val="accent1"/>
-          </a:effectRef>
-          <a:fontRef idx="minor">
-            <a:schemeClr val="lt1"/>
-          </a:fontRef>
-        </p:style>
-        <p:txBody>
-          <a:bodyPr rtlCol="0" anchor="ctr"/>
-          <a:lstStyle/>
-          <a:p>
-            <a:pPr algn="ctr"/>
-          </a:p>
-        </p:txBody>
-      </p:sp>
-      <p:sp>
-        <p:nvSpPr>
-          <p:cNvPr id="12" name="Rectangle 11"/>
-          <p:cNvSpPr/>
-          <p:nvPr/>
-        </p:nvSpPr>
-        <p:spPr>
-          <a:xfrm>
-            <a:off x="457200" y="3694176"/>
-            <a:ext cx="128016" cy="1051560"/>
-          </a:xfrm>
-          <a:prstGeom prst="rect">
-            <a:avLst/>
-          </a:prstGeom>
-          <a:solidFill>
-            <a:srgbClr val="A02030"/>
-          </a:solidFill>
-          <a:ln>
-            <a:noFill/>
-          </a:ln>
-        </p:spPr>
-        <p:style>
-          <a:lnRef idx="1">
-            <a:schemeClr val="accent1"/>
-          </a:lnRef>
-          <a:fillRef idx="3">
-            <a:schemeClr val="accent1"/>
-          </a:fillRef>
-          <a:effectRef idx="2">
-            <a:schemeClr val="accent1"/>
-          </a:effectRef>
-          <a:fontRef idx="minor">
-            <a:schemeClr val="lt1"/>
-          </a:fontRef>
-        </p:style>
-        <p:txBody>
-          <a:bodyPr rtlCol="0" anchor="ctr"/>
-          <a:lstStyle/>
-          <a:p>
-            <a:pPr algn="ctr"/>
-          </a:p>
-        </p:txBody>
-      </p:sp>
-      <p:sp>
-        <p:nvSpPr>
-          <p:cNvPr id="13" name="TextBox 12"/>
-          <p:cNvSpPr txBox="1"/>
-          <p:nvPr/>
-        </p:nvSpPr>
-        <p:spPr>
-          <a:xfrm>
-            <a:off x="777240" y="3831336"/>
-            <a:ext cx="10774375" cy="822959"/>
-          </a:xfrm>
-          <a:prstGeom prst="rect">
-            <a:avLst/>
-          </a:prstGeom>
-          <a:noFill/>
-        </p:spPr>
-        <p:txBody>
-          <a:bodyPr wrap="square">
-            <a:spAutoFit/>
-          </a:bodyPr>
-          <a:lstStyle/>
-          <a:p>
-            <a:r>
-              <a:rPr sz="1200" b="1" i="0">
-                <a:solidFill>
-                  <a:srgbClr val="A02030"/>
-                </a:solidFill>
-                <a:latin typeface="Calibri"/>
-              </a:rPr>
-              <a:t>Atención</a:t>
+              <a:t>–   </a:t>
+            </a:r>
+            <a:r>
+              <a:rPr sz="2000" b="1" i="0">
+                <a:solidFill>
+                  <a:srgbClr val="333333"/>
+                </a:solidFill>
+                <a:latin typeface="Calibri"/>
+              </a:rPr>
+              <a:t>Demo:</a:t>
+            </a:r>
+            <a:r>
+              <a:rPr sz="2000" b="0" i="0">
+                <a:solidFill>
+                  <a:srgbClr val="333333"/>
+                </a:solidFill>
+                <a:latin typeface="Calibri"/>
+              </a:rPr>
+              <a:t> El docente sustenta VetCare en 6 minutos delante del grupo, provoca a proposito un error de edad para mostrar la validacion, y luego repite la misma demo con la lista vacia para que se vea el desastre de no sembrar datos.</a:t>
             </a:r>
           </a:p>
           <a:p>
             <a:pPr>
-              <a:spcBef>
-                <a:spcPts val="400"/>
-              </a:spcBef>
+              <a:spcAft>
+                <a:spcPts val="800"/>
+              </a:spcAft>
             </a:pPr>
             <a:r>
-              <a:rPr sz="1400" b="0" i="0">
+              <a:rPr sz="2000" b="0" i="0">
                 <a:solidFill>
                   <a:srgbClr val="333333"/>
                 </a:solidFill>
                 <a:latin typeface="Calibri"/>
               </a:rPr>
-              <a:t>Entrega del taller, si el docente lo asigna · en la fecha que indique el docente.</a:t>
-            </a:r>
-          </a:p>
-        </p:txBody>
-      </p:sp>
-      <p:sp>
-        <p:nvSpPr>
-          <p:cNvPr id="14" name="TextBox 13"/>
+              <a:t>–   Mismo dominio VetCare — no otro ejemplo.</a:t>
+            </a:r>
+          </a:p>
+        </p:txBody>
+      </p:sp>
+      <p:sp>
+        <p:nvSpPr>
+          <p:cNvPr id="6" name="TextBox 5"/>
           <p:cNvSpPr txBox="1"/>
           <p:nvPr/>
         </p:nvSpPr>
@@ -5191,6 +4657,3163 @@
         <p:spPr>
           <a:xfrm>
             <a:off x="0" y="0"/>
+            <a:ext cx="12191695" cy="960120"/>
+          </a:xfrm>
+          <a:prstGeom prst="rect">
+            <a:avLst/>
+          </a:prstGeom>
+          <a:solidFill>
+            <a:srgbClr val="095292"/>
+          </a:solidFill>
+          <a:ln>
+            <a:noFill/>
+          </a:ln>
+        </p:spPr>
+        <p:style>
+          <a:lnRef idx="1">
+            <a:schemeClr val="accent1"/>
+          </a:lnRef>
+          <a:fillRef idx="3">
+            <a:schemeClr val="accent1"/>
+          </a:fillRef>
+          <a:effectRef idx="2">
+            <a:schemeClr val="accent1"/>
+          </a:effectRef>
+          <a:fontRef idx="minor">
+            <a:schemeClr val="lt1"/>
+          </a:fontRef>
+        </p:style>
+        <p:txBody>
+          <a:bodyPr rtlCol="0" anchor="ctr"/>
+          <a:lstStyle/>
+          <a:p>
+            <a:pPr algn="ctr"/>
+          </a:p>
+        </p:txBody>
+      </p:sp>
+      <p:sp>
+        <p:nvSpPr>
+          <p:cNvPr id="3" name="Rectangle 2"/>
+          <p:cNvSpPr/>
+          <p:nvPr/>
+        </p:nvSpPr>
+        <p:spPr>
+          <a:xfrm>
+            <a:off x="0" y="960120"/>
+            <a:ext cx="12191695" cy="41148"/>
+          </a:xfrm>
+          <a:prstGeom prst="rect">
+            <a:avLst/>
+          </a:prstGeom>
+          <a:solidFill>
+            <a:srgbClr val="FFD000"/>
+          </a:solidFill>
+          <a:ln>
+            <a:noFill/>
+          </a:ln>
+        </p:spPr>
+        <p:style>
+          <a:lnRef idx="1">
+            <a:schemeClr val="accent1"/>
+          </a:lnRef>
+          <a:fillRef idx="3">
+            <a:schemeClr val="accent1"/>
+          </a:fillRef>
+          <a:effectRef idx="2">
+            <a:schemeClr val="accent1"/>
+          </a:effectRef>
+          <a:fontRef idx="minor">
+            <a:schemeClr val="lt1"/>
+          </a:fontRef>
+        </p:style>
+        <p:txBody>
+          <a:bodyPr rtlCol="0" anchor="ctr"/>
+          <a:lstStyle/>
+          <a:p>
+            <a:pPr algn="ctr"/>
+          </a:p>
+        </p:txBody>
+      </p:sp>
+      <p:sp>
+        <p:nvSpPr>
+          <p:cNvPr id="4" name="TextBox 3"/>
+          <p:cNvSpPr txBox="1"/>
+          <p:nvPr/>
+        </p:nvSpPr>
+        <p:spPr>
+          <a:xfrm>
+            <a:off x="457200" y="164592"/>
+            <a:ext cx="11277295" cy="502920"/>
+          </a:xfrm>
+          <a:prstGeom prst="rect">
+            <a:avLst/>
+          </a:prstGeom>
+          <a:noFill/>
+        </p:spPr>
+        <p:txBody>
+          <a:bodyPr wrap="square">
+            <a:spAutoFit/>
+          </a:bodyPr>
+          <a:lstStyle/>
+          <a:p>
+            <a:r>
+              <a:rPr sz="2600" b="1" i="0">
+                <a:solidFill>
+                  <a:srgbClr val="FFFFFF"/>
+                </a:solidFill>
+                <a:latin typeface="Calibri"/>
+              </a:rPr>
+              <a:t>Taller PI — por que importa</a:t>
+            </a:r>
+          </a:p>
+        </p:txBody>
+      </p:sp>
+      <p:sp>
+        <p:nvSpPr>
+          <p:cNvPr id="5" name="TextBox 4"/>
+          <p:cNvSpPr txBox="1"/>
+          <p:nvPr/>
+        </p:nvSpPr>
+        <p:spPr>
+          <a:xfrm>
+            <a:off x="457200" y="1170432"/>
+            <a:ext cx="11277295" cy="5230368"/>
+          </a:xfrm>
+          <a:prstGeom prst="rect">
+            <a:avLst/>
+          </a:prstGeom>
+          <a:noFill/>
+        </p:spPr>
+        <p:txBody>
+          <a:bodyPr wrap="square">
+            <a:spAutoFit/>
+          </a:bodyPr>
+          <a:lstStyle/>
+          <a:p>
+            <a:pPr>
+              <a:spcAft>
+                <a:spcPts val="800"/>
+              </a:spcAft>
+            </a:pPr>
+            <a:r>
+              <a:rPr sz="2000" b="0" i="0">
+                <a:solidFill>
+                  <a:srgbClr val="333333"/>
+                </a:solidFill>
+                <a:latin typeface="Calibri"/>
+              </a:rPr>
+              <a:t>–   </a:t>
+            </a:r>
+            <a:r>
+              <a:rPr sz="2000" b="1" i="0">
+                <a:solidFill>
+                  <a:srgbClr val="333333"/>
+                </a:solidFill>
+                <a:latin typeface="Calibri"/>
+              </a:rPr>
+              <a:t>Por que importa al PI:</a:t>
+            </a:r>
+            <a:r>
+              <a:rPr sz="2000" b="0" i="0">
+                <a:solidFill>
+                  <a:srgbClr val="333333"/>
+                </a:solidFill>
+                <a:latin typeface="Calibri"/>
+              </a:rPr>
+              <a:t> la nota del Proyecto Integrador no se define solo por el codigo sino por lo que el jurado alcance a ver en 5 a 8 minutos, y una demo que falla borra tres meses de trabajo bien hecho.</a:t>
+            </a:r>
+          </a:p>
+          <a:p>
+            <a:pPr>
+              <a:spcAft>
+                <a:spcPts val="800"/>
+              </a:spcAft>
+            </a:pPr>
+            <a:r>
+              <a:rPr sz="2000" b="0" i="0">
+                <a:solidFill>
+                  <a:srgbClr val="333333"/>
+                </a:solidFill>
+                <a:latin typeface="Calibri"/>
+              </a:rPr>
+              <a:t>–   VetCare ya cumple los requisitos tecnicos (POO, colecciones, interfaz grafica, manejo de errores y persistencia); hoy lo que se construye es la evidencia de que todo eso funciona junto y en vivo.</a:t>
+            </a:r>
+          </a:p>
+          <a:p>
+            <a:pPr>
+              <a:spcAft>
+                <a:spcPts val="800"/>
+              </a:spcAft>
+            </a:pPr>
+            <a:r>
+              <a:rPr sz="2000" b="0" i="0">
+                <a:solidFill>
+                  <a:srgbClr val="333333"/>
+                </a:solidFill>
+                <a:latin typeface="Calibri"/>
+              </a:rPr>
+              <a:t>–   El guion, los datos sembrados y el video de respaldo son artefactos reales del oficio: en la industria a esto se le llama preparar el demo day, y se hace exactamente igual.</a:t>
+            </a:r>
+          </a:p>
+        </p:txBody>
+      </p:sp>
+      <p:sp>
+        <p:nvSpPr>
+          <p:cNvPr id="6" name="TextBox 5"/>
+          <p:cNvSpPr txBox="1"/>
+          <p:nvPr/>
+        </p:nvSpPr>
+        <p:spPr>
+          <a:xfrm>
+            <a:off x="11185855" y="6473952"/>
+            <a:ext cx="640080" cy="274320"/>
+          </a:xfrm>
+          <a:prstGeom prst="rect">
+            <a:avLst/>
+          </a:prstGeom>
+          <a:noFill/>
+        </p:spPr>
+        <p:txBody>
+          <a:bodyPr wrap="square">
+            <a:spAutoFit/>
+          </a:bodyPr>
+          <a:lstStyle/>
+          <a:p>
+            <a:pPr algn="r"/>
+            <a:r>
+              <a:rPr sz="1100" b="0" i="0">
+                <a:solidFill>
+                  <a:srgbClr val="666666"/>
+                </a:solidFill>
+                <a:latin typeface="Calibri"/>
+              </a:rPr>
+              <a:t>13</a:t>
+            </a:r>
+          </a:p>
+        </p:txBody>
+      </p:sp>
+    </p:spTree>
+  </p:cSld>
+  <p:clrMapOvr>
+    <a:masterClrMapping/>
+  </p:clrMapOvr>
+</p:sld>
+</file>
+
+<file path=ppt/slides/slide14.xml><?xml version="1.0" encoding="utf-8"?>
+<p:sld xmlns:a="http://schemas.openxmlformats.org/drawingml/2006/main" xmlns:p="http://schemas.openxmlformats.org/presentationml/2006/main" xmlns:r="http://schemas.openxmlformats.org/officeDocument/2006/relationships">
+  <p:cSld>
+    <p:bg>
+      <p:bgPr>
+        <a:solidFill>
+          <a:srgbClr val="FFFFFF"/>
+        </a:solidFill>
+        <a:effectLst/>
+      </p:bgPr>
+    </p:bg>
+    <p:spTree>
+      <p:nvGrpSpPr>
+        <p:cNvPr id="1" name=""/>
+        <p:cNvGrpSpPr/>
+        <p:nvPr/>
+      </p:nvGrpSpPr>
+      <p:grpSpPr/>
+      <p:sp>
+        <p:nvSpPr>
+          <p:cNvPr id="2" name="Rectangle 1"/>
+          <p:cNvSpPr/>
+          <p:nvPr/>
+        </p:nvSpPr>
+        <p:spPr>
+          <a:xfrm>
+            <a:off x="0" y="0"/>
+            <a:ext cx="12191695" cy="960120"/>
+          </a:xfrm>
+          <a:prstGeom prst="rect">
+            <a:avLst/>
+          </a:prstGeom>
+          <a:solidFill>
+            <a:srgbClr val="095292"/>
+          </a:solidFill>
+          <a:ln>
+            <a:noFill/>
+          </a:ln>
+        </p:spPr>
+        <p:style>
+          <a:lnRef idx="1">
+            <a:schemeClr val="accent1"/>
+          </a:lnRef>
+          <a:fillRef idx="3">
+            <a:schemeClr val="accent1"/>
+          </a:fillRef>
+          <a:effectRef idx="2">
+            <a:schemeClr val="accent1"/>
+          </a:effectRef>
+          <a:fontRef idx="minor">
+            <a:schemeClr val="lt1"/>
+          </a:fontRef>
+        </p:style>
+        <p:txBody>
+          <a:bodyPr rtlCol="0" anchor="ctr"/>
+          <a:lstStyle/>
+          <a:p>
+            <a:pPr algn="ctr"/>
+          </a:p>
+        </p:txBody>
+      </p:sp>
+      <p:sp>
+        <p:nvSpPr>
+          <p:cNvPr id="3" name="Rectangle 2"/>
+          <p:cNvSpPr/>
+          <p:nvPr/>
+        </p:nvSpPr>
+        <p:spPr>
+          <a:xfrm>
+            <a:off x="0" y="960120"/>
+            <a:ext cx="12191695" cy="41148"/>
+          </a:xfrm>
+          <a:prstGeom prst="rect">
+            <a:avLst/>
+          </a:prstGeom>
+          <a:solidFill>
+            <a:srgbClr val="FFD000"/>
+          </a:solidFill>
+          <a:ln>
+            <a:noFill/>
+          </a:ln>
+        </p:spPr>
+        <p:style>
+          <a:lnRef idx="1">
+            <a:schemeClr val="accent1"/>
+          </a:lnRef>
+          <a:fillRef idx="3">
+            <a:schemeClr val="accent1"/>
+          </a:fillRef>
+          <a:effectRef idx="2">
+            <a:schemeClr val="accent1"/>
+          </a:effectRef>
+          <a:fontRef idx="minor">
+            <a:schemeClr val="lt1"/>
+          </a:fontRef>
+        </p:style>
+        <p:txBody>
+          <a:bodyPr rtlCol="0" anchor="ctr"/>
+          <a:lstStyle/>
+          <a:p>
+            <a:pPr algn="ctr"/>
+          </a:p>
+        </p:txBody>
+      </p:sp>
+      <p:sp>
+        <p:nvSpPr>
+          <p:cNvPr id="4" name="TextBox 3"/>
+          <p:cNvSpPr txBox="1"/>
+          <p:nvPr/>
+        </p:nvSpPr>
+        <p:spPr>
+          <a:xfrm>
+            <a:off x="457200" y="164592"/>
+            <a:ext cx="11277295" cy="502920"/>
+          </a:xfrm>
+          <a:prstGeom prst="rect">
+            <a:avLst/>
+          </a:prstGeom>
+          <a:noFill/>
+        </p:spPr>
+        <p:txBody>
+          <a:bodyPr wrap="square">
+            <a:spAutoFit/>
+          </a:bodyPr>
+          <a:lstStyle/>
+          <a:p>
+            <a:r>
+              <a:rPr sz="2600" b="1" i="0">
+                <a:solidFill>
+                  <a:srgbClr val="FFFFFF"/>
+                </a:solidFill>
+                <a:latin typeface="Calibri"/>
+              </a:rPr>
+              <a:t>Taller PI — punto de partida</a:t>
+            </a:r>
+          </a:p>
+        </p:txBody>
+      </p:sp>
+      <p:sp>
+        <p:nvSpPr>
+          <p:cNvPr id="5" name="TextBox 4"/>
+          <p:cNvSpPr txBox="1"/>
+          <p:nvPr/>
+        </p:nvSpPr>
+        <p:spPr>
+          <a:xfrm>
+            <a:off x="457200" y="1170432"/>
+            <a:ext cx="11277295" cy="5230368"/>
+          </a:xfrm>
+          <a:prstGeom prst="rect">
+            <a:avLst/>
+          </a:prstGeom>
+          <a:noFill/>
+        </p:spPr>
+        <p:txBody>
+          <a:bodyPr wrap="square">
+            <a:spAutoFit/>
+          </a:bodyPr>
+          <a:lstStyle/>
+          <a:p>
+            <a:pPr>
+              <a:spcAft>
+                <a:spcPts val="800"/>
+              </a:spcAft>
+            </a:pPr>
+            <a:r>
+              <a:rPr sz="2000" b="0" i="0">
+                <a:solidFill>
+                  <a:srgbClr val="333333"/>
+                </a:solidFill>
+                <a:latin typeface="Calibri"/>
+              </a:rPr>
+              <a:t>–   Cada estudiante llega con su VetCare compilando y corriendo, con las funciones de registrar dueno y mascota, agendar cita, buscar por ID y guardar en archivo ya terminadas.</a:t>
+            </a:r>
+          </a:p>
+          <a:p>
+            <a:pPr>
+              <a:spcAft>
+                <a:spcPts val="800"/>
+              </a:spcAft>
+            </a:pPr>
+            <a:r>
+              <a:rPr sz="2000" b="0" i="0">
+                <a:solidFill>
+                  <a:srgbClr val="333333"/>
+                </a:solidFill>
+                <a:latin typeface="Calibri"/>
+              </a:rPr>
+              <a:t>–   La carpeta datos del proyecto puede estar vacia o con basura de las pruebas de la clase pasada; el chequeo pre-vuelo debe detectarlo antes del primer ensayo.</a:t>
+            </a:r>
+          </a:p>
+          <a:p>
+            <a:pPr>
+              <a:spcAft>
+                <a:spcPts val="800"/>
+              </a:spcAft>
+            </a:pPr>
+            <a:r>
+              <a:rPr sz="2000" b="0" i="0">
+                <a:solidFill>
+                  <a:srgbClr val="333333"/>
+                </a:solidFill>
+                <a:latin typeface="Calibri"/>
+              </a:rPr>
+              <a:t>–   El salon tiene videobeam y un solo cable: cada proyecto dispone de 8 minutos de reloj y una unica oportunidad de conectar, igual que el dia de la sustentacion.</a:t>
+            </a:r>
+          </a:p>
+        </p:txBody>
+      </p:sp>
+      <p:sp>
+        <p:nvSpPr>
+          <p:cNvPr id="6" name="TextBox 5"/>
+          <p:cNvSpPr txBox="1"/>
+          <p:nvPr/>
+        </p:nvSpPr>
+        <p:spPr>
+          <a:xfrm>
+            <a:off x="11185855" y="6473952"/>
+            <a:ext cx="640080" cy="274320"/>
+          </a:xfrm>
+          <a:prstGeom prst="rect">
+            <a:avLst/>
+          </a:prstGeom>
+          <a:noFill/>
+        </p:spPr>
+        <p:txBody>
+          <a:bodyPr wrap="square">
+            <a:spAutoFit/>
+          </a:bodyPr>
+          <a:lstStyle/>
+          <a:p>
+            <a:pPr algn="r"/>
+            <a:r>
+              <a:rPr sz="1100" b="0" i="0">
+                <a:solidFill>
+                  <a:srgbClr val="666666"/>
+                </a:solidFill>
+                <a:latin typeface="Calibri"/>
+              </a:rPr>
+              <a:t>14</a:t>
+            </a:r>
+          </a:p>
+        </p:txBody>
+      </p:sp>
+    </p:spTree>
+  </p:cSld>
+  <p:clrMapOvr>
+    <a:masterClrMapping/>
+  </p:clrMapOvr>
+</p:sld>
+</file>
+
+<file path=ppt/slides/slide15.xml><?xml version="1.0" encoding="utf-8"?>
+<p:sld xmlns:a="http://schemas.openxmlformats.org/drawingml/2006/main" xmlns:p="http://schemas.openxmlformats.org/presentationml/2006/main" xmlns:r="http://schemas.openxmlformats.org/officeDocument/2006/relationships">
+  <p:cSld>
+    <p:bg>
+      <p:bgPr>
+        <a:solidFill>
+          <a:srgbClr val="FFFFFF"/>
+        </a:solidFill>
+        <a:effectLst/>
+      </p:bgPr>
+    </p:bg>
+    <p:spTree>
+      <p:nvGrpSpPr>
+        <p:cNvPr id="1" name=""/>
+        <p:cNvGrpSpPr/>
+        <p:nvPr/>
+      </p:nvGrpSpPr>
+      <p:grpSpPr/>
+      <p:sp>
+        <p:nvSpPr>
+          <p:cNvPr id="2" name="Rectangle 1"/>
+          <p:cNvSpPr/>
+          <p:nvPr/>
+        </p:nvSpPr>
+        <p:spPr>
+          <a:xfrm>
+            <a:off x="0" y="0"/>
+            <a:ext cx="12191695" cy="960120"/>
+          </a:xfrm>
+          <a:prstGeom prst="rect">
+            <a:avLst/>
+          </a:prstGeom>
+          <a:solidFill>
+            <a:srgbClr val="095292"/>
+          </a:solidFill>
+          <a:ln>
+            <a:noFill/>
+          </a:ln>
+        </p:spPr>
+        <p:style>
+          <a:lnRef idx="1">
+            <a:schemeClr val="accent1"/>
+          </a:lnRef>
+          <a:fillRef idx="3">
+            <a:schemeClr val="accent1"/>
+          </a:fillRef>
+          <a:effectRef idx="2">
+            <a:schemeClr val="accent1"/>
+          </a:effectRef>
+          <a:fontRef idx="minor">
+            <a:schemeClr val="lt1"/>
+          </a:fontRef>
+        </p:style>
+        <p:txBody>
+          <a:bodyPr rtlCol="0" anchor="ctr"/>
+          <a:lstStyle/>
+          <a:p>
+            <a:pPr algn="ctr"/>
+          </a:p>
+        </p:txBody>
+      </p:sp>
+      <p:sp>
+        <p:nvSpPr>
+          <p:cNvPr id="3" name="Rectangle 2"/>
+          <p:cNvSpPr/>
+          <p:nvPr/>
+        </p:nvSpPr>
+        <p:spPr>
+          <a:xfrm>
+            <a:off x="0" y="960120"/>
+            <a:ext cx="12191695" cy="41148"/>
+          </a:xfrm>
+          <a:prstGeom prst="rect">
+            <a:avLst/>
+          </a:prstGeom>
+          <a:solidFill>
+            <a:srgbClr val="FFD000"/>
+          </a:solidFill>
+          <a:ln>
+            <a:noFill/>
+          </a:ln>
+        </p:spPr>
+        <p:style>
+          <a:lnRef idx="1">
+            <a:schemeClr val="accent1"/>
+          </a:lnRef>
+          <a:fillRef idx="3">
+            <a:schemeClr val="accent1"/>
+          </a:fillRef>
+          <a:effectRef idx="2">
+            <a:schemeClr val="accent1"/>
+          </a:effectRef>
+          <a:fontRef idx="minor">
+            <a:schemeClr val="lt1"/>
+          </a:fontRef>
+        </p:style>
+        <p:txBody>
+          <a:bodyPr rtlCol="0" anchor="ctr"/>
+          <a:lstStyle/>
+          <a:p>
+            <a:pPr algn="ctr"/>
+          </a:p>
+        </p:txBody>
+      </p:sp>
+      <p:sp>
+        <p:nvSpPr>
+          <p:cNvPr id="4" name="TextBox 3"/>
+          <p:cNvSpPr txBox="1"/>
+          <p:nvPr/>
+        </p:nvSpPr>
+        <p:spPr>
+          <a:xfrm>
+            <a:off x="457200" y="164592"/>
+            <a:ext cx="11277295" cy="502920"/>
+          </a:xfrm>
+          <a:prstGeom prst="rect">
+            <a:avLst/>
+          </a:prstGeom>
+          <a:noFill/>
+        </p:spPr>
+        <p:txBody>
+          <a:bodyPr wrap="square">
+            <a:spAutoFit/>
+          </a:bodyPr>
+          <a:lstStyle/>
+          <a:p>
+            <a:r>
+              <a:rPr sz="2600" b="1" i="0">
+                <a:solidFill>
+                  <a:srgbClr val="FFFFFF"/>
+                </a:solidFill>
+                <a:latin typeface="Calibri"/>
+              </a:rPr>
+              <a:t>Taller PI — pasos guiados</a:t>
+            </a:r>
+          </a:p>
+        </p:txBody>
+      </p:sp>
+      <p:sp>
+        <p:nvSpPr>
+          <p:cNvPr id="5" name="Rounded Rectangle 4"/>
+          <p:cNvSpPr/>
+          <p:nvPr/>
+        </p:nvSpPr>
+        <p:spPr>
+          <a:xfrm>
+            <a:off x="457200" y="1234440"/>
+            <a:ext cx="11277295" cy="950976"/>
+          </a:xfrm>
+          <a:prstGeom prst="roundRect">
+            <a:avLst>
+              <a:gd name="adj" fmla="val 12000"/>
+            </a:avLst>
+          </a:prstGeom>
+          <a:solidFill>
+            <a:srgbClr val="F2F2F2"/>
+          </a:solidFill>
+          <a:ln>
+            <a:noFill/>
+          </a:ln>
+        </p:spPr>
+        <p:style>
+          <a:lnRef idx="1">
+            <a:schemeClr val="accent1"/>
+          </a:lnRef>
+          <a:fillRef idx="3">
+            <a:schemeClr val="accent1"/>
+          </a:fillRef>
+          <a:effectRef idx="2">
+            <a:schemeClr val="accent1"/>
+          </a:effectRef>
+          <a:fontRef idx="minor">
+            <a:schemeClr val="lt1"/>
+          </a:fontRef>
+        </p:style>
+        <p:txBody>
+          <a:bodyPr rtlCol="0" anchor="ctr"/>
+          <a:lstStyle/>
+          <a:p>
+            <a:pPr algn="ctr"/>
+          </a:p>
+        </p:txBody>
+      </p:sp>
+      <p:sp>
+        <p:nvSpPr>
+          <p:cNvPr id="6" name="Rounded Rectangle 5"/>
+          <p:cNvSpPr/>
+          <p:nvPr/>
+        </p:nvSpPr>
+        <p:spPr>
+          <a:xfrm>
+            <a:off x="594360" y="1490472"/>
+            <a:ext cx="438912" cy="438912"/>
+          </a:xfrm>
+          <a:prstGeom prst="roundRect">
+            <a:avLst>
+              <a:gd name="adj" fmla="val 12000"/>
+            </a:avLst>
+          </a:prstGeom>
+          <a:solidFill>
+            <a:srgbClr val="095292"/>
+          </a:solidFill>
+          <a:ln>
+            <a:noFill/>
+          </a:ln>
+        </p:spPr>
+        <p:style>
+          <a:lnRef idx="1">
+            <a:schemeClr val="accent1"/>
+          </a:lnRef>
+          <a:fillRef idx="3">
+            <a:schemeClr val="accent1"/>
+          </a:fillRef>
+          <a:effectRef idx="2">
+            <a:schemeClr val="accent1"/>
+          </a:effectRef>
+          <a:fontRef idx="minor">
+            <a:schemeClr val="lt1"/>
+          </a:fontRef>
+        </p:style>
+        <p:txBody>
+          <a:bodyPr rtlCol="0" anchor="ctr"/>
+          <a:lstStyle/>
+          <a:p>
+            <a:pPr algn="ctr"/>
+          </a:p>
+        </p:txBody>
+      </p:sp>
+      <p:sp>
+        <p:nvSpPr>
+          <p:cNvPr id="7" name="TextBox 6"/>
+          <p:cNvSpPr txBox="1"/>
+          <p:nvPr/>
+        </p:nvSpPr>
+        <p:spPr>
+          <a:xfrm>
+            <a:off x="594360" y="1490472"/>
+            <a:ext cx="438912" cy="438912"/>
+          </a:xfrm>
+          <a:prstGeom prst="rect">
+            <a:avLst/>
+          </a:prstGeom>
+          <a:noFill/>
+        </p:spPr>
+        <p:txBody>
+          <a:bodyPr wrap="square" anchor="ctr"/>
+          <a:lstStyle/>
+          <a:p>
+            <a:pPr algn="ctr"/>
+            <a:r>
+              <a:rPr sz="1600" b="1" i="0">
+                <a:solidFill>
+                  <a:srgbClr val="FFFFFF"/>
+                </a:solidFill>
+                <a:latin typeface="Calibri"/>
+              </a:rPr>
+              <a:t>1</a:t>
+            </a:r>
+          </a:p>
+        </p:txBody>
+      </p:sp>
+      <p:sp>
+        <p:nvSpPr>
+          <p:cNvPr id="8" name="TextBox 7"/>
+          <p:cNvSpPr txBox="1"/>
+          <p:nvPr/>
+        </p:nvSpPr>
+        <p:spPr>
+          <a:xfrm>
+            <a:off x="1188720" y="1325880"/>
+            <a:ext cx="10271455" cy="786384"/>
+          </a:xfrm>
+          <a:prstGeom prst="rect">
+            <a:avLst/>
+          </a:prstGeom>
+          <a:noFill/>
+        </p:spPr>
+        <p:txBody>
+          <a:bodyPr wrap="square" anchor="ctr"/>
+          <a:lstStyle/>
+          <a:p>
+            <a:r>
+              <a:rPr sz="1400" b="1" i="0">
+                <a:solidFill>
+                  <a:srgbClr val="095292"/>
+                </a:solidFill>
+                <a:latin typeface="Calibri"/>
+              </a:rPr>
+              <a:t>Paso 1. Escriban el guion de la sustentacion en una tabla de cinco bloques con tres columnas: bloque, minutos planeados y evidencia exacta que se muestra en pantalla (si el docente autorizo equipo, agreguen una cuarta columna con el responsable); el total debe sumar entre 5 y 7 minutos, dejando margen, y la demo en vivo debe ocupar por lo menos la mitad.</a:t>
+            </a:r>
+          </a:p>
+        </p:txBody>
+      </p:sp>
+      <p:sp>
+        <p:nvSpPr>
+          <p:cNvPr id="9" name="Rounded Rectangle 8"/>
+          <p:cNvSpPr/>
+          <p:nvPr/>
+        </p:nvSpPr>
+        <p:spPr>
+          <a:xfrm>
+            <a:off x="457200" y="2276856"/>
+            <a:ext cx="11277295" cy="950976"/>
+          </a:xfrm>
+          <a:prstGeom prst="roundRect">
+            <a:avLst>
+              <a:gd name="adj" fmla="val 12000"/>
+            </a:avLst>
+          </a:prstGeom>
+          <a:solidFill>
+            <a:srgbClr val="E8F4FA"/>
+          </a:solidFill>
+          <a:ln>
+            <a:noFill/>
+          </a:ln>
+        </p:spPr>
+        <p:style>
+          <a:lnRef idx="1">
+            <a:schemeClr val="accent1"/>
+          </a:lnRef>
+          <a:fillRef idx="3">
+            <a:schemeClr val="accent1"/>
+          </a:fillRef>
+          <a:effectRef idx="2">
+            <a:schemeClr val="accent1"/>
+          </a:effectRef>
+          <a:fontRef idx="minor">
+            <a:schemeClr val="lt1"/>
+          </a:fontRef>
+        </p:style>
+        <p:txBody>
+          <a:bodyPr rtlCol="0" anchor="ctr"/>
+          <a:lstStyle/>
+          <a:p>
+            <a:pPr algn="ctr"/>
+          </a:p>
+        </p:txBody>
+      </p:sp>
+      <p:sp>
+        <p:nvSpPr>
+          <p:cNvPr id="10" name="Rounded Rectangle 9"/>
+          <p:cNvSpPr/>
+          <p:nvPr/>
+        </p:nvSpPr>
+        <p:spPr>
+          <a:xfrm>
+            <a:off x="594360" y="2532888"/>
+            <a:ext cx="438912" cy="438912"/>
+          </a:xfrm>
+          <a:prstGeom prst="roundRect">
+            <a:avLst>
+              <a:gd name="adj" fmla="val 12000"/>
+            </a:avLst>
+          </a:prstGeom>
+          <a:solidFill>
+            <a:srgbClr val="095292"/>
+          </a:solidFill>
+          <a:ln>
+            <a:noFill/>
+          </a:ln>
+        </p:spPr>
+        <p:style>
+          <a:lnRef idx="1">
+            <a:schemeClr val="accent1"/>
+          </a:lnRef>
+          <a:fillRef idx="3">
+            <a:schemeClr val="accent1"/>
+          </a:fillRef>
+          <a:effectRef idx="2">
+            <a:schemeClr val="accent1"/>
+          </a:effectRef>
+          <a:fontRef idx="minor">
+            <a:schemeClr val="lt1"/>
+          </a:fontRef>
+        </p:style>
+        <p:txBody>
+          <a:bodyPr rtlCol="0" anchor="ctr"/>
+          <a:lstStyle/>
+          <a:p>
+            <a:pPr algn="ctr"/>
+          </a:p>
+        </p:txBody>
+      </p:sp>
+      <p:sp>
+        <p:nvSpPr>
+          <p:cNvPr id="11" name="TextBox 10"/>
+          <p:cNvSpPr txBox="1"/>
+          <p:nvPr/>
+        </p:nvSpPr>
+        <p:spPr>
+          <a:xfrm>
+            <a:off x="594360" y="2532888"/>
+            <a:ext cx="438912" cy="438912"/>
+          </a:xfrm>
+          <a:prstGeom prst="rect">
+            <a:avLst/>
+          </a:prstGeom>
+          <a:noFill/>
+        </p:spPr>
+        <p:txBody>
+          <a:bodyPr wrap="square" anchor="ctr"/>
+          <a:lstStyle/>
+          <a:p>
+            <a:pPr algn="ctr"/>
+            <a:r>
+              <a:rPr sz="1600" b="1" i="0">
+                <a:solidFill>
+                  <a:srgbClr val="FFFFFF"/>
+                </a:solidFill>
+                <a:latin typeface="Calibri"/>
+              </a:rPr>
+              <a:t>2</a:t>
+            </a:r>
+          </a:p>
+        </p:txBody>
+      </p:sp>
+      <p:sp>
+        <p:nvSpPr>
+          <p:cNvPr id="12" name="TextBox 11"/>
+          <p:cNvSpPr txBox="1"/>
+          <p:nvPr/>
+        </p:nvSpPr>
+        <p:spPr>
+          <a:xfrm>
+            <a:off x="1188720" y="2368296"/>
+            <a:ext cx="10271455" cy="786384"/>
+          </a:xfrm>
+          <a:prstGeom prst="rect">
+            <a:avLst/>
+          </a:prstGeom>
+          <a:noFill/>
+        </p:spPr>
+        <p:txBody>
+          <a:bodyPr wrap="square" anchor="ctr"/>
+          <a:lstStyle/>
+          <a:p>
+            <a:r>
+              <a:rPr sz="1500" b="1" i="0">
+                <a:solidFill>
+                  <a:srgbClr val="095292"/>
+                </a:solidFill>
+                <a:latin typeface="Calibri"/>
+              </a:rPr>
+              <a:t>Paso 2. Ejecuten el sembrador de datos de demostracion para dejar datos_demo con duenos.csv, mascotas.csv y citas.csv, y corran el chequeo pre-vuelo hasta que las tres lineas salgan en [OK] con filas mayores que cero.</a:t>
+            </a:r>
+          </a:p>
+        </p:txBody>
+      </p:sp>
+      <p:sp>
+        <p:nvSpPr>
+          <p:cNvPr id="13" name="Rounded Rectangle 12"/>
+          <p:cNvSpPr/>
+          <p:nvPr/>
+        </p:nvSpPr>
+        <p:spPr>
+          <a:xfrm>
+            <a:off x="457200" y="3319272"/>
+            <a:ext cx="11277295" cy="950976"/>
+          </a:xfrm>
+          <a:prstGeom prst="roundRect">
+            <a:avLst>
+              <a:gd name="adj" fmla="val 12000"/>
+            </a:avLst>
+          </a:prstGeom>
+          <a:solidFill>
+            <a:srgbClr val="F2F2F2"/>
+          </a:solidFill>
+          <a:ln>
+            <a:noFill/>
+          </a:ln>
+        </p:spPr>
+        <p:style>
+          <a:lnRef idx="1">
+            <a:schemeClr val="accent1"/>
+          </a:lnRef>
+          <a:fillRef idx="3">
+            <a:schemeClr val="accent1"/>
+          </a:fillRef>
+          <a:effectRef idx="2">
+            <a:schemeClr val="accent1"/>
+          </a:effectRef>
+          <a:fontRef idx="minor">
+            <a:schemeClr val="lt1"/>
+          </a:fontRef>
+        </p:style>
+        <p:txBody>
+          <a:bodyPr rtlCol="0" anchor="ctr"/>
+          <a:lstStyle/>
+          <a:p>
+            <a:pPr algn="ctr"/>
+          </a:p>
+        </p:txBody>
+      </p:sp>
+      <p:sp>
+        <p:nvSpPr>
+          <p:cNvPr id="14" name="Rounded Rectangle 13"/>
+          <p:cNvSpPr/>
+          <p:nvPr/>
+        </p:nvSpPr>
+        <p:spPr>
+          <a:xfrm>
+            <a:off x="594360" y="3575304"/>
+            <a:ext cx="438912" cy="438912"/>
+          </a:xfrm>
+          <a:prstGeom prst="roundRect">
+            <a:avLst>
+              <a:gd name="adj" fmla="val 12000"/>
+            </a:avLst>
+          </a:prstGeom>
+          <a:solidFill>
+            <a:srgbClr val="095292"/>
+          </a:solidFill>
+          <a:ln>
+            <a:noFill/>
+          </a:ln>
+        </p:spPr>
+        <p:style>
+          <a:lnRef idx="1">
+            <a:schemeClr val="accent1"/>
+          </a:lnRef>
+          <a:fillRef idx="3">
+            <a:schemeClr val="accent1"/>
+          </a:fillRef>
+          <a:effectRef idx="2">
+            <a:schemeClr val="accent1"/>
+          </a:effectRef>
+          <a:fontRef idx="minor">
+            <a:schemeClr val="lt1"/>
+          </a:fontRef>
+        </p:style>
+        <p:txBody>
+          <a:bodyPr rtlCol="0" anchor="ctr"/>
+          <a:lstStyle/>
+          <a:p>
+            <a:pPr algn="ctr"/>
+          </a:p>
+        </p:txBody>
+      </p:sp>
+      <p:sp>
+        <p:nvSpPr>
+          <p:cNvPr id="15" name="TextBox 14"/>
+          <p:cNvSpPr txBox="1"/>
+          <p:nvPr/>
+        </p:nvSpPr>
+        <p:spPr>
+          <a:xfrm>
+            <a:off x="594360" y="3575304"/>
+            <a:ext cx="438912" cy="438912"/>
+          </a:xfrm>
+          <a:prstGeom prst="rect">
+            <a:avLst/>
+          </a:prstGeom>
+          <a:noFill/>
+        </p:spPr>
+        <p:txBody>
+          <a:bodyPr wrap="square" anchor="ctr"/>
+          <a:lstStyle/>
+          <a:p>
+            <a:pPr algn="ctr"/>
+            <a:r>
+              <a:rPr sz="1600" b="1" i="0">
+                <a:solidFill>
+                  <a:srgbClr val="FFFFFF"/>
+                </a:solidFill>
+                <a:latin typeface="Calibri"/>
+              </a:rPr>
+              <a:t>3</a:t>
+            </a:r>
+          </a:p>
+        </p:txBody>
+      </p:sp>
+      <p:sp>
+        <p:nvSpPr>
+          <p:cNvPr id="16" name="TextBox 15"/>
+          <p:cNvSpPr txBox="1"/>
+          <p:nvPr/>
+        </p:nvSpPr>
+        <p:spPr>
+          <a:xfrm>
+            <a:off x="1188720" y="3410712"/>
+            <a:ext cx="10271455" cy="786384"/>
+          </a:xfrm>
+          <a:prstGeom prst="rect">
+            <a:avLst/>
+          </a:prstGeom>
+          <a:noFill/>
+        </p:spPr>
+        <p:txBody>
+          <a:bodyPr wrap="square" anchor="ctr"/>
+          <a:lstStyle/>
+          <a:p>
+            <a:r>
+              <a:rPr sz="1400" b="1" i="0">
+                <a:solidFill>
+                  <a:srgbClr val="095292"/>
+                </a:solidFill>
+                <a:latin typeface="Calibri"/>
+              </a:rPr>
+              <a:t>Paso 3. Hagan el ensayo numero uno con el cronometro del programa: hablen cada bloque completo de pie y sin saltarse ninguno (si trabajan en equipo, cada integrante el suyo), y al final anoten tiempo real contra tiempo planeado de cada bloque en la planilla.</a:t>
+            </a:r>
+          </a:p>
+        </p:txBody>
+      </p:sp>
+      <p:sp>
+        <p:nvSpPr>
+          <p:cNvPr id="17" name="Rounded Rectangle 16"/>
+          <p:cNvSpPr/>
+          <p:nvPr/>
+        </p:nvSpPr>
+        <p:spPr>
+          <a:xfrm>
+            <a:off x="457200" y="4361688"/>
+            <a:ext cx="11277295" cy="950976"/>
+          </a:xfrm>
+          <a:prstGeom prst="roundRect">
+            <a:avLst>
+              <a:gd name="adj" fmla="val 12000"/>
+            </a:avLst>
+          </a:prstGeom>
+          <a:solidFill>
+            <a:srgbClr val="E8F4FA"/>
+          </a:solidFill>
+          <a:ln>
+            <a:noFill/>
+          </a:ln>
+        </p:spPr>
+        <p:style>
+          <a:lnRef idx="1">
+            <a:schemeClr val="accent1"/>
+          </a:lnRef>
+          <a:fillRef idx="3">
+            <a:schemeClr val="accent1"/>
+          </a:fillRef>
+          <a:effectRef idx="2">
+            <a:schemeClr val="accent1"/>
+          </a:effectRef>
+          <a:fontRef idx="minor">
+            <a:schemeClr val="lt1"/>
+          </a:fontRef>
+        </p:style>
+        <p:txBody>
+          <a:bodyPr rtlCol="0" anchor="ctr"/>
+          <a:lstStyle/>
+          <a:p>
+            <a:pPr algn="ctr"/>
+          </a:p>
+        </p:txBody>
+      </p:sp>
+      <p:sp>
+        <p:nvSpPr>
+          <p:cNvPr id="18" name="Rounded Rectangle 17"/>
+          <p:cNvSpPr/>
+          <p:nvPr/>
+        </p:nvSpPr>
+        <p:spPr>
+          <a:xfrm>
+            <a:off x="594360" y="4617720"/>
+            <a:ext cx="438912" cy="438912"/>
+          </a:xfrm>
+          <a:prstGeom prst="roundRect">
+            <a:avLst>
+              <a:gd name="adj" fmla="val 12000"/>
+            </a:avLst>
+          </a:prstGeom>
+          <a:solidFill>
+            <a:srgbClr val="095292"/>
+          </a:solidFill>
+          <a:ln>
+            <a:noFill/>
+          </a:ln>
+        </p:spPr>
+        <p:style>
+          <a:lnRef idx="1">
+            <a:schemeClr val="accent1"/>
+          </a:lnRef>
+          <a:fillRef idx="3">
+            <a:schemeClr val="accent1"/>
+          </a:fillRef>
+          <a:effectRef idx="2">
+            <a:schemeClr val="accent1"/>
+          </a:effectRef>
+          <a:fontRef idx="minor">
+            <a:schemeClr val="lt1"/>
+          </a:fontRef>
+        </p:style>
+        <p:txBody>
+          <a:bodyPr rtlCol="0" anchor="ctr"/>
+          <a:lstStyle/>
+          <a:p>
+            <a:pPr algn="ctr"/>
+          </a:p>
+        </p:txBody>
+      </p:sp>
+      <p:sp>
+        <p:nvSpPr>
+          <p:cNvPr id="19" name="TextBox 18"/>
+          <p:cNvSpPr txBox="1"/>
+          <p:nvPr/>
+        </p:nvSpPr>
+        <p:spPr>
+          <a:xfrm>
+            <a:off x="594360" y="4617720"/>
+            <a:ext cx="438912" cy="438912"/>
+          </a:xfrm>
+          <a:prstGeom prst="rect">
+            <a:avLst/>
+          </a:prstGeom>
+          <a:noFill/>
+        </p:spPr>
+        <p:txBody>
+          <a:bodyPr wrap="square" anchor="ctr"/>
+          <a:lstStyle/>
+          <a:p>
+            <a:pPr algn="ctr"/>
+            <a:r>
+              <a:rPr sz="1600" b="1" i="0">
+                <a:solidFill>
+                  <a:srgbClr val="FFFFFF"/>
+                </a:solidFill>
+                <a:latin typeface="Calibri"/>
+              </a:rPr>
+              <a:t>4</a:t>
+            </a:r>
+          </a:p>
+        </p:txBody>
+      </p:sp>
+      <p:sp>
+        <p:nvSpPr>
+          <p:cNvPr id="20" name="TextBox 19"/>
+          <p:cNvSpPr txBox="1"/>
+          <p:nvPr/>
+        </p:nvSpPr>
+        <p:spPr>
+          <a:xfrm>
+            <a:off x="1188720" y="4453128"/>
+            <a:ext cx="10271455" cy="786384"/>
+          </a:xfrm>
+          <a:prstGeom prst="rect">
+            <a:avLst/>
+          </a:prstGeom>
+          <a:noFill/>
+        </p:spPr>
+        <p:txBody>
+          <a:bodyPr wrap="square" anchor="ctr"/>
+          <a:lstStyle/>
+          <a:p>
+            <a:r>
+              <a:rPr sz="1400" b="1" i="0">
+                <a:solidFill>
+                  <a:srgbClr val="095292"/>
+                </a:solidFill>
+                <a:latin typeface="Calibri"/>
+              </a:rPr>
+              <a:t>Paso 4. Graben el plan B: un video de dos a tres minutos con la ruta feliz completa (registrar dueno, registrar mascota, agendar cita, buscar por ID, cerrar y volver a abrir mostrando que los datos siguen ahi) y exporten seis capturas de pantalla de esos mismos momentos.</a:t>
+            </a:r>
+          </a:p>
+        </p:txBody>
+      </p:sp>
+      <p:sp>
+        <p:nvSpPr>
+          <p:cNvPr id="21" name="Rounded Rectangle 20"/>
+          <p:cNvSpPr/>
+          <p:nvPr/>
+        </p:nvSpPr>
+        <p:spPr>
+          <a:xfrm>
+            <a:off x="457200" y="5404104"/>
+            <a:ext cx="11277295" cy="950976"/>
+          </a:xfrm>
+          <a:prstGeom prst="roundRect">
+            <a:avLst>
+              <a:gd name="adj" fmla="val 12000"/>
+            </a:avLst>
+          </a:prstGeom>
+          <a:solidFill>
+            <a:srgbClr val="F2F2F2"/>
+          </a:solidFill>
+          <a:ln>
+            <a:noFill/>
+          </a:ln>
+        </p:spPr>
+        <p:style>
+          <a:lnRef idx="1">
+            <a:schemeClr val="accent1"/>
+          </a:lnRef>
+          <a:fillRef idx="3">
+            <a:schemeClr val="accent1"/>
+          </a:fillRef>
+          <a:effectRef idx="2">
+            <a:schemeClr val="accent1"/>
+          </a:effectRef>
+          <a:fontRef idx="minor">
+            <a:schemeClr val="lt1"/>
+          </a:fontRef>
+        </p:style>
+        <p:txBody>
+          <a:bodyPr rtlCol="0" anchor="ctr"/>
+          <a:lstStyle/>
+          <a:p>
+            <a:pPr algn="ctr"/>
+          </a:p>
+        </p:txBody>
+      </p:sp>
+      <p:sp>
+        <p:nvSpPr>
+          <p:cNvPr id="22" name="Rounded Rectangle 21"/>
+          <p:cNvSpPr/>
+          <p:nvPr/>
+        </p:nvSpPr>
+        <p:spPr>
+          <a:xfrm>
+            <a:off x="594360" y="5660136"/>
+            <a:ext cx="438912" cy="438912"/>
+          </a:xfrm>
+          <a:prstGeom prst="roundRect">
+            <a:avLst>
+              <a:gd name="adj" fmla="val 12000"/>
+            </a:avLst>
+          </a:prstGeom>
+          <a:solidFill>
+            <a:srgbClr val="095292"/>
+          </a:solidFill>
+          <a:ln>
+            <a:noFill/>
+          </a:ln>
+        </p:spPr>
+        <p:style>
+          <a:lnRef idx="1">
+            <a:schemeClr val="accent1"/>
+          </a:lnRef>
+          <a:fillRef idx="3">
+            <a:schemeClr val="accent1"/>
+          </a:fillRef>
+          <a:effectRef idx="2">
+            <a:schemeClr val="accent1"/>
+          </a:effectRef>
+          <a:fontRef idx="minor">
+            <a:schemeClr val="lt1"/>
+          </a:fontRef>
+        </p:style>
+        <p:txBody>
+          <a:bodyPr rtlCol="0" anchor="ctr"/>
+          <a:lstStyle/>
+          <a:p>
+            <a:pPr algn="ctr"/>
+          </a:p>
+        </p:txBody>
+      </p:sp>
+      <p:sp>
+        <p:nvSpPr>
+          <p:cNvPr id="23" name="TextBox 22"/>
+          <p:cNvSpPr txBox="1"/>
+          <p:nvPr/>
+        </p:nvSpPr>
+        <p:spPr>
+          <a:xfrm>
+            <a:off x="594360" y="5660136"/>
+            <a:ext cx="438912" cy="438912"/>
+          </a:xfrm>
+          <a:prstGeom prst="rect">
+            <a:avLst/>
+          </a:prstGeom>
+          <a:noFill/>
+        </p:spPr>
+        <p:txBody>
+          <a:bodyPr wrap="square" anchor="ctr"/>
+          <a:lstStyle/>
+          <a:p>
+            <a:pPr algn="ctr"/>
+            <a:r>
+              <a:rPr sz="1600" b="1" i="0">
+                <a:solidFill>
+                  <a:srgbClr val="FFFFFF"/>
+                </a:solidFill>
+                <a:latin typeface="Calibri"/>
+              </a:rPr>
+              <a:t>5</a:t>
+            </a:r>
+          </a:p>
+        </p:txBody>
+      </p:sp>
+      <p:sp>
+        <p:nvSpPr>
+          <p:cNvPr id="24" name="TextBox 23"/>
+          <p:cNvSpPr txBox="1"/>
+          <p:nvPr/>
+        </p:nvSpPr>
+        <p:spPr>
+          <a:xfrm>
+            <a:off x="1188720" y="5495544"/>
+            <a:ext cx="10271455" cy="786384"/>
+          </a:xfrm>
+          <a:prstGeom prst="rect">
+            <a:avLst/>
+          </a:prstGeom>
+          <a:noFill/>
+        </p:spPr>
+        <p:txBody>
+          <a:bodyPr wrap="square" anchor="ctr"/>
+          <a:lstStyle/>
+          <a:p>
+            <a:r>
+              <a:rPr sz="1400" b="1" i="0">
+                <a:solidFill>
+                  <a:srgbClr val="095292"/>
+                </a:solidFill>
+                <a:latin typeface="Calibri"/>
+              </a:rPr>
+              <a:t>Paso 5. Intercambien con otro compañero (o con otro equipo, si el docente lo autorizo) una ronda de cinco preguntas de jurado, ajusten el guion con lo que fallo, hagan el ensayo numero dos y suban a la plataforma del curso el guion, la planilla de tiempos de los dos ensayos y el video de respaldo.</a:t>
+            </a:r>
+          </a:p>
+        </p:txBody>
+      </p:sp>
+      <p:sp>
+        <p:nvSpPr>
+          <p:cNvPr id="25" name="TextBox 24"/>
+          <p:cNvSpPr txBox="1"/>
+          <p:nvPr/>
+        </p:nvSpPr>
+        <p:spPr>
+          <a:xfrm>
+            <a:off x="11185855" y="6473952"/>
+            <a:ext cx="640080" cy="274320"/>
+          </a:xfrm>
+          <a:prstGeom prst="rect">
+            <a:avLst/>
+          </a:prstGeom>
+          <a:noFill/>
+        </p:spPr>
+        <p:txBody>
+          <a:bodyPr wrap="square">
+            <a:spAutoFit/>
+          </a:bodyPr>
+          <a:lstStyle/>
+          <a:p>
+            <a:pPr algn="r"/>
+            <a:r>
+              <a:rPr sz="1100" b="0" i="0">
+                <a:solidFill>
+                  <a:srgbClr val="666666"/>
+                </a:solidFill>
+                <a:latin typeface="Calibri"/>
+              </a:rPr>
+              <a:t>15</a:t>
+            </a:r>
+          </a:p>
+        </p:txBody>
+      </p:sp>
+    </p:spTree>
+  </p:cSld>
+  <p:clrMapOvr>
+    <a:masterClrMapping/>
+  </p:clrMapOvr>
+</p:sld>
+</file>
+
+<file path=ppt/slides/slide16.xml><?xml version="1.0" encoding="utf-8"?>
+<p:sld xmlns:a="http://schemas.openxmlformats.org/drawingml/2006/main" xmlns:p="http://schemas.openxmlformats.org/presentationml/2006/main" xmlns:r="http://schemas.openxmlformats.org/officeDocument/2006/relationships">
+  <p:cSld>
+    <p:bg>
+      <p:bgPr>
+        <a:solidFill>
+          <a:srgbClr val="FFFFFF"/>
+        </a:solidFill>
+        <a:effectLst/>
+      </p:bgPr>
+    </p:bg>
+    <p:spTree>
+      <p:nvGrpSpPr>
+        <p:cNvPr id="1" name=""/>
+        <p:cNvGrpSpPr/>
+        <p:nvPr/>
+      </p:nvGrpSpPr>
+      <p:grpSpPr/>
+      <p:sp>
+        <p:nvSpPr>
+          <p:cNvPr id="2" name="Rectangle 1"/>
+          <p:cNvSpPr/>
+          <p:nvPr/>
+        </p:nvSpPr>
+        <p:spPr>
+          <a:xfrm>
+            <a:off x="0" y="0"/>
+            <a:ext cx="12191695" cy="960120"/>
+          </a:xfrm>
+          <a:prstGeom prst="rect">
+            <a:avLst/>
+          </a:prstGeom>
+          <a:solidFill>
+            <a:srgbClr val="095292"/>
+          </a:solidFill>
+          <a:ln>
+            <a:noFill/>
+          </a:ln>
+        </p:spPr>
+        <p:style>
+          <a:lnRef idx="1">
+            <a:schemeClr val="accent1"/>
+          </a:lnRef>
+          <a:fillRef idx="3">
+            <a:schemeClr val="accent1"/>
+          </a:fillRef>
+          <a:effectRef idx="2">
+            <a:schemeClr val="accent1"/>
+          </a:effectRef>
+          <a:fontRef idx="minor">
+            <a:schemeClr val="lt1"/>
+          </a:fontRef>
+        </p:style>
+        <p:txBody>
+          <a:bodyPr rtlCol="0" anchor="ctr"/>
+          <a:lstStyle/>
+          <a:p>
+            <a:pPr algn="ctr"/>
+          </a:p>
+        </p:txBody>
+      </p:sp>
+      <p:sp>
+        <p:nvSpPr>
+          <p:cNvPr id="3" name="Rectangle 2"/>
+          <p:cNvSpPr/>
+          <p:nvPr/>
+        </p:nvSpPr>
+        <p:spPr>
+          <a:xfrm>
+            <a:off x="0" y="960120"/>
+            <a:ext cx="12191695" cy="41148"/>
+          </a:xfrm>
+          <a:prstGeom prst="rect">
+            <a:avLst/>
+          </a:prstGeom>
+          <a:solidFill>
+            <a:srgbClr val="FFD000"/>
+          </a:solidFill>
+          <a:ln>
+            <a:noFill/>
+          </a:ln>
+        </p:spPr>
+        <p:style>
+          <a:lnRef idx="1">
+            <a:schemeClr val="accent1"/>
+          </a:lnRef>
+          <a:fillRef idx="3">
+            <a:schemeClr val="accent1"/>
+          </a:fillRef>
+          <a:effectRef idx="2">
+            <a:schemeClr val="accent1"/>
+          </a:effectRef>
+          <a:fontRef idx="minor">
+            <a:schemeClr val="lt1"/>
+          </a:fontRef>
+        </p:style>
+        <p:txBody>
+          <a:bodyPr rtlCol="0" anchor="ctr"/>
+          <a:lstStyle/>
+          <a:p>
+            <a:pPr algn="ctr"/>
+          </a:p>
+        </p:txBody>
+      </p:sp>
+      <p:sp>
+        <p:nvSpPr>
+          <p:cNvPr id="4" name="TextBox 3"/>
+          <p:cNvSpPr txBox="1"/>
+          <p:nvPr/>
+        </p:nvSpPr>
+        <p:spPr>
+          <a:xfrm>
+            <a:off x="457200" y="164592"/>
+            <a:ext cx="11277295" cy="502920"/>
+          </a:xfrm>
+          <a:prstGeom prst="rect">
+            <a:avLst/>
+          </a:prstGeom>
+          <a:noFill/>
+        </p:spPr>
+        <p:txBody>
+          <a:bodyPr wrap="square">
+            <a:spAutoFit/>
+          </a:bodyPr>
+          <a:lstStyle/>
+          <a:p>
+            <a:r>
+              <a:rPr sz="2600" b="1" i="0">
+                <a:solidFill>
+                  <a:srgbClr val="FFFFFF"/>
+                </a:solidFill>
+                <a:latin typeface="Calibri"/>
+              </a:rPr>
+              <a:t>Antes de entregar — autochequeo</a:t>
+            </a:r>
+          </a:p>
+        </p:txBody>
+      </p:sp>
+      <p:sp>
+        <p:nvSpPr>
+          <p:cNvPr id="5" name="Rounded Rectangle 4"/>
+          <p:cNvSpPr/>
+          <p:nvPr/>
+        </p:nvSpPr>
+        <p:spPr>
+          <a:xfrm>
+            <a:off x="457200" y="1261872"/>
+            <a:ext cx="11277295" cy="566928"/>
+          </a:xfrm>
+          <a:prstGeom prst="roundRect">
+            <a:avLst>
+              <a:gd name="adj" fmla="val 12000"/>
+            </a:avLst>
+          </a:prstGeom>
+          <a:solidFill>
+            <a:srgbClr val="F2F2F2"/>
+          </a:solidFill>
+          <a:ln>
+            <a:noFill/>
+          </a:ln>
+        </p:spPr>
+        <p:style>
+          <a:lnRef idx="1">
+            <a:schemeClr val="accent1"/>
+          </a:lnRef>
+          <a:fillRef idx="3">
+            <a:schemeClr val="accent1"/>
+          </a:fillRef>
+          <a:effectRef idx="2">
+            <a:schemeClr val="accent1"/>
+          </a:effectRef>
+          <a:fontRef idx="minor">
+            <a:schemeClr val="lt1"/>
+          </a:fontRef>
+        </p:style>
+        <p:txBody>
+          <a:bodyPr rtlCol="0" anchor="ctr"/>
+          <a:lstStyle/>
+          <a:p>
+            <a:pPr algn="ctr"/>
+          </a:p>
+        </p:txBody>
+      </p:sp>
+      <p:sp>
+        <p:nvSpPr>
+          <p:cNvPr id="6" name="Rectangle 5"/>
+          <p:cNvSpPr/>
+          <p:nvPr/>
+        </p:nvSpPr>
+        <p:spPr>
+          <a:xfrm>
+            <a:off x="640080" y="1408175"/>
+            <a:ext cx="274320" cy="274320"/>
+          </a:xfrm>
+          <a:prstGeom prst="rect">
+            <a:avLst/>
+          </a:prstGeom>
+          <a:solidFill>
+            <a:srgbClr val="FFFFFF"/>
+          </a:solidFill>
+          <a:ln>
+            <a:solidFill>
+              <a:srgbClr val="333333"/>
+            </a:solidFill>
+          </a:ln>
+        </p:spPr>
+        <p:style>
+          <a:lnRef idx="1">
+            <a:schemeClr val="accent1"/>
+          </a:lnRef>
+          <a:fillRef idx="3">
+            <a:schemeClr val="accent1"/>
+          </a:fillRef>
+          <a:effectRef idx="2">
+            <a:schemeClr val="accent1"/>
+          </a:effectRef>
+          <a:fontRef idx="minor">
+            <a:schemeClr val="lt1"/>
+          </a:fontRef>
+        </p:style>
+        <p:txBody>
+          <a:bodyPr rtlCol="0" anchor="ctr"/>
+          <a:lstStyle/>
+          <a:p>
+            <a:pPr algn="ctr"/>
+          </a:p>
+        </p:txBody>
+      </p:sp>
+      <p:sp>
+        <p:nvSpPr>
+          <p:cNvPr id="7" name="Rectangle 6"/>
+          <p:cNvSpPr/>
+          <p:nvPr/>
+        </p:nvSpPr>
+        <p:spPr>
+          <a:xfrm>
+            <a:off x="640080" y="1408175"/>
+            <a:ext cx="73152" cy="274320"/>
+          </a:xfrm>
+          <a:prstGeom prst="rect">
+            <a:avLst/>
+          </a:prstGeom>
+          <a:solidFill>
+            <a:srgbClr val="269CCB"/>
+          </a:solidFill>
+          <a:ln>
+            <a:noFill/>
+          </a:ln>
+        </p:spPr>
+        <p:style>
+          <a:lnRef idx="1">
+            <a:schemeClr val="accent1"/>
+          </a:lnRef>
+          <a:fillRef idx="3">
+            <a:schemeClr val="accent1"/>
+          </a:fillRef>
+          <a:effectRef idx="2">
+            <a:schemeClr val="accent1"/>
+          </a:effectRef>
+          <a:fontRef idx="minor">
+            <a:schemeClr val="lt1"/>
+          </a:fontRef>
+        </p:style>
+        <p:txBody>
+          <a:bodyPr rtlCol="0" anchor="ctr"/>
+          <a:lstStyle/>
+          <a:p>
+            <a:pPr algn="ctr"/>
+          </a:p>
+        </p:txBody>
+      </p:sp>
+      <p:sp>
+        <p:nvSpPr>
+          <p:cNvPr id="8" name="TextBox 7"/>
+          <p:cNvSpPr txBox="1"/>
+          <p:nvPr/>
+        </p:nvSpPr>
+        <p:spPr>
+          <a:xfrm>
+            <a:off x="1097280" y="1353312"/>
+            <a:ext cx="10362895" cy="402336"/>
+          </a:xfrm>
+          <a:prstGeom prst="rect">
+            <a:avLst/>
+          </a:prstGeom>
+          <a:noFill/>
+        </p:spPr>
+        <p:txBody>
+          <a:bodyPr wrap="square" anchor="ctr"/>
+          <a:lstStyle/>
+          <a:p>
+            <a:r>
+              <a:rPr sz="1500" b="0" i="0">
+                <a:solidFill>
+                  <a:srgbClr val="333333"/>
+                </a:solidFill>
+                <a:latin typeface="Calibri"/>
+              </a:rPr>
+              <a:t>Si el computador no enciende cinco minutos antes de sustentar, ¿que muestra en su lugar y donde lo tiene a la mano?</a:t>
+            </a:r>
+          </a:p>
+        </p:txBody>
+      </p:sp>
+      <p:sp>
+        <p:nvSpPr>
+          <p:cNvPr id="9" name="Rounded Rectangle 8"/>
+          <p:cNvSpPr/>
+          <p:nvPr/>
+        </p:nvSpPr>
+        <p:spPr>
+          <a:xfrm>
+            <a:off x="457200" y="1938528"/>
+            <a:ext cx="11277295" cy="566928"/>
+          </a:xfrm>
+          <a:prstGeom prst="roundRect">
+            <a:avLst>
+              <a:gd name="adj" fmla="val 12000"/>
+            </a:avLst>
+          </a:prstGeom>
+          <a:solidFill>
+            <a:srgbClr val="F2F2F2"/>
+          </a:solidFill>
+          <a:ln>
+            <a:noFill/>
+          </a:ln>
+        </p:spPr>
+        <p:style>
+          <a:lnRef idx="1">
+            <a:schemeClr val="accent1"/>
+          </a:lnRef>
+          <a:fillRef idx="3">
+            <a:schemeClr val="accent1"/>
+          </a:fillRef>
+          <a:effectRef idx="2">
+            <a:schemeClr val="accent1"/>
+          </a:effectRef>
+          <a:fontRef idx="minor">
+            <a:schemeClr val="lt1"/>
+          </a:fontRef>
+        </p:style>
+        <p:txBody>
+          <a:bodyPr rtlCol="0" anchor="ctr"/>
+          <a:lstStyle/>
+          <a:p>
+            <a:pPr algn="ctr"/>
+          </a:p>
+        </p:txBody>
+      </p:sp>
+      <p:sp>
+        <p:nvSpPr>
+          <p:cNvPr id="10" name="Rectangle 9"/>
+          <p:cNvSpPr/>
+          <p:nvPr/>
+        </p:nvSpPr>
+        <p:spPr>
+          <a:xfrm>
+            <a:off x="640080" y="2084832"/>
+            <a:ext cx="274320" cy="274320"/>
+          </a:xfrm>
+          <a:prstGeom prst="rect">
+            <a:avLst/>
+          </a:prstGeom>
+          <a:solidFill>
+            <a:srgbClr val="FFFFFF"/>
+          </a:solidFill>
+          <a:ln>
+            <a:solidFill>
+              <a:srgbClr val="333333"/>
+            </a:solidFill>
+          </a:ln>
+        </p:spPr>
+        <p:style>
+          <a:lnRef idx="1">
+            <a:schemeClr val="accent1"/>
+          </a:lnRef>
+          <a:fillRef idx="3">
+            <a:schemeClr val="accent1"/>
+          </a:fillRef>
+          <a:effectRef idx="2">
+            <a:schemeClr val="accent1"/>
+          </a:effectRef>
+          <a:fontRef idx="minor">
+            <a:schemeClr val="lt1"/>
+          </a:fontRef>
+        </p:style>
+        <p:txBody>
+          <a:bodyPr rtlCol="0" anchor="ctr"/>
+          <a:lstStyle/>
+          <a:p>
+            <a:pPr algn="ctr"/>
+          </a:p>
+        </p:txBody>
+      </p:sp>
+      <p:sp>
+        <p:nvSpPr>
+          <p:cNvPr id="11" name="Rectangle 10"/>
+          <p:cNvSpPr/>
+          <p:nvPr/>
+        </p:nvSpPr>
+        <p:spPr>
+          <a:xfrm>
+            <a:off x="640080" y="2084832"/>
+            <a:ext cx="73152" cy="274320"/>
+          </a:xfrm>
+          <a:prstGeom prst="rect">
+            <a:avLst/>
+          </a:prstGeom>
+          <a:solidFill>
+            <a:srgbClr val="269CCB"/>
+          </a:solidFill>
+          <a:ln>
+            <a:noFill/>
+          </a:ln>
+        </p:spPr>
+        <p:style>
+          <a:lnRef idx="1">
+            <a:schemeClr val="accent1"/>
+          </a:lnRef>
+          <a:fillRef idx="3">
+            <a:schemeClr val="accent1"/>
+          </a:fillRef>
+          <a:effectRef idx="2">
+            <a:schemeClr val="accent1"/>
+          </a:effectRef>
+          <a:fontRef idx="minor">
+            <a:schemeClr val="lt1"/>
+          </a:fontRef>
+        </p:style>
+        <p:txBody>
+          <a:bodyPr rtlCol="0" anchor="ctr"/>
+          <a:lstStyle/>
+          <a:p>
+            <a:pPr algn="ctr"/>
+          </a:p>
+        </p:txBody>
+      </p:sp>
+      <p:sp>
+        <p:nvSpPr>
+          <p:cNvPr id="12" name="TextBox 11"/>
+          <p:cNvSpPr txBox="1"/>
+          <p:nvPr/>
+        </p:nvSpPr>
+        <p:spPr>
+          <a:xfrm>
+            <a:off x="1097280" y="2029968"/>
+            <a:ext cx="10362895" cy="402336"/>
+          </a:xfrm>
+          <a:prstGeom prst="rect">
+            <a:avLst/>
+          </a:prstGeom>
+          <a:noFill/>
+        </p:spPr>
+        <p:txBody>
+          <a:bodyPr wrap="square" anchor="ctr"/>
+          <a:lstStyle/>
+          <a:p>
+            <a:r>
+              <a:rPr sz="1500" b="0" i="0">
+                <a:solidFill>
+                  <a:srgbClr val="333333"/>
+                </a:solidFill>
+                <a:latin typeface="Calibri"/>
+              </a:rPr>
+              <a:t>¿Cual es la primera pantalla que ve el jurado y que informacion tiene: hay datos, o una tabla vacia que parece un programa que no sirve?</a:t>
+            </a:r>
+          </a:p>
+        </p:txBody>
+      </p:sp>
+      <p:sp>
+        <p:nvSpPr>
+          <p:cNvPr id="13" name="Rounded Rectangle 12"/>
+          <p:cNvSpPr/>
+          <p:nvPr/>
+        </p:nvSpPr>
+        <p:spPr>
+          <a:xfrm>
+            <a:off x="457200" y="2615184"/>
+            <a:ext cx="11277295" cy="566928"/>
+          </a:xfrm>
+          <a:prstGeom prst="roundRect">
+            <a:avLst>
+              <a:gd name="adj" fmla="val 12000"/>
+            </a:avLst>
+          </a:prstGeom>
+          <a:solidFill>
+            <a:srgbClr val="F2F2F2"/>
+          </a:solidFill>
+          <a:ln>
+            <a:noFill/>
+          </a:ln>
+        </p:spPr>
+        <p:style>
+          <a:lnRef idx="1">
+            <a:schemeClr val="accent1"/>
+          </a:lnRef>
+          <a:fillRef idx="3">
+            <a:schemeClr val="accent1"/>
+          </a:fillRef>
+          <a:effectRef idx="2">
+            <a:schemeClr val="accent1"/>
+          </a:effectRef>
+          <a:fontRef idx="minor">
+            <a:schemeClr val="lt1"/>
+          </a:fontRef>
+        </p:style>
+        <p:txBody>
+          <a:bodyPr rtlCol="0" anchor="ctr"/>
+          <a:lstStyle/>
+          <a:p>
+            <a:pPr algn="ctr"/>
+          </a:p>
+        </p:txBody>
+      </p:sp>
+      <p:sp>
+        <p:nvSpPr>
+          <p:cNvPr id="14" name="Rectangle 13"/>
+          <p:cNvSpPr/>
+          <p:nvPr/>
+        </p:nvSpPr>
+        <p:spPr>
+          <a:xfrm>
+            <a:off x="640080" y="2761488"/>
+            <a:ext cx="274320" cy="274320"/>
+          </a:xfrm>
+          <a:prstGeom prst="rect">
+            <a:avLst/>
+          </a:prstGeom>
+          <a:solidFill>
+            <a:srgbClr val="FFFFFF"/>
+          </a:solidFill>
+          <a:ln>
+            <a:solidFill>
+              <a:srgbClr val="333333"/>
+            </a:solidFill>
+          </a:ln>
+        </p:spPr>
+        <p:style>
+          <a:lnRef idx="1">
+            <a:schemeClr val="accent1"/>
+          </a:lnRef>
+          <a:fillRef idx="3">
+            <a:schemeClr val="accent1"/>
+          </a:fillRef>
+          <a:effectRef idx="2">
+            <a:schemeClr val="accent1"/>
+          </a:effectRef>
+          <a:fontRef idx="minor">
+            <a:schemeClr val="lt1"/>
+          </a:fontRef>
+        </p:style>
+        <p:txBody>
+          <a:bodyPr rtlCol="0" anchor="ctr"/>
+          <a:lstStyle/>
+          <a:p>
+            <a:pPr algn="ctr"/>
+          </a:p>
+        </p:txBody>
+      </p:sp>
+      <p:sp>
+        <p:nvSpPr>
+          <p:cNvPr id="15" name="Rectangle 14"/>
+          <p:cNvSpPr/>
+          <p:nvPr/>
+        </p:nvSpPr>
+        <p:spPr>
+          <a:xfrm>
+            <a:off x="640080" y="2761488"/>
+            <a:ext cx="73152" cy="274320"/>
+          </a:xfrm>
+          <a:prstGeom prst="rect">
+            <a:avLst/>
+          </a:prstGeom>
+          <a:solidFill>
+            <a:srgbClr val="269CCB"/>
+          </a:solidFill>
+          <a:ln>
+            <a:noFill/>
+          </a:ln>
+        </p:spPr>
+        <p:style>
+          <a:lnRef idx="1">
+            <a:schemeClr val="accent1"/>
+          </a:lnRef>
+          <a:fillRef idx="3">
+            <a:schemeClr val="accent1"/>
+          </a:fillRef>
+          <a:effectRef idx="2">
+            <a:schemeClr val="accent1"/>
+          </a:effectRef>
+          <a:fontRef idx="minor">
+            <a:schemeClr val="lt1"/>
+          </a:fontRef>
+        </p:style>
+        <p:txBody>
+          <a:bodyPr rtlCol="0" anchor="ctr"/>
+          <a:lstStyle/>
+          <a:p>
+            <a:pPr algn="ctr"/>
+          </a:p>
+        </p:txBody>
+      </p:sp>
+      <p:sp>
+        <p:nvSpPr>
+          <p:cNvPr id="16" name="TextBox 15"/>
+          <p:cNvSpPr txBox="1"/>
+          <p:nvPr/>
+        </p:nvSpPr>
+        <p:spPr>
+          <a:xfrm>
+            <a:off x="1097280" y="2706624"/>
+            <a:ext cx="10362895" cy="402336"/>
+          </a:xfrm>
+          <a:prstGeom prst="rect">
+            <a:avLst/>
+          </a:prstGeom>
+          <a:noFill/>
+        </p:spPr>
+        <p:txBody>
+          <a:bodyPr wrap="square" anchor="ctr"/>
+          <a:lstStyle/>
+          <a:p>
+            <a:r>
+              <a:rPr sz="1500" b="0" i="0">
+                <a:solidFill>
+                  <a:srgbClr val="333333"/>
+                </a:solidFill>
+                <a:latin typeface="Calibri"/>
+              </a:rPr>
+              <a:t>Si el jurado pregunta 'donde esta la herencia en su proyecto', ¿en cuantos segundos puede tener ese archivo en pantalla?</a:t>
+            </a:r>
+          </a:p>
+        </p:txBody>
+      </p:sp>
+      <p:sp>
+        <p:nvSpPr>
+          <p:cNvPr id="17" name="TextBox 16"/>
+          <p:cNvSpPr txBox="1"/>
+          <p:nvPr/>
+        </p:nvSpPr>
+        <p:spPr>
+          <a:xfrm>
+            <a:off x="11185855" y="6473952"/>
+            <a:ext cx="640080" cy="274320"/>
+          </a:xfrm>
+          <a:prstGeom prst="rect">
+            <a:avLst/>
+          </a:prstGeom>
+          <a:noFill/>
+        </p:spPr>
+        <p:txBody>
+          <a:bodyPr wrap="square">
+            <a:spAutoFit/>
+          </a:bodyPr>
+          <a:lstStyle/>
+          <a:p>
+            <a:pPr algn="r"/>
+            <a:r>
+              <a:rPr sz="1100" b="0" i="0">
+                <a:solidFill>
+                  <a:srgbClr val="666666"/>
+                </a:solidFill>
+                <a:latin typeface="Calibri"/>
+              </a:rPr>
+              <a:t>16</a:t>
+            </a:r>
+          </a:p>
+        </p:txBody>
+      </p:sp>
+    </p:spTree>
+  </p:cSld>
+  <p:clrMapOvr>
+    <a:masterClrMapping/>
+  </p:clrMapOvr>
+</p:sld>
+</file>
+
+<file path=ppt/slides/slide17.xml><?xml version="1.0" encoding="utf-8"?>
+<p:sld xmlns:a="http://schemas.openxmlformats.org/drawingml/2006/main" xmlns:p="http://schemas.openxmlformats.org/presentationml/2006/main" xmlns:r="http://schemas.openxmlformats.org/officeDocument/2006/relationships">
+  <p:cSld>
+    <p:bg>
+      <p:bgPr>
+        <a:solidFill>
+          <a:srgbClr val="FFFFFF"/>
+        </a:solidFill>
+        <a:effectLst/>
+      </p:bgPr>
+    </p:bg>
+    <p:spTree>
+      <p:nvGrpSpPr>
+        <p:cNvPr id="1" name=""/>
+        <p:cNvGrpSpPr/>
+        <p:nvPr/>
+      </p:nvGrpSpPr>
+      <p:grpSpPr/>
+      <p:sp>
+        <p:nvSpPr>
+          <p:cNvPr id="2" name="Rectangle 1"/>
+          <p:cNvSpPr/>
+          <p:nvPr/>
+        </p:nvSpPr>
+        <p:spPr>
+          <a:xfrm>
+            <a:off x="0" y="0"/>
+            <a:ext cx="12191695" cy="960120"/>
+          </a:xfrm>
+          <a:prstGeom prst="rect">
+            <a:avLst/>
+          </a:prstGeom>
+          <a:solidFill>
+            <a:srgbClr val="095292"/>
+          </a:solidFill>
+          <a:ln>
+            <a:noFill/>
+          </a:ln>
+        </p:spPr>
+        <p:style>
+          <a:lnRef idx="1">
+            <a:schemeClr val="accent1"/>
+          </a:lnRef>
+          <a:fillRef idx="3">
+            <a:schemeClr val="accent1"/>
+          </a:fillRef>
+          <a:effectRef idx="2">
+            <a:schemeClr val="accent1"/>
+          </a:effectRef>
+          <a:fontRef idx="minor">
+            <a:schemeClr val="lt1"/>
+          </a:fontRef>
+        </p:style>
+        <p:txBody>
+          <a:bodyPr rtlCol="0" anchor="ctr"/>
+          <a:lstStyle/>
+          <a:p>
+            <a:pPr algn="ctr"/>
+          </a:p>
+        </p:txBody>
+      </p:sp>
+      <p:sp>
+        <p:nvSpPr>
+          <p:cNvPr id="3" name="Rectangle 2"/>
+          <p:cNvSpPr/>
+          <p:nvPr/>
+        </p:nvSpPr>
+        <p:spPr>
+          <a:xfrm>
+            <a:off x="0" y="960120"/>
+            <a:ext cx="12191695" cy="41148"/>
+          </a:xfrm>
+          <a:prstGeom prst="rect">
+            <a:avLst/>
+          </a:prstGeom>
+          <a:solidFill>
+            <a:srgbClr val="FFD000"/>
+          </a:solidFill>
+          <a:ln>
+            <a:noFill/>
+          </a:ln>
+        </p:spPr>
+        <p:style>
+          <a:lnRef idx="1">
+            <a:schemeClr val="accent1"/>
+          </a:lnRef>
+          <a:fillRef idx="3">
+            <a:schemeClr val="accent1"/>
+          </a:fillRef>
+          <a:effectRef idx="2">
+            <a:schemeClr val="accent1"/>
+          </a:effectRef>
+          <a:fontRef idx="minor">
+            <a:schemeClr val="lt1"/>
+          </a:fontRef>
+        </p:style>
+        <p:txBody>
+          <a:bodyPr rtlCol="0" anchor="ctr"/>
+          <a:lstStyle/>
+          <a:p>
+            <a:pPr algn="ctr"/>
+          </a:p>
+        </p:txBody>
+      </p:sp>
+      <p:sp>
+        <p:nvSpPr>
+          <p:cNvPr id="4" name="TextBox 3"/>
+          <p:cNvSpPr txBox="1"/>
+          <p:nvPr/>
+        </p:nvSpPr>
+        <p:spPr>
+          <a:xfrm>
+            <a:off x="457200" y="164592"/>
+            <a:ext cx="11277295" cy="502920"/>
+          </a:xfrm>
+          <a:prstGeom prst="rect">
+            <a:avLst/>
+          </a:prstGeom>
+          <a:noFill/>
+        </p:spPr>
+        <p:txBody>
+          <a:bodyPr wrap="square">
+            <a:spAutoFit/>
+          </a:bodyPr>
+          <a:lstStyle/>
+          <a:p>
+            <a:r>
+              <a:rPr sz="2600" b="1" i="0">
+                <a:solidFill>
+                  <a:srgbClr val="FFFFFF"/>
+                </a:solidFill>
+                <a:latin typeface="Calibri"/>
+              </a:rPr>
+              <a:t>Criterios de exito / entregable</a:t>
+            </a:r>
+          </a:p>
+        </p:txBody>
+      </p:sp>
+      <p:sp>
+        <p:nvSpPr>
+          <p:cNvPr id="5" name="TextBox 4"/>
+          <p:cNvSpPr txBox="1"/>
+          <p:nvPr/>
+        </p:nvSpPr>
+        <p:spPr>
+          <a:xfrm>
+            <a:off x="457200" y="1170432"/>
+            <a:ext cx="11277295" cy="5230368"/>
+          </a:xfrm>
+          <a:prstGeom prst="rect">
+            <a:avLst/>
+          </a:prstGeom>
+          <a:noFill/>
+        </p:spPr>
+        <p:txBody>
+          <a:bodyPr wrap="square">
+            <a:spAutoFit/>
+          </a:bodyPr>
+          <a:lstStyle/>
+          <a:p>
+            <a:pPr>
+              <a:spcAft>
+                <a:spcPts val="800"/>
+              </a:spcAft>
+            </a:pPr>
+            <a:r>
+              <a:rPr sz="2000" b="0" i="0">
+                <a:solidFill>
+                  <a:srgbClr val="333333"/>
+                </a:solidFill>
+                <a:latin typeface="Calibri"/>
+              </a:rPr>
+              <a:t>–   </a:t>
+            </a:r>
+            <a:r>
+              <a:rPr sz="2000" b="1" i="0">
+                <a:solidFill>
+                  <a:srgbClr val="333333"/>
+                </a:solidFill>
+                <a:latin typeface="Calibri"/>
+              </a:rPr>
+              <a:t>Entregable:</a:t>
+            </a:r>
+            <a:r>
+              <a:rPr sz="2000" b="0" i="0">
+                <a:solidFill>
+                  <a:srgbClr val="333333"/>
+                </a:solidFill>
+                <a:latin typeface="Calibri"/>
+              </a:rPr>
+              <a:t> Guion de sustentacion con bloques, minutos y evidencia que se muestra (mas el responsable nominal solo si el docente autorizo equipo), mas la planilla de tiempos de dos ensayos y el video de respaldo de la ruta feliz, subido a la plataforma del curso.</a:t>
+            </a:r>
+          </a:p>
+          <a:p>
+            <a:pPr>
+              <a:spcAft>
+                <a:spcPts val="800"/>
+              </a:spcAft>
+            </a:pPr>
+            <a:r>
+              <a:rPr sz="2000" b="0" i="0">
+                <a:solidFill>
+                  <a:srgbClr val="333333"/>
+                </a:solidFill>
+                <a:latin typeface="Calibri"/>
+              </a:rPr>
+              <a:t>–   </a:t>
+            </a:r>
+            <a:r>
+              <a:rPr sz="2000" b="1" i="0">
+                <a:solidFill>
+                  <a:srgbClr val="333333"/>
+                </a:solidFill>
+                <a:latin typeface="Calibri"/>
+              </a:rPr>
+              <a:t>Exito:</a:t>
+            </a:r>
+            <a:r>
+              <a:rPr sz="2000" b="0" i="0">
+                <a:solidFill>
+                  <a:srgbClr val="333333"/>
+                </a:solidFill>
+                <a:latin typeface="Calibri"/>
+              </a:rPr>
+              <a:t> El guion escrito cubre los cinco bloques con minutos y evidencia, sin bloques huerfanos; si el docente autorizo equipo, todos los integrantes tienen bloque y ninguno queda sin intervencion.</a:t>
+            </a:r>
+          </a:p>
+          <a:p>
+            <a:pPr>
+              <a:spcAft>
+                <a:spcPts val="800"/>
+              </a:spcAft>
+            </a:pPr>
+            <a:r>
+              <a:rPr sz="2000" b="0" i="0">
+                <a:solidFill>
+                  <a:srgbClr val="333333"/>
+                </a:solidFill>
+                <a:latin typeface="Calibri"/>
+              </a:rPr>
+              <a:t>–   </a:t>
+            </a:r>
+            <a:r>
+              <a:rPr sz="2000" b="1" i="0">
+                <a:solidFill>
+                  <a:srgbClr val="333333"/>
+                </a:solidFill>
+                <a:latin typeface="Calibri"/>
+              </a:rPr>
+              <a:t>Exito:</a:t>
+            </a:r>
+            <a:r>
+              <a:rPr sz="2000" b="0" i="0">
+                <a:solidFill>
+                  <a:srgbClr val="333333"/>
+                </a:solidFill>
+                <a:latin typeface="Calibri"/>
+              </a:rPr>
+              <a:t> El chequeo pre-vuelo devuelve [OK] en los tres archivos de datos_demo y la aplicacion arranca mostrando informacion, nunca una lista vacia.</a:t>
+            </a:r>
+          </a:p>
+          <a:p>
+            <a:pPr>
+              <a:spcAft>
+                <a:spcPts val="800"/>
+              </a:spcAft>
+            </a:pPr>
+            <a:r>
+              <a:rPr sz="2000" b="0" i="0">
+                <a:solidFill>
+                  <a:srgbClr val="333333"/>
+                </a:solidFill>
+                <a:latin typeface="Calibri"/>
+              </a:rPr>
+              <a:t>–   </a:t>
+            </a:r>
+            <a:r>
+              <a:rPr sz="2000" b="1" i="0">
+                <a:solidFill>
+                  <a:srgbClr val="333333"/>
+                </a:solidFill>
+                <a:latin typeface="Calibri"/>
+              </a:rPr>
+              <a:t>Exito:</a:t>
+            </a:r>
+            <a:r>
+              <a:rPr sz="2000" b="0" i="0">
+                <a:solidFill>
+                  <a:srgbClr val="333333"/>
+                </a:solidFill>
+                <a:latin typeface="Calibri"/>
+              </a:rPr>
+              <a:t> Los dos ensayos quedan cronometrados y el segundo cae entre 5 y 8 minutos, con la demo en vivo ocupando al menos la mitad del tiempo.</a:t>
+            </a:r>
+          </a:p>
+          <a:p>
+            <a:pPr>
+              <a:spcAft>
+                <a:spcPts val="800"/>
+              </a:spcAft>
+            </a:pPr>
+            <a:r>
+              <a:rPr sz="2000" b="0" i="0">
+                <a:solidFill>
+                  <a:srgbClr val="333333"/>
+                </a:solidFill>
+                <a:latin typeface="Calibri"/>
+              </a:rPr>
+              <a:t>–   </a:t>
+            </a:r>
+            <a:r>
+              <a:rPr sz="2000" b="1" i="0">
+                <a:solidFill>
+                  <a:srgbClr val="333333"/>
+                </a:solidFill>
+                <a:latin typeface="Calibri"/>
+              </a:rPr>
+              <a:t>Exito:</a:t>
+            </a:r>
+            <a:r>
+              <a:rPr sz="2000" b="0" i="0">
+                <a:solidFill>
+                  <a:srgbClr val="333333"/>
+                </a:solidFill>
+                <a:latin typeface="Calibri"/>
+              </a:rPr>
+              <a:t> Existe plan B verificado: video de la ruta feliz reproducible sin internet y seis capturas exportadas en la carpeta del proyecto.</a:t>
+            </a:r>
+          </a:p>
+          <a:p>
+            <a:pPr>
+              <a:spcAft>
+                <a:spcPts val="800"/>
+              </a:spcAft>
+            </a:pPr>
+            <a:r>
+              <a:rPr sz="2000" b="0" i="0">
+                <a:solidFill>
+                  <a:srgbClr val="333333"/>
+                </a:solidFill>
+                <a:latin typeface="Calibri"/>
+              </a:rPr>
+              <a:t>–   </a:t>
+            </a:r>
+            <a:r>
+              <a:rPr sz="2000" b="1" i="0">
+                <a:solidFill>
+                  <a:srgbClr val="333333"/>
+                </a:solidFill>
+                <a:latin typeface="Calibri"/>
+              </a:rPr>
+              <a:t>Entrega en la plataforma del curso</a:t>
+            </a:r>
+            <a:r>
+              <a:rPr sz="2000" b="0" i="0">
+                <a:solidFill>
+                  <a:srgbClr val="333333"/>
+                </a:solidFill>
+                <a:latin typeface="Calibri"/>
+              </a:rPr>
+              <a:t> — en la fecha que indique el docente.</a:t>
+            </a:r>
+          </a:p>
+        </p:txBody>
+      </p:sp>
+      <p:sp>
+        <p:nvSpPr>
+          <p:cNvPr id="6" name="TextBox 5"/>
+          <p:cNvSpPr txBox="1"/>
+          <p:nvPr/>
+        </p:nvSpPr>
+        <p:spPr>
+          <a:xfrm>
+            <a:off x="11185855" y="6473952"/>
+            <a:ext cx="640080" cy="274320"/>
+          </a:xfrm>
+          <a:prstGeom prst="rect">
+            <a:avLst/>
+          </a:prstGeom>
+          <a:noFill/>
+        </p:spPr>
+        <p:txBody>
+          <a:bodyPr wrap="square">
+            <a:spAutoFit/>
+          </a:bodyPr>
+          <a:lstStyle/>
+          <a:p>
+            <a:pPr algn="r"/>
+            <a:r>
+              <a:rPr sz="1100" b="0" i="0">
+                <a:solidFill>
+                  <a:srgbClr val="666666"/>
+                </a:solidFill>
+                <a:latin typeface="Calibri"/>
+              </a:rPr>
+              <a:t>17</a:t>
+            </a:r>
+          </a:p>
+        </p:txBody>
+      </p:sp>
+    </p:spTree>
+  </p:cSld>
+  <p:clrMapOvr>
+    <a:masterClrMapping/>
+  </p:clrMapOvr>
+</p:sld>
+</file>
+
+<file path=ppt/slides/slide18.xml><?xml version="1.0" encoding="utf-8"?>
+<p:sld xmlns:a="http://schemas.openxmlformats.org/drawingml/2006/main" xmlns:p="http://schemas.openxmlformats.org/presentationml/2006/main" xmlns:r="http://schemas.openxmlformats.org/officeDocument/2006/relationships">
+  <p:cSld>
+    <p:bg>
+      <p:bgPr>
+        <a:solidFill>
+          <a:srgbClr val="FFFFFF"/>
+        </a:solidFill>
+        <a:effectLst/>
+      </p:bgPr>
+    </p:bg>
+    <p:spTree>
+      <p:nvGrpSpPr>
+        <p:cNvPr id="1" name=""/>
+        <p:cNvGrpSpPr/>
+        <p:nvPr/>
+      </p:nvGrpSpPr>
+      <p:grpSpPr/>
+      <p:sp>
+        <p:nvSpPr>
+          <p:cNvPr id="2" name="Rectangle 1"/>
+          <p:cNvSpPr/>
+          <p:nvPr/>
+        </p:nvSpPr>
+        <p:spPr>
+          <a:xfrm>
+            <a:off x="0" y="0"/>
+            <a:ext cx="12191695" cy="960120"/>
+          </a:xfrm>
+          <a:prstGeom prst="rect">
+            <a:avLst/>
+          </a:prstGeom>
+          <a:solidFill>
+            <a:srgbClr val="095292"/>
+          </a:solidFill>
+          <a:ln>
+            <a:noFill/>
+          </a:ln>
+        </p:spPr>
+        <p:style>
+          <a:lnRef idx="1">
+            <a:schemeClr val="accent1"/>
+          </a:lnRef>
+          <a:fillRef idx="3">
+            <a:schemeClr val="accent1"/>
+          </a:fillRef>
+          <a:effectRef idx="2">
+            <a:schemeClr val="accent1"/>
+          </a:effectRef>
+          <a:fontRef idx="minor">
+            <a:schemeClr val="lt1"/>
+          </a:fontRef>
+        </p:style>
+        <p:txBody>
+          <a:bodyPr rtlCol="0" anchor="ctr"/>
+          <a:lstStyle/>
+          <a:p>
+            <a:pPr algn="ctr"/>
+          </a:p>
+        </p:txBody>
+      </p:sp>
+      <p:sp>
+        <p:nvSpPr>
+          <p:cNvPr id="3" name="Rectangle 2"/>
+          <p:cNvSpPr/>
+          <p:nvPr/>
+        </p:nvSpPr>
+        <p:spPr>
+          <a:xfrm>
+            <a:off x="0" y="960120"/>
+            <a:ext cx="12191695" cy="41148"/>
+          </a:xfrm>
+          <a:prstGeom prst="rect">
+            <a:avLst/>
+          </a:prstGeom>
+          <a:solidFill>
+            <a:srgbClr val="FFD000"/>
+          </a:solidFill>
+          <a:ln>
+            <a:noFill/>
+          </a:ln>
+        </p:spPr>
+        <p:style>
+          <a:lnRef idx="1">
+            <a:schemeClr val="accent1"/>
+          </a:lnRef>
+          <a:fillRef idx="3">
+            <a:schemeClr val="accent1"/>
+          </a:fillRef>
+          <a:effectRef idx="2">
+            <a:schemeClr val="accent1"/>
+          </a:effectRef>
+          <a:fontRef idx="minor">
+            <a:schemeClr val="lt1"/>
+          </a:fontRef>
+        </p:style>
+        <p:txBody>
+          <a:bodyPr rtlCol="0" anchor="ctr"/>
+          <a:lstStyle/>
+          <a:p>
+            <a:pPr algn="ctr"/>
+          </a:p>
+        </p:txBody>
+      </p:sp>
+      <p:sp>
+        <p:nvSpPr>
+          <p:cNvPr id="4" name="TextBox 3"/>
+          <p:cNvSpPr txBox="1"/>
+          <p:nvPr/>
+        </p:nvSpPr>
+        <p:spPr>
+          <a:xfrm>
+            <a:off x="457200" y="164592"/>
+            <a:ext cx="11277295" cy="502920"/>
+          </a:xfrm>
+          <a:prstGeom prst="rect">
+            <a:avLst/>
+          </a:prstGeom>
+          <a:noFill/>
+        </p:spPr>
+        <p:txBody>
+          <a:bodyPr wrap="square">
+            <a:spAutoFit/>
+          </a:bodyPr>
+          <a:lstStyle/>
+          <a:p>
+            <a:r>
+              <a:rPr sz="2600" b="1" i="0">
+                <a:solidFill>
+                  <a:srgbClr val="FFFFFF"/>
+                </a:solidFill>
+                <a:latin typeface="Calibri"/>
+              </a:rPr>
+              <a:t>Para el PI esta semana</a:t>
+            </a:r>
+          </a:p>
+        </p:txBody>
+      </p:sp>
+      <p:sp>
+        <p:nvSpPr>
+          <p:cNvPr id="5" name="Rounded Rectangle 4"/>
+          <p:cNvSpPr/>
+          <p:nvPr/>
+        </p:nvSpPr>
+        <p:spPr>
+          <a:xfrm>
+            <a:off x="457200" y="1261872"/>
+            <a:ext cx="11277295" cy="1051560"/>
+          </a:xfrm>
+          <a:prstGeom prst="roundRect">
+            <a:avLst>
+              <a:gd name="adj" fmla="val 12000"/>
+            </a:avLst>
+          </a:prstGeom>
+          <a:solidFill>
+            <a:srgbClr val="E8F4FA"/>
+          </a:solidFill>
+          <a:ln>
+            <a:noFill/>
+          </a:ln>
+        </p:spPr>
+        <p:style>
+          <a:lnRef idx="1">
+            <a:schemeClr val="accent1"/>
+          </a:lnRef>
+          <a:fillRef idx="3">
+            <a:schemeClr val="accent1"/>
+          </a:fillRef>
+          <a:effectRef idx="2">
+            <a:schemeClr val="accent1"/>
+          </a:effectRef>
+          <a:fontRef idx="minor">
+            <a:schemeClr val="lt1"/>
+          </a:fontRef>
+        </p:style>
+        <p:txBody>
+          <a:bodyPr rtlCol="0" anchor="ctr"/>
+          <a:lstStyle/>
+          <a:p>
+            <a:pPr algn="ctr"/>
+          </a:p>
+        </p:txBody>
+      </p:sp>
+      <p:sp>
+        <p:nvSpPr>
+          <p:cNvPr id="6" name="Rectangle 5"/>
+          <p:cNvSpPr/>
+          <p:nvPr/>
+        </p:nvSpPr>
+        <p:spPr>
+          <a:xfrm>
+            <a:off x="457200" y="1261872"/>
+            <a:ext cx="128016" cy="1051560"/>
+          </a:xfrm>
+          <a:prstGeom prst="rect">
+            <a:avLst/>
+          </a:prstGeom>
+          <a:solidFill>
+            <a:srgbClr val="269CCB"/>
+          </a:solidFill>
+          <a:ln>
+            <a:noFill/>
+          </a:ln>
+        </p:spPr>
+        <p:style>
+          <a:lnRef idx="1">
+            <a:schemeClr val="accent1"/>
+          </a:lnRef>
+          <a:fillRef idx="3">
+            <a:schemeClr val="accent1"/>
+          </a:fillRef>
+          <a:effectRef idx="2">
+            <a:schemeClr val="accent1"/>
+          </a:effectRef>
+          <a:fontRef idx="minor">
+            <a:schemeClr val="lt1"/>
+          </a:fontRef>
+        </p:style>
+        <p:txBody>
+          <a:bodyPr rtlCol="0" anchor="ctr"/>
+          <a:lstStyle/>
+          <a:p>
+            <a:pPr algn="ctr"/>
+          </a:p>
+        </p:txBody>
+      </p:sp>
+      <p:sp>
+        <p:nvSpPr>
+          <p:cNvPr id="7" name="TextBox 6"/>
+          <p:cNvSpPr txBox="1"/>
+          <p:nvPr/>
+        </p:nvSpPr>
+        <p:spPr>
+          <a:xfrm>
+            <a:off x="777240" y="1399031"/>
+            <a:ext cx="10774375" cy="822959"/>
+          </a:xfrm>
+          <a:prstGeom prst="rect">
+            <a:avLst/>
+          </a:prstGeom>
+          <a:noFill/>
+        </p:spPr>
+        <p:txBody>
+          <a:bodyPr wrap="square">
+            <a:spAutoFit/>
+          </a:bodyPr>
+          <a:lstStyle/>
+          <a:p>
+            <a:r>
+              <a:rPr sz="1200" b="1" i="0">
+                <a:solidFill>
+                  <a:srgbClr val="269CCB"/>
+                </a:solidFill>
+                <a:latin typeface="Calibri"/>
+              </a:rPr>
+              <a:t>Info</a:t>
+            </a:r>
+          </a:p>
+          <a:p>
+            <a:pPr>
+              <a:spcBef>
+                <a:spcPts val="400"/>
+              </a:spcBef>
+            </a:pPr>
+            <a:r>
+              <a:rPr sz="1400" b="0" i="0">
+                <a:solidFill>
+                  <a:srgbClr val="333333"/>
+                </a:solidFill>
+                <a:latin typeface="Calibri"/>
+              </a:rPr>
+              <a:t>Hito: VetCare queda con guion de sustentacion, juego de datos de demostracion sembrado y ensayo cronometrado dentro de la ventana de 5 a 8 minutos.</a:t>
+            </a:r>
+          </a:p>
+        </p:txBody>
+      </p:sp>
+      <p:sp>
+        <p:nvSpPr>
+          <p:cNvPr id="8" name="Rounded Rectangle 7"/>
+          <p:cNvSpPr/>
+          <p:nvPr/>
+        </p:nvSpPr>
+        <p:spPr>
+          <a:xfrm>
+            <a:off x="457200" y="2478024"/>
+            <a:ext cx="11277295" cy="1051560"/>
+          </a:xfrm>
+          <a:prstGeom prst="roundRect">
+            <a:avLst>
+              <a:gd name="adj" fmla="val 12000"/>
+            </a:avLst>
+          </a:prstGeom>
+          <a:solidFill>
+            <a:srgbClr val="FFF8E1"/>
+          </a:solidFill>
+          <a:ln>
+            <a:noFill/>
+          </a:ln>
+        </p:spPr>
+        <p:style>
+          <a:lnRef idx="1">
+            <a:schemeClr val="accent1"/>
+          </a:lnRef>
+          <a:fillRef idx="3">
+            <a:schemeClr val="accent1"/>
+          </a:fillRef>
+          <a:effectRef idx="2">
+            <a:schemeClr val="accent1"/>
+          </a:effectRef>
+          <a:fontRef idx="minor">
+            <a:schemeClr val="lt1"/>
+          </a:fontRef>
+        </p:style>
+        <p:txBody>
+          <a:bodyPr rtlCol="0" anchor="ctr"/>
+          <a:lstStyle/>
+          <a:p>
+            <a:pPr algn="ctr"/>
+          </a:p>
+        </p:txBody>
+      </p:sp>
+      <p:sp>
+        <p:nvSpPr>
+          <p:cNvPr id="9" name="Rectangle 8"/>
+          <p:cNvSpPr/>
+          <p:nvPr/>
+        </p:nvSpPr>
+        <p:spPr>
+          <a:xfrm>
+            <a:off x="457200" y="2478024"/>
+            <a:ext cx="128016" cy="1051560"/>
+          </a:xfrm>
+          <a:prstGeom prst="rect">
+            <a:avLst/>
+          </a:prstGeom>
+          <a:solidFill>
+            <a:srgbClr val="FFD000"/>
+          </a:solidFill>
+          <a:ln>
+            <a:noFill/>
+          </a:ln>
+        </p:spPr>
+        <p:style>
+          <a:lnRef idx="1">
+            <a:schemeClr val="accent1"/>
+          </a:lnRef>
+          <a:fillRef idx="3">
+            <a:schemeClr val="accent1"/>
+          </a:fillRef>
+          <a:effectRef idx="2">
+            <a:schemeClr val="accent1"/>
+          </a:effectRef>
+          <a:fontRef idx="minor">
+            <a:schemeClr val="lt1"/>
+          </a:fontRef>
+        </p:style>
+        <p:txBody>
+          <a:bodyPr rtlCol="0" anchor="ctr"/>
+          <a:lstStyle/>
+          <a:p>
+            <a:pPr algn="ctr"/>
+          </a:p>
+        </p:txBody>
+      </p:sp>
+      <p:sp>
+        <p:nvSpPr>
+          <p:cNvPr id="10" name="TextBox 9"/>
+          <p:cNvSpPr txBox="1"/>
+          <p:nvPr/>
+        </p:nvSpPr>
+        <p:spPr>
+          <a:xfrm>
+            <a:off x="777240" y="2615184"/>
+            <a:ext cx="10774375" cy="822959"/>
+          </a:xfrm>
+          <a:prstGeom prst="rect">
+            <a:avLst/>
+          </a:prstGeom>
+          <a:noFill/>
+        </p:spPr>
+        <p:txBody>
+          <a:bodyPr wrap="square">
+            <a:spAutoFit/>
+          </a:bodyPr>
+          <a:lstStyle/>
+          <a:p>
+            <a:r>
+              <a:rPr sz="1200" b="1" i="0">
+                <a:solidFill>
+                  <a:srgbClr val="FFD000"/>
+                </a:solidFill>
+                <a:latin typeface="Calibri"/>
+              </a:rPr>
+              <a:t>Aclaración</a:t>
+            </a:r>
+          </a:p>
+          <a:p>
+            <a:pPr>
+              <a:spcBef>
+                <a:spcPts val="400"/>
+              </a:spcBef>
+            </a:pPr>
+            <a:r>
+              <a:rPr sz="1400" b="0" i="0">
+                <a:solidFill>
+                  <a:srgbClr val="333333"/>
+                </a:solidFill>
+                <a:latin typeface="Calibri"/>
+              </a:rPr>
+              <a:t>Enunciado completo: Clases/Proyecto Integrador/ (VetCare).</a:t>
+            </a:r>
+          </a:p>
+        </p:txBody>
+      </p:sp>
+      <p:sp>
+        <p:nvSpPr>
+          <p:cNvPr id="11" name="Rounded Rectangle 10"/>
+          <p:cNvSpPr/>
+          <p:nvPr/>
+        </p:nvSpPr>
+        <p:spPr>
+          <a:xfrm>
+            <a:off x="457200" y="3694176"/>
+            <a:ext cx="11277295" cy="1051560"/>
+          </a:xfrm>
+          <a:prstGeom prst="roundRect">
+            <a:avLst>
+              <a:gd name="adj" fmla="val 12000"/>
+            </a:avLst>
+          </a:prstGeom>
+          <a:solidFill>
+            <a:srgbClr val="FBE4E4"/>
+          </a:solidFill>
+          <a:ln>
+            <a:noFill/>
+          </a:ln>
+        </p:spPr>
+        <p:style>
+          <a:lnRef idx="1">
+            <a:schemeClr val="accent1"/>
+          </a:lnRef>
+          <a:fillRef idx="3">
+            <a:schemeClr val="accent1"/>
+          </a:fillRef>
+          <a:effectRef idx="2">
+            <a:schemeClr val="accent1"/>
+          </a:effectRef>
+          <a:fontRef idx="minor">
+            <a:schemeClr val="lt1"/>
+          </a:fontRef>
+        </p:style>
+        <p:txBody>
+          <a:bodyPr rtlCol="0" anchor="ctr"/>
+          <a:lstStyle/>
+          <a:p>
+            <a:pPr algn="ctr"/>
+          </a:p>
+        </p:txBody>
+      </p:sp>
+      <p:sp>
+        <p:nvSpPr>
+          <p:cNvPr id="12" name="Rectangle 11"/>
+          <p:cNvSpPr/>
+          <p:nvPr/>
+        </p:nvSpPr>
+        <p:spPr>
+          <a:xfrm>
+            <a:off x="457200" y="3694176"/>
+            <a:ext cx="128016" cy="1051560"/>
+          </a:xfrm>
+          <a:prstGeom prst="rect">
+            <a:avLst/>
+          </a:prstGeom>
+          <a:solidFill>
+            <a:srgbClr val="A02030"/>
+          </a:solidFill>
+          <a:ln>
+            <a:noFill/>
+          </a:ln>
+        </p:spPr>
+        <p:style>
+          <a:lnRef idx="1">
+            <a:schemeClr val="accent1"/>
+          </a:lnRef>
+          <a:fillRef idx="3">
+            <a:schemeClr val="accent1"/>
+          </a:fillRef>
+          <a:effectRef idx="2">
+            <a:schemeClr val="accent1"/>
+          </a:effectRef>
+          <a:fontRef idx="minor">
+            <a:schemeClr val="lt1"/>
+          </a:fontRef>
+        </p:style>
+        <p:txBody>
+          <a:bodyPr rtlCol="0" anchor="ctr"/>
+          <a:lstStyle/>
+          <a:p>
+            <a:pPr algn="ctr"/>
+          </a:p>
+        </p:txBody>
+      </p:sp>
+      <p:sp>
+        <p:nvSpPr>
+          <p:cNvPr id="13" name="TextBox 12"/>
+          <p:cNvSpPr txBox="1"/>
+          <p:nvPr/>
+        </p:nvSpPr>
+        <p:spPr>
+          <a:xfrm>
+            <a:off x="777240" y="3831336"/>
+            <a:ext cx="10774375" cy="822959"/>
+          </a:xfrm>
+          <a:prstGeom prst="rect">
+            <a:avLst/>
+          </a:prstGeom>
+          <a:noFill/>
+        </p:spPr>
+        <p:txBody>
+          <a:bodyPr wrap="square">
+            <a:spAutoFit/>
+          </a:bodyPr>
+          <a:lstStyle/>
+          <a:p>
+            <a:r>
+              <a:rPr sz="1200" b="1" i="0">
+                <a:solidFill>
+                  <a:srgbClr val="A02030"/>
+                </a:solidFill>
+                <a:latin typeface="Calibri"/>
+              </a:rPr>
+              <a:t>Atención</a:t>
+            </a:r>
+          </a:p>
+          <a:p>
+            <a:pPr>
+              <a:spcBef>
+                <a:spcPts val="400"/>
+              </a:spcBef>
+            </a:pPr>
+            <a:r>
+              <a:rPr sz="1400" b="0" i="0">
+                <a:solidFill>
+                  <a:srgbClr val="333333"/>
+                </a:solidFill>
+                <a:latin typeface="Calibri"/>
+              </a:rPr>
+              <a:t>Entrega del taller, si el docente lo asigna · en la fecha que indique el docente.</a:t>
+            </a:r>
+          </a:p>
+        </p:txBody>
+      </p:sp>
+      <p:sp>
+        <p:nvSpPr>
+          <p:cNvPr id="14" name="TextBox 13"/>
+          <p:cNvSpPr txBox="1"/>
+          <p:nvPr/>
+        </p:nvSpPr>
+        <p:spPr>
+          <a:xfrm>
+            <a:off x="11185855" y="6473952"/>
+            <a:ext cx="640080" cy="274320"/>
+          </a:xfrm>
+          <a:prstGeom prst="rect">
+            <a:avLst/>
+          </a:prstGeom>
+          <a:noFill/>
+        </p:spPr>
+        <p:txBody>
+          <a:bodyPr wrap="square">
+            <a:spAutoFit/>
+          </a:bodyPr>
+          <a:lstStyle/>
+          <a:p>
+            <a:pPr algn="r"/>
+            <a:r>
+              <a:rPr sz="1100" b="0" i="0">
+                <a:solidFill>
+                  <a:srgbClr val="666666"/>
+                </a:solidFill>
+                <a:latin typeface="Calibri"/>
+              </a:rPr>
+              <a:t>18</a:t>
+            </a:r>
+          </a:p>
+        </p:txBody>
+      </p:sp>
+    </p:spTree>
+  </p:cSld>
+  <p:clrMapOvr>
+    <a:masterClrMapping/>
+  </p:clrMapOvr>
+</p:sld>
+</file>
+
+<file path=ppt/slides/slide19.xml><?xml version="1.0" encoding="utf-8"?>
+<p:sld xmlns:a="http://schemas.openxmlformats.org/drawingml/2006/main" xmlns:p="http://schemas.openxmlformats.org/presentationml/2006/main" xmlns:r="http://schemas.openxmlformats.org/officeDocument/2006/relationships">
+  <p:cSld>
+    <p:bg>
+      <p:bgPr>
+        <a:solidFill>
+          <a:srgbClr val="FFFFFF"/>
+        </a:solidFill>
+        <a:effectLst/>
+      </p:bgPr>
+    </p:bg>
+    <p:spTree>
+      <p:nvGrpSpPr>
+        <p:cNvPr id="1" name=""/>
+        <p:cNvGrpSpPr/>
+        <p:nvPr/>
+      </p:nvGrpSpPr>
+      <p:grpSpPr/>
+      <p:sp>
+        <p:nvSpPr>
+          <p:cNvPr id="2" name="Rectangle 1"/>
+          <p:cNvSpPr/>
+          <p:nvPr/>
+        </p:nvSpPr>
+        <p:spPr>
+          <a:xfrm>
+            <a:off x="0" y="0"/>
             <a:ext cx="12191695" cy="164592"/>
           </a:xfrm>
           <a:prstGeom prst="rect">
@@ -6712,7 +9335,7 @@
                 </a:solidFill>
                 <a:latin typeface="Calibri"/>
               </a:rPr>
-              <a:t>Teoria Core</a:t>
+              <a:t>Sustentar un proyecto de software no es exponer diapositivas: es...</a:t>
             </a:r>
           </a:p>
         </p:txBody>
@@ -6751,7 +9374,7 @@
                 </a:solidFill>
                 <a:latin typeface="Calibri"/>
               </a:rPr>
-              <a:t>–   Sustentar un proyecto de software no es exponer diapositivas: es demostrar, delante de un jurado que duda con…</a:t>
+              <a:t>–   Sustentar un proyecto de software no es exponer diapositivas: es demostrar, delante de un jurado que duda con razon, que un problema real quedo resuelto por un programa que corre.</a:t>
             </a:r>
           </a:p>
           <a:p>
@@ -6767,7 +9390,7 @@
                 </a:solidFill>
                 <a:latin typeface="Calibri"/>
               </a:rPr>
-              <a:t>–   La sustentacion es una coreografia y hay que repartirla como se reparte una obra de teatro, aunque suba una sola…</a:t>
+              <a:t>–   El jurado no compra promesas ni diagramas bonitos, compra evidencia; por eso la regla practica es que al menos la mitad del tiempo debe ser aplicacion corriendo en pantalla.</a:t>
             </a:r>
           </a:p>
           <a:p>
@@ -6783,7 +9406,7 @@
                 </a:solidFill>
                 <a:latin typeface="Calibri"/>
               </a:rPr>
-              <a:t>–   La demo en vivo no falla por mala suerte, falla por falta de preparacion, y se blinda con un chequeo previo que…</a:t>
+              <a:t>–   El orden que funciona es siempre el mismo y va de lo humano a lo tecnico y de vuelta a lo humano: primero el problema de la clinica Huellitas en una frase concreta (todo en papel, se pierden expedientes, no se sabe quien tiene cita manana)</a:t>
             </a:r>
           </a:p>
           <a:p>
@@ -6799,7 +9422,7 @@
                 </a:solidFill>
                 <a:latin typeface="Calibri"/>
               </a:rPr>
-              <a:t>–   Las preguntas del jurado son casi siempre las mismas y se pueden preparar una por una</a:t>
+              <a:t>–   Luego la solucion en una frase (una aplicacion de escritorio en Java que registra duenos y mascotas, agenda citas y conserva los datos)</a:t>
             </a:r>
           </a:p>
           <a:p>
@@ -6815,7 +9438,23 @@
                 </a:solidFill>
                 <a:latin typeface="Calibri"/>
               </a:rPr>
-              <a:t>–   El manejo del tiempo y del nervio se entrena, no se improvisa</a:t>
+              <a:t>–   Despues la arquitectura en treinta segundos (las clases Dueno, Mascota y Cita y como se relacionan), enseguida la demo en vivo que es el corazon, y al cerrar los aprendizajes y las limitaciones.</a:t>
+            </a:r>
+          </a:p>
+          <a:p>
+            <a:pPr>
+              <a:spcAft>
+                <a:spcPts val="800"/>
+              </a:spcAft>
+            </a:pPr>
+            <a:r>
+              <a:rPr sz="2000" b="0" i="0">
+                <a:solidFill>
+                  <a:srgbClr val="333333"/>
+                </a:solidFill>
+                <a:latin typeface="Calibri"/>
+              </a:rPr>
+              <a:t>–   Empezar por el diagrama de clases o por la lista de tecnologias es el error mas comun: nadie sabe todavia para que sirve eso.</a:t>
             </a:r>
           </a:p>
         </p:txBody>
@@ -6996,141 +9635,21 @@
                 </a:solidFill>
                 <a:latin typeface="Calibri"/>
               </a:rPr>
-              <a:t>Chequeo pre-vuelo: la demo que no falla</a:t>
-            </a:r>
-          </a:p>
-        </p:txBody>
-      </p:sp>
-      <p:sp>
-        <p:nvSpPr>
-          <p:cNvPr id="5" name="Rounded Rectangle 4"/>
-          <p:cNvSpPr/>
-          <p:nvPr/>
-        </p:nvSpPr>
-        <p:spPr>
-          <a:xfrm>
-            <a:off x="457200" y="1261872"/>
-            <a:ext cx="11277295" cy="4773168"/>
-          </a:xfrm>
-          <a:prstGeom prst="roundRect">
-            <a:avLst>
-              <a:gd name="adj" fmla="val 12000"/>
-            </a:avLst>
-          </a:prstGeom>
-          <a:solidFill>
-            <a:srgbClr val="1E2A38"/>
-          </a:solidFill>
-          <a:ln>
-            <a:noFill/>
-          </a:ln>
-        </p:spPr>
-        <p:style>
-          <a:lnRef idx="1">
-            <a:schemeClr val="accent1"/>
-          </a:lnRef>
-          <a:fillRef idx="3">
-            <a:schemeClr val="accent1"/>
-          </a:fillRef>
-          <a:effectRef idx="2">
-            <a:schemeClr val="accent1"/>
-          </a:effectRef>
-          <a:fontRef idx="minor">
-            <a:schemeClr val="lt1"/>
-          </a:fontRef>
-        </p:style>
-        <p:txBody>
-          <a:bodyPr rtlCol="0" anchor="ctr"/>
-          <a:lstStyle/>
-          <a:p>
-            <a:pPr algn="ctr"/>
-          </a:p>
-        </p:txBody>
-      </p:sp>
-      <p:sp>
-        <p:nvSpPr>
-          <p:cNvPr id="6" name="Rectangle 5"/>
-          <p:cNvSpPr/>
-          <p:nvPr/>
-        </p:nvSpPr>
-        <p:spPr>
-          <a:xfrm>
-            <a:off x="457200" y="1261872"/>
-            <a:ext cx="11277295" cy="320040"/>
-          </a:xfrm>
-          <a:prstGeom prst="rect">
-            <a:avLst/>
-          </a:prstGeom>
-          <a:solidFill>
-            <a:srgbClr val="095292"/>
-          </a:solidFill>
-          <a:ln>
-            <a:noFill/>
-          </a:ln>
-        </p:spPr>
-        <p:style>
-          <a:lnRef idx="1">
-            <a:schemeClr val="accent1"/>
-          </a:lnRef>
-          <a:fillRef idx="3">
-            <a:schemeClr val="accent1"/>
-          </a:fillRef>
-          <a:effectRef idx="2">
-            <a:schemeClr val="accent1"/>
-          </a:effectRef>
-          <a:fontRef idx="minor">
-            <a:schemeClr val="lt1"/>
-          </a:fontRef>
-        </p:style>
-        <p:txBody>
-          <a:bodyPr rtlCol="0" anchor="ctr"/>
-          <a:lstStyle/>
-          <a:p>
-            <a:pPr algn="ctr"/>
-          </a:p>
-        </p:txBody>
-      </p:sp>
-      <p:sp>
-        <p:nvSpPr>
-          <p:cNvPr id="7" name="TextBox 6"/>
+              <a:t>La sustentacion es una coreografia y hay que repartirla como se reparte... (1/2)</a:t>
+            </a:r>
+          </a:p>
+        </p:txBody>
+      </p:sp>
+      <p:sp>
+        <p:nvSpPr>
+          <p:cNvPr id="5" name="TextBox 4"/>
           <p:cNvSpPr txBox="1"/>
           <p:nvPr/>
         </p:nvSpPr>
         <p:spPr>
           <a:xfrm>
-            <a:off x="685800" y="1307592"/>
-            <a:ext cx="10820095" cy="256032"/>
-          </a:xfrm>
-          <a:prstGeom prst="rect">
-            <a:avLst/>
-          </a:prstGeom>
-          <a:noFill/>
-        </p:spPr>
-        <p:txBody>
-          <a:bodyPr wrap="square" anchor="ctr"/>
-          <a:lstStyle/>
-          <a:p>
-            <a:r>
-              <a:rPr sz="1000" b="1" i="0">
-                <a:solidFill>
-                  <a:srgbClr val="269CCB"/>
-                </a:solidFill>
-                <a:latin typeface="Calibri"/>
-              </a:rPr>
-              <a:t>● ● ●</a:t>
-            </a:r>
-          </a:p>
-        </p:txBody>
-      </p:sp>
-      <p:sp>
-        <p:nvSpPr>
-          <p:cNvPr id="8" name="TextBox 7"/>
-          <p:cNvSpPr txBox="1"/>
-          <p:nvPr/>
-        </p:nvSpPr>
-        <p:spPr>
-          <a:xfrm>
-            <a:off x="777240" y="1719072"/>
-            <a:ext cx="10637215" cy="4133087"/>
+            <a:off x="457200" y="1170432"/>
+            <a:ext cx="11277295" cy="5230368"/>
           </a:xfrm>
           <a:prstGeom prst="rect">
             <a:avLst/>
@@ -7145,235 +9664,72 @@
           <a:p>
             <a:pPr>
               <a:spcAft>
-                <a:spcPts val="400"/>
+                <a:spcPts val="800"/>
               </a:spcAft>
             </a:pPr>
             <a:r>
-              <a:rPr sz="1400" b="0" i="0">
-                <a:solidFill>
-                  <a:srgbClr val="FFFFFF"/>
-                </a:solidFill>
-                <a:latin typeface="Calibri"/>
-              </a:rPr>
-              <a:t>private static boolean chequeoPreVuelo() {          // se ejecuta 10 minutos antes de sustentar</a:t>
+              <a:rPr sz="2000" b="0" i="0">
+                <a:solidFill>
+                  <a:srgbClr val="333333"/>
+                </a:solidFill>
+                <a:latin typeface="Calibri"/>
+              </a:rPr>
+              <a:t>–   La sustentacion es una coreografia y hay que repartirla como se reparte una obra de teatro, aunque suba una sola persona.</a:t>
             </a:r>
           </a:p>
           <a:p>
             <a:pPr>
               <a:spcAft>
-                <a:spcPts val="400"/>
+                <a:spcPts val="800"/>
               </a:spcAft>
             </a:pPr>
             <a:r>
-              <a:rPr sz="1400" b="0" i="0">
-                <a:solidFill>
-                  <a:srgbClr val="FFFFFF"/>
-                </a:solidFill>
-                <a:latin typeface="Calibri"/>
-              </a:rPr>
-              <a:t>    String[] requeridos = {"datos_demo/duenos.csv", "datos_demo/mascotas.csv", "datos_demo/citas.csv"};</a:t>
+              <a:rPr sz="2000" b="0" i="0">
+                <a:solidFill>
+                  <a:srgbClr val="333333"/>
+                </a:solidFill>
+                <a:latin typeface="Calibri"/>
+              </a:rPr>
+              <a:t>–   La sustentacion es individual por defecto: el estudiante trocea su exposicion en bloques completos con inicio, final y evidencia en pantalla —no frases sueltas—</a:t>
             </a:r>
           </a:p>
           <a:p>
             <a:pPr>
               <a:spcAft>
-                <a:spcPts val="400"/>
+                <a:spcPts val="800"/>
               </a:spcAft>
             </a:pPr>
             <a:r>
-              <a:rPr sz="1400" b="0" i="0">
-                <a:solidFill>
-                  <a:srgbClr val="FFFFFF"/>
-                </a:solidFill>
-                <a:latin typeface="Calibri"/>
-              </a:rPr>
-              <a:t>    boolean listo = true;</a:t>
+              <a:rPr sz="2000" b="0" i="0">
+                <a:solidFill>
+                  <a:srgbClr val="333333"/>
+                </a:solidFill>
+                <a:latin typeface="Calibri"/>
+              </a:rPr>
+              <a:t>–   Define en que momento suelta la diapositiva y toma el mouse, y deja listo un computador de respaldo con el proyecto ya abierto.</a:t>
             </a:r>
           </a:p>
           <a:p>
             <a:pPr>
               <a:spcAft>
-                <a:spcPts val="400"/>
+                <a:spcPts val="800"/>
               </a:spcAft>
             </a:pPr>
             <a:r>
-              <a:rPr sz="1400" b="0" i="0">
-                <a:solidFill>
-                  <a:srgbClr val="FFFFFF"/>
-                </a:solidFill>
-                <a:latin typeface="Calibri"/>
-              </a:rPr>
-              <a:t>    for (String ruta: requeridos) {</a:t>
-            </a:r>
-          </a:p>
-          <a:p>
-            <a:pPr>
-              <a:spcAft>
-                <a:spcPts val="400"/>
-              </a:spcAft>
-            </a:pPr>
-            <a:r>
-              <a:rPr sz="1400" b="0" i="0">
-                <a:solidFill>
-                  <a:srgbClr val="FFFFFF"/>
-                </a:solidFill>
-                <a:latin typeface="Calibri"/>
-              </a:rPr>
-              <a:t>        int filas = contarFilas(ruta);              // 0 filas = pantalla vacia frente al jurado</a:t>
-            </a:r>
-          </a:p>
-          <a:p>
-            <a:pPr>
-              <a:spcAft>
-                <a:spcPts val="400"/>
-              </a:spcAft>
-            </a:pPr>
-            <a:r>
-              <a:rPr sz="1400" b="0" i="0">
-                <a:solidFill>
-                  <a:srgbClr val="FFFFFF"/>
-                </a:solidFill>
-                <a:latin typeface="Calibri"/>
-              </a:rPr>
-              <a:t>        System.out.println((filas &gt; 0 ? "[OK]    ": "[FALLA] ") + ruta + " -&gt; " + filas + " filas");</a:t>
-            </a:r>
-          </a:p>
-          <a:p>
-            <a:pPr>
-              <a:spcAft>
-                <a:spcPts val="400"/>
-              </a:spcAft>
-            </a:pPr>
-            <a:r>
-              <a:rPr sz="1400" b="0" i="0">
-                <a:solidFill>
-                  <a:srgbClr val="FFFFFF"/>
-                </a:solidFill>
-                <a:latin typeface="Calibri"/>
-              </a:rPr>
-              <a:t>        if (filas == 0) {</a:t>
-            </a:r>
-          </a:p>
-          <a:p>
-            <a:pPr>
-              <a:spcAft>
-                <a:spcPts val="400"/>
-              </a:spcAft>
-            </a:pPr>
-            <a:r>
-              <a:rPr sz="1400" b="0" i="0">
-                <a:solidFill>
-                  <a:srgbClr val="FFFFFF"/>
-                </a:solidFill>
-                <a:latin typeface="Calibri"/>
-              </a:rPr>
-              <a:t>            listo = false;</a:t>
-            </a:r>
-          </a:p>
-          <a:p>
-            <a:pPr>
-              <a:spcAft>
-                <a:spcPts val="400"/>
-              </a:spcAft>
-            </a:pPr>
-            <a:r>
-              <a:rPr sz="1400" b="0" i="0">
-                <a:solidFill>
-                  <a:srgbClr val="FFFFFF"/>
-                </a:solidFill>
-                <a:latin typeface="Calibri"/>
-              </a:rPr>
-              <a:t>        }</a:t>
-            </a:r>
-          </a:p>
-          <a:p>
-            <a:pPr>
-              <a:spcAft>
-                <a:spcPts val="400"/>
-              </a:spcAft>
-            </a:pPr>
-            <a:r>
-              <a:rPr sz="1400" b="0" i="0">
-                <a:solidFill>
-                  <a:srgbClr val="FFFFFF"/>
-                </a:solidFill>
-                <a:latin typeface="Calibri"/>
-              </a:rPr>
-              <a:t>    }</a:t>
-            </a:r>
-          </a:p>
-          <a:p>
-            <a:pPr>
-              <a:spcAft>
-                <a:spcPts val="400"/>
-              </a:spcAft>
-            </a:pPr>
-            <a:r>
-              <a:rPr sz="1400" b="0" i="0">
-                <a:solidFill>
-                  <a:srgbClr val="FFFFFF"/>
-                </a:solidFill>
-                <a:latin typeface="Calibri"/>
-              </a:rPr>
-              <a:t>    return listo;   // si devuelve false, todavia no se sustenta ni se ensaya</a:t>
-            </a:r>
-          </a:p>
-          <a:p>
-            <a:pPr>
-              <a:spcAft>
-                <a:spcPts val="400"/>
-              </a:spcAft>
-            </a:pPr>
-            <a:r>
-              <a:rPr sz="1400" b="0" i="0">
-                <a:solidFill>
-                  <a:srgbClr val="FFFFFF"/>
-                </a:solidFill>
-                <a:latin typeface="Calibri"/>
-              </a:rPr>
-              <a:t>}</a:t>
-            </a:r>
-          </a:p>
-        </p:txBody>
-      </p:sp>
-      <p:sp>
-        <p:nvSpPr>
-          <p:cNvPr id="9" name="TextBox 8"/>
-          <p:cNvSpPr txBox="1"/>
-          <p:nvPr/>
-        </p:nvSpPr>
-        <p:spPr>
-          <a:xfrm>
-            <a:off x="457200" y="6080760"/>
-            <a:ext cx="11277295" cy="320040"/>
-          </a:xfrm>
-          <a:prstGeom prst="rect">
-            <a:avLst/>
-          </a:prstGeom>
-          <a:noFill/>
-        </p:spPr>
-        <p:txBody>
-          <a:bodyPr wrap="square">
-            <a:spAutoFit/>
-          </a:bodyPr>
-          <a:lstStyle/>
-          <a:p>
-            <a:pPr algn="ctr"/>
-            <a:r>
-              <a:rPr sz="1200" b="0" i="1">
-                <a:solidFill>
-                  <a:srgbClr val="666666"/>
-                </a:solidFill>
-                <a:latin typeface="Calibri"/>
-              </a:rPr>
-              <a:t>Una demo se prepara con codigo, no con fe: si el pre-vuelo no da verde, la sustentacion no arranca.</a:t>
-            </a:r>
-          </a:p>
-        </p:txBody>
-      </p:sp>
-      <p:sp>
-        <p:nvSpPr>
-          <p:cNvPr id="10" name="TextBox 9"/>
+              <a:rPr sz="2000" b="0" i="0">
+                <a:solidFill>
+                  <a:srgbClr val="333333"/>
+                </a:solidFill>
+                <a:latin typeface="Calibri"/>
+              </a:rPr>
+              <a:t>–   Las transiciones entre bloques se dicen en voz alta, con una formula corta del tipo 'para mostrar como quedan guardados esos datos, abro de nuevo la aplicacion', porque los silencios incomodos al cambiar de tema son lo que mas se nota.</a:t>
+            </a:r>
+          </a:p>
+        </p:txBody>
+      </p:sp>
+      <p:sp>
+        <p:nvSpPr>
+          <p:cNvPr id="6" name="TextBox 5"/>
           <p:cNvSpPr txBox="1"/>
           <p:nvPr/>
         </p:nvSpPr>
@@ -7547,7 +9903,7 @@
                 </a:solidFill>
                 <a:latin typeface="Calibri"/>
               </a:rPr>
-              <a:t>Demo del dia</a:t>
+              <a:t>La sustentacion es una coreografia y hay que repartirla como se reparte... (2/2)</a:t>
             </a:r>
           </a:p>
         </p:txBody>
@@ -7586,25 +9942,7 @@
                 </a:solidFill>
                 <a:latin typeface="Calibri"/>
               </a:rPr>
-              <a:t>–   </a:t>
-            </a:r>
-            <a:r>
-              <a:rPr sz="2000" b="1" i="0">
-                <a:solidFill>
-                  <a:srgbClr val="333333"/>
-                </a:solidFill>
-                <a:latin typeface="Calibri"/>
-              </a:rPr>
-              <a:t>Herramienta:</a:t>
-            </a:r>
-            <a:r>
-              <a:rPr sz="2000" b="0" i="0">
-                <a:solidFill>
-                  <a:srgbClr val="333333"/>
-                </a:solidFill>
-                <a:latin typeface="Calibri"/>
-              </a:rPr>
-              <a:t> Visual Studio Code (Java)</a:t>
+              <a:t>–   Si el docente autorizo equipo de 2 o 3, cada integrante toma bloques completos, ninguno se queda callado aunque otro domine mas el codigo</a:t>
             </a:r>
           </a:p>
           <a:p>
@@ -7620,25 +9958,7 @@
                 </a:solidFill>
                 <a:latin typeface="Calibri"/>
               </a:rPr>
-              <a:t>–   </a:t>
-            </a:r>
-            <a:r>
-              <a:rPr sz="2000" b="1" i="0">
-                <a:solidFill>
-                  <a:srgbClr val="333333"/>
-                </a:solidFill>
-                <a:latin typeface="Calibri"/>
-              </a:rPr>
-              <a:t>Demo:</a:t>
-            </a:r>
-            <a:r>
-              <a:rPr sz="2000" b="0" i="0">
-                <a:solidFill>
-                  <a:srgbClr val="333333"/>
-                </a:solidFill>
-                <a:latin typeface="Calibri"/>
-              </a:rPr>
-              <a:t> El docente sustenta VetCare en 6 minutos delante del grupo, provoca a proposito un error de edad para mostrar la validacion, y luego repite la misma demo con la lista vacia para que se vea el desastre de no sembrar datos.</a:t>
+              <a:t>–   Y las transiciones se nombran ('sigue Julian'), porque el jurado pregunta quien hizo que y tiene derecho a preguntarle a cualquiera sobre cualquier parte.</a:t>
             </a:r>
           </a:p>
           <a:p>
@@ -7654,7 +9974,23 @@
                 </a:solidFill>
                 <a:latin typeface="Calibri"/>
               </a:rPr>
-              <a:t>–   Mismo dominio VetCare — no otro ejemplo.</a:t>
+              <a:t>–   Un guion escrito, con minutos y evidencia por bloque (y el nombre del responsable si hay equipo), convierte una exposicion nerviosa en algo que se puede ensayar y medir</a:t>
+            </a:r>
+          </a:p>
+          <a:p>
+            <a:pPr>
+              <a:spcAft>
+                <a:spcPts val="800"/>
+              </a:spcAft>
+            </a:pPr>
+            <a:r>
+              <a:rPr sz="2000" b="0" i="0">
+                <a:solidFill>
+                  <a:srgbClr val="333333"/>
+                </a:solidFill>
+                <a:latin typeface="Calibri"/>
+              </a:rPr>
+              <a:t>–   En VetCare ese guion tiene cinco bloques y suma siete minutos, con cuatro dedicados a la demo.</a:t>
             </a:r>
           </a:p>
         </p:txBody>
@@ -7835,7 +10171,7 @@
                 </a:solidFill>
                 <a:latin typeface="Calibri"/>
               </a:rPr>
-              <a:t>Taller PI — por que importa</a:t>
+              <a:t>La demo en vivo no falla por mala suerte, falla por falta de... (1/2)</a:t>
             </a:r>
           </a:p>
         </p:txBody>
@@ -7874,25 +10210,7 @@
                 </a:solidFill>
                 <a:latin typeface="Calibri"/>
               </a:rPr>
-              <a:t>–   </a:t>
-            </a:r>
-            <a:r>
-              <a:rPr sz="2000" b="1" i="0">
-                <a:solidFill>
-                  <a:srgbClr val="333333"/>
-                </a:solidFill>
-                <a:latin typeface="Calibri"/>
-              </a:rPr>
-              <a:t>Por que importa al PI:</a:t>
-            </a:r>
-            <a:r>
-              <a:rPr sz="2000" b="0" i="0">
-                <a:solidFill>
-                  <a:srgbClr val="333333"/>
-                </a:solidFill>
-                <a:latin typeface="Calibri"/>
-              </a:rPr>
-              <a:t> la nota del Proyecto Integrador no se define solo por el codigo sino por lo que el jurado alcance a ver en 5 a 8 minutos, y una demo que falla borra tres meses de trabajo bien hecho.</a:t>
+              <a:t>–   La demo en vivo no falla por mala suerte, falla por falta de preparacion, y se blinda con un chequeo previo que llamaremos pre-vuelo.</a:t>
             </a:r>
           </a:p>
           <a:p>
@@ -7908,7 +10226,7 @@
                 </a:solidFill>
                 <a:latin typeface="Calibri"/>
               </a:rPr>
-              <a:t>–   VetCare ya cumple los requisitos tecnicos (POO, colecciones, interfaz grafica, manejo de errores y persistencia); hoy lo que se construye es la evidencia de que todo eso funciona junto y en vivo.</a:t>
+              <a:t>–   Lo primero es sembrar datos de demostracion: tres duenos, cuatro mascotas y tres citas ya cargadas en los CSV, porque una aplicacion con la lista vacia parece una aplicacion que no funciona</a:t>
             </a:r>
           </a:p>
           <a:p>
@@ -7924,7 +10242,23 @@
                 </a:solidFill>
                 <a:latin typeface="Calibri"/>
               </a:rPr>
-              <a:t>–   El guion, los datos sembrados y el video de respaldo son artefactos reales del oficio: en la industria a esto se le llama preparar el demo day, y se hace exactamente igual.</a:t>
+              <a:t>–   Y ademas los datos deben ser creibles del dominio (Marta Lopez con Firulais, labrador de 4 anios) y nunca 'aaa' ni 'prueba1'.</a:t>
+            </a:r>
+          </a:p>
+          <a:p>
+            <a:pPr>
+              <a:spcAft>
+                <a:spcPts val="800"/>
+              </a:spcAft>
+            </a:pPr>
+            <a:r>
+              <a:rPr sz="2000" b="0" i="0">
+                <a:solidFill>
+                  <a:srgbClr val="333333"/>
+                </a:solidFill>
+                <a:latin typeface="Calibri"/>
+              </a:rPr>
+              <a:t>–   Lo segundo es tener ensayado el camino feliz exacto, es decir la secuencia de clics que se va a hacer, sin improvisar busquedas ni teclear rutas largas frente al publico.</a:t>
             </a:r>
           </a:p>
         </p:txBody>
@@ -8105,7 +10439,7 @@
                 </a:solidFill>
                 <a:latin typeface="Calibri"/>
               </a:rPr>
-              <a:t>Taller PI — punto de partida</a:t>
+              <a:t>La demo en vivo no falla por mala suerte, falla por falta de... (2/2)</a:t>
             </a:r>
           </a:p>
         </p:txBody>
@@ -8144,7 +10478,7 @@
                 </a:solidFill>
                 <a:latin typeface="Calibri"/>
               </a:rPr>
-              <a:t>–   Cada estudiante llega con su VetCare compilando y corriendo, con las funciones de registrar dueno y mascota, agendar cita, buscar por ID y guardar en archivo ya terminadas.</a:t>
+              <a:t>–   Lo tercero es la higiene de pantalla: aumentar el tamano de fuente del IDE, cerrar notificaciones y pestanas ajenas, dejar el proyecto ya compilado y, si es posible, ejecutar el.jar en lugar de compilar delante del jurado.</a:t>
             </a:r>
           </a:p>
           <a:p>
@@ -8160,7 +10494,7 @@
                 </a:solidFill>
                 <a:latin typeface="Calibri"/>
               </a:rPr>
-              <a:t>–   La carpeta datos del proyecto puede estar vacia o con basura de las pruebas de la clase pasada; el chequeo pre-vuelo debe detectarlo antes del primer ensayo.</a:t>
+              <a:t>–   Lo cuarto es el plan B: un video de dos o tres minutos de la ruta feliz y seis capturas de pantalla listas, para que si el computador falla la presentacion continue sin panico.</a:t>
             </a:r>
           </a:p>
           <a:p>
@@ -8176,7 +10510,7 @@
                 </a:solidFill>
                 <a:latin typeface="Calibri"/>
               </a:rPr>
-              <a:t>–   El salon tiene videobeam y un solo cable: cada proyecto dispone de 8 minutos de reloj y una unica oportunidad de conectar, igual que el dia de la sustentacion.</a:t>
+              <a:t>–   Y hay un quinto detalle que suma puntos: provocar a proposito un error de edad para mostrar la validacion de la clase 13 como una fortaleza, no como un accidente.</a:t>
             </a:r>
           </a:p>
         </p:txBody>
@@ -8357,111 +10691,21 @@
                 </a:solidFill>
                 <a:latin typeface="Calibri"/>
               </a:rPr>
-              <a:t>Taller PI — pasos guiados</a:t>
-            </a:r>
-          </a:p>
-        </p:txBody>
-      </p:sp>
-      <p:sp>
-        <p:nvSpPr>
-          <p:cNvPr id="5" name="Rounded Rectangle 4"/>
-          <p:cNvSpPr/>
-          <p:nvPr/>
-        </p:nvSpPr>
-        <p:spPr>
-          <a:xfrm>
-            <a:off x="457200" y="1234440"/>
-            <a:ext cx="11277295" cy="950976"/>
-          </a:xfrm>
-          <a:prstGeom prst="roundRect">
-            <a:avLst>
-              <a:gd name="adj" fmla="val 12000"/>
-            </a:avLst>
-          </a:prstGeom>
-          <a:solidFill>
-            <a:srgbClr val="F2F2F2"/>
-          </a:solidFill>
-          <a:ln>
-            <a:noFill/>
-          </a:ln>
-        </p:spPr>
-        <p:style>
-          <a:lnRef idx="1">
-            <a:schemeClr val="accent1"/>
-          </a:lnRef>
-          <a:fillRef idx="3">
-            <a:schemeClr val="accent1"/>
-          </a:fillRef>
-          <a:effectRef idx="2">
-            <a:schemeClr val="accent1"/>
-          </a:effectRef>
-          <a:fontRef idx="minor">
-            <a:schemeClr val="lt1"/>
-          </a:fontRef>
-        </p:style>
-        <p:txBody>
-          <a:bodyPr rtlCol="0" anchor="ctr"/>
-          <a:lstStyle/>
-          <a:p>
-            <a:pPr algn="ctr"/>
-          </a:p>
-        </p:txBody>
-      </p:sp>
-      <p:sp>
-        <p:nvSpPr>
-          <p:cNvPr id="6" name="Rounded Rectangle 5"/>
-          <p:cNvSpPr/>
-          <p:nvPr/>
-        </p:nvSpPr>
-        <p:spPr>
-          <a:xfrm>
-            <a:off x="594360" y="1490472"/>
-            <a:ext cx="438912" cy="438912"/>
-          </a:xfrm>
-          <a:prstGeom prst="roundRect">
-            <a:avLst>
-              <a:gd name="adj" fmla="val 12000"/>
-            </a:avLst>
-          </a:prstGeom>
-          <a:solidFill>
-            <a:srgbClr val="095292"/>
-          </a:solidFill>
-          <a:ln>
-            <a:noFill/>
-          </a:ln>
-        </p:spPr>
-        <p:style>
-          <a:lnRef idx="1">
-            <a:schemeClr val="accent1"/>
-          </a:lnRef>
-          <a:fillRef idx="3">
-            <a:schemeClr val="accent1"/>
-          </a:fillRef>
-          <a:effectRef idx="2">
-            <a:schemeClr val="accent1"/>
-          </a:effectRef>
-          <a:fontRef idx="minor">
-            <a:schemeClr val="lt1"/>
-          </a:fontRef>
-        </p:style>
-        <p:txBody>
-          <a:bodyPr rtlCol="0" anchor="ctr"/>
-          <a:lstStyle/>
-          <a:p>
-            <a:pPr algn="ctr"/>
-          </a:p>
-        </p:txBody>
-      </p:sp>
-      <p:sp>
-        <p:nvSpPr>
-          <p:cNvPr id="7" name="TextBox 6"/>
+              <a:t>Las preguntas del jurado son casi siempre las mismas y se pueden...</a:t>
+            </a:r>
+          </a:p>
+        </p:txBody>
+      </p:sp>
+      <p:sp>
+        <p:nvSpPr>
+          <p:cNvPr id="5" name="TextBox 4"/>
           <p:cNvSpPr txBox="1"/>
           <p:nvPr/>
         </p:nvSpPr>
         <p:spPr>
           <a:xfrm>
-            <a:off x="594360" y="1490472"/>
-            <a:ext cx="438912" cy="438912"/>
+            <a:off x="457200" y="1170432"/>
+            <a:ext cx="11277295" cy="5230368"/>
           </a:xfrm>
           <a:prstGeom prst="rect">
             <a:avLst/>
@@ -8469,677 +10713,111 @@
           <a:noFill/>
         </p:spPr>
         <p:txBody>
-          <a:bodyPr wrap="square" anchor="ctr"/>
-          <a:lstStyle/>
-          <a:p>
-            <a:pPr algn="ctr"/>
-            <a:r>
-              <a:rPr sz="1600" b="1" i="0">
-                <a:solidFill>
-                  <a:srgbClr val="FFFFFF"/>
-                </a:solidFill>
-                <a:latin typeface="Calibri"/>
-              </a:rPr>
-              <a:t>1</a:t>
-            </a:r>
-          </a:p>
-        </p:txBody>
-      </p:sp>
-      <p:sp>
-        <p:nvSpPr>
-          <p:cNvPr id="8" name="TextBox 7"/>
-          <p:cNvSpPr txBox="1"/>
-          <p:nvPr/>
-        </p:nvSpPr>
-        <p:spPr>
-          <a:xfrm>
-            <a:off x="1188720" y="1325880"/>
-            <a:ext cx="10271455" cy="786384"/>
-          </a:xfrm>
-          <a:prstGeom prst="rect">
-            <a:avLst/>
-          </a:prstGeom>
-          <a:noFill/>
-        </p:spPr>
-        <p:txBody>
-          <a:bodyPr wrap="square" anchor="ctr"/>
-          <a:lstStyle/>
-          <a:p>
-            <a:r>
-              <a:rPr sz="1400" b="1" i="0">
-                <a:solidFill>
-                  <a:srgbClr val="095292"/>
-                </a:solidFill>
-                <a:latin typeface="Calibri"/>
-              </a:rPr>
-              <a:t>Paso 1. Escriban el guion de la sustentacion en una tabla de cinco bloques con tres columnas: bloque, minutos planeados y evidencia exacta que se muestra en pantalla (si el docente autorizo equipo, agreguen una cuarta columna con el responsable); el total debe sumar entre 5 y 7 minutos, dejando margen, y la demo en vivo debe ocupar por lo menos la mitad.</a:t>
-            </a:r>
-          </a:p>
-        </p:txBody>
-      </p:sp>
-      <p:sp>
-        <p:nvSpPr>
-          <p:cNvPr id="9" name="Rounded Rectangle 8"/>
-          <p:cNvSpPr/>
-          <p:nvPr/>
-        </p:nvSpPr>
-        <p:spPr>
-          <a:xfrm>
-            <a:off x="457200" y="2276856"/>
-            <a:ext cx="11277295" cy="950976"/>
-          </a:xfrm>
-          <a:prstGeom prst="roundRect">
-            <a:avLst>
-              <a:gd name="adj" fmla="val 12000"/>
-            </a:avLst>
-          </a:prstGeom>
-          <a:solidFill>
-            <a:srgbClr val="E8F4FA"/>
-          </a:solidFill>
-          <a:ln>
-            <a:noFill/>
-          </a:ln>
-        </p:spPr>
-        <p:style>
-          <a:lnRef idx="1">
-            <a:schemeClr val="accent1"/>
-          </a:lnRef>
-          <a:fillRef idx="3">
-            <a:schemeClr val="accent1"/>
-          </a:fillRef>
-          <a:effectRef idx="2">
-            <a:schemeClr val="accent1"/>
-          </a:effectRef>
-          <a:fontRef idx="minor">
-            <a:schemeClr val="lt1"/>
-          </a:fontRef>
-        </p:style>
-        <p:txBody>
-          <a:bodyPr rtlCol="0" anchor="ctr"/>
-          <a:lstStyle/>
-          <a:p>
-            <a:pPr algn="ctr"/>
-          </a:p>
-        </p:txBody>
-      </p:sp>
-      <p:sp>
-        <p:nvSpPr>
-          <p:cNvPr id="10" name="Rounded Rectangle 9"/>
-          <p:cNvSpPr/>
-          <p:nvPr/>
-        </p:nvSpPr>
-        <p:spPr>
-          <a:xfrm>
-            <a:off x="594360" y="2532888"/>
-            <a:ext cx="438912" cy="438912"/>
-          </a:xfrm>
-          <a:prstGeom prst="roundRect">
-            <a:avLst>
-              <a:gd name="adj" fmla="val 12000"/>
-            </a:avLst>
-          </a:prstGeom>
-          <a:solidFill>
-            <a:srgbClr val="095292"/>
-          </a:solidFill>
-          <a:ln>
-            <a:noFill/>
-          </a:ln>
-        </p:spPr>
-        <p:style>
-          <a:lnRef idx="1">
-            <a:schemeClr val="accent1"/>
-          </a:lnRef>
-          <a:fillRef idx="3">
-            <a:schemeClr val="accent1"/>
-          </a:fillRef>
-          <a:effectRef idx="2">
-            <a:schemeClr val="accent1"/>
-          </a:effectRef>
-          <a:fontRef idx="minor">
-            <a:schemeClr val="lt1"/>
-          </a:fontRef>
-        </p:style>
-        <p:txBody>
-          <a:bodyPr rtlCol="0" anchor="ctr"/>
-          <a:lstStyle/>
-          <a:p>
-            <a:pPr algn="ctr"/>
-          </a:p>
-        </p:txBody>
-      </p:sp>
-      <p:sp>
-        <p:nvSpPr>
-          <p:cNvPr id="11" name="TextBox 10"/>
-          <p:cNvSpPr txBox="1"/>
-          <p:nvPr/>
-        </p:nvSpPr>
-        <p:spPr>
-          <a:xfrm>
-            <a:off x="594360" y="2532888"/>
-            <a:ext cx="438912" cy="438912"/>
-          </a:xfrm>
-          <a:prstGeom prst="rect">
-            <a:avLst/>
-          </a:prstGeom>
-          <a:noFill/>
-        </p:spPr>
-        <p:txBody>
-          <a:bodyPr wrap="square" anchor="ctr"/>
-          <a:lstStyle/>
-          <a:p>
-            <a:pPr algn="ctr"/>
-            <a:r>
-              <a:rPr sz="1600" b="1" i="0">
-                <a:solidFill>
-                  <a:srgbClr val="FFFFFF"/>
-                </a:solidFill>
-                <a:latin typeface="Calibri"/>
-              </a:rPr>
-              <a:t>2</a:t>
-            </a:r>
-          </a:p>
-        </p:txBody>
-      </p:sp>
-      <p:sp>
-        <p:nvSpPr>
-          <p:cNvPr id="12" name="TextBox 11"/>
-          <p:cNvSpPr txBox="1"/>
-          <p:nvPr/>
-        </p:nvSpPr>
-        <p:spPr>
-          <a:xfrm>
-            <a:off x="1188720" y="2368296"/>
-            <a:ext cx="10271455" cy="786384"/>
-          </a:xfrm>
-          <a:prstGeom prst="rect">
-            <a:avLst/>
-          </a:prstGeom>
-          <a:noFill/>
-        </p:spPr>
-        <p:txBody>
-          <a:bodyPr wrap="square" anchor="ctr"/>
-          <a:lstStyle/>
-          <a:p>
-            <a:r>
-              <a:rPr sz="1500" b="1" i="0">
-                <a:solidFill>
-                  <a:srgbClr val="095292"/>
-                </a:solidFill>
-                <a:latin typeface="Calibri"/>
-              </a:rPr>
-              <a:t>Paso 2. Ejecuten el sembrador de datos de demostracion para dejar datos_demo con duenos.csv, mascotas.csv y citas.csv, y corran el chequeo pre-vuelo hasta que las tres lineas salgan en [OK] con filas mayores que cero.</a:t>
-            </a:r>
-          </a:p>
-        </p:txBody>
-      </p:sp>
-      <p:sp>
-        <p:nvSpPr>
-          <p:cNvPr id="13" name="Rounded Rectangle 12"/>
-          <p:cNvSpPr/>
-          <p:nvPr/>
-        </p:nvSpPr>
-        <p:spPr>
-          <a:xfrm>
-            <a:off x="457200" y="3319272"/>
-            <a:ext cx="11277295" cy="950976"/>
-          </a:xfrm>
-          <a:prstGeom prst="roundRect">
-            <a:avLst>
-              <a:gd name="adj" fmla="val 12000"/>
-            </a:avLst>
-          </a:prstGeom>
-          <a:solidFill>
-            <a:srgbClr val="F2F2F2"/>
-          </a:solidFill>
-          <a:ln>
-            <a:noFill/>
-          </a:ln>
-        </p:spPr>
-        <p:style>
-          <a:lnRef idx="1">
-            <a:schemeClr val="accent1"/>
-          </a:lnRef>
-          <a:fillRef idx="3">
-            <a:schemeClr val="accent1"/>
-          </a:fillRef>
-          <a:effectRef idx="2">
-            <a:schemeClr val="accent1"/>
-          </a:effectRef>
-          <a:fontRef idx="minor">
-            <a:schemeClr val="lt1"/>
-          </a:fontRef>
-        </p:style>
-        <p:txBody>
-          <a:bodyPr rtlCol="0" anchor="ctr"/>
-          <a:lstStyle/>
-          <a:p>
-            <a:pPr algn="ctr"/>
-          </a:p>
-        </p:txBody>
-      </p:sp>
-      <p:sp>
-        <p:nvSpPr>
-          <p:cNvPr id="14" name="Rounded Rectangle 13"/>
-          <p:cNvSpPr/>
-          <p:nvPr/>
-        </p:nvSpPr>
-        <p:spPr>
-          <a:xfrm>
-            <a:off x="594360" y="3575304"/>
-            <a:ext cx="438912" cy="438912"/>
-          </a:xfrm>
-          <a:prstGeom prst="roundRect">
-            <a:avLst>
-              <a:gd name="adj" fmla="val 12000"/>
-            </a:avLst>
-          </a:prstGeom>
-          <a:solidFill>
-            <a:srgbClr val="095292"/>
-          </a:solidFill>
-          <a:ln>
-            <a:noFill/>
-          </a:ln>
-        </p:spPr>
-        <p:style>
-          <a:lnRef idx="1">
-            <a:schemeClr val="accent1"/>
-          </a:lnRef>
-          <a:fillRef idx="3">
-            <a:schemeClr val="accent1"/>
-          </a:fillRef>
-          <a:effectRef idx="2">
-            <a:schemeClr val="accent1"/>
-          </a:effectRef>
-          <a:fontRef idx="minor">
-            <a:schemeClr val="lt1"/>
-          </a:fontRef>
-        </p:style>
-        <p:txBody>
-          <a:bodyPr rtlCol="0" anchor="ctr"/>
-          <a:lstStyle/>
-          <a:p>
-            <a:pPr algn="ctr"/>
-          </a:p>
-        </p:txBody>
-      </p:sp>
-      <p:sp>
-        <p:nvSpPr>
-          <p:cNvPr id="15" name="TextBox 14"/>
-          <p:cNvSpPr txBox="1"/>
-          <p:nvPr/>
-        </p:nvSpPr>
-        <p:spPr>
-          <a:xfrm>
-            <a:off x="594360" y="3575304"/>
-            <a:ext cx="438912" cy="438912"/>
-          </a:xfrm>
-          <a:prstGeom prst="rect">
-            <a:avLst/>
-          </a:prstGeom>
-          <a:noFill/>
-        </p:spPr>
-        <p:txBody>
-          <a:bodyPr wrap="square" anchor="ctr"/>
-          <a:lstStyle/>
-          <a:p>
-            <a:pPr algn="ctr"/>
-            <a:r>
-              <a:rPr sz="1600" b="1" i="0">
-                <a:solidFill>
-                  <a:srgbClr val="FFFFFF"/>
-                </a:solidFill>
-                <a:latin typeface="Calibri"/>
-              </a:rPr>
-              <a:t>3</a:t>
-            </a:r>
-          </a:p>
-        </p:txBody>
-      </p:sp>
-      <p:sp>
-        <p:nvSpPr>
-          <p:cNvPr id="16" name="TextBox 15"/>
-          <p:cNvSpPr txBox="1"/>
-          <p:nvPr/>
-        </p:nvSpPr>
-        <p:spPr>
-          <a:xfrm>
-            <a:off x="1188720" y="3410712"/>
-            <a:ext cx="10271455" cy="786384"/>
-          </a:xfrm>
-          <a:prstGeom prst="rect">
-            <a:avLst/>
-          </a:prstGeom>
-          <a:noFill/>
-        </p:spPr>
-        <p:txBody>
-          <a:bodyPr wrap="square" anchor="ctr"/>
-          <a:lstStyle/>
-          <a:p>
-            <a:r>
-              <a:rPr sz="1400" b="1" i="0">
-                <a:solidFill>
-                  <a:srgbClr val="095292"/>
-                </a:solidFill>
-                <a:latin typeface="Calibri"/>
-              </a:rPr>
-              <a:t>Paso 3. Hagan el ensayo numero uno con el cronometro del programa: hablen cada bloque completo de pie y sin saltarse ninguno (si trabajan en equipo, cada integrante el suyo), y al final anoten tiempo real contra tiempo planeado de cada bloque en la planilla.</a:t>
-            </a:r>
-          </a:p>
-        </p:txBody>
-      </p:sp>
-      <p:sp>
-        <p:nvSpPr>
-          <p:cNvPr id="17" name="Rounded Rectangle 16"/>
-          <p:cNvSpPr/>
-          <p:nvPr/>
-        </p:nvSpPr>
-        <p:spPr>
-          <a:xfrm>
-            <a:off x="457200" y="4361688"/>
-            <a:ext cx="11277295" cy="950976"/>
-          </a:xfrm>
-          <a:prstGeom prst="roundRect">
-            <a:avLst>
-              <a:gd name="adj" fmla="val 12000"/>
-            </a:avLst>
-          </a:prstGeom>
-          <a:solidFill>
-            <a:srgbClr val="E8F4FA"/>
-          </a:solidFill>
-          <a:ln>
-            <a:noFill/>
-          </a:ln>
-        </p:spPr>
-        <p:style>
-          <a:lnRef idx="1">
-            <a:schemeClr val="accent1"/>
-          </a:lnRef>
-          <a:fillRef idx="3">
-            <a:schemeClr val="accent1"/>
-          </a:fillRef>
-          <a:effectRef idx="2">
-            <a:schemeClr val="accent1"/>
-          </a:effectRef>
-          <a:fontRef idx="minor">
-            <a:schemeClr val="lt1"/>
-          </a:fontRef>
-        </p:style>
-        <p:txBody>
-          <a:bodyPr rtlCol="0" anchor="ctr"/>
-          <a:lstStyle/>
-          <a:p>
-            <a:pPr algn="ctr"/>
-          </a:p>
-        </p:txBody>
-      </p:sp>
-      <p:sp>
-        <p:nvSpPr>
-          <p:cNvPr id="18" name="Rounded Rectangle 17"/>
-          <p:cNvSpPr/>
-          <p:nvPr/>
-        </p:nvSpPr>
-        <p:spPr>
-          <a:xfrm>
-            <a:off x="594360" y="4617720"/>
-            <a:ext cx="438912" cy="438912"/>
-          </a:xfrm>
-          <a:prstGeom prst="roundRect">
-            <a:avLst>
-              <a:gd name="adj" fmla="val 12000"/>
-            </a:avLst>
-          </a:prstGeom>
-          <a:solidFill>
-            <a:srgbClr val="095292"/>
-          </a:solidFill>
-          <a:ln>
-            <a:noFill/>
-          </a:ln>
-        </p:spPr>
-        <p:style>
-          <a:lnRef idx="1">
-            <a:schemeClr val="accent1"/>
-          </a:lnRef>
-          <a:fillRef idx="3">
-            <a:schemeClr val="accent1"/>
-          </a:fillRef>
-          <a:effectRef idx="2">
-            <a:schemeClr val="accent1"/>
-          </a:effectRef>
-          <a:fontRef idx="minor">
-            <a:schemeClr val="lt1"/>
-          </a:fontRef>
-        </p:style>
-        <p:txBody>
-          <a:bodyPr rtlCol="0" anchor="ctr"/>
-          <a:lstStyle/>
-          <a:p>
-            <a:pPr algn="ctr"/>
-          </a:p>
-        </p:txBody>
-      </p:sp>
-      <p:sp>
-        <p:nvSpPr>
-          <p:cNvPr id="19" name="TextBox 18"/>
-          <p:cNvSpPr txBox="1"/>
-          <p:nvPr/>
-        </p:nvSpPr>
-        <p:spPr>
-          <a:xfrm>
-            <a:off x="594360" y="4617720"/>
-            <a:ext cx="438912" cy="438912"/>
-          </a:xfrm>
-          <a:prstGeom prst="rect">
-            <a:avLst/>
-          </a:prstGeom>
-          <a:noFill/>
-        </p:spPr>
-        <p:txBody>
-          <a:bodyPr wrap="square" anchor="ctr"/>
-          <a:lstStyle/>
-          <a:p>
-            <a:pPr algn="ctr"/>
-            <a:r>
-              <a:rPr sz="1600" b="1" i="0">
-                <a:solidFill>
-                  <a:srgbClr val="FFFFFF"/>
-                </a:solidFill>
-                <a:latin typeface="Calibri"/>
-              </a:rPr>
-              <a:t>4</a:t>
-            </a:r>
-          </a:p>
-        </p:txBody>
-      </p:sp>
-      <p:sp>
-        <p:nvSpPr>
-          <p:cNvPr id="20" name="TextBox 19"/>
-          <p:cNvSpPr txBox="1"/>
-          <p:nvPr/>
-        </p:nvSpPr>
-        <p:spPr>
-          <a:xfrm>
-            <a:off x="1188720" y="4453128"/>
-            <a:ext cx="10271455" cy="786384"/>
-          </a:xfrm>
-          <a:prstGeom prst="rect">
-            <a:avLst/>
-          </a:prstGeom>
-          <a:noFill/>
-        </p:spPr>
-        <p:txBody>
-          <a:bodyPr wrap="square" anchor="ctr"/>
-          <a:lstStyle/>
-          <a:p>
-            <a:r>
-              <a:rPr sz="1400" b="1" i="0">
-                <a:solidFill>
-                  <a:srgbClr val="095292"/>
-                </a:solidFill>
-                <a:latin typeface="Calibri"/>
-              </a:rPr>
-              <a:t>Paso 4. Graben el plan B: un video de dos a tres minutos con la ruta feliz completa (registrar dueno, registrar mascota, agendar cita, buscar por ID, cerrar y volver a abrir mostrando que los datos siguen ahi) y exporten seis capturas de pantalla de esos mismos momentos.</a:t>
-            </a:r>
-          </a:p>
-        </p:txBody>
-      </p:sp>
-      <p:sp>
-        <p:nvSpPr>
-          <p:cNvPr id="21" name="Rounded Rectangle 20"/>
-          <p:cNvSpPr/>
-          <p:nvPr/>
-        </p:nvSpPr>
-        <p:spPr>
-          <a:xfrm>
-            <a:off x="457200" y="5404104"/>
-            <a:ext cx="11277295" cy="950976"/>
-          </a:xfrm>
-          <a:prstGeom prst="roundRect">
-            <a:avLst>
-              <a:gd name="adj" fmla="val 12000"/>
-            </a:avLst>
-          </a:prstGeom>
-          <a:solidFill>
-            <a:srgbClr val="F2F2F2"/>
-          </a:solidFill>
-          <a:ln>
-            <a:noFill/>
-          </a:ln>
-        </p:spPr>
-        <p:style>
-          <a:lnRef idx="1">
-            <a:schemeClr val="accent1"/>
-          </a:lnRef>
-          <a:fillRef idx="3">
-            <a:schemeClr val="accent1"/>
-          </a:fillRef>
-          <a:effectRef idx="2">
-            <a:schemeClr val="accent1"/>
-          </a:effectRef>
-          <a:fontRef idx="minor">
-            <a:schemeClr val="lt1"/>
-          </a:fontRef>
-        </p:style>
-        <p:txBody>
-          <a:bodyPr rtlCol="0" anchor="ctr"/>
-          <a:lstStyle/>
-          <a:p>
-            <a:pPr algn="ctr"/>
-          </a:p>
-        </p:txBody>
-      </p:sp>
-      <p:sp>
-        <p:nvSpPr>
-          <p:cNvPr id="22" name="Rounded Rectangle 21"/>
-          <p:cNvSpPr/>
-          <p:nvPr/>
-        </p:nvSpPr>
-        <p:spPr>
-          <a:xfrm>
-            <a:off x="594360" y="5660136"/>
-            <a:ext cx="438912" cy="438912"/>
-          </a:xfrm>
-          <a:prstGeom prst="roundRect">
-            <a:avLst>
-              <a:gd name="adj" fmla="val 12000"/>
-            </a:avLst>
-          </a:prstGeom>
-          <a:solidFill>
-            <a:srgbClr val="095292"/>
-          </a:solidFill>
-          <a:ln>
-            <a:noFill/>
-          </a:ln>
-        </p:spPr>
-        <p:style>
-          <a:lnRef idx="1">
-            <a:schemeClr val="accent1"/>
-          </a:lnRef>
-          <a:fillRef idx="3">
-            <a:schemeClr val="accent1"/>
-          </a:fillRef>
-          <a:effectRef idx="2">
-            <a:schemeClr val="accent1"/>
-          </a:effectRef>
-          <a:fontRef idx="minor">
-            <a:schemeClr val="lt1"/>
-          </a:fontRef>
-        </p:style>
-        <p:txBody>
-          <a:bodyPr rtlCol="0" anchor="ctr"/>
-          <a:lstStyle/>
-          <a:p>
-            <a:pPr algn="ctr"/>
-          </a:p>
-        </p:txBody>
-      </p:sp>
-      <p:sp>
-        <p:nvSpPr>
-          <p:cNvPr id="23" name="TextBox 22"/>
-          <p:cNvSpPr txBox="1"/>
-          <p:nvPr/>
-        </p:nvSpPr>
-        <p:spPr>
-          <a:xfrm>
-            <a:off x="594360" y="5660136"/>
-            <a:ext cx="438912" cy="438912"/>
-          </a:xfrm>
-          <a:prstGeom prst="rect">
-            <a:avLst/>
-          </a:prstGeom>
-          <a:noFill/>
-        </p:spPr>
-        <p:txBody>
-          <a:bodyPr wrap="square" anchor="ctr"/>
-          <a:lstStyle/>
-          <a:p>
-            <a:pPr algn="ctr"/>
-            <a:r>
-              <a:rPr sz="1600" b="1" i="0">
-                <a:solidFill>
-                  <a:srgbClr val="FFFFFF"/>
-                </a:solidFill>
-                <a:latin typeface="Calibri"/>
-              </a:rPr>
-              <a:t>5</a:t>
-            </a:r>
-          </a:p>
-        </p:txBody>
-      </p:sp>
-      <p:sp>
-        <p:nvSpPr>
-          <p:cNvPr id="24" name="TextBox 23"/>
-          <p:cNvSpPr txBox="1"/>
-          <p:nvPr/>
-        </p:nvSpPr>
-        <p:spPr>
-          <a:xfrm>
-            <a:off x="1188720" y="5495544"/>
-            <a:ext cx="10271455" cy="786384"/>
-          </a:xfrm>
-          <a:prstGeom prst="rect">
-            <a:avLst/>
-          </a:prstGeom>
-          <a:noFill/>
-        </p:spPr>
-        <p:txBody>
-          <a:bodyPr wrap="square" anchor="ctr"/>
-          <a:lstStyle/>
-          <a:p>
-            <a:r>
-              <a:rPr sz="1400" b="1" i="0">
-                <a:solidFill>
-                  <a:srgbClr val="095292"/>
-                </a:solidFill>
-                <a:latin typeface="Calibri"/>
-              </a:rPr>
-              <a:t>Paso 5. Intercambien con otro compañero (o con otro equipo, si el docente lo autorizo) una ronda de cinco preguntas de jurado, ajusten el guion con lo que fallo, hagan el ensayo numero dos y suban a la plataforma del curso el guion, la planilla de tiempos de los dos ensayos y el video de respaldo.</a:t>
-            </a:r>
-          </a:p>
-        </p:txBody>
-      </p:sp>
-      <p:sp>
-        <p:nvSpPr>
-          <p:cNvPr id="25" name="TextBox 24"/>
+          <a:bodyPr wrap="square">
+            <a:spAutoFit/>
+          </a:bodyPr>
+          <a:lstStyle/>
+          <a:p>
+            <a:pPr>
+              <a:spcAft>
+                <a:spcPts val="800"/>
+              </a:spcAft>
+            </a:pPr>
+            <a:r>
+              <a:rPr sz="2000" b="0" i="0">
+                <a:solidFill>
+                  <a:srgbClr val="333333"/>
+                </a:solidFill>
+                <a:latin typeface="Calibri"/>
+              </a:rPr>
+              <a:t>–   Las preguntas del jurado son casi siempre las mismas y se pueden preparar una por una.</a:t>
+            </a:r>
+          </a:p>
+          <a:p>
+            <a:pPr>
+              <a:spcAft>
+                <a:spcPts val="800"/>
+              </a:spcAft>
+            </a:pPr>
+            <a:r>
+              <a:rPr sz="2000" b="0" i="0">
+                <a:solidFill>
+                  <a:srgbClr val="333333"/>
+                </a:solidFill>
+                <a:latin typeface="Calibri"/>
+              </a:rPr>
+              <a:t>–   Donde esta la herencia y por que la usaron; por que ArrayList y no un arreglo fijo; que pasa si borro el archivo mascotas.csv; como controlan que alguien escriba texto donde va la edad; quien programo cada parte; que harian distinto si empezaran de nuevo.</a:t>
+            </a:r>
+          </a:p>
+          <a:p>
+            <a:pPr>
+              <a:spcAft>
+                <a:spcPts val="800"/>
+              </a:spcAft>
+            </a:pPr>
+            <a:r>
+              <a:rPr sz="2000" b="0" i="0">
+                <a:solidFill>
+                  <a:srgbClr val="333333"/>
+                </a:solidFill>
+                <a:latin typeface="Calibri"/>
+              </a:rPr>
+              <a:t>–   La forma de responder tiene tres reglas: responda con la aplicacion o el codigo en pantalla</a:t>
+            </a:r>
+          </a:p>
+          <a:p>
+            <a:pPr>
+              <a:spcAft>
+                <a:spcPts val="800"/>
+              </a:spcAft>
+            </a:pPr>
+            <a:r>
+              <a:rPr sz="2000" b="0" i="0">
+                <a:solidFill>
+                  <a:srgbClr val="333333"/>
+                </a:solidFill>
+                <a:latin typeface="Calibri"/>
+              </a:rPr>
+              <a:t>–   Porque mostrar vale mas que explicar; no se demore mas de treinta o cuarenta segundos por respuesta; y si no sabe, digalo con dignidad y proponga como lo averiguaria, que eso el jurado lo respeta mucho mas que un invento.</a:t>
+            </a:r>
+          </a:p>
+          <a:p>
+            <a:pPr>
+              <a:spcAft>
+                <a:spcPts val="800"/>
+              </a:spcAft>
+            </a:pPr>
+            <a:r>
+              <a:rPr sz="2000" b="0" i="0">
+                <a:solidFill>
+                  <a:srgbClr val="333333"/>
+                </a:solidFill>
+                <a:latin typeface="Calibri"/>
+              </a:rPr>
+              <a:t>–   Tambien conviene tener a la mano el archivo de cada respuesta ya abierto en una pestana del IDE (Dueno.java para la herencia</a:t>
+            </a:r>
+          </a:p>
+          <a:p>
+            <a:pPr>
+              <a:spcAft>
+                <a:spcPts val="800"/>
+              </a:spcAft>
+            </a:pPr>
+            <a:r>
+              <a:rPr sz="2000" b="0" i="0">
+                <a:solidFill>
+                  <a:srgbClr val="333333"/>
+                </a:solidFill>
+                <a:latin typeface="Calibri"/>
+              </a:rPr>
+              <a:t>–   Mascota.java para las validaciones, la clase de persistencia para el CSV), de modo que la respuesta sea abrir una pestana y no buscar en vivo.</a:t>
+            </a:r>
+          </a:p>
+        </p:txBody>
+      </p:sp>
+      <p:sp>
+        <p:nvSpPr>
+          <p:cNvPr id="6" name="TextBox 5"/>
           <p:cNvSpPr txBox="1"/>
           <p:nvPr/>
         </p:nvSpPr>

--- a/Programacion II/Clases/Clase 14 - Preparacion de la presentacion final/Presentacion.pptx
+++ b/Programacion II/Clases/Clase 14 - Preparacion de la presentacion final/Presentacion.pptx
@@ -11,32 +11,26 @@
     <p:sldId id="259" r:id="rId10"/>
     <p:sldId id="260" r:id="rId11"/>
     <p:sldId id="261" r:id="rId12"/>
-    <p:sldId id="262" r:id="rId13"/>
-    <p:sldId id="263" r:id="rId14"/>
-    <p:sldId id="264" r:id="rId15"/>
-    <p:sldId id="265" r:id="rId16"/>
-    <p:sldId id="266" r:id="rId17"/>
-    <p:sldId id="267" r:id="rId18"/>
-    <p:sldId id="268" r:id="rId19"/>
-    <p:sldId id="269" r:id="rId20"/>
-    <p:sldId id="270" r:id="rId21"/>
-    <p:sldId id="271" r:id="rId22"/>
-    <p:sldId id="272" r:id="rId23"/>
-    <p:sldId id="273" r:id="rId24"/>
-    <p:sldId id="274" r:id="rId25"/>
-    <p:sldId id="275" r:id="rId26"/>
-    <p:sldId id="276" r:id="rId27"/>
-    <p:sldId id="277" r:id="rId28"/>
-    <p:sldId id="278" r:id="rId29"/>
-    <p:sldId id="279" r:id="rId30"/>
-    <p:sldId id="280" r:id="rId31"/>
-    <p:sldId id="281" r:id="rId32"/>
-    <p:sldId id="282" r:id="rId33"/>
-    <p:sldId id="283" r:id="rId34"/>
-    <p:sldId id="284" r:id="rId35"/>
-    <p:sldId id="285" r:id="rId36"/>
-    <p:sldId id="286" r:id="rId37"/>
-    <p:sldId id="287" r:id="rId38"/>
+    <p:sldId id="262" r:id="rId14"/>
+    <p:sldId id="263" r:id="rId15"/>
+    <p:sldId id="264" r:id="rId16"/>
+    <p:sldId id="265" r:id="rId17"/>
+    <p:sldId id="266" r:id="rId18"/>
+    <p:sldId id="267" r:id="rId19"/>
+    <p:sldId id="268" r:id="rId20"/>
+    <p:sldId id="269" r:id="rId21"/>
+    <p:sldId id="270" r:id="rId22"/>
+    <p:sldId id="271" r:id="rId23"/>
+    <p:sldId id="272" r:id="rId24"/>
+    <p:sldId id="273" r:id="rId25"/>
+    <p:sldId id="274" r:id="rId26"/>
+    <p:sldId id="275" r:id="rId27"/>
+    <p:sldId id="276" r:id="rId28"/>
+    <p:sldId id="277" r:id="rId29"/>
+    <p:sldId id="278" r:id="rId30"/>
+    <p:sldId id="279" r:id="rId31"/>
+    <p:sldId id="280" r:id="rId32"/>
+    <p:sldId id="281" r:id="rId33"/>
   </p:sldIdLst>
   <p:sldSz cx="12191695" cy="6858000" type="screen4x3"/>
   <p:notesSz cx="6858000" cy="9144000"/>
@@ -136,6 +130,566 @@
     </a:lvl9pPr>
   </p:defaultTextStyle>
 </p:presentation>
+</file>
+
+<file path=ppt/notesMasters/notesMaster1.xml><?xml version="1.0" encoding="utf-8"?>
+<p:notesMaster xmlns:a="http://schemas.openxmlformats.org/drawingml/2006/main" xmlns:p="http://schemas.openxmlformats.org/presentationml/2006/main" xmlns:r="http://schemas.openxmlformats.org/officeDocument/2006/relationships">
+  <p:cSld>
+    <p:bg>
+      <p:bgRef idx="1001">
+        <a:schemeClr val="bg1"/>
+      </p:bgRef>
+    </p:bg>
+    <p:spTree>
+      <p:nvGrpSpPr>
+        <p:cNvPr id="1" name=""/>
+        <p:cNvGrpSpPr/>
+        <p:nvPr/>
+      </p:nvGrpSpPr>
+      <p:grpSpPr>
+        <a:xfrm>
+          <a:off x="0" y="0"/>
+          <a:ext cx="0" cy="0"/>
+          <a:chOff x="0" y="0"/>
+          <a:chExt cx="0" cy="0"/>
+        </a:xfrm>
+      </p:grpSpPr>
+      <p:sp>
+        <p:nvSpPr>
+          <p:cNvPr id="2" name="Header Placeholder 1"/>
+          <p:cNvSpPr>
+            <a:spLocks noGrp="1"/>
+          </p:cNvSpPr>
+          <p:nvPr>
+            <p:ph type="hdr" sz="quarter"/>
+          </p:nvPr>
+        </p:nvSpPr>
+        <p:spPr>
+          <a:xfrm>
+            <a:off x="0" y="0"/>
+            <a:ext cx="2971800" cy="457200"/>
+          </a:xfrm>
+          <a:prstGeom prst="rect">
+            <a:avLst/>
+          </a:prstGeom>
+        </p:spPr>
+        <p:txBody>
+          <a:bodyPr vert="horz" lIns="91440" tIns="45720" rIns="91440" bIns="45720" rtlCol="0"/>
+          <a:lstStyle>
+            <a:lvl1pPr algn="l">
+              <a:defRPr sz="1200"/>
+            </a:lvl1pPr>
+          </a:lstStyle>
+          <a:p>
+            <a:endParaRPr lang="en-US"/>
+          </a:p>
+        </p:txBody>
+      </p:sp>
+      <p:sp>
+        <p:nvSpPr>
+          <p:cNvPr id="3" name="Date Placeholder 2"/>
+          <p:cNvSpPr>
+            <a:spLocks noGrp="1"/>
+          </p:cNvSpPr>
+          <p:nvPr>
+            <p:ph type="dt" idx="1"/>
+          </p:nvPr>
+        </p:nvSpPr>
+        <p:spPr>
+          <a:xfrm>
+            <a:off x="3884613" y="0"/>
+            <a:ext cx="2971800" cy="457200"/>
+          </a:xfrm>
+          <a:prstGeom prst="rect">
+            <a:avLst/>
+          </a:prstGeom>
+        </p:spPr>
+        <p:txBody>
+          <a:bodyPr vert="horz" lIns="91440" tIns="45720" rIns="91440" bIns="45720" rtlCol="0"/>
+          <a:lstStyle>
+            <a:lvl1pPr algn="r">
+              <a:defRPr sz="1200"/>
+            </a:lvl1pPr>
+          </a:lstStyle>
+          <a:p>
+            <a:fld id="{0F89C1C7-3DCD-1040-A9CF-14679D8B5DDD}" type="datetimeFigureOut">
+              <a:rPr lang="en-US" smtClean="0"/>
+              <a:t>10/17/16</a:t>
+            </a:fld>
+            <a:endParaRPr lang="en-US"/>
+          </a:p>
+        </p:txBody>
+      </p:sp>
+      <p:sp>
+        <p:nvSpPr>
+          <p:cNvPr id="4" name="Slide Image Placeholder 3"/>
+          <p:cNvSpPr>
+            <a:spLocks noGrp="1" noRot="1" noChangeAspect="1"/>
+          </p:cNvSpPr>
+          <p:nvPr>
+            <p:ph type="sldImg" idx="2"/>
+          </p:nvPr>
+        </p:nvSpPr>
+        <p:spPr>
+          <a:xfrm>
+            <a:off x="1143000" y="685800"/>
+            <a:ext cx="4572000" cy="3429000"/>
+          </a:xfrm>
+          <a:prstGeom prst="rect">
+            <a:avLst/>
+          </a:prstGeom>
+          <a:noFill/>
+          <a:ln w="12700">
+            <a:solidFill>
+              <a:prstClr val="black"/>
+            </a:solidFill>
+          </a:ln>
+        </p:spPr>
+        <p:txBody>
+          <a:bodyPr vert="horz" lIns="91440" tIns="45720" rIns="91440" bIns="45720" rtlCol="0" anchor="ctr"/>
+          <a:lstStyle/>
+          <a:p>
+            <a:endParaRPr lang="en-US"/>
+          </a:p>
+        </p:txBody>
+      </p:sp>
+      <p:sp>
+        <p:nvSpPr>
+          <p:cNvPr id="5" name="Notes Placeholder 4"/>
+          <p:cNvSpPr>
+            <a:spLocks noGrp="1"/>
+          </p:cNvSpPr>
+          <p:nvPr>
+            <p:ph type="body" sz="quarter" idx="3"/>
+          </p:nvPr>
+        </p:nvSpPr>
+        <p:spPr>
+          <a:xfrm>
+            <a:off x="685800" y="4343400"/>
+            <a:ext cx="5486400" cy="4114800"/>
+          </a:xfrm>
+          <a:prstGeom prst="rect">
+            <a:avLst/>
+          </a:prstGeom>
+        </p:spPr>
+        <p:txBody>
+          <a:bodyPr vert="horz" lIns="91440" tIns="45720" rIns="91440" bIns="45720" rtlCol="0"/>
+          <a:lstStyle/>
+          <a:p>
+            <a:pPr lvl="0"/>
+            <a:r>
+              <a:rPr lang="en-US" smtClean="0"/>
+              <a:t>Click to edit Master text styles</a:t>
+            </a:r>
+          </a:p>
+          <a:p>
+            <a:pPr lvl="1"/>
+            <a:r>
+              <a:rPr lang="en-US" smtClean="0"/>
+              <a:t>Second level</a:t>
+            </a:r>
+          </a:p>
+          <a:p>
+            <a:pPr lvl="2"/>
+            <a:r>
+              <a:rPr lang="en-US" smtClean="0"/>
+              <a:t>Third level</a:t>
+            </a:r>
+          </a:p>
+          <a:p>
+            <a:pPr lvl="3"/>
+            <a:r>
+              <a:rPr lang="en-US" smtClean="0"/>
+              <a:t>Fourth level</a:t>
+            </a:r>
+          </a:p>
+          <a:p>
+            <a:pPr lvl="4"/>
+            <a:r>
+              <a:rPr lang="en-US" smtClean="0"/>
+              <a:t>Fifth level</a:t>
+            </a:r>
+            <a:endParaRPr lang="en-US"/>
+          </a:p>
+        </p:txBody>
+      </p:sp>
+      <p:sp>
+        <p:nvSpPr>
+          <p:cNvPr id="6" name="Footer Placeholder 5"/>
+          <p:cNvSpPr>
+            <a:spLocks noGrp="1"/>
+          </p:cNvSpPr>
+          <p:nvPr>
+            <p:ph type="ftr" sz="quarter" idx="4"/>
+          </p:nvPr>
+        </p:nvSpPr>
+        <p:spPr>
+          <a:xfrm>
+            <a:off x="0" y="8685213"/>
+            <a:ext cx="2971800" cy="457200"/>
+          </a:xfrm>
+          <a:prstGeom prst="rect">
+            <a:avLst/>
+          </a:prstGeom>
+        </p:spPr>
+        <p:txBody>
+          <a:bodyPr vert="horz" lIns="91440" tIns="45720" rIns="91440" bIns="45720" rtlCol="0" anchor="b"/>
+          <a:lstStyle>
+            <a:lvl1pPr algn="l">
+              <a:defRPr sz="1200"/>
+            </a:lvl1pPr>
+          </a:lstStyle>
+          <a:p>
+            <a:endParaRPr lang="en-US"/>
+          </a:p>
+        </p:txBody>
+      </p:sp>
+      <p:sp>
+        <p:nvSpPr>
+          <p:cNvPr id="7" name="Slide Number Placeholder 6"/>
+          <p:cNvSpPr>
+            <a:spLocks noGrp="1"/>
+          </p:cNvSpPr>
+          <p:nvPr>
+            <p:ph type="sldNum" sz="quarter" idx="5"/>
+          </p:nvPr>
+        </p:nvSpPr>
+        <p:spPr>
+          <a:xfrm>
+            <a:off x="3884613" y="8685213"/>
+            <a:ext cx="2971800" cy="457200"/>
+          </a:xfrm>
+          <a:prstGeom prst="rect">
+            <a:avLst/>
+          </a:prstGeom>
+        </p:spPr>
+        <p:txBody>
+          <a:bodyPr vert="horz" lIns="91440" tIns="45720" rIns="91440" bIns="45720" rtlCol="0" anchor="b"/>
+          <a:lstStyle>
+            <a:lvl1pPr algn="r">
+              <a:defRPr sz="1200"/>
+            </a:lvl1pPr>
+          </a:lstStyle>
+          <a:p>
+            <a:fld id="{BB5E49A5-4136-284D-997B-48E1D791AD67}" type="slidenum">
+              <a:rPr lang="en-US" smtClean="0"/>
+              <a:t>‹#›</a:t>
+            </a:fld>
+            <a:endParaRPr lang="en-US"/>
+          </a:p>
+        </p:txBody>
+      </p:sp>
+    </p:spTree>
+    <p:extLst>
+      <p:ext uri="{BB962C8B-B14F-4D97-AF65-F5344CB8AC3E}">
+        <p14:creationId xmlns:p14="http://schemas.microsoft.com/office/powerpoint/2010/main" val="2623252185"/>
+      </p:ext>
+    </p:extLst>
+  </p:cSld>
+  <p:clrMap bg1="lt1" tx1="dk1" bg2="lt2" tx2="dk2" accent1="accent1" accent2="accent2" accent3="accent3" accent4="accent4" accent5="accent5" accent6="accent6" hlink="hlink" folHlink="folHlink"/>
+  <p:notesStyle>
+    <a:lvl1pPr marL="0" algn="l" defTabSz="457200" rtl="0" eaLnBrk="1" latinLnBrk="0" hangingPunct="1">
+      <a:defRPr sz="1200" kern="1200">
+        <a:solidFill>
+          <a:schemeClr val="tx1"/>
+        </a:solidFill>
+        <a:latin typeface="+mn-lt"/>
+        <a:ea typeface="+mn-ea"/>
+        <a:cs typeface="+mn-cs"/>
+      </a:defRPr>
+    </a:lvl1pPr>
+    <a:lvl2pPr marL="457200" algn="l" defTabSz="457200" rtl="0" eaLnBrk="1" latinLnBrk="0" hangingPunct="1">
+      <a:defRPr sz="1200" kern="1200">
+        <a:solidFill>
+          <a:schemeClr val="tx1"/>
+        </a:solidFill>
+        <a:latin typeface="+mn-lt"/>
+        <a:ea typeface="+mn-ea"/>
+        <a:cs typeface="+mn-cs"/>
+      </a:defRPr>
+    </a:lvl2pPr>
+    <a:lvl3pPr marL="914400" algn="l" defTabSz="457200" rtl="0" eaLnBrk="1" latinLnBrk="0" hangingPunct="1">
+      <a:defRPr sz="1200" kern="1200">
+        <a:solidFill>
+          <a:schemeClr val="tx1"/>
+        </a:solidFill>
+        <a:latin typeface="+mn-lt"/>
+        <a:ea typeface="+mn-ea"/>
+        <a:cs typeface="+mn-cs"/>
+      </a:defRPr>
+    </a:lvl3pPr>
+    <a:lvl4pPr marL="1371600" algn="l" defTabSz="457200" rtl="0" eaLnBrk="1" latinLnBrk="0" hangingPunct="1">
+      <a:defRPr sz="1200" kern="1200">
+        <a:solidFill>
+          <a:schemeClr val="tx1"/>
+        </a:solidFill>
+        <a:latin typeface="+mn-lt"/>
+        <a:ea typeface="+mn-ea"/>
+        <a:cs typeface="+mn-cs"/>
+      </a:defRPr>
+    </a:lvl4pPr>
+    <a:lvl5pPr marL="1828800" algn="l" defTabSz="457200" rtl="0" eaLnBrk="1" latinLnBrk="0" hangingPunct="1">
+      <a:defRPr sz="1200" kern="1200">
+        <a:solidFill>
+          <a:schemeClr val="tx1"/>
+        </a:solidFill>
+        <a:latin typeface="+mn-lt"/>
+        <a:ea typeface="+mn-ea"/>
+        <a:cs typeface="+mn-cs"/>
+      </a:defRPr>
+    </a:lvl5pPr>
+    <a:lvl6pPr marL="2286000" algn="l" defTabSz="457200" rtl="0" eaLnBrk="1" latinLnBrk="0" hangingPunct="1">
+      <a:defRPr sz="1200" kern="1200">
+        <a:solidFill>
+          <a:schemeClr val="tx1"/>
+        </a:solidFill>
+        <a:latin typeface="+mn-lt"/>
+        <a:ea typeface="+mn-ea"/>
+        <a:cs typeface="+mn-cs"/>
+      </a:defRPr>
+    </a:lvl6pPr>
+    <a:lvl7pPr marL="2743200" algn="l" defTabSz="457200" rtl="0" eaLnBrk="1" latinLnBrk="0" hangingPunct="1">
+      <a:defRPr sz="1200" kern="1200">
+        <a:solidFill>
+          <a:schemeClr val="tx1"/>
+        </a:solidFill>
+        <a:latin typeface="+mn-lt"/>
+        <a:ea typeface="+mn-ea"/>
+        <a:cs typeface="+mn-cs"/>
+      </a:defRPr>
+    </a:lvl7pPr>
+    <a:lvl8pPr marL="3200400" algn="l" defTabSz="457200" rtl="0" eaLnBrk="1" latinLnBrk="0" hangingPunct="1">
+      <a:defRPr sz="1200" kern="1200">
+        <a:solidFill>
+          <a:schemeClr val="tx1"/>
+        </a:solidFill>
+        <a:latin typeface="+mn-lt"/>
+        <a:ea typeface="+mn-ea"/>
+        <a:cs typeface="+mn-cs"/>
+      </a:defRPr>
+    </a:lvl8pPr>
+    <a:lvl9pPr marL="3657600" algn="l" defTabSz="457200" rtl="0" eaLnBrk="1" latinLnBrk="0" hangingPunct="1">
+      <a:defRPr sz="1200" kern="1200">
+        <a:solidFill>
+          <a:schemeClr val="tx1"/>
+        </a:solidFill>
+        <a:latin typeface="+mn-lt"/>
+        <a:ea typeface="+mn-ea"/>
+        <a:cs typeface="+mn-cs"/>
+      </a:defRPr>
+    </a:lvl9pPr>
+  </p:notesStyle>
+</p:notesMaster>
+</file>
+
+<file path=ppt/notesSlides/notesSlide1.xml><?xml version="1.0" encoding="utf-8"?>
+<p:notes xmlns:a="http://schemas.openxmlformats.org/drawingml/2006/main" xmlns:p="http://schemas.openxmlformats.org/presentationml/2006/main" xmlns:r="http://schemas.openxmlformats.org/officeDocument/2006/relationships">
+  <p:cSld>
+    <p:spTree>
+      <p:nvGrpSpPr>
+        <p:cNvPr id="1" name=""/>
+        <p:cNvGrpSpPr/>
+        <p:nvPr/>
+      </p:nvGrpSpPr>
+      <p:grpSpPr>
+        <a:xfrm>
+          <a:off x="0" y="0"/>
+          <a:ext cx="0" cy="0"/>
+          <a:chOff x="0" y="0"/>
+          <a:chExt cx="0" cy="0"/>
+        </a:xfrm>
+      </p:grpSpPr>
+      <p:sp>
+        <p:nvSpPr>
+          <p:cNvPr id="2" name="Slide Image Placeholder 1"/>
+          <p:cNvSpPr>
+            <a:spLocks noGrp="1"/>
+          </p:cNvSpPr>
+          <p:nvPr>
+            <p:ph type="sldImg" idx="2"/>
+          </p:nvPr>
+        </p:nvSpPr>
+        <p:spPr/>
+      </p:sp>
+      <p:sp>
+        <p:nvSpPr>
+          <p:cNvPr id="3" name="Notes Placeholder 2"/>
+          <p:cNvSpPr>
+            <a:spLocks noGrp="1"/>
+          </p:cNvSpPr>
+          <p:nvPr>
+            <p:ph type="body" idx="3" sz="quarter"/>
+          </p:nvPr>
+        </p:nvSpPr>
+        <p:spPr/>
+        <p:txBody>
+          <a:bodyPr/>
+          <a:lstStyle/>
+          <a:p>
+            <a:r>
+              <a:t>Un guion escrito, con minutos y evidencia por bloque (y el nombre del responsable si hay equipo), convierte una exposicion nerviosa en algo que se puede ensayar y medir; en VetCare ese guion tiene cinco bloques y suma siete minutos, con cuatro dedicados a la demo.</a:t>
+            </a:r>
+          </a:p>
+        </p:txBody>
+      </p:sp>
+      <p:sp>
+        <p:nvSpPr>
+          <p:cNvPr id="4" name="Slide Number Placeholder 3"/>
+          <p:cNvSpPr>
+            <a:spLocks noGrp="1"/>
+          </p:cNvSpPr>
+          <p:nvPr>
+            <p:ph type="sldNum" idx="5" sz="quarter"/>
+          </p:nvPr>
+        </p:nvSpPr>
+        <p:spPr/>
+      </p:sp>
+    </p:spTree>
+  </p:cSld>
+  <p:clrMapOvr>
+    <a:masterClrMapping/>
+  </p:clrMapOvr>
+</p:notes>
+</file>
+
+<file path=ppt/notesSlides/notesSlide2.xml><?xml version="1.0" encoding="utf-8"?>
+<p:notes xmlns:a="http://schemas.openxmlformats.org/drawingml/2006/main" xmlns:p="http://schemas.openxmlformats.org/presentationml/2006/main" xmlns:r="http://schemas.openxmlformats.org/officeDocument/2006/relationships">
+  <p:cSld>
+    <p:spTree>
+      <p:nvGrpSpPr>
+        <p:cNvPr id="1" name=""/>
+        <p:cNvGrpSpPr/>
+        <p:nvPr/>
+      </p:nvGrpSpPr>
+      <p:grpSpPr>
+        <a:xfrm>
+          <a:off x="0" y="0"/>
+          <a:ext cx="0" cy="0"/>
+          <a:chOff x="0" y="0"/>
+          <a:chExt cx="0" cy="0"/>
+        </a:xfrm>
+      </p:grpSpPr>
+      <p:sp>
+        <p:nvSpPr>
+          <p:cNvPr id="2" name="Slide Image Placeholder 1"/>
+          <p:cNvSpPr>
+            <a:spLocks noGrp="1"/>
+          </p:cNvSpPr>
+          <p:nvPr>
+            <p:ph type="sldImg" idx="2"/>
+          </p:nvPr>
+        </p:nvSpPr>
+        <p:spPr/>
+      </p:sp>
+      <p:sp>
+        <p:nvSpPr>
+          <p:cNvPr id="3" name="Notes Placeholder 2"/>
+          <p:cNvSpPr>
+            <a:spLocks noGrp="1"/>
+          </p:cNvSpPr>
+          <p:nvPr>
+            <p:ph type="body" idx="3" sz="quarter"/>
+          </p:nvPr>
+        </p:nvSpPr>
+        <p:spPr/>
+        <p:txBody>
+          <a:bodyPr/>
+          <a:lstStyle/>
+          <a:p>
+            <a:r>
+              <a:t>La demo en vivo no falla por mala suerte, falla por falta de preparacion, y se blinda con un chequeo previo que llamaremos pre-vuelo.</a:t>
+            </a:r>
+          </a:p>
+        </p:txBody>
+      </p:sp>
+      <p:sp>
+        <p:nvSpPr>
+          <p:cNvPr id="4" name="Slide Number Placeholder 3"/>
+          <p:cNvSpPr>
+            <a:spLocks noGrp="1"/>
+          </p:cNvSpPr>
+          <p:nvPr>
+            <p:ph type="sldNum" idx="5" sz="quarter"/>
+          </p:nvPr>
+        </p:nvSpPr>
+        <p:spPr/>
+      </p:sp>
+    </p:spTree>
+  </p:cSld>
+  <p:clrMapOvr>
+    <a:masterClrMapping/>
+  </p:clrMapOvr>
+</p:notes>
+</file>
+
+<file path=ppt/notesSlides/notesSlide3.xml><?xml version="1.0" encoding="utf-8"?>
+<p:notes xmlns:a="http://schemas.openxmlformats.org/drawingml/2006/main" xmlns:p="http://schemas.openxmlformats.org/presentationml/2006/main" xmlns:r="http://schemas.openxmlformats.org/officeDocument/2006/relationships">
+  <p:cSld>
+    <p:spTree>
+      <p:nvGrpSpPr>
+        <p:cNvPr id="1" name=""/>
+        <p:cNvGrpSpPr/>
+        <p:nvPr/>
+      </p:nvGrpSpPr>
+      <p:grpSpPr>
+        <a:xfrm>
+          <a:off x="0" y="0"/>
+          <a:ext cx="0" cy="0"/>
+          <a:chOff x="0" y="0"/>
+          <a:chExt cx="0" cy="0"/>
+        </a:xfrm>
+      </p:grpSpPr>
+      <p:sp>
+        <p:nvSpPr>
+          <p:cNvPr id="2" name="Slide Image Placeholder 1"/>
+          <p:cNvSpPr>
+            <a:spLocks noGrp="1"/>
+          </p:cNvSpPr>
+          <p:nvPr>
+            <p:ph type="sldImg" idx="2"/>
+          </p:nvPr>
+        </p:nvSpPr>
+        <p:spPr/>
+      </p:sp>
+      <p:sp>
+        <p:nvSpPr>
+          <p:cNvPr id="3" name="Notes Placeholder 2"/>
+          <p:cNvSpPr>
+            <a:spLocks noGrp="1"/>
+          </p:cNvSpPr>
+          <p:nvPr>
+            <p:ph type="body" idx="3" sz="quarter"/>
+          </p:nvPr>
+        </p:nvSpPr>
+        <p:spPr/>
+        <p:txBody>
+          <a:bodyPr/>
+          <a:lstStyle/>
+          <a:p>
+            <a:r>
+              <a:t>Por eso hoy ensayamos con reloj y anotamos el tiempo real de cada bloque frente al planeado, y se repite hasta que el total caiga entre cinco y ocho minutos con margen.</a:t>
+            </a:r>
+          </a:p>
+        </p:txBody>
+      </p:sp>
+      <p:sp>
+        <p:nvSpPr>
+          <p:cNvPr id="4" name="Slide Number Placeholder 3"/>
+          <p:cNvSpPr>
+            <a:spLocks noGrp="1"/>
+          </p:cNvSpPr>
+          <p:nvPr>
+            <p:ph type="sldNum" idx="5" sz="quarter"/>
+          </p:nvPr>
+        </p:nvSpPr>
+        <p:spPr/>
+      </p:sp>
+    </p:spTree>
+  </p:cSld>
+  <p:clrMapOvr>
+    <a:masterClrMapping/>
+  </p:clrMapOvr>
+</p:notes>
 </file>
 
 <file path=ppt/slideLayouts/slideLayout1.xml><?xml version="1.0" encoding="utf-8"?>
@@ -8378,7 +8932,7 @@
                 </a:solidFill>
                 <a:latin typeface="Calibri"/>
               </a:rPr>
-              <a:t>Encuadre de hoy · Objetivo del PI</a:t>
+              <a:t>Encuadre de hoy</a:t>
             </a:r>
           </a:p>
         </p:txBody>
@@ -8426,7 +8980,7 @@
                 </a:solidFill>
                 <a:latin typeface="Calibri"/>
               </a:rPr>
-              <a:t>Hoy avanzamos VetCare en:</a:t>
+              <a:t>Tema de hoy:</a:t>
             </a:r>
             <a:r>
               <a:rPr sz="2000" b="0" i="0">
@@ -8435,7 +8989,7 @@
                 </a:solidFill>
                 <a:latin typeface="Calibri"/>
               </a:rPr>
-              <a:t> VetCare queda con guion de sustentacion, juego de datos de demostracion sembrado y ensayo cronometrado dentro de la ventana de 5 a 8 minutos.</a:t>
+              <a:t> Preparacion de la presentacion final · Sustentacion de VetCare — Que mostrar, en que orden y como lograr que la demo no falle</a:t>
             </a:r>
           </a:p>
           <a:p>
@@ -8494,41 +9048,23 @@
                 </a:solidFill>
                 <a:latin typeface="Calibri"/>
               </a:rPr>
-              <a:t>–   </a:t>
-            </a:r>
-            <a:r>
-              <a:rPr sz="2000" b="1" i="0">
+              <a:t>–   Primero el concepto, despues el codigo que lo muestra y la demo en vivo.</a:t>
+            </a:r>
+          </a:p>
+          <a:p>
+            <a:pPr>
+              <a:spcAft>
+                <a:spcPts val="800"/>
+              </a:spcAft>
+            </a:pPr>
+            <a:r>
+              <a:rPr sz="2000" b="0" i="0">
                 <a:solidFill>
                   <a:srgbClr val="333333"/>
                 </a:solidFill>
                 <a:latin typeface="Calibri"/>
               </a:rPr>
-              <a:t>Entregable de hoy:</a:t>
-            </a:r>
-            <a:r>
-              <a:rPr sz="2000" b="0" i="0">
-                <a:solidFill>
-                  <a:srgbClr val="333333"/>
-                </a:solidFill>
-                <a:latin typeface="Calibri"/>
-              </a:rPr>
-              <a:t> Guion de sustentacion con bloques, minutos y evidencia que se muestra (mas el responsable nominal solo si el docente autorizo equipo), mas la planilla de tiempos de dos ensayos y el video de respaldo de la ruta feliz, subido a la plataforma del curso.</a:t>
-            </a:r>
-          </a:p>
-          <a:p>
-            <a:pPr>
-              <a:spcAft>
-                <a:spcPts val="800"/>
-              </a:spcAft>
-            </a:pPr>
-            <a:r>
-              <a:rPr sz="2000" b="0" i="0">
-                <a:solidFill>
-                  <a:srgbClr val="333333"/>
-                </a:solidFill>
-                <a:latin typeface="Calibri"/>
-              </a:rPr>
-              <a:t>–   La teoria esta al servicio del producto: al salir, VetCare avanzo.</a:t>
+              <a:t>–   Todo con el mismo dominio: la clinica veterinaria Huellitas (VetCare).</a:t>
             </a:r>
           </a:p>
         </p:txBody>
@@ -11705,1695 +12241,7 @@
         <p:spPr>
           <a:xfrm>
             <a:off x="0" y="0"/>
-            <a:ext cx="12191695" cy="960120"/>
-          </a:xfrm>
-          <a:prstGeom prst="rect">
-            <a:avLst/>
-          </a:prstGeom>
-          <a:solidFill>
-            <a:srgbClr val="095292"/>
-          </a:solidFill>
-          <a:ln>
-            <a:noFill/>
-          </a:ln>
-        </p:spPr>
-        <p:style>
-          <a:lnRef idx="1">
-            <a:schemeClr val="accent1"/>
-          </a:lnRef>
-          <a:fillRef idx="3">
-            <a:schemeClr val="accent1"/>
-          </a:fillRef>
-          <a:effectRef idx="2">
-            <a:schemeClr val="accent1"/>
-          </a:effectRef>
-          <a:fontRef idx="minor">
-            <a:schemeClr val="lt1"/>
-          </a:fontRef>
-        </p:style>
-        <p:txBody>
-          <a:bodyPr rtlCol="0" anchor="ctr"/>
-          <a:lstStyle/>
-          <a:p>
-            <a:pPr algn="ctr"/>
-          </a:p>
-        </p:txBody>
-      </p:sp>
-      <p:sp>
-        <p:nvSpPr>
-          <p:cNvPr id="3" name="Rectangle 2"/>
-          <p:cNvSpPr/>
-          <p:nvPr/>
-        </p:nvSpPr>
-        <p:spPr>
-          <a:xfrm>
-            <a:off x="0" y="960120"/>
-            <a:ext cx="12191695" cy="41148"/>
-          </a:xfrm>
-          <a:prstGeom prst="rect">
-            <a:avLst/>
-          </a:prstGeom>
-          <a:solidFill>
-            <a:srgbClr val="FFD000"/>
-          </a:solidFill>
-          <a:ln>
-            <a:noFill/>
-          </a:ln>
-        </p:spPr>
-        <p:style>
-          <a:lnRef idx="1">
-            <a:schemeClr val="accent1"/>
-          </a:lnRef>
-          <a:fillRef idx="3">
-            <a:schemeClr val="accent1"/>
-          </a:fillRef>
-          <a:effectRef idx="2">
-            <a:schemeClr val="accent1"/>
-          </a:effectRef>
-          <a:fontRef idx="minor">
-            <a:schemeClr val="lt1"/>
-          </a:fontRef>
-        </p:style>
-        <p:txBody>
-          <a:bodyPr rtlCol="0" anchor="ctr"/>
-          <a:lstStyle/>
-          <a:p>
-            <a:pPr algn="ctr"/>
-          </a:p>
-        </p:txBody>
-      </p:sp>
-      <p:sp>
-        <p:nvSpPr>
-          <p:cNvPr id="4" name="TextBox 3"/>
-          <p:cNvSpPr txBox="1"/>
-          <p:nvPr/>
-        </p:nvSpPr>
-        <p:spPr>
-          <a:xfrm>
-            <a:off x="457200" y="164592"/>
-            <a:ext cx="11277295" cy="502920"/>
-          </a:xfrm>
-          <a:prstGeom prst="rect">
-            <a:avLst/>
-          </a:prstGeom>
-          <a:noFill/>
-        </p:spPr>
-        <p:txBody>
-          <a:bodyPr wrap="square">
-            <a:spAutoFit/>
-          </a:bodyPr>
-          <a:lstStyle/>
-          <a:p>
-            <a:r>
-              <a:rPr sz="2600" b="1" i="0">
-                <a:solidFill>
-                  <a:srgbClr val="FFFFFF"/>
-                </a:solidFill>
-                <a:latin typeface="Calibri"/>
-              </a:rPr>
-              <a:t>Taller PI — por que importa</a:t>
-            </a:r>
-          </a:p>
-        </p:txBody>
-      </p:sp>
-      <p:sp>
-        <p:nvSpPr>
-          <p:cNvPr id="5" name="TextBox 4"/>
-          <p:cNvSpPr txBox="1"/>
-          <p:nvPr/>
-        </p:nvSpPr>
-        <p:spPr>
-          <a:xfrm>
-            <a:off x="457200" y="1170432"/>
-            <a:ext cx="11277295" cy="5230368"/>
-          </a:xfrm>
-          <a:prstGeom prst="rect">
-            <a:avLst/>
-          </a:prstGeom>
-          <a:noFill/>
-        </p:spPr>
-        <p:txBody>
-          <a:bodyPr wrap="square">
-            <a:spAutoFit/>
-          </a:bodyPr>
-          <a:lstStyle/>
-          <a:p>
-            <a:pPr>
-              <a:spcAft>
-                <a:spcPts val="800"/>
-              </a:spcAft>
-            </a:pPr>
-            <a:r>
-              <a:rPr sz="2000" b="0" i="0">
-                <a:solidFill>
-                  <a:srgbClr val="333333"/>
-                </a:solidFill>
-                <a:latin typeface="Calibri"/>
-              </a:rPr>
-              <a:t>–   </a:t>
-            </a:r>
-            <a:r>
-              <a:rPr sz="2000" b="1" i="0">
-                <a:solidFill>
-                  <a:srgbClr val="333333"/>
-                </a:solidFill>
-                <a:latin typeface="Calibri"/>
-              </a:rPr>
-              <a:t>Por que importa al PI:</a:t>
-            </a:r>
-            <a:r>
-              <a:rPr sz="2000" b="0" i="0">
-                <a:solidFill>
-                  <a:srgbClr val="333333"/>
-                </a:solidFill>
-                <a:latin typeface="Calibri"/>
-              </a:rPr>
-              <a:t> la nota del Proyecto Integrador no se define solo por el codigo sino por lo que el jurado alcance a ver en 5 a 8 minutos, y una demo que falla borra tres meses de trabajo bien hecho.</a:t>
-            </a:r>
-          </a:p>
-          <a:p>
-            <a:pPr>
-              <a:spcAft>
-                <a:spcPts val="800"/>
-              </a:spcAft>
-            </a:pPr>
-            <a:r>
-              <a:rPr sz="2000" b="0" i="0">
-                <a:solidFill>
-                  <a:srgbClr val="333333"/>
-                </a:solidFill>
-                <a:latin typeface="Calibri"/>
-              </a:rPr>
-              <a:t>–   VetCare ya cumple los requisitos tecnicos (POO, colecciones, interfaz grafica, manejo de errores y persistencia); hoy lo que se construye es la evidencia de que todo eso funciona junto y en vivo.</a:t>
-            </a:r>
-          </a:p>
-          <a:p>
-            <a:pPr>
-              <a:spcAft>
-                <a:spcPts val="800"/>
-              </a:spcAft>
-            </a:pPr>
-            <a:r>
-              <a:rPr sz="2000" b="0" i="0">
-                <a:solidFill>
-                  <a:srgbClr val="333333"/>
-                </a:solidFill>
-                <a:latin typeface="Calibri"/>
-              </a:rPr>
-              <a:t>–   El guion, los datos sembrados y el video de respaldo son artefactos reales del oficio: en la industria a esto se le llama preparar el demo day, y se hace exactamente igual.</a:t>
-            </a:r>
-          </a:p>
-        </p:txBody>
-      </p:sp>
-      <p:sp>
-        <p:nvSpPr>
-          <p:cNvPr id="6" name="TextBox 5"/>
-          <p:cNvSpPr txBox="1"/>
-          <p:nvPr/>
-        </p:nvSpPr>
-        <p:spPr>
-          <a:xfrm>
-            <a:off x="11185855" y="6473952"/>
-            <a:ext cx="640080" cy="274320"/>
-          </a:xfrm>
-          <a:prstGeom prst="rect">
-            <a:avLst/>
-          </a:prstGeom>
-          <a:noFill/>
-        </p:spPr>
-        <p:txBody>
-          <a:bodyPr wrap="square">
-            <a:spAutoFit/>
-          </a:bodyPr>
-          <a:lstStyle/>
-          <a:p>
-            <a:pPr algn="r"/>
-            <a:r>
-              <a:rPr sz="1100" b="0" i="0">
-                <a:solidFill>
-                  <a:srgbClr val="666666"/>
-                </a:solidFill>
-                <a:latin typeface="Calibri"/>
-              </a:rPr>
-              <a:t>26</a:t>
-            </a:r>
-          </a:p>
-        </p:txBody>
-      </p:sp>
-    </p:spTree>
-  </p:cSld>
-  <p:clrMapOvr>
-    <a:masterClrMapping/>
-  </p:clrMapOvr>
-</p:sld>
-</file>
-
-<file path=ppt/slides/slide27.xml><?xml version="1.0" encoding="utf-8"?>
-<p:sld xmlns:a="http://schemas.openxmlformats.org/drawingml/2006/main" xmlns:p="http://schemas.openxmlformats.org/presentationml/2006/main" xmlns:r="http://schemas.openxmlformats.org/officeDocument/2006/relationships">
-  <p:cSld>
-    <p:bg>
-      <p:bgPr>
-        <a:solidFill>
-          <a:srgbClr val="FFFFFF"/>
-        </a:solidFill>
-        <a:effectLst/>
-      </p:bgPr>
-    </p:bg>
-    <p:spTree>
-      <p:nvGrpSpPr>
-        <p:cNvPr id="1" name=""/>
-        <p:cNvGrpSpPr/>
-        <p:nvPr/>
-      </p:nvGrpSpPr>
-      <p:grpSpPr/>
-      <p:sp>
-        <p:nvSpPr>
-          <p:cNvPr id="2" name="Rectangle 1"/>
-          <p:cNvSpPr/>
-          <p:nvPr/>
-        </p:nvSpPr>
-        <p:spPr>
-          <a:xfrm>
-            <a:off x="0" y="0"/>
-            <a:ext cx="12191695" cy="960120"/>
-          </a:xfrm>
-          <a:prstGeom prst="rect">
-            <a:avLst/>
-          </a:prstGeom>
-          <a:solidFill>
-            <a:srgbClr val="095292"/>
-          </a:solidFill>
-          <a:ln>
-            <a:noFill/>
-          </a:ln>
-        </p:spPr>
-        <p:style>
-          <a:lnRef idx="1">
-            <a:schemeClr val="accent1"/>
-          </a:lnRef>
-          <a:fillRef idx="3">
-            <a:schemeClr val="accent1"/>
-          </a:fillRef>
-          <a:effectRef idx="2">
-            <a:schemeClr val="accent1"/>
-          </a:effectRef>
-          <a:fontRef idx="minor">
-            <a:schemeClr val="lt1"/>
-          </a:fontRef>
-        </p:style>
-        <p:txBody>
-          <a:bodyPr rtlCol="0" anchor="ctr"/>
-          <a:lstStyle/>
-          <a:p>
-            <a:pPr algn="ctr"/>
-          </a:p>
-        </p:txBody>
-      </p:sp>
-      <p:sp>
-        <p:nvSpPr>
-          <p:cNvPr id="3" name="Rectangle 2"/>
-          <p:cNvSpPr/>
-          <p:nvPr/>
-        </p:nvSpPr>
-        <p:spPr>
-          <a:xfrm>
-            <a:off x="0" y="960120"/>
-            <a:ext cx="12191695" cy="41148"/>
-          </a:xfrm>
-          <a:prstGeom prst="rect">
-            <a:avLst/>
-          </a:prstGeom>
-          <a:solidFill>
-            <a:srgbClr val="FFD000"/>
-          </a:solidFill>
-          <a:ln>
-            <a:noFill/>
-          </a:ln>
-        </p:spPr>
-        <p:style>
-          <a:lnRef idx="1">
-            <a:schemeClr val="accent1"/>
-          </a:lnRef>
-          <a:fillRef idx="3">
-            <a:schemeClr val="accent1"/>
-          </a:fillRef>
-          <a:effectRef idx="2">
-            <a:schemeClr val="accent1"/>
-          </a:effectRef>
-          <a:fontRef idx="minor">
-            <a:schemeClr val="lt1"/>
-          </a:fontRef>
-        </p:style>
-        <p:txBody>
-          <a:bodyPr rtlCol="0" anchor="ctr"/>
-          <a:lstStyle/>
-          <a:p>
-            <a:pPr algn="ctr"/>
-          </a:p>
-        </p:txBody>
-      </p:sp>
-      <p:sp>
-        <p:nvSpPr>
-          <p:cNvPr id="4" name="TextBox 3"/>
-          <p:cNvSpPr txBox="1"/>
-          <p:nvPr/>
-        </p:nvSpPr>
-        <p:spPr>
-          <a:xfrm>
-            <a:off x="457200" y="164592"/>
-            <a:ext cx="11277295" cy="502920"/>
-          </a:xfrm>
-          <a:prstGeom prst="rect">
-            <a:avLst/>
-          </a:prstGeom>
-          <a:noFill/>
-        </p:spPr>
-        <p:txBody>
-          <a:bodyPr wrap="square">
-            <a:spAutoFit/>
-          </a:bodyPr>
-          <a:lstStyle/>
-          <a:p>
-            <a:r>
-              <a:rPr sz="2600" b="1" i="0">
-                <a:solidFill>
-                  <a:srgbClr val="FFFFFF"/>
-                </a:solidFill>
-                <a:latin typeface="Calibri"/>
-              </a:rPr>
-              <a:t>Taller PI — punto de partida</a:t>
-            </a:r>
-          </a:p>
-        </p:txBody>
-      </p:sp>
-      <p:sp>
-        <p:nvSpPr>
-          <p:cNvPr id="5" name="TextBox 4"/>
-          <p:cNvSpPr txBox="1"/>
-          <p:nvPr/>
-        </p:nvSpPr>
-        <p:spPr>
-          <a:xfrm>
-            <a:off x="457200" y="1170432"/>
-            <a:ext cx="11277295" cy="5230368"/>
-          </a:xfrm>
-          <a:prstGeom prst="rect">
-            <a:avLst/>
-          </a:prstGeom>
-          <a:noFill/>
-        </p:spPr>
-        <p:txBody>
-          <a:bodyPr wrap="square">
-            <a:spAutoFit/>
-          </a:bodyPr>
-          <a:lstStyle/>
-          <a:p>
-            <a:pPr>
-              <a:spcAft>
-                <a:spcPts val="800"/>
-              </a:spcAft>
-            </a:pPr>
-            <a:r>
-              <a:rPr sz="2000" b="0" i="0">
-                <a:solidFill>
-                  <a:srgbClr val="333333"/>
-                </a:solidFill>
-                <a:latin typeface="Calibri"/>
-              </a:rPr>
-              <a:t>–   Cada estudiante llega con su VetCare compilando y corriendo, con las funciones de registrar dueno y mascota, agendar cita, buscar por ID y guardar en archivo ya terminadas.</a:t>
-            </a:r>
-          </a:p>
-          <a:p>
-            <a:pPr>
-              <a:spcAft>
-                <a:spcPts val="800"/>
-              </a:spcAft>
-            </a:pPr>
-            <a:r>
-              <a:rPr sz="2000" b="0" i="0">
-                <a:solidFill>
-                  <a:srgbClr val="333333"/>
-                </a:solidFill>
-                <a:latin typeface="Calibri"/>
-              </a:rPr>
-              <a:t>–   La carpeta datos del proyecto puede estar vacia o con basura de las pruebas de la clase pasada; el chequeo pre-vuelo debe detectarlo antes del primer ensayo.</a:t>
-            </a:r>
-          </a:p>
-          <a:p>
-            <a:pPr>
-              <a:spcAft>
-                <a:spcPts val="800"/>
-              </a:spcAft>
-            </a:pPr>
-            <a:r>
-              <a:rPr sz="2000" b="0" i="0">
-                <a:solidFill>
-                  <a:srgbClr val="333333"/>
-                </a:solidFill>
-                <a:latin typeface="Calibri"/>
-              </a:rPr>
-              <a:t>–   El salon tiene videobeam y un solo cable: cada proyecto dispone de 8 minutos de reloj y una unica oportunidad de conectar, igual que el dia de la sustentacion.</a:t>
-            </a:r>
-          </a:p>
-        </p:txBody>
-      </p:sp>
-      <p:sp>
-        <p:nvSpPr>
-          <p:cNvPr id="6" name="TextBox 5"/>
-          <p:cNvSpPr txBox="1"/>
-          <p:nvPr/>
-        </p:nvSpPr>
-        <p:spPr>
-          <a:xfrm>
-            <a:off x="11185855" y="6473952"/>
-            <a:ext cx="640080" cy="274320"/>
-          </a:xfrm>
-          <a:prstGeom prst="rect">
-            <a:avLst/>
-          </a:prstGeom>
-          <a:noFill/>
-        </p:spPr>
-        <p:txBody>
-          <a:bodyPr wrap="square">
-            <a:spAutoFit/>
-          </a:bodyPr>
-          <a:lstStyle/>
-          <a:p>
-            <a:pPr algn="r"/>
-            <a:r>
-              <a:rPr sz="1100" b="0" i="0">
-                <a:solidFill>
-                  <a:srgbClr val="666666"/>
-                </a:solidFill>
-                <a:latin typeface="Calibri"/>
-              </a:rPr>
-              <a:t>27</a:t>
-            </a:r>
-          </a:p>
-        </p:txBody>
-      </p:sp>
-    </p:spTree>
-  </p:cSld>
-  <p:clrMapOvr>
-    <a:masterClrMapping/>
-  </p:clrMapOvr>
-</p:sld>
-</file>
-
-<file path=ppt/slides/slide28.xml><?xml version="1.0" encoding="utf-8"?>
-<p:sld xmlns:a="http://schemas.openxmlformats.org/drawingml/2006/main" xmlns:p="http://schemas.openxmlformats.org/presentationml/2006/main" xmlns:r="http://schemas.openxmlformats.org/officeDocument/2006/relationships">
-  <p:cSld>
-    <p:bg>
-      <p:bgPr>
-        <a:solidFill>
-          <a:srgbClr val="FFFFFF"/>
-        </a:solidFill>
-        <a:effectLst/>
-      </p:bgPr>
-    </p:bg>
-    <p:spTree>
-      <p:nvGrpSpPr>
-        <p:cNvPr id="1" name=""/>
-        <p:cNvGrpSpPr/>
-        <p:nvPr/>
-      </p:nvGrpSpPr>
-      <p:grpSpPr/>
-      <p:sp>
-        <p:nvSpPr>
-          <p:cNvPr id="2" name="Rectangle 1"/>
-          <p:cNvSpPr/>
-          <p:nvPr/>
-        </p:nvSpPr>
-        <p:spPr>
-          <a:xfrm>
-            <a:off x="0" y="0"/>
-            <a:ext cx="12191695" cy="960120"/>
-          </a:xfrm>
-          <a:prstGeom prst="rect">
-            <a:avLst/>
-          </a:prstGeom>
-          <a:solidFill>
-            <a:srgbClr val="095292"/>
-          </a:solidFill>
-          <a:ln>
-            <a:noFill/>
-          </a:ln>
-        </p:spPr>
-        <p:style>
-          <a:lnRef idx="1">
-            <a:schemeClr val="accent1"/>
-          </a:lnRef>
-          <a:fillRef idx="3">
-            <a:schemeClr val="accent1"/>
-          </a:fillRef>
-          <a:effectRef idx="2">
-            <a:schemeClr val="accent1"/>
-          </a:effectRef>
-          <a:fontRef idx="minor">
-            <a:schemeClr val="lt1"/>
-          </a:fontRef>
-        </p:style>
-        <p:txBody>
-          <a:bodyPr rtlCol="0" anchor="ctr"/>
-          <a:lstStyle/>
-          <a:p>
-            <a:pPr algn="ctr"/>
-          </a:p>
-        </p:txBody>
-      </p:sp>
-      <p:sp>
-        <p:nvSpPr>
-          <p:cNvPr id="3" name="Rectangle 2"/>
-          <p:cNvSpPr/>
-          <p:nvPr/>
-        </p:nvSpPr>
-        <p:spPr>
-          <a:xfrm>
-            <a:off x="0" y="960120"/>
-            <a:ext cx="12191695" cy="41148"/>
-          </a:xfrm>
-          <a:prstGeom prst="rect">
-            <a:avLst/>
-          </a:prstGeom>
-          <a:solidFill>
-            <a:srgbClr val="FFD000"/>
-          </a:solidFill>
-          <a:ln>
-            <a:noFill/>
-          </a:ln>
-        </p:spPr>
-        <p:style>
-          <a:lnRef idx="1">
-            <a:schemeClr val="accent1"/>
-          </a:lnRef>
-          <a:fillRef idx="3">
-            <a:schemeClr val="accent1"/>
-          </a:fillRef>
-          <a:effectRef idx="2">
-            <a:schemeClr val="accent1"/>
-          </a:effectRef>
-          <a:fontRef idx="minor">
-            <a:schemeClr val="lt1"/>
-          </a:fontRef>
-        </p:style>
-        <p:txBody>
-          <a:bodyPr rtlCol="0" anchor="ctr"/>
-          <a:lstStyle/>
-          <a:p>
-            <a:pPr algn="ctr"/>
-          </a:p>
-        </p:txBody>
-      </p:sp>
-      <p:sp>
-        <p:nvSpPr>
-          <p:cNvPr id="4" name="TextBox 3"/>
-          <p:cNvSpPr txBox="1"/>
-          <p:nvPr/>
-        </p:nvSpPr>
-        <p:spPr>
-          <a:xfrm>
-            <a:off x="457200" y="164592"/>
-            <a:ext cx="11277295" cy="502920"/>
-          </a:xfrm>
-          <a:prstGeom prst="rect">
-            <a:avLst/>
-          </a:prstGeom>
-          <a:noFill/>
-        </p:spPr>
-        <p:txBody>
-          <a:bodyPr wrap="square">
-            <a:spAutoFit/>
-          </a:bodyPr>
-          <a:lstStyle/>
-          <a:p>
-            <a:r>
-              <a:rPr sz="2600" b="1" i="0">
-                <a:solidFill>
-                  <a:srgbClr val="FFFFFF"/>
-                </a:solidFill>
-                <a:latin typeface="Calibri"/>
-              </a:rPr>
-              <a:t>Taller PI — pasos guiados</a:t>
-            </a:r>
-          </a:p>
-        </p:txBody>
-      </p:sp>
-      <p:sp>
-        <p:nvSpPr>
-          <p:cNvPr id="5" name="Rounded Rectangle 4"/>
-          <p:cNvSpPr/>
-          <p:nvPr/>
-        </p:nvSpPr>
-        <p:spPr>
-          <a:xfrm>
-            <a:off x="457200" y="1234440"/>
-            <a:ext cx="11277295" cy="950976"/>
-          </a:xfrm>
-          <a:prstGeom prst="roundRect">
-            <a:avLst>
-              <a:gd name="adj" fmla="val 12000"/>
-            </a:avLst>
-          </a:prstGeom>
-          <a:solidFill>
-            <a:srgbClr val="F2F2F2"/>
-          </a:solidFill>
-          <a:ln>
-            <a:noFill/>
-          </a:ln>
-        </p:spPr>
-        <p:style>
-          <a:lnRef idx="1">
-            <a:schemeClr val="accent1"/>
-          </a:lnRef>
-          <a:fillRef idx="3">
-            <a:schemeClr val="accent1"/>
-          </a:fillRef>
-          <a:effectRef idx="2">
-            <a:schemeClr val="accent1"/>
-          </a:effectRef>
-          <a:fontRef idx="minor">
-            <a:schemeClr val="lt1"/>
-          </a:fontRef>
-        </p:style>
-        <p:txBody>
-          <a:bodyPr rtlCol="0" anchor="ctr"/>
-          <a:lstStyle/>
-          <a:p>
-            <a:pPr algn="ctr"/>
-          </a:p>
-        </p:txBody>
-      </p:sp>
-      <p:sp>
-        <p:nvSpPr>
-          <p:cNvPr id="6" name="Rounded Rectangle 5"/>
-          <p:cNvSpPr/>
-          <p:nvPr/>
-        </p:nvSpPr>
-        <p:spPr>
-          <a:xfrm>
-            <a:off x="594360" y="1490472"/>
-            <a:ext cx="438912" cy="438912"/>
-          </a:xfrm>
-          <a:prstGeom prst="roundRect">
-            <a:avLst>
-              <a:gd name="adj" fmla="val 12000"/>
-            </a:avLst>
-          </a:prstGeom>
-          <a:solidFill>
-            <a:srgbClr val="095292"/>
-          </a:solidFill>
-          <a:ln>
-            <a:noFill/>
-          </a:ln>
-        </p:spPr>
-        <p:style>
-          <a:lnRef idx="1">
-            <a:schemeClr val="accent1"/>
-          </a:lnRef>
-          <a:fillRef idx="3">
-            <a:schemeClr val="accent1"/>
-          </a:fillRef>
-          <a:effectRef idx="2">
-            <a:schemeClr val="accent1"/>
-          </a:effectRef>
-          <a:fontRef idx="minor">
-            <a:schemeClr val="lt1"/>
-          </a:fontRef>
-        </p:style>
-        <p:txBody>
-          <a:bodyPr rtlCol="0" anchor="ctr"/>
-          <a:lstStyle/>
-          <a:p>
-            <a:pPr algn="ctr"/>
-          </a:p>
-        </p:txBody>
-      </p:sp>
-      <p:sp>
-        <p:nvSpPr>
-          <p:cNvPr id="7" name="TextBox 6"/>
-          <p:cNvSpPr txBox="1"/>
-          <p:nvPr/>
-        </p:nvSpPr>
-        <p:spPr>
-          <a:xfrm>
-            <a:off x="594360" y="1490472"/>
-            <a:ext cx="438912" cy="438912"/>
-          </a:xfrm>
-          <a:prstGeom prst="rect">
-            <a:avLst/>
-          </a:prstGeom>
-          <a:noFill/>
-        </p:spPr>
-        <p:txBody>
-          <a:bodyPr wrap="square" anchor="ctr"/>
-          <a:lstStyle/>
-          <a:p>
-            <a:pPr algn="ctr"/>
-            <a:r>
-              <a:rPr sz="1600" b="1" i="0">
-                <a:solidFill>
-                  <a:srgbClr val="FFFFFF"/>
-                </a:solidFill>
-                <a:latin typeface="Calibri"/>
-              </a:rPr>
-              <a:t>1</a:t>
-            </a:r>
-          </a:p>
-        </p:txBody>
-      </p:sp>
-      <p:sp>
-        <p:nvSpPr>
-          <p:cNvPr id="8" name="TextBox 7"/>
-          <p:cNvSpPr txBox="1"/>
-          <p:nvPr/>
-        </p:nvSpPr>
-        <p:spPr>
-          <a:xfrm>
-            <a:off x="1188720" y="1325880"/>
-            <a:ext cx="10271455" cy="786384"/>
-          </a:xfrm>
-          <a:prstGeom prst="rect">
-            <a:avLst/>
-          </a:prstGeom>
-          <a:noFill/>
-        </p:spPr>
-        <p:txBody>
-          <a:bodyPr wrap="square" anchor="ctr"/>
-          <a:lstStyle/>
-          <a:p>
-            <a:r>
-              <a:rPr sz="1400" b="1" i="0">
-                <a:solidFill>
-                  <a:srgbClr val="095292"/>
-                </a:solidFill>
-                <a:latin typeface="Calibri"/>
-              </a:rPr>
-              <a:t>Paso 1. Escriban el guion de la sustentacion en una tabla de cinco bloques con tres columnas: bloque, minutos planeados y evidencia exacta que se muestra en pantalla (si el docente autorizo equipo, agreguen una cuarta columna con el responsable); el total debe sumar entre 5 y 7 minutos, dejando margen, y la demo en vivo debe ocupar por lo menos la mitad.</a:t>
-            </a:r>
-          </a:p>
-        </p:txBody>
-      </p:sp>
-      <p:sp>
-        <p:nvSpPr>
-          <p:cNvPr id="9" name="Rounded Rectangle 8"/>
-          <p:cNvSpPr/>
-          <p:nvPr/>
-        </p:nvSpPr>
-        <p:spPr>
-          <a:xfrm>
-            <a:off x="457200" y="2276856"/>
-            <a:ext cx="11277295" cy="950976"/>
-          </a:xfrm>
-          <a:prstGeom prst="roundRect">
-            <a:avLst>
-              <a:gd name="adj" fmla="val 12000"/>
-            </a:avLst>
-          </a:prstGeom>
-          <a:solidFill>
-            <a:srgbClr val="E8F4FA"/>
-          </a:solidFill>
-          <a:ln>
-            <a:noFill/>
-          </a:ln>
-        </p:spPr>
-        <p:style>
-          <a:lnRef idx="1">
-            <a:schemeClr val="accent1"/>
-          </a:lnRef>
-          <a:fillRef idx="3">
-            <a:schemeClr val="accent1"/>
-          </a:fillRef>
-          <a:effectRef idx="2">
-            <a:schemeClr val="accent1"/>
-          </a:effectRef>
-          <a:fontRef idx="minor">
-            <a:schemeClr val="lt1"/>
-          </a:fontRef>
-        </p:style>
-        <p:txBody>
-          <a:bodyPr rtlCol="0" anchor="ctr"/>
-          <a:lstStyle/>
-          <a:p>
-            <a:pPr algn="ctr"/>
-          </a:p>
-        </p:txBody>
-      </p:sp>
-      <p:sp>
-        <p:nvSpPr>
-          <p:cNvPr id="10" name="Rounded Rectangle 9"/>
-          <p:cNvSpPr/>
-          <p:nvPr/>
-        </p:nvSpPr>
-        <p:spPr>
-          <a:xfrm>
-            <a:off x="594360" y="2532888"/>
-            <a:ext cx="438912" cy="438912"/>
-          </a:xfrm>
-          <a:prstGeom prst="roundRect">
-            <a:avLst>
-              <a:gd name="adj" fmla="val 12000"/>
-            </a:avLst>
-          </a:prstGeom>
-          <a:solidFill>
-            <a:srgbClr val="095292"/>
-          </a:solidFill>
-          <a:ln>
-            <a:noFill/>
-          </a:ln>
-        </p:spPr>
-        <p:style>
-          <a:lnRef idx="1">
-            <a:schemeClr val="accent1"/>
-          </a:lnRef>
-          <a:fillRef idx="3">
-            <a:schemeClr val="accent1"/>
-          </a:fillRef>
-          <a:effectRef idx="2">
-            <a:schemeClr val="accent1"/>
-          </a:effectRef>
-          <a:fontRef idx="minor">
-            <a:schemeClr val="lt1"/>
-          </a:fontRef>
-        </p:style>
-        <p:txBody>
-          <a:bodyPr rtlCol="0" anchor="ctr"/>
-          <a:lstStyle/>
-          <a:p>
-            <a:pPr algn="ctr"/>
-          </a:p>
-        </p:txBody>
-      </p:sp>
-      <p:sp>
-        <p:nvSpPr>
-          <p:cNvPr id="11" name="TextBox 10"/>
-          <p:cNvSpPr txBox="1"/>
-          <p:nvPr/>
-        </p:nvSpPr>
-        <p:spPr>
-          <a:xfrm>
-            <a:off x="594360" y="2532888"/>
-            <a:ext cx="438912" cy="438912"/>
-          </a:xfrm>
-          <a:prstGeom prst="rect">
-            <a:avLst/>
-          </a:prstGeom>
-          <a:noFill/>
-        </p:spPr>
-        <p:txBody>
-          <a:bodyPr wrap="square" anchor="ctr"/>
-          <a:lstStyle/>
-          <a:p>
-            <a:pPr algn="ctr"/>
-            <a:r>
-              <a:rPr sz="1600" b="1" i="0">
-                <a:solidFill>
-                  <a:srgbClr val="FFFFFF"/>
-                </a:solidFill>
-                <a:latin typeface="Calibri"/>
-              </a:rPr>
-              <a:t>2</a:t>
-            </a:r>
-          </a:p>
-        </p:txBody>
-      </p:sp>
-      <p:sp>
-        <p:nvSpPr>
-          <p:cNvPr id="12" name="TextBox 11"/>
-          <p:cNvSpPr txBox="1"/>
-          <p:nvPr/>
-        </p:nvSpPr>
-        <p:spPr>
-          <a:xfrm>
-            <a:off x="1188720" y="2368296"/>
-            <a:ext cx="10271455" cy="786384"/>
-          </a:xfrm>
-          <a:prstGeom prst="rect">
-            <a:avLst/>
-          </a:prstGeom>
-          <a:noFill/>
-        </p:spPr>
-        <p:txBody>
-          <a:bodyPr wrap="square" anchor="ctr"/>
-          <a:lstStyle/>
-          <a:p>
-            <a:r>
-              <a:rPr sz="1500" b="1" i="0">
-                <a:solidFill>
-                  <a:srgbClr val="095292"/>
-                </a:solidFill>
-                <a:latin typeface="Calibri"/>
-              </a:rPr>
-              <a:t>Paso 2. Ejecuten el sembrador de datos de demostracion para dejar datos_demo con duenos.csv, mascotas.csv y citas.csv, y corran el chequeo pre-vuelo hasta que las tres lineas salgan en [OK] con filas mayores que cero.</a:t>
-            </a:r>
-          </a:p>
-        </p:txBody>
-      </p:sp>
-      <p:sp>
-        <p:nvSpPr>
-          <p:cNvPr id="13" name="Rounded Rectangle 12"/>
-          <p:cNvSpPr/>
-          <p:nvPr/>
-        </p:nvSpPr>
-        <p:spPr>
-          <a:xfrm>
-            <a:off x="457200" y="3319272"/>
-            <a:ext cx="11277295" cy="950976"/>
-          </a:xfrm>
-          <a:prstGeom prst="roundRect">
-            <a:avLst>
-              <a:gd name="adj" fmla="val 12000"/>
-            </a:avLst>
-          </a:prstGeom>
-          <a:solidFill>
-            <a:srgbClr val="F2F2F2"/>
-          </a:solidFill>
-          <a:ln>
-            <a:noFill/>
-          </a:ln>
-        </p:spPr>
-        <p:style>
-          <a:lnRef idx="1">
-            <a:schemeClr val="accent1"/>
-          </a:lnRef>
-          <a:fillRef idx="3">
-            <a:schemeClr val="accent1"/>
-          </a:fillRef>
-          <a:effectRef idx="2">
-            <a:schemeClr val="accent1"/>
-          </a:effectRef>
-          <a:fontRef idx="minor">
-            <a:schemeClr val="lt1"/>
-          </a:fontRef>
-        </p:style>
-        <p:txBody>
-          <a:bodyPr rtlCol="0" anchor="ctr"/>
-          <a:lstStyle/>
-          <a:p>
-            <a:pPr algn="ctr"/>
-          </a:p>
-        </p:txBody>
-      </p:sp>
-      <p:sp>
-        <p:nvSpPr>
-          <p:cNvPr id="14" name="Rounded Rectangle 13"/>
-          <p:cNvSpPr/>
-          <p:nvPr/>
-        </p:nvSpPr>
-        <p:spPr>
-          <a:xfrm>
-            <a:off x="594360" y="3575304"/>
-            <a:ext cx="438912" cy="438912"/>
-          </a:xfrm>
-          <a:prstGeom prst="roundRect">
-            <a:avLst>
-              <a:gd name="adj" fmla="val 12000"/>
-            </a:avLst>
-          </a:prstGeom>
-          <a:solidFill>
-            <a:srgbClr val="095292"/>
-          </a:solidFill>
-          <a:ln>
-            <a:noFill/>
-          </a:ln>
-        </p:spPr>
-        <p:style>
-          <a:lnRef idx="1">
-            <a:schemeClr val="accent1"/>
-          </a:lnRef>
-          <a:fillRef idx="3">
-            <a:schemeClr val="accent1"/>
-          </a:fillRef>
-          <a:effectRef idx="2">
-            <a:schemeClr val="accent1"/>
-          </a:effectRef>
-          <a:fontRef idx="minor">
-            <a:schemeClr val="lt1"/>
-          </a:fontRef>
-        </p:style>
-        <p:txBody>
-          <a:bodyPr rtlCol="0" anchor="ctr"/>
-          <a:lstStyle/>
-          <a:p>
-            <a:pPr algn="ctr"/>
-          </a:p>
-        </p:txBody>
-      </p:sp>
-      <p:sp>
-        <p:nvSpPr>
-          <p:cNvPr id="15" name="TextBox 14"/>
-          <p:cNvSpPr txBox="1"/>
-          <p:nvPr/>
-        </p:nvSpPr>
-        <p:spPr>
-          <a:xfrm>
-            <a:off x="594360" y="3575304"/>
-            <a:ext cx="438912" cy="438912"/>
-          </a:xfrm>
-          <a:prstGeom prst="rect">
-            <a:avLst/>
-          </a:prstGeom>
-          <a:noFill/>
-        </p:spPr>
-        <p:txBody>
-          <a:bodyPr wrap="square" anchor="ctr"/>
-          <a:lstStyle/>
-          <a:p>
-            <a:pPr algn="ctr"/>
-            <a:r>
-              <a:rPr sz="1600" b="1" i="0">
-                <a:solidFill>
-                  <a:srgbClr val="FFFFFF"/>
-                </a:solidFill>
-                <a:latin typeface="Calibri"/>
-              </a:rPr>
-              <a:t>3</a:t>
-            </a:r>
-          </a:p>
-        </p:txBody>
-      </p:sp>
-      <p:sp>
-        <p:nvSpPr>
-          <p:cNvPr id="16" name="TextBox 15"/>
-          <p:cNvSpPr txBox="1"/>
-          <p:nvPr/>
-        </p:nvSpPr>
-        <p:spPr>
-          <a:xfrm>
-            <a:off x="1188720" y="3410712"/>
-            <a:ext cx="10271455" cy="786384"/>
-          </a:xfrm>
-          <a:prstGeom prst="rect">
-            <a:avLst/>
-          </a:prstGeom>
-          <a:noFill/>
-        </p:spPr>
-        <p:txBody>
-          <a:bodyPr wrap="square" anchor="ctr"/>
-          <a:lstStyle/>
-          <a:p>
-            <a:r>
-              <a:rPr sz="1400" b="1" i="0">
-                <a:solidFill>
-                  <a:srgbClr val="095292"/>
-                </a:solidFill>
-                <a:latin typeface="Calibri"/>
-              </a:rPr>
-              <a:t>Paso 3. Hagan el ensayo numero uno con el cronometro del programa: hablen cada bloque completo de pie y sin saltarse ninguno (si trabajan en equipo, cada integrante el suyo), y al final anoten tiempo real contra tiempo planeado de cada bloque en la planilla.</a:t>
-            </a:r>
-          </a:p>
-        </p:txBody>
-      </p:sp>
-      <p:sp>
-        <p:nvSpPr>
-          <p:cNvPr id="17" name="Rounded Rectangle 16"/>
-          <p:cNvSpPr/>
-          <p:nvPr/>
-        </p:nvSpPr>
-        <p:spPr>
-          <a:xfrm>
-            <a:off x="457200" y="4361688"/>
-            <a:ext cx="11277295" cy="950976"/>
-          </a:xfrm>
-          <a:prstGeom prst="roundRect">
-            <a:avLst>
-              <a:gd name="adj" fmla="val 12000"/>
-            </a:avLst>
-          </a:prstGeom>
-          <a:solidFill>
-            <a:srgbClr val="E8F4FA"/>
-          </a:solidFill>
-          <a:ln>
-            <a:noFill/>
-          </a:ln>
-        </p:spPr>
-        <p:style>
-          <a:lnRef idx="1">
-            <a:schemeClr val="accent1"/>
-          </a:lnRef>
-          <a:fillRef idx="3">
-            <a:schemeClr val="accent1"/>
-          </a:fillRef>
-          <a:effectRef idx="2">
-            <a:schemeClr val="accent1"/>
-          </a:effectRef>
-          <a:fontRef idx="minor">
-            <a:schemeClr val="lt1"/>
-          </a:fontRef>
-        </p:style>
-        <p:txBody>
-          <a:bodyPr rtlCol="0" anchor="ctr"/>
-          <a:lstStyle/>
-          <a:p>
-            <a:pPr algn="ctr"/>
-          </a:p>
-        </p:txBody>
-      </p:sp>
-      <p:sp>
-        <p:nvSpPr>
-          <p:cNvPr id="18" name="Rounded Rectangle 17"/>
-          <p:cNvSpPr/>
-          <p:nvPr/>
-        </p:nvSpPr>
-        <p:spPr>
-          <a:xfrm>
-            <a:off x="594360" y="4617720"/>
-            <a:ext cx="438912" cy="438912"/>
-          </a:xfrm>
-          <a:prstGeom prst="roundRect">
-            <a:avLst>
-              <a:gd name="adj" fmla="val 12000"/>
-            </a:avLst>
-          </a:prstGeom>
-          <a:solidFill>
-            <a:srgbClr val="095292"/>
-          </a:solidFill>
-          <a:ln>
-            <a:noFill/>
-          </a:ln>
-        </p:spPr>
-        <p:style>
-          <a:lnRef idx="1">
-            <a:schemeClr val="accent1"/>
-          </a:lnRef>
-          <a:fillRef idx="3">
-            <a:schemeClr val="accent1"/>
-          </a:fillRef>
-          <a:effectRef idx="2">
-            <a:schemeClr val="accent1"/>
-          </a:effectRef>
-          <a:fontRef idx="minor">
-            <a:schemeClr val="lt1"/>
-          </a:fontRef>
-        </p:style>
-        <p:txBody>
-          <a:bodyPr rtlCol="0" anchor="ctr"/>
-          <a:lstStyle/>
-          <a:p>
-            <a:pPr algn="ctr"/>
-          </a:p>
-        </p:txBody>
-      </p:sp>
-      <p:sp>
-        <p:nvSpPr>
-          <p:cNvPr id="19" name="TextBox 18"/>
-          <p:cNvSpPr txBox="1"/>
-          <p:nvPr/>
-        </p:nvSpPr>
-        <p:spPr>
-          <a:xfrm>
-            <a:off x="594360" y="4617720"/>
-            <a:ext cx="438912" cy="438912"/>
-          </a:xfrm>
-          <a:prstGeom prst="rect">
-            <a:avLst/>
-          </a:prstGeom>
-          <a:noFill/>
-        </p:spPr>
-        <p:txBody>
-          <a:bodyPr wrap="square" anchor="ctr"/>
-          <a:lstStyle/>
-          <a:p>
-            <a:pPr algn="ctr"/>
-            <a:r>
-              <a:rPr sz="1600" b="1" i="0">
-                <a:solidFill>
-                  <a:srgbClr val="FFFFFF"/>
-                </a:solidFill>
-                <a:latin typeface="Calibri"/>
-              </a:rPr>
-              <a:t>4</a:t>
-            </a:r>
-          </a:p>
-        </p:txBody>
-      </p:sp>
-      <p:sp>
-        <p:nvSpPr>
-          <p:cNvPr id="20" name="TextBox 19"/>
-          <p:cNvSpPr txBox="1"/>
-          <p:nvPr/>
-        </p:nvSpPr>
-        <p:spPr>
-          <a:xfrm>
-            <a:off x="1188720" y="4453128"/>
-            <a:ext cx="10271455" cy="786384"/>
-          </a:xfrm>
-          <a:prstGeom prst="rect">
-            <a:avLst/>
-          </a:prstGeom>
-          <a:noFill/>
-        </p:spPr>
-        <p:txBody>
-          <a:bodyPr wrap="square" anchor="ctr"/>
-          <a:lstStyle/>
-          <a:p>
-            <a:r>
-              <a:rPr sz="1400" b="1" i="0">
-                <a:solidFill>
-                  <a:srgbClr val="095292"/>
-                </a:solidFill>
-                <a:latin typeface="Calibri"/>
-              </a:rPr>
-              <a:t>Paso 4. Graben el plan B: un video de dos a tres minutos con la ruta feliz completa (registrar dueno, registrar mascota, agendar cita, buscar por ID, cerrar y volver a abrir mostrando que los datos siguen ahi) y exporten seis capturas de pantalla de esos mismos momentos.</a:t>
-            </a:r>
-          </a:p>
-        </p:txBody>
-      </p:sp>
-      <p:sp>
-        <p:nvSpPr>
-          <p:cNvPr id="21" name="Rounded Rectangle 20"/>
-          <p:cNvSpPr/>
-          <p:nvPr/>
-        </p:nvSpPr>
-        <p:spPr>
-          <a:xfrm>
-            <a:off x="457200" y="5404104"/>
-            <a:ext cx="11277295" cy="950976"/>
-          </a:xfrm>
-          <a:prstGeom prst="roundRect">
-            <a:avLst>
-              <a:gd name="adj" fmla="val 12000"/>
-            </a:avLst>
-          </a:prstGeom>
-          <a:solidFill>
-            <a:srgbClr val="F2F2F2"/>
-          </a:solidFill>
-          <a:ln>
-            <a:noFill/>
-          </a:ln>
-        </p:spPr>
-        <p:style>
-          <a:lnRef idx="1">
-            <a:schemeClr val="accent1"/>
-          </a:lnRef>
-          <a:fillRef idx="3">
-            <a:schemeClr val="accent1"/>
-          </a:fillRef>
-          <a:effectRef idx="2">
-            <a:schemeClr val="accent1"/>
-          </a:effectRef>
-          <a:fontRef idx="minor">
-            <a:schemeClr val="lt1"/>
-          </a:fontRef>
-        </p:style>
-        <p:txBody>
-          <a:bodyPr rtlCol="0" anchor="ctr"/>
-          <a:lstStyle/>
-          <a:p>
-            <a:pPr algn="ctr"/>
-          </a:p>
-        </p:txBody>
-      </p:sp>
-      <p:sp>
-        <p:nvSpPr>
-          <p:cNvPr id="22" name="Rounded Rectangle 21"/>
-          <p:cNvSpPr/>
-          <p:nvPr/>
-        </p:nvSpPr>
-        <p:spPr>
-          <a:xfrm>
-            <a:off x="594360" y="5660136"/>
-            <a:ext cx="438912" cy="438912"/>
-          </a:xfrm>
-          <a:prstGeom prst="roundRect">
-            <a:avLst>
-              <a:gd name="adj" fmla="val 12000"/>
-            </a:avLst>
-          </a:prstGeom>
-          <a:solidFill>
-            <a:srgbClr val="095292"/>
-          </a:solidFill>
-          <a:ln>
-            <a:noFill/>
-          </a:ln>
-        </p:spPr>
-        <p:style>
-          <a:lnRef idx="1">
-            <a:schemeClr val="accent1"/>
-          </a:lnRef>
-          <a:fillRef idx="3">
-            <a:schemeClr val="accent1"/>
-          </a:fillRef>
-          <a:effectRef idx="2">
-            <a:schemeClr val="accent1"/>
-          </a:effectRef>
-          <a:fontRef idx="minor">
-            <a:schemeClr val="lt1"/>
-          </a:fontRef>
-        </p:style>
-        <p:txBody>
-          <a:bodyPr rtlCol="0" anchor="ctr"/>
-          <a:lstStyle/>
-          <a:p>
-            <a:pPr algn="ctr"/>
-          </a:p>
-        </p:txBody>
-      </p:sp>
-      <p:sp>
-        <p:nvSpPr>
-          <p:cNvPr id="23" name="TextBox 22"/>
-          <p:cNvSpPr txBox="1"/>
-          <p:nvPr/>
-        </p:nvSpPr>
-        <p:spPr>
-          <a:xfrm>
-            <a:off x="594360" y="5660136"/>
-            <a:ext cx="438912" cy="438912"/>
-          </a:xfrm>
-          <a:prstGeom prst="rect">
-            <a:avLst/>
-          </a:prstGeom>
-          <a:noFill/>
-        </p:spPr>
-        <p:txBody>
-          <a:bodyPr wrap="square" anchor="ctr"/>
-          <a:lstStyle/>
-          <a:p>
-            <a:pPr algn="ctr"/>
-            <a:r>
-              <a:rPr sz="1600" b="1" i="0">
-                <a:solidFill>
-                  <a:srgbClr val="FFFFFF"/>
-                </a:solidFill>
-                <a:latin typeface="Calibri"/>
-              </a:rPr>
-              <a:t>5</a:t>
-            </a:r>
-          </a:p>
-        </p:txBody>
-      </p:sp>
-      <p:sp>
-        <p:nvSpPr>
-          <p:cNvPr id="24" name="TextBox 23"/>
-          <p:cNvSpPr txBox="1"/>
-          <p:nvPr/>
-        </p:nvSpPr>
-        <p:spPr>
-          <a:xfrm>
-            <a:off x="1188720" y="5495544"/>
-            <a:ext cx="10271455" cy="786384"/>
-          </a:xfrm>
-          <a:prstGeom prst="rect">
-            <a:avLst/>
-          </a:prstGeom>
-          <a:noFill/>
-        </p:spPr>
-        <p:txBody>
-          <a:bodyPr wrap="square" anchor="ctr"/>
-          <a:lstStyle/>
-          <a:p>
-            <a:r>
-              <a:rPr sz="1400" b="1" i="0">
-                <a:solidFill>
-                  <a:srgbClr val="095292"/>
-                </a:solidFill>
-                <a:latin typeface="Calibri"/>
-              </a:rPr>
-              <a:t>Paso 5. Intercambien con otro compañero (o con otro equipo, si el docente lo autorizo) una ronda de cinco preguntas de jurado, ajusten el guion con lo que fallo, hagan el ensayo numero dos y suban a la plataforma del curso el guion, la planilla de tiempos de los dos ensayos y el video de respaldo.</a:t>
-            </a:r>
-          </a:p>
-        </p:txBody>
-      </p:sp>
-      <p:sp>
-        <p:nvSpPr>
-          <p:cNvPr id="25" name="TextBox 24"/>
-          <p:cNvSpPr txBox="1"/>
-          <p:nvPr/>
-        </p:nvSpPr>
-        <p:spPr>
-          <a:xfrm>
-            <a:off x="11185855" y="6473952"/>
-            <a:ext cx="640080" cy="274320"/>
-          </a:xfrm>
-          <a:prstGeom prst="rect">
-            <a:avLst/>
-          </a:prstGeom>
-          <a:noFill/>
-        </p:spPr>
-        <p:txBody>
-          <a:bodyPr wrap="square">
-            <a:spAutoFit/>
-          </a:bodyPr>
-          <a:lstStyle/>
-          <a:p>
-            <a:pPr algn="r"/>
-            <a:r>
-              <a:rPr sz="1100" b="0" i="0">
-                <a:solidFill>
-                  <a:srgbClr val="666666"/>
-                </a:solidFill>
-                <a:latin typeface="Calibri"/>
-              </a:rPr>
-              <a:t>28</a:t>
-            </a:r>
-          </a:p>
-        </p:txBody>
-      </p:sp>
-    </p:spTree>
-  </p:cSld>
-  <p:clrMapOvr>
-    <a:masterClrMapping/>
-  </p:clrMapOvr>
-</p:sld>
-</file>
-
-<file path=ppt/slides/slide29.xml><?xml version="1.0" encoding="utf-8"?>
-<p:sld xmlns:a="http://schemas.openxmlformats.org/drawingml/2006/main" xmlns:p="http://schemas.openxmlformats.org/presentationml/2006/main" xmlns:r="http://schemas.openxmlformats.org/officeDocument/2006/relationships">
-  <p:cSld>
-    <p:bg>
-      <p:bgPr>
-        <a:solidFill>
-          <a:srgbClr val="FFFFFF"/>
-        </a:solidFill>
-        <a:effectLst/>
-      </p:bgPr>
-    </p:bg>
-    <p:spTree>
-      <p:nvGrpSpPr>
-        <p:cNvPr id="1" name=""/>
-        <p:cNvGrpSpPr/>
-        <p:nvPr/>
-      </p:nvGrpSpPr>
-      <p:grpSpPr/>
-      <p:sp>
-        <p:nvSpPr>
-          <p:cNvPr id="2" name="Rectangle 1"/>
-          <p:cNvSpPr/>
-          <p:nvPr/>
-        </p:nvSpPr>
-        <p:spPr>
-          <a:xfrm>
-            <a:off x="0" y="0"/>
-            <a:ext cx="12191695" cy="960120"/>
-          </a:xfrm>
-          <a:prstGeom prst="rect">
-            <a:avLst/>
-          </a:prstGeom>
-          <a:solidFill>
-            <a:srgbClr val="095292"/>
-          </a:solidFill>
-          <a:ln>
-            <a:noFill/>
-          </a:ln>
-        </p:spPr>
-        <p:style>
-          <a:lnRef idx="1">
-            <a:schemeClr val="accent1"/>
-          </a:lnRef>
-          <a:fillRef idx="3">
-            <a:schemeClr val="accent1"/>
-          </a:fillRef>
-          <a:effectRef idx="2">
-            <a:schemeClr val="accent1"/>
-          </a:effectRef>
-          <a:fontRef idx="minor">
-            <a:schemeClr val="lt1"/>
-          </a:fontRef>
-        </p:style>
-        <p:txBody>
-          <a:bodyPr rtlCol="0" anchor="ctr"/>
-          <a:lstStyle/>
-          <a:p>
-            <a:pPr algn="ctr"/>
-          </a:p>
-        </p:txBody>
-      </p:sp>
-      <p:sp>
-        <p:nvSpPr>
-          <p:cNvPr id="3" name="Rectangle 2"/>
-          <p:cNvSpPr/>
-          <p:nvPr/>
-        </p:nvSpPr>
-        <p:spPr>
-          <a:xfrm>
-            <a:off x="0" y="960120"/>
-            <a:ext cx="12191695" cy="41148"/>
-          </a:xfrm>
-          <a:prstGeom prst="rect">
-            <a:avLst/>
-          </a:prstGeom>
-          <a:solidFill>
-            <a:srgbClr val="FFD000"/>
-          </a:solidFill>
-          <a:ln>
-            <a:noFill/>
-          </a:ln>
-        </p:spPr>
-        <p:style>
-          <a:lnRef idx="1">
-            <a:schemeClr val="accent1"/>
-          </a:lnRef>
-          <a:fillRef idx="3">
-            <a:schemeClr val="accent1"/>
-          </a:fillRef>
-          <a:effectRef idx="2">
-            <a:schemeClr val="accent1"/>
-          </a:effectRef>
-          <a:fontRef idx="minor">
-            <a:schemeClr val="lt1"/>
-          </a:fontRef>
-        </p:style>
-        <p:txBody>
-          <a:bodyPr rtlCol="0" anchor="ctr"/>
-          <a:lstStyle/>
-          <a:p>
-            <a:pPr algn="ctr"/>
-          </a:p>
-        </p:txBody>
-      </p:sp>
-      <p:sp>
-        <p:nvSpPr>
-          <p:cNvPr id="4" name="TextBox 3"/>
-          <p:cNvSpPr txBox="1"/>
-          <p:nvPr/>
-        </p:nvSpPr>
-        <p:spPr>
-          <a:xfrm>
-            <a:off x="457200" y="164592"/>
-            <a:ext cx="11277295" cy="502920"/>
-          </a:xfrm>
-          <a:prstGeom prst="rect">
-            <a:avLst/>
-          </a:prstGeom>
-          <a:noFill/>
-        </p:spPr>
-        <p:txBody>
-          <a:bodyPr wrap="square">
-            <a:spAutoFit/>
-          </a:bodyPr>
-          <a:lstStyle/>
-          <a:p>
-            <a:r>
-              <a:rPr sz="2600" b="1" i="0">
-                <a:solidFill>
-                  <a:srgbClr val="FFFFFF"/>
-                </a:solidFill>
-                <a:latin typeface="Calibri"/>
-              </a:rPr>
-              <a:t>Antes de entregar — autochequeo</a:t>
-            </a:r>
-          </a:p>
-        </p:txBody>
-      </p:sp>
-      <p:sp>
-        <p:nvSpPr>
-          <p:cNvPr id="5" name="Rounded Rectangle 4"/>
-          <p:cNvSpPr/>
-          <p:nvPr/>
-        </p:nvSpPr>
-        <p:spPr>
-          <a:xfrm>
-            <a:off x="457200" y="1261872"/>
-            <a:ext cx="11277295" cy="566928"/>
-          </a:xfrm>
-          <a:prstGeom prst="roundRect">
-            <a:avLst>
-              <a:gd name="adj" fmla="val 12000"/>
-            </a:avLst>
-          </a:prstGeom>
-          <a:solidFill>
-            <a:srgbClr val="F2F2F2"/>
-          </a:solidFill>
-          <a:ln>
-            <a:noFill/>
-          </a:ln>
-        </p:spPr>
-        <p:style>
-          <a:lnRef idx="1">
-            <a:schemeClr val="accent1"/>
-          </a:lnRef>
-          <a:fillRef idx="3">
-            <a:schemeClr val="accent1"/>
-          </a:fillRef>
-          <a:effectRef idx="2">
-            <a:schemeClr val="accent1"/>
-          </a:effectRef>
-          <a:fontRef idx="minor">
-            <a:schemeClr val="lt1"/>
-          </a:fontRef>
-        </p:style>
-        <p:txBody>
-          <a:bodyPr rtlCol="0" anchor="ctr"/>
-          <a:lstStyle/>
-          <a:p>
-            <a:pPr algn="ctr"/>
-          </a:p>
-        </p:txBody>
-      </p:sp>
-      <p:sp>
-        <p:nvSpPr>
-          <p:cNvPr id="6" name="Rectangle 5"/>
-          <p:cNvSpPr/>
-          <p:nvPr/>
-        </p:nvSpPr>
-        <p:spPr>
-          <a:xfrm>
-            <a:off x="640080" y="1408175"/>
-            <a:ext cx="274320" cy="274320"/>
-          </a:xfrm>
-          <a:prstGeom prst="rect">
-            <a:avLst/>
-          </a:prstGeom>
-          <a:solidFill>
-            <a:srgbClr val="FFFFFF"/>
-          </a:solidFill>
-          <a:ln>
-            <a:solidFill>
-              <a:srgbClr val="333333"/>
-            </a:solidFill>
-          </a:ln>
-        </p:spPr>
-        <p:style>
-          <a:lnRef idx="1">
-            <a:schemeClr val="accent1"/>
-          </a:lnRef>
-          <a:fillRef idx="3">
-            <a:schemeClr val="accent1"/>
-          </a:fillRef>
-          <a:effectRef idx="2">
-            <a:schemeClr val="accent1"/>
-          </a:effectRef>
-          <a:fontRef idx="minor">
-            <a:schemeClr val="lt1"/>
-          </a:fontRef>
-        </p:style>
-        <p:txBody>
-          <a:bodyPr rtlCol="0" anchor="ctr"/>
-          <a:lstStyle/>
-          <a:p>
-            <a:pPr algn="ctr"/>
-          </a:p>
-        </p:txBody>
-      </p:sp>
-      <p:sp>
-        <p:nvSpPr>
-          <p:cNvPr id="7" name="Rectangle 6"/>
-          <p:cNvSpPr/>
-          <p:nvPr/>
-        </p:nvSpPr>
-        <p:spPr>
-          <a:xfrm>
-            <a:off x="640080" y="1408175"/>
-            <a:ext cx="73152" cy="274320"/>
+            <a:ext cx="12191695" cy="164592"/>
           </a:xfrm>
           <a:prstGeom prst="rect">
             <a:avLst/>
@@ -13427,16 +12275,40 @@
           </a:p>
         </p:txBody>
       </p:sp>
-      <p:sp>
-        <p:nvSpPr>
-          <p:cNvPr id="8" name="TextBox 7"/>
+      <p:pic>
+        <p:nvPicPr>
+          <p:cNvPr id="3" name="Picture 2" descr="logo_uniajc_color.png"/>
+          <p:cNvPicPr>
+            <a:picLocks noChangeAspect="1"/>
+          </p:cNvPicPr>
+          <p:nvPr/>
+        </p:nvPicPr>
+        <p:blipFill>
+          <a:blip r:embed="rId2"/>
+          <a:stretch>
+            <a:fillRect/>
+          </a:stretch>
+        </p:blipFill>
+        <p:spPr>
+          <a:xfrm>
+            <a:off x="10271455" y="5998464"/>
+            <a:ext cx="1463040" cy="643233"/>
+          </a:xfrm>
+          <a:prstGeom prst="rect">
+            <a:avLst/>
+          </a:prstGeom>
+        </p:spPr>
+      </p:pic>
+      <p:sp>
+        <p:nvSpPr>
+          <p:cNvPr id="4" name="TextBox 3"/>
           <p:cNvSpPr txBox="1"/>
           <p:nvPr/>
         </p:nvSpPr>
         <p:spPr>
           <a:xfrm>
-            <a:off x="1097280" y="1353312"/>
-            <a:ext cx="10362895" cy="402336"/>
+            <a:off x="457200" y="1737360"/>
+            <a:ext cx="11277295" cy="1097280"/>
           </a:xfrm>
           <a:prstGeom prst="rect">
             <a:avLst/>
@@ -13447,358 +12319,29 @@
           <a:bodyPr wrap="square" anchor="ctr"/>
           <a:lstStyle/>
           <a:p>
-            <a:r>
-              <a:rPr sz="1500" b="0" i="0">
-                <a:solidFill>
-                  <a:srgbClr val="333333"/>
-                </a:solidFill>
-                <a:latin typeface="Calibri"/>
-              </a:rPr>
-              <a:t>Si el computador no enciende cinco minutos antes de sustentar, ¿que muestra en su lugar y donde lo tiene a la mano?</a:t>
-            </a:r>
-          </a:p>
-        </p:txBody>
-      </p:sp>
-      <p:sp>
-        <p:nvSpPr>
-          <p:cNvPr id="9" name="Rounded Rectangle 8"/>
-          <p:cNvSpPr/>
-          <p:nvPr/>
-        </p:nvSpPr>
-        <p:spPr>
-          <a:xfrm>
-            <a:off x="457200" y="1938528"/>
-            <a:ext cx="11277295" cy="566928"/>
-          </a:xfrm>
-          <a:prstGeom prst="roundRect">
-            <a:avLst>
-              <a:gd name="adj" fmla="val 12000"/>
-            </a:avLst>
-          </a:prstGeom>
-          <a:solidFill>
-            <a:srgbClr val="F2F2F2"/>
-          </a:solidFill>
-          <a:ln>
-            <a:noFill/>
-          </a:ln>
-        </p:spPr>
-        <p:style>
-          <a:lnRef idx="1">
-            <a:schemeClr val="accent1"/>
-          </a:lnRef>
-          <a:fillRef idx="3">
-            <a:schemeClr val="accent1"/>
-          </a:fillRef>
-          <a:effectRef idx="2">
-            <a:schemeClr val="accent1"/>
-          </a:effectRef>
-          <a:fontRef idx="minor">
-            <a:schemeClr val="lt1"/>
-          </a:fontRef>
-        </p:style>
-        <p:txBody>
-          <a:bodyPr rtlCol="0" anchor="ctr"/>
-          <a:lstStyle/>
-          <a:p>
             <a:pPr algn="ctr"/>
-          </a:p>
-        </p:txBody>
-      </p:sp>
-      <p:sp>
-        <p:nvSpPr>
-          <p:cNvPr id="10" name="Rectangle 9"/>
-          <p:cNvSpPr/>
-          <p:nvPr/>
-        </p:nvSpPr>
-        <p:spPr>
-          <a:xfrm>
-            <a:off x="640080" y="2084832"/>
-            <a:ext cx="274320" cy="274320"/>
-          </a:xfrm>
-          <a:prstGeom prst="rect">
-            <a:avLst/>
-          </a:prstGeom>
-          <a:solidFill>
-            <a:srgbClr val="FFFFFF"/>
-          </a:solidFill>
-          <a:ln>
-            <a:solidFill>
-              <a:srgbClr val="333333"/>
-            </a:solidFill>
-          </a:ln>
-        </p:spPr>
-        <p:style>
-          <a:lnRef idx="1">
-            <a:schemeClr val="accent1"/>
-          </a:lnRef>
-          <a:fillRef idx="3">
-            <a:schemeClr val="accent1"/>
-          </a:fillRef>
-          <a:effectRef idx="2">
-            <a:schemeClr val="accent1"/>
-          </a:effectRef>
-          <a:fontRef idx="minor">
-            <a:schemeClr val="lt1"/>
-          </a:fontRef>
-        </p:style>
-        <p:txBody>
-          <a:bodyPr rtlCol="0" anchor="ctr"/>
-          <a:lstStyle/>
-          <a:p>
-            <a:pPr algn="ctr"/>
-          </a:p>
-        </p:txBody>
-      </p:sp>
-      <p:sp>
-        <p:nvSpPr>
-          <p:cNvPr id="11" name="Rectangle 10"/>
-          <p:cNvSpPr/>
-          <p:nvPr/>
-        </p:nvSpPr>
-        <p:spPr>
-          <a:xfrm>
-            <a:off x="640080" y="2084832"/>
-            <a:ext cx="73152" cy="274320"/>
-          </a:xfrm>
-          <a:prstGeom prst="rect">
-            <a:avLst/>
-          </a:prstGeom>
-          <a:solidFill>
-            <a:srgbClr val="269CCB"/>
-          </a:solidFill>
-          <a:ln>
-            <a:noFill/>
-          </a:ln>
-        </p:spPr>
-        <p:style>
-          <a:lnRef idx="1">
-            <a:schemeClr val="accent1"/>
-          </a:lnRef>
-          <a:fillRef idx="3">
-            <a:schemeClr val="accent1"/>
-          </a:fillRef>
-          <a:effectRef idx="2">
-            <a:schemeClr val="accent1"/>
-          </a:effectRef>
-          <a:fontRef idx="minor">
-            <a:schemeClr val="lt1"/>
-          </a:fontRef>
-        </p:style>
-        <p:txBody>
-          <a:bodyPr rtlCol="0" anchor="ctr"/>
-          <a:lstStyle/>
-          <a:p>
-            <a:pPr algn="ctr"/>
-          </a:p>
-        </p:txBody>
-      </p:sp>
-      <p:sp>
-        <p:nvSpPr>
-          <p:cNvPr id="12" name="TextBox 11"/>
+            <a:r>
+              <a:rPr sz="3400" b="1" i="0">
+                <a:solidFill>
+                  <a:srgbClr val="095292"/>
+                </a:solidFill>
+                <a:latin typeface="Calibri"/>
+              </a:rPr>
+              <a:t>Clase 14 · Preparacion de la presentacion final · Sustentacion de VetCare</a:t>
+            </a:r>
+          </a:p>
+        </p:txBody>
+      </p:sp>
+      <p:sp>
+        <p:nvSpPr>
+          <p:cNvPr id="5" name="TextBox 4"/>
           <p:cNvSpPr txBox="1"/>
           <p:nvPr/>
         </p:nvSpPr>
         <p:spPr>
           <a:xfrm>
-            <a:off x="1097280" y="2029968"/>
-            <a:ext cx="10362895" cy="402336"/>
-          </a:xfrm>
-          <a:prstGeom prst="rect">
-            <a:avLst/>
-          </a:prstGeom>
-          <a:noFill/>
-        </p:spPr>
-        <p:txBody>
-          <a:bodyPr wrap="square" anchor="ctr"/>
-          <a:lstStyle/>
-          <a:p>
-            <a:r>
-              <a:rPr sz="1500" b="0" i="0">
-                <a:solidFill>
-                  <a:srgbClr val="333333"/>
-                </a:solidFill>
-                <a:latin typeface="Calibri"/>
-              </a:rPr>
-              <a:t>¿Cual es la primera pantalla que ve el jurado y que informacion tiene: hay datos, o una tabla vacia que parece un programa que no sirve?</a:t>
-            </a:r>
-          </a:p>
-        </p:txBody>
-      </p:sp>
-      <p:sp>
-        <p:nvSpPr>
-          <p:cNvPr id="13" name="Rounded Rectangle 12"/>
-          <p:cNvSpPr/>
-          <p:nvPr/>
-        </p:nvSpPr>
-        <p:spPr>
-          <a:xfrm>
-            <a:off x="457200" y="2615184"/>
-            <a:ext cx="11277295" cy="566928"/>
-          </a:xfrm>
-          <a:prstGeom prst="roundRect">
-            <a:avLst>
-              <a:gd name="adj" fmla="val 12000"/>
-            </a:avLst>
-          </a:prstGeom>
-          <a:solidFill>
-            <a:srgbClr val="F2F2F2"/>
-          </a:solidFill>
-          <a:ln>
-            <a:noFill/>
-          </a:ln>
-        </p:spPr>
-        <p:style>
-          <a:lnRef idx="1">
-            <a:schemeClr val="accent1"/>
-          </a:lnRef>
-          <a:fillRef idx="3">
-            <a:schemeClr val="accent1"/>
-          </a:fillRef>
-          <a:effectRef idx="2">
-            <a:schemeClr val="accent1"/>
-          </a:effectRef>
-          <a:fontRef idx="minor">
-            <a:schemeClr val="lt1"/>
-          </a:fontRef>
-        </p:style>
-        <p:txBody>
-          <a:bodyPr rtlCol="0" anchor="ctr"/>
-          <a:lstStyle/>
-          <a:p>
-            <a:pPr algn="ctr"/>
-          </a:p>
-        </p:txBody>
-      </p:sp>
-      <p:sp>
-        <p:nvSpPr>
-          <p:cNvPr id="14" name="Rectangle 13"/>
-          <p:cNvSpPr/>
-          <p:nvPr/>
-        </p:nvSpPr>
-        <p:spPr>
-          <a:xfrm>
-            <a:off x="640080" y="2761488"/>
-            <a:ext cx="274320" cy="274320"/>
-          </a:xfrm>
-          <a:prstGeom prst="rect">
-            <a:avLst/>
-          </a:prstGeom>
-          <a:solidFill>
-            <a:srgbClr val="FFFFFF"/>
-          </a:solidFill>
-          <a:ln>
-            <a:solidFill>
-              <a:srgbClr val="333333"/>
-            </a:solidFill>
-          </a:ln>
-        </p:spPr>
-        <p:style>
-          <a:lnRef idx="1">
-            <a:schemeClr val="accent1"/>
-          </a:lnRef>
-          <a:fillRef idx="3">
-            <a:schemeClr val="accent1"/>
-          </a:fillRef>
-          <a:effectRef idx="2">
-            <a:schemeClr val="accent1"/>
-          </a:effectRef>
-          <a:fontRef idx="minor">
-            <a:schemeClr val="lt1"/>
-          </a:fontRef>
-        </p:style>
-        <p:txBody>
-          <a:bodyPr rtlCol="0" anchor="ctr"/>
-          <a:lstStyle/>
-          <a:p>
-            <a:pPr algn="ctr"/>
-          </a:p>
-        </p:txBody>
-      </p:sp>
-      <p:sp>
-        <p:nvSpPr>
-          <p:cNvPr id="15" name="Rectangle 14"/>
-          <p:cNvSpPr/>
-          <p:nvPr/>
-        </p:nvSpPr>
-        <p:spPr>
-          <a:xfrm>
-            <a:off x="640080" y="2761488"/>
-            <a:ext cx="73152" cy="274320"/>
-          </a:xfrm>
-          <a:prstGeom prst="rect">
-            <a:avLst/>
-          </a:prstGeom>
-          <a:solidFill>
-            <a:srgbClr val="269CCB"/>
-          </a:solidFill>
-          <a:ln>
-            <a:noFill/>
-          </a:ln>
-        </p:spPr>
-        <p:style>
-          <a:lnRef idx="1">
-            <a:schemeClr val="accent1"/>
-          </a:lnRef>
-          <a:fillRef idx="3">
-            <a:schemeClr val="accent1"/>
-          </a:fillRef>
-          <a:effectRef idx="2">
-            <a:schemeClr val="accent1"/>
-          </a:effectRef>
-          <a:fontRef idx="minor">
-            <a:schemeClr val="lt1"/>
-          </a:fontRef>
-        </p:style>
-        <p:txBody>
-          <a:bodyPr rtlCol="0" anchor="ctr"/>
-          <a:lstStyle/>
-          <a:p>
-            <a:pPr algn="ctr"/>
-          </a:p>
-        </p:txBody>
-      </p:sp>
-      <p:sp>
-        <p:nvSpPr>
-          <p:cNvPr id="16" name="TextBox 15"/>
-          <p:cNvSpPr txBox="1"/>
-          <p:nvPr/>
-        </p:nvSpPr>
-        <p:spPr>
-          <a:xfrm>
-            <a:off x="1097280" y="2706624"/>
-            <a:ext cx="10362895" cy="402336"/>
-          </a:xfrm>
-          <a:prstGeom prst="rect">
-            <a:avLst/>
-          </a:prstGeom>
-          <a:noFill/>
-        </p:spPr>
-        <p:txBody>
-          <a:bodyPr wrap="square" anchor="ctr"/>
-          <a:lstStyle/>
-          <a:p>
-            <a:r>
-              <a:rPr sz="1500" b="0" i="0">
-                <a:solidFill>
-                  <a:srgbClr val="333333"/>
-                </a:solidFill>
-                <a:latin typeface="Calibri"/>
-              </a:rPr>
-              <a:t>Si el jurado pregunta 'donde esta la herencia en su proyecto', ¿en cuantos segundos puede tener ese archivo en pantalla?</a:t>
-            </a:r>
-          </a:p>
-        </p:txBody>
-      </p:sp>
-      <p:sp>
-        <p:nvSpPr>
-          <p:cNvPr id="17" name="TextBox 16"/>
-          <p:cNvSpPr txBox="1"/>
-          <p:nvPr/>
-        </p:nvSpPr>
-        <p:spPr>
-          <a:xfrm>
-            <a:off x="11185855" y="6473952"/>
-            <a:ext cx="640080" cy="274320"/>
+            <a:off x="457200" y="3017520"/>
+            <a:ext cx="11277295" cy="1645920"/>
           </a:xfrm>
           <a:prstGeom prst="rect">
             <a:avLst/>
@@ -13811,15 +12354,86 @@
           </a:bodyPr>
           <a:lstStyle/>
           <a:p>
-            <a:pPr algn="r"/>
-            <a:r>
-              <a:rPr sz="1100" b="0" i="0">
-                <a:solidFill>
-                  <a:srgbClr val="666666"/>
-                </a:solidFill>
-                <a:latin typeface="Calibri"/>
-              </a:rPr>
-              <a:t>29</a:t>
+            <a:pPr algn="ctr">
+              <a:spcAft>
+                <a:spcPts val="600"/>
+              </a:spcAft>
+            </a:pPr>
+            <a:r>
+              <a:rPr sz="1600" b="0" i="0">
+                <a:solidFill>
+                  <a:srgbClr val="333333"/>
+                </a:solidFill>
+                <a:latin typeface="Calibri"/>
+              </a:rPr>
+              <a:t>Que mostrar, en que orden y como lograr que la demo no falle</a:t>
+            </a:r>
+          </a:p>
+          <a:p>
+            <a:pPr algn="ctr">
+              <a:spcAft>
+                <a:spcPts val="600"/>
+              </a:spcAft>
+            </a:pPr>
+            <a:r>
+              <a:rPr sz="1600" b="0" i="0">
+                <a:solidFill>
+                  <a:srgbClr val="333333"/>
+                </a:solidFill>
+                <a:latin typeface="Calibri"/>
+              </a:rPr>
+              <a:t>Repasa las laminas de concepto y el codigo de la demo</a:t>
+            </a:r>
+          </a:p>
+          <a:p>
+            <a:pPr algn="ctr">
+              <a:spcAft>
+                <a:spcPts val="600"/>
+              </a:spcAft>
+            </a:pPr>
+            <a:r>
+              <a:rPr sz="1600" b="0" i="0">
+                <a:solidFill>
+                  <a:srgbClr val="333333"/>
+                </a:solidFill>
+                <a:latin typeface="Calibri"/>
+              </a:rPr>
+              <a:t>Siguiente clase: continuamos el hilo del tema</a:t>
+            </a:r>
+          </a:p>
+        </p:txBody>
+      </p:sp>
+      <p:sp>
+        <p:nvSpPr>
+          <p:cNvPr id="6" name="TextBox 5"/>
+          <p:cNvSpPr txBox="1"/>
+          <p:nvPr/>
+        </p:nvSpPr>
+        <p:spPr>
+          <a:xfrm>
+            <a:off x="457200" y="4754880"/>
+            <a:ext cx="11277295" cy="640080"/>
+          </a:xfrm>
+          <a:prstGeom prst="rect">
+            <a:avLst/>
+          </a:prstGeom>
+          <a:noFill/>
+        </p:spPr>
+        <p:txBody>
+          <a:bodyPr wrap="square">
+            <a:spAutoFit/>
+          </a:bodyPr>
+          <a:lstStyle/>
+          <a:p>
+            <a:pPr algn="ctr"/>
+            <a:r>
+              <a:rPr sz="2000" b="1" i="0">
+                <a:solidFill>
+                  <a:srgbClr val="269CCB"/>
+                </a:solidFill>
+                <a:latin typeface="Calibri"/>
+              </a:rPr>
+              <a:t>Teoria al servicio del proyecto</a:t>
             </a:r>
           </a:p>
         </p:txBody>
@@ -14123,7 +12737,7 @@
                 </a:solidFill>
                 <a:latin typeface="Calibri"/>
               </a:rPr>
-              <a:t>Encuadre y repaso del avance</a:t>
+              <a:t>Encuadre y repaso de la clase anterior</a:t>
             </a:r>
           </a:p>
         </p:txBody>
@@ -14468,7 +13082,7 @@
                 </a:solidFill>
                 <a:latin typeface="Calibri"/>
               </a:rPr>
-              <a:t>Taller guiado = avance del PI</a:t>
+              <a:t>Practica (opcional, guia en la carpeta)</a:t>
             </a:r>
           </a:p>
         </p:txBody>
@@ -14583,7 +13197,7 @@
                 </a:solidFill>
                 <a:latin typeface="Calibri"/>
               </a:rPr>
-              <a:t>Criterios de exito y cierre</a:t>
+              <a:t>Repaso de conceptos y cierre</a:t>
             </a:r>
           </a:p>
         </p:txBody>
@@ -14672,1241 +13286,6 @@
                 <a:latin typeface="Calibri"/>
               </a:rPr>
               <a:t>3</a:t>
-            </a:r>
-          </a:p>
-        </p:txBody>
-      </p:sp>
-    </p:spTree>
-  </p:cSld>
-  <p:clrMapOvr>
-    <a:masterClrMapping/>
-  </p:clrMapOvr>
-</p:sld>
-</file>
-
-<file path=ppt/slides/slide30.xml><?xml version="1.0" encoding="utf-8"?>
-<p:sld xmlns:a="http://schemas.openxmlformats.org/drawingml/2006/main" xmlns:p="http://schemas.openxmlformats.org/presentationml/2006/main" xmlns:r="http://schemas.openxmlformats.org/officeDocument/2006/relationships">
-  <p:cSld>
-    <p:bg>
-      <p:bgPr>
-        <a:solidFill>
-          <a:srgbClr val="FFFFFF"/>
-        </a:solidFill>
-        <a:effectLst/>
-      </p:bgPr>
-    </p:bg>
-    <p:spTree>
-      <p:nvGrpSpPr>
-        <p:cNvPr id="1" name=""/>
-        <p:cNvGrpSpPr/>
-        <p:nvPr/>
-      </p:nvGrpSpPr>
-      <p:grpSpPr/>
-      <p:sp>
-        <p:nvSpPr>
-          <p:cNvPr id="2" name="Rectangle 1"/>
-          <p:cNvSpPr/>
-          <p:nvPr/>
-        </p:nvSpPr>
-        <p:spPr>
-          <a:xfrm>
-            <a:off x="0" y="0"/>
-            <a:ext cx="12191695" cy="960120"/>
-          </a:xfrm>
-          <a:prstGeom prst="rect">
-            <a:avLst/>
-          </a:prstGeom>
-          <a:solidFill>
-            <a:srgbClr val="095292"/>
-          </a:solidFill>
-          <a:ln>
-            <a:noFill/>
-          </a:ln>
-        </p:spPr>
-        <p:style>
-          <a:lnRef idx="1">
-            <a:schemeClr val="accent1"/>
-          </a:lnRef>
-          <a:fillRef idx="3">
-            <a:schemeClr val="accent1"/>
-          </a:fillRef>
-          <a:effectRef idx="2">
-            <a:schemeClr val="accent1"/>
-          </a:effectRef>
-          <a:fontRef idx="minor">
-            <a:schemeClr val="lt1"/>
-          </a:fontRef>
-        </p:style>
-        <p:txBody>
-          <a:bodyPr rtlCol="0" anchor="ctr"/>
-          <a:lstStyle/>
-          <a:p>
-            <a:pPr algn="ctr"/>
-          </a:p>
-        </p:txBody>
-      </p:sp>
-      <p:sp>
-        <p:nvSpPr>
-          <p:cNvPr id="3" name="Rectangle 2"/>
-          <p:cNvSpPr/>
-          <p:nvPr/>
-        </p:nvSpPr>
-        <p:spPr>
-          <a:xfrm>
-            <a:off x="0" y="960120"/>
-            <a:ext cx="12191695" cy="41148"/>
-          </a:xfrm>
-          <a:prstGeom prst="rect">
-            <a:avLst/>
-          </a:prstGeom>
-          <a:solidFill>
-            <a:srgbClr val="FFD000"/>
-          </a:solidFill>
-          <a:ln>
-            <a:noFill/>
-          </a:ln>
-        </p:spPr>
-        <p:style>
-          <a:lnRef idx="1">
-            <a:schemeClr val="accent1"/>
-          </a:lnRef>
-          <a:fillRef idx="3">
-            <a:schemeClr val="accent1"/>
-          </a:fillRef>
-          <a:effectRef idx="2">
-            <a:schemeClr val="accent1"/>
-          </a:effectRef>
-          <a:fontRef idx="minor">
-            <a:schemeClr val="lt1"/>
-          </a:fontRef>
-        </p:style>
-        <p:txBody>
-          <a:bodyPr rtlCol="0" anchor="ctr"/>
-          <a:lstStyle/>
-          <a:p>
-            <a:pPr algn="ctr"/>
-          </a:p>
-        </p:txBody>
-      </p:sp>
-      <p:sp>
-        <p:nvSpPr>
-          <p:cNvPr id="4" name="TextBox 3"/>
-          <p:cNvSpPr txBox="1"/>
-          <p:nvPr/>
-        </p:nvSpPr>
-        <p:spPr>
-          <a:xfrm>
-            <a:off x="457200" y="164592"/>
-            <a:ext cx="11277295" cy="502920"/>
-          </a:xfrm>
-          <a:prstGeom prst="rect">
-            <a:avLst/>
-          </a:prstGeom>
-          <a:noFill/>
-        </p:spPr>
-        <p:txBody>
-          <a:bodyPr wrap="square">
-            <a:spAutoFit/>
-          </a:bodyPr>
-          <a:lstStyle/>
-          <a:p>
-            <a:r>
-              <a:rPr sz="2600" b="1" i="0">
-                <a:solidFill>
-                  <a:srgbClr val="FFFFFF"/>
-                </a:solidFill>
-                <a:latin typeface="Calibri"/>
-              </a:rPr>
-              <a:t>Criterios de exito / entregable</a:t>
-            </a:r>
-          </a:p>
-        </p:txBody>
-      </p:sp>
-      <p:sp>
-        <p:nvSpPr>
-          <p:cNvPr id="5" name="TextBox 4"/>
-          <p:cNvSpPr txBox="1"/>
-          <p:nvPr/>
-        </p:nvSpPr>
-        <p:spPr>
-          <a:xfrm>
-            <a:off x="457200" y="1170432"/>
-            <a:ext cx="11277295" cy="5230368"/>
-          </a:xfrm>
-          <a:prstGeom prst="rect">
-            <a:avLst/>
-          </a:prstGeom>
-          <a:noFill/>
-        </p:spPr>
-        <p:txBody>
-          <a:bodyPr wrap="square">
-            <a:spAutoFit/>
-          </a:bodyPr>
-          <a:lstStyle/>
-          <a:p>
-            <a:pPr>
-              <a:spcAft>
-                <a:spcPts val="800"/>
-              </a:spcAft>
-            </a:pPr>
-            <a:r>
-              <a:rPr sz="2000" b="0" i="0">
-                <a:solidFill>
-                  <a:srgbClr val="333333"/>
-                </a:solidFill>
-                <a:latin typeface="Calibri"/>
-              </a:rPr>
-              <a:t>–   </a:t>
-            </a:r>
-            <a:r>
-              <a:rPr sz="2000" b="1" i="0">
-                <a:solidFill>
-                  <a:srgbClr val="333333"/>
-                </a:solidFill>
-                <a:latin typeface="Calibri"/>
-              </a:rPr>
-              <a:t>Entregable:</a:t>
-            </a:r>
-            <a:r>
-              <a:rPr sz="2000" b="0" i="0">
-                <a:solidFill>
-                  <a:srgbClr val="333333"/>
-                </a:solidFill>
-                <a:latin typeface="Calibri"/>
-              </a:rPr>
-              <a:t> Guion de sustentacion con bloques, minutos y evidencia que se muestra (mas el responsable nominal solo si el docente autorizo equipo), mas la planilla de tiempos de dos ensayos y el video de respaldo de la ruta feliz, subido a la plataforma del curso.</a:t>
-            </a:r>
-          </a:p>
-          <a:p>
-            <a:pPr>
-              <a:spcAft>
-                <a:spcPts val="800"/>
-              </a:spcAft>
-            </a:pPr>
-            <a:r>
-              <a:rPr sz="2000" b="0" i="0">
-                <a:solidFill>
-                  <a:srgbClr val="333333"/>
-                </a:solidFill>
-                <a:latin typeface="Calibri"/>
-              </a:rPr>
-              <a:t>–   </a:t>
-            </a:r>
-            <a:r>
-              <a:rPr sz="2000" b="1" i="0">
-                <a:solidFill>
-                  <a:srgbClr val="333333"/>
-                </a:solidFill>
-                <a:latin typeface="Calibri"/>
-              </a:rPr>
-              <a:t>Exito:</a:t>
-            </a:r>
-            <a:r>
-              <a:rPr sz="2000" b="0" i="0">
-                <a:solidFill>
-                  <a:srgbClr val="333333"/>
-                </a:solidFill>
-                <a:latin typeface="Calibri"/>
-              </a:rPr>
-              <a:t> El guion escrito cubre los cinco bloques con minutos y evidencia, sin bloques huerfanos; si el docente autorizo equipo, todos los integrantes tienen bloque y ninguno queda sin intervencion.</a:t>
-            </a:r>
-          </a:p>
-          <a:p>
-            <a:pPr>
-              <a:spcAft>
-                <a:spcPts val="800"/>
-              </a:spcAft>
-            </a:pPr>
-            <a:r>
-              <a:rPr sz="2000" b="0" i="0">
-                <a:solidFill>
-                  <a:srgbClr val="333333"/>
-                </a:solidFill>
-                <a:latin typeface="Calibri"/>
-              </a:rPr>
-              <a:t>–   </a:t>
-            </a:r>
-            <a:r>
-              <a:rPr sz="2000" b="1" i="0">
-                <a:solidFill>
-                  <a:srgbClr val="333333"/>
-                </a:solidFill>
-                <a:latin typeface="Calibri"/>
-              </a:rPr>
-              <a:t>Exito:</a:t>
-            </a:r>
-            <a:r>
-              <a:rPr sz="2000" b="0" i="0">
-                <a:solidFill>
-                  <a:srgbClr val="333333"/>
-                </a:solidFill>
-                <a:latin typeface="Calibri"/>
-              </a:rPr>
-              <a:t> El chequeo pre-vuelo devuelve [OK] en los tres archivos de datos_demo y la aplicacion arranca mostrando informacion, nunca una lista vacia.</a:t>
-            </a:r>
-          </a:p>
-          <a:p>
-            <a:pPr>
-              <a:spcAft>
-                <a:spcPts val="800"/>
-              </a:spcAft>
-            </a:pPr>
-            <a:r>
-              <a:rPr sz="2000" b="0" i="0">
-                <a:solidFill>
-                  <a:srgbClr val="333333"/>
-                </a:solidFill>
-                <a:latin typeface="Calibri"/>
-              </a:rPr>
-              <a:t>–   </a:t>
-            </a:r>
-            <a:r>
-              <a:rPr sz="2000" b="1" i="0">
-                <a:solidFill>
-                  <a:srgbClr val="333333"/>
-                </a:solidFill>
-                <a:latin typeface="Calibri"/>
-              </a:rPr>
-              <a:t>Exito:</a:t>
-            </a:r>
-            <a:r>
-              <a:rPr sz="2000" b="0" i="0">
-                <a:solidFill>
-                  <a:srgbClr val="333333"/>
-                </a:solidFill>
-                <a:latin typeface="Calibri"/>
-              </a:rPr>
-              <a:t> Los dos ensayos quedan cronometrados y el segundo cae entre 5 y 8 minutos, con la demo en vivo ocupando al menos la mitad del tiempo.</a:t>
-            </a:r>
-          </a:p>
-          <a:p>
-            <a:pPr>
-              <a:spcAft>
-                <a:spcPts val="800"/>
-              </a:spcAft>
-            </a:pPr>
-            <a:r>
-              <a:rPr sz="2000" b="0" i="0">
-                <a:solidFill>
-                  <a:srgbClr val="333333"/>
-                </a:solidFill>
-                <a:latin typeface="Calibri"/>
-              </a:rPr>
-              <a:t>–   </a:t>
-            </a:r>
-            <a:r>
-              <a:rPr sz="2000" b="1" i="0">
-                <a:solidFill>
-                  <a:srgbClr val="333333"/>
-                </a:solidFill>
-                <a:latin typeface="Calibri"/>
-              </a:rPr>
-              <a:t>Exito:</a:t>
-            </a:r>
-            <a:r>
-              <a:rPr sz="2000" b="0" i="0">
-                <a:solidFill>
-                  <a:srgbClr val="333333"/>
-                </a:solidFill>
-                <a:latin typeface="Calibri"/>
-              </a:rPr>
-              <a:t> Existe plan B verificado: video de la ruta feliz reproducible sin internet y seis capturas exportadas en la carpeta del proyecto.</a:t>
-            </a:r>
-          </a:p>
-          <a:p>
-            <a:pPr>
-              <a:spcAft>
-                <a:spcPts val="800"/>
-              </a:spcAft>
-            </a:pPr>
-            <a:r>
-              <a:rPr sz="2000" b="0" i="0">
-                <a:solidFill>
-                  <a:srgbClr val="333333"/>
-                </a:solidFill>
-                <a:latin typeface="Calibri"/>
-              </a:rPr>
-              <a:t>–   </a:t>
-            </a:r>
-            <a:r>
-              <a:rPr sz="2000" b="1" i="0">
-                <a:solidFill>
-                  <a:srgbClr val="333333"/>
-                </a:solidFill>
-                <a:latin typeface="Calibri"/>
-              </a:rPr>
-              <a:t>Entrega en la plataforma del curso</a:t>
-            </a:r>
-            <a:r>
-              <a:rPr sz="2000" b="0" i="0">
-                <a:solidFill>
-                  <a:srgbClr val="333333"/>
-                </a:solidFill>
-                <a:latin typeface="Calibri"/>
-              </a:rPr>
-              <a:t> — en la fecha que indique el docente.</a:t>
-            </a:r>
-          </a:p>
-        </p:txBody>
-      </p:sp>
-      <p:sp>
-        <p:nvSpPr>
-          <p:cNvPr id="6" name="TextBox 5"/>
-          <p:cNvSpPr txBox="1"/>
-          <p:nvPr/>
-        </p:nvSpPr>
-        <p:spPr>
-          <a:xfrm>
-            <a:off x="11185855" y="6473952"/>
-            <a:ext cx="640080" cy="274320"/>
-          </a:xfrm>
-          <a:prstGeom prst="rect">
-            <a:avLst/>
-          </a:prstGeom>
-          <a:noFill/>
-        </p:spPr>
-        <p:txBody>
-          <a:bodyPr wrap="square">
-            <a:spAutoFit/>
-          </a:bodyPr>
-          <a:lstStyle/>
-          <a:p>
-            <a:pPr algn="r"/>
-            <a:r>
-              <a:rPr sz="1100" b="0" i="0">
-                <a:solidFill>
-                  <a:srgbClr val="666666"/>
-                </a:solidFill>
-                <a:latin typeface="Calibri"/>
-              </a:rPr>
-              <a:t>30</a:t>
-            </a:r>
-          </a:p>
-        </p:txBody>
-      </p:sp>
-    </p:spTree>
-  </p:cSld>
-  <p:clrMapOvr>
-    <a:masterClrMapping/>
-  </p:clrMapOvr>
-</p:sld>
-</file>
-
-<file path=ppt/slides/slide31.xml><?xml version="1.0" encoding="utf-8"?>
-<p:sld xmlns:a="http://schemas.openxmlformats.org/drawingml/2006/main" xmlns:p="http://schemas.openxmlformats.org/presentationml/2006/main" xmlns:r="http://schemas.openxmlformats.org/officeDocument/2006/relationships">
-  <p:cSld>
-    <p:bg>
-      <p:bgPr>
-        <a:solidFill>
-          <a:srgbClr val="FFFFFF"/>
-        </a:solidFill>
-        <a:effectLst/>
-      </p:bgPr>
-    </p:bg>
-    <p:spTree>
-      <p:nvGrpSpPr>
-        <p:cNvPr id="1" name=""/>
-        <p:cNvGrpSpPr/>
-        <p:nvPr/>
-      </p:nvGrpSpPr>
-      <p:grpSpPr/>
-      <p:sp>
-        <p:nvSpPr>
-          <p:cNvPr id="2" name="Rectangle 1"/>
-          <p:cNvSpPr/>
-          <p:nvPr/>
-        </p:nvSpPr>
-        <p:spPr>
-          <a:xfrm>
-            <a:off x="0" y="0"/>
-            <a:ext cx="12191695" cy="960120"/>
-          </a:xfrm>
-          <a:prstGeom prst="rect">
-            <a:avLst/>
-          </a:prstGeom>
-          <a:solidFill>
-            <a:srgbClr val="095292"/>
-          </a:solidFill>
-          <a:ln>
-            <a:noFill/>
-          </a:ln>
-        </p:spPr>
-        <p:style>
-          <a:lnRef idx="1">
-            <a:schemeClr val="accent1"/>
-          </a:lnRef>
-          <a:fillRef idx="3">
-            <a:schemeClr val="accent1"/>
-          </a:fillRef>
-          <a:effectRef idx="2">
-            <a:schemeClr val="accent1"/>
-          </a:effectRef>
-          <a:fontRef idx="minor">
-            <a:schemeClr val="lt1"/>
-          </a:fontRef>
-        </p:style>
-        <p:txBody>
-          <a:bodyPr rtlCol="0" anchor="ctr"/>
-          <a:lstStyle/>
-          <a:p>
-            <a:pPr algn="ctr"/>
-          </a:p>
-        </p:txBody>
-      </p:sp>
-      <p:sp>
-        <p:nvSpPr>
-          <p:cNvPr id="3" name="Rectangle 2"/>
-          <p:cNvSpPr/>
-          <p:nvPr/>
-        </p:nvSpPr>
-        <p:spPr>
-          <a:xfrm>
-            <a:off x="0" y="960120"/>
-            <a:ext cx="12191695" cy="41148"/>
-          </a:xfrm>
-          <a:prstGeom prst="rect">
-            <a:avLst/>
-          </a:prstGeom>
-          <a:solidFill>
-            <a:srgbClr val="FFD000"/>
-          </a:solidFill>
-          <a:ln>
-            <a:noFill/>
-          </a:ln>
-        </p:spPr>
-        <p:style>
-          <a:lnRef idx="1">
-            <a:schemeClr val="accent1"/>
-          </a:lnRef>
-          <a:fillRef idx="3">
-            <a:schemeClr val="accent1"/>
-          </a:fillRef>
-          <a:effectRef idx="2">
-            <a:schemeClr val="accent1"/>
-          </a:effectRef>
-          <a:fontRef idx="minor">
-            <a:schemeClr val="lt1"/>
-          </a:fontRef>
-        </p:style>
-        <p:txBody>
-          <a:bodyPr rtlCol="0" anchor="ctr"/>
-          <a:lstStyle/>
-          <a:p>
-            <a:pPr algn="ctr"/>
-          </a:p>
-        </p:txBody>
-      </p:sp>
-      <p:sp>
-        <p:nvSpPr>
-          <p:cNvPr id="4" name="TextBox 3"/>
-          <p:cNvSpPr txBox="1"/>
-          <p:nvPr/>
-        </p:nvSpPr>
-        <p:spPr>
-          <a:xfrm>
-            <a:off x="457200" y="164592"/>
-            <a:ext cx="11277295" cy="502920"/>
-          </a:xfrm>
-          <a:prstGeom prst="rect">
-            <a:avLst/>
-          </a:prstGeom>
-          <a:noFill/>
-        </p:spPr>
-        <p:txBody>
-          <a:bodyPr wrap="square">
-            <a:spAutoFit/>
-          </a:bodyPr>
-          <a:lstStyle/>
-          <a:p>
-            <a:r>
-              <a:rPr sz="2600" b="1" i="0">
-                <a:solidFill>
-                  <a:srgbClr val="FFFFFF"/>
-                </a:solidFill>
-                <a:latin typeface="Calibri"/>
-              </a:rPr>
-              <a:t>Para el PI esta semana</a:t>
-            </a:r>
-          </a:p>
-        </p:txBody>
-      </p:sp>
-      <p:sp>
-        <p:nvSpPr>
-          <p:cNvPr id="5" name="Rounded Rectangle 4"/>
-          <p:cNvSpPr/>
-          <p:nvPr/>
-        </p:nvSpPr>
-        <p:spPr>
-          <a:xfrm>
-            <a:off x="457200" y="1261872"/>
-            <a:ext cx="11277295" cy="1051560"/>
-          </a:xfrm>
-          <a:prstGeom prst="roundRect">
-            <a:avLst>
-              <a:gd name="adj" fmla="val 12000"/>
-            </a:avLst>
-          </a:prstGeom>
-          <a:solidFill>
-            <a:srgbClr val="E8F4FA"/>
-          </a:solidFill>
-          <a:ln>
-            <a:noFill/>
-          </a:ln>
-        </p:spPr>
-        <p:style>
-          <a:lnRef idx="1">
-            <a:schemeClr val="accent1"/>
-          </a:lnRef>
-          <a:fillRef idx="3">
-            <a:schemeClr val="accent1"/>
-          </a:fillRef>
-          <a:effectRef idx="2">
-            <a:schemeClr val="accent1"/>
-          </a:effectRef>
-          <a:fontRef idx="minor">
-            <a:schemeClr val="lt1"/>
-          </a:fontRef>
-        </p:style>
-        <p:txBody>
-          <a:bodyPr rtlCol="0" anchor="ctr"/>
-          <a:lstStyle/>
-          <a:p>
-            <a:pPr algn="ctr"/>
-          </a:p>
-        </p:txBody>
-      </p:sp>
-      <p:sp>
-        <p:nvSpPr>
-          <p:cNvPr id="6" name="Rectangle 5"/>
-          <p:cNvSpPr/>
-          <p:nvPr/>
-        </p:nvSpPr>
-        <p:spPr>
-          <a:xfrm>
-            <a:off x="457200" y="1261872"/>
-            <a:ext cx="128016" cy="1051560"/>
-          </a:xfrm>
-          <a:prstGeom prst="rect">
-            <a:avLst/>
-          </a:prstGeom>
-          <a:solidFill>
-            <a:srgbClr val="269CCB"/>
-          </a:solidFill>
-          <a:ln>
-            <a:noFill/>
-          </a:ln>
-        </p:spPr>
-        <p:style>
-          <a:lnRef idx="1">
-            <a:schemeClr val="accent1"/>
-          </a:lnRef>
-          <a:fillRef idx="3">
-            <a:schemeClr val="accent1"/>
-          </a:fillRef>
-          <a:effectRef idx="2">
-            <a:schemeClr val="accent1"/>
-          </a:effectRef>
-          <a:fontRef idx="minor">
-            <a:schemeClr val="lt1"/>
-          </a:fontRef>
-        </p:style>
-        <p:txBody>
-          <a:bodyPr rtlCol="0" anchor="ctr"/>
-          <a:lstStyle/>
-          <a:p>
-            <a:pPr algn="ctr"/>
-          </a:p>
-        </p:txBody>
-      </p:sp>
-      <p:sp>
-        <p:nvSpPr>
-          <p:cNvPr id="7" name="TextBox 6"/>
-          <p:cNvSpPr txBox="1"/>
-          <p:nvPr/>
-        </p:nvSpPr>
-        <p:spPr>
-          <a:xfrm>
-            <a:off x="777240" y="1399031"/>
-            <a:ext cx="10774375" cy="822959"/>
-          </a:xfrm>
-          <a:prstGeom prst="rect">
-            <a:avLst/>
-          </a:prstGeom>
-          <a:noFill/>
-        </p:spPr>
-        <p:txBody>
-          <a:bodyPr wrap="square">
-            <a:spAutoFit/>
-          </a:bodyPr>
-          <a:lstStyle/>
-          <a:p>
-            <a:r>
-              <a:rPr sz="1200" b="1" i="0">
-                <a:solidFill>
-                  <a:srgbClr val="269CCB"/>
-                </a:solidFill>
-                <a:latin typeface="Calibri"/>
-              </a:rPr>
-              <a:t>Info</a:t>
-            </a:r>
-          </a:p>
-          <a:p>
-            <a:pPr>
-              <a:spcBef>
-                <a:spcPts val="400"/>
-              </a:spcBef>
-            </a:pPr>
-            <a:r>
-              <a:rPr sz="1400" b="0" i="0">
-                <a:solidFill>
-                  <a:srgbClr val="333333"/>
-                </a:solidFill>
-                <a:latin typeface="Calibri"/>
-              </a:rPr>
-              <a:t>Hito: VetCare queda con guion de sustentacion, juego de datos de demostracion sembrado y ensayo cronometrado dentro de la ventana de 5 a 8 minutos.</a:t>
-            </a:r>
-          </a:p>
-        </p:txBody>
-      </p:sp>
-      <p:sp>
-        <p:nvSpPr>
-          <p:cNvPr id="8" name="Rounded Rectangle 7"/>
-          <p:cNvSpPr/>
-          <p:nvPr/>
-        </p:nvSpPr>
-        <p:spPr>
-          <a:xfrm>
-            <a:off x="457200" y="2478024"/>
-            <a:ext cx="11277295" cy="1051560"/>
-          </a:xfrm>
-          <a:prstGeom prst="roundRect">
-            <a:avLst>
-              <a:gd name="adj" fmla="val 12000"/>
-            </a:avLst>
-          </a:prstGeom>
-          <a:solidFill>
-            <a:srgbClr val="FFF8E1"/>
-          </a:solidFill>
-          <a:ln>
-            <a:noFill/>
-          </a:ln>
-        </p:spPr>
-        <p:style>
-          <a:lnRef idx="1">
-            <a:schemeClr val="accent1"/>
-          </a:lnRef>
-          <a:fillRef idx="3">
-            <a:schemeClr val="accent1"/>
-          </a:fillRef>
-          <a:effectRef idx="2">
-            <a:schemeClr val="accent1"/>
-          </a:effectRef>
-          <a:fontRef idx="minor">
-            <a:schemeClr val="lt1"/>
-          </a:fontRef>
-        </p:style>
-        <p:txBody>
-          <a:bodyPr rtlCol="0" anchor="ctr"/>
-          <a:lstStyle/>
-          <a:p>
-            <a:pPr algn="ctr"/>
-          </a:p>
-        </p:txBody>
-      </p:sp>
-      <p:sp>
-        <p:nvSpPr>
-          <p:cNvPr id="9" name="Rectangle 8"/>
-          <p:cNvSpPr/>
-          <p:nvPr/>
-        </p:nvSpPr>
-        <p:spPr>
-          <a:xfrm>
-            <a:off x="457200" y="2478024"/>
-            <a:ext cx="128016" cy="1051560"/>
-          </a:xfrm>
-          <a:prstGeom prst="rect">
-            <a:avLst/>
-          </a:prstGeom>
-          <a:solidFill>
-            <a:srgbClr val="FFD000"/>
-          </a:solidFill>
-          <a:ln>
-            <a:noFill/>
-          </a:ln>
-        </p:spPr>
-        <p:style>
-          <a:lnRef idx="1">
-            <a:schemeClr val="accent1"/>
-          </a:lnRef>
-          <a:fillRef idx="3">
-            <a:schemeClr val="accent1"/>
-          </a:fillRef>
-          <a:effectRef idx="2">
-            <a:schemeClr val="accent1"/>
-          </a:effectRef>
-          <a:fontRef idx="minor">
-            <a:schemeClr val="lt1"/>
-          </a:fontRef>
-        </p:style>
-        <p:txBody>
-          <a:bodyPr rtlCol="0" anchor="ctr"/>
-          <a:lstStyle/>
-          <a:p>
-            <a:pPr algn="ctr"/>
-          </a:p>
-        </p:txBody>
-      </p:sp>
-      <p:sp>
-        <p:nvSpPr>
-          <p:cNvPr id="10" name="TextBox 9"/>
-          <p:cNvSpPr txBox="1"/>
-          <p:nvPr/>
-        </p:nvSpPr>
-        <p:spPr>
-          <a:xfrm>
-            <a:off x="777240" y="2615184"/>
-            <a:ext cx="10774375" cy="822959"/>
-          </a:xfrm>
-          <a:prstGeom prst="rect">
-            <a:avLst/>
-          </a:prstGeom>
-          <a:noFill/>
-        </p:spPr>
-        <p:txBody>
-          <a:bodyPr wrap="square">
-            <a:spAutoFit/>
-          </a:bodyPr>
-          <a:lstStyle/>
-          <a:p>
-            <a:r>
-              <a:rPr sz="1200" b="1" i="0">
-                <a:solidFill>
-                  <a:srgbClr val="FFD000"/>
-                </a:solidFill>
-                <a:latin typeface="Calibri"/>
-              </a:rPr>
-              <a:t>Aclaración</a:t>
-            </a:r>
-          </a:p>
-          <a:p>
-            <a:pPr>
-              <a:spcBef>
-                <a:spcPts val="400"/>
-              </a:spcBef>
-            </a:pPr>
-            <a:r>
-              <a:rPr sz="1400" b="0" i="0">
-                <a:solidFill>
-                  <a:srgbClr val="333333"/>
-                </a:solidFill>
-                <a:latin typeface="Calibri"/>
-              </a:rPr>
-              <a:t>Enunciado completo: Clases/Proyecto Integrador/ (VetCare).</a:t>
-            </a:r>
-          </a:p>
-        </p:txBody>
-      </p:sp>
-      <p:sp>
-        <p:nvSpPr>
-          <p:cNvPr id="11" name="Rounded Rectangle 10"/>
-          <p:cNvSpPr/>
-          <p:nvPr/>
-        </p:nvSpPr>
-        <p:spPr>
-          <a:xfrm>
-            <a:off x="457200" y="3694176"/>
-            <a:ext cx="11277295" cy="1051560"/>
-          </a:xfrm>
-          <a:prstGeom prst="roundRect">
-            <a:avLst>
-              <a:gd name="adj" fmla="val 12000"/>
-            </a:avLst>
-          </a:prstGeom>
-          <a:solidFill>
-            <a:srgbClr val="FBE4E4"/>
-          </a:solidFill>
-          <a:ln>
-            <a:noFill/>
-          </a:ln>
-        </p:spPr>
-        <p:style>
-          <a:lnRef idx="1">
-            <a:schemeClr val="accent1"/>
-          </a:lnRef>
-          <a:fillRef idx="3">
-            <a:schemeClr val="accent1"/>
-          </a:fillRef>
-          <a:effectRef idx="2">
-            <a:schemeClr val="accent1"/>
-          </a:effectRef>
-          <a:fontRef idx="minor">
-            <a:schemeClr val="lt1"/>
-          </a:fontRef>
-        </p:style>
-        <p:txBody>
-          <a:bodyPr rtlCol="0" anchor="ctr"/>
-          <a:lstStyle/>
-          <a:p>
-            <a:pPr algn="ctr"/>
-          </a:p>
-        </p:txBody>
-      </p:sp>
-      <p:sp>
-        <p:nvSpPr>
-          <p:cNvPr id="12" name="Rectangle 11"/>
-          <p:cNvSpPr/>
-          <p:nvPr/>
-        </p:nvSpPr>
-        <p:spPr>
-          <a:xfrm>
-            <a:off x="457200" y="3694176"/>
-            <a:ext cx="128016" cy="1051560"/>
-          </a:xfrm>
-          <a:prstGeom prst="rect">
-            <a:avLst/>
-          </a:prstGeom>
-          <a:solidFill>
-            <a:srgbClr val="A02030"/>
-          </a:solidFill>
-          <a:ln>
-            <a:noFill/>
-          </a:ln>
-        </p:spPr>
-        <p:style>
-          <a:lnRef idx="1">
-            <a:schemeClr val="accent1"/>
-          </a:lnRef>
-          <a:fillRef idx="3">
-            <a:schemeClr val="accent1"/>
-          </a:fillRef>
-          <a:effectRef idx="2">
-            <a:schemeClr val="accent1"/>
-          </a:effectRef>
-          <a:fontRef idx="minor">
-            <a:schemeClr val="lt1"/>
-          </a:fontRef>
-        </p:style>
-        <p:txBody>
-          <a:bodyPr rtlCol="0" anchor="ctr"/>
-          <a:lstStyle/>
-          <a:p>
-            <a:pPr algn="ctr"/>
-          </a:p>
-        </p:txBody>
-      </p:sp>
-      <p:sp>
-        <p:nvSpPr>
-          <p:cNvPr id="13" name="TextBox 12"/>
-          <p:cNvSpPr txBox="1"/>
-          <p:nvPr/>
-        </p:nvSpPr>
-        <p:spPr>
-          <a:xfrm>
-            <a:off x="777240" y="3831336"/>
-            <a:ext cx="10774375" cy="822959"/>
-          </a:xfrm>
-          <a:prstGeom prst="rect">
-            <a:avLst/>
-          </a:prstGeom>
-          <a:noFill/>
-        </p:spPr>
-        <p:txBody>
-          <a:bodyPr wrap="square">
-            <a:spAutoFit/>
-          </a:bodyPr>
-          <a:lstStyle/>
-          <a:p>
-            <a:r>
-              <a:rPr sz="1200" b="1" i="0">
-                <a:solidFill>
-                  <a:srgbClr val="A02030"/>
-                </a:solidFill>
-                <a:latin typeface="Calibri"/>
-              </a:rPr>
-              <a:t>Atención</a:t>
-            </a:r>
-          </a:p>
-          <a:p>
-            <a:pPr>
-              <a:spcBef>
-                <a:spcPts val="400"/>
-              </a:spcBef>
-            </a:pPr>
-            <a:r>
-              <a:rPr sz="1400" b="0" i="0">
-                <a:solidFill>
-                  <a:srgbClr val="333333"/>
-                </a:solidFill>
-                <a:latin typeface="Calibri"/>
-              </a:rPr>
-              <a:t>Entrega del taller, si el docente lo asigna · en la fecha que indique el docente.</a:t>
-            </a:r>
-          </a:p>
-        </p:txBody>
-      </p:sp>
-      <p:sp>
-        <p:nvSpPr>
-          <p:cNvPr id="14" name="TextBox 13"/>
-          <p:cNvSpPr txBox="1"/>
-          <p:nvPr/>
-        </p:nvSpPr>
-        <p:spPr>
-          <a:xfrm>
-            <a:off x="11185855" y="6473952"/>
-            <a:ext cx="640080" cy="274320"/>
-          </a:xfrm>
-          <a:prstGeom prst="rect">
-            <a:avLst/>
-          </a:prstGeom>
-          <a:noFill/>
-        </p:spPr>
-        <p:txBody>
-          <a:bodyPr wrap="square">
-            <a:spAutoFit/>
-          </a:bodyPr>
-          <a:lstStyle/>
-          <a:p>
-            <a:pPr algn="r"/>
-            <a:r>
-              <a:rPr sz="1100" b="0" i="0">
-                <a:solidFill>
-                  <a:srgbClr val="666666"/>
-                </a:solidFill>
-                <a:latin typeface="Calibri"/>
-              </a:rPr>
-              <a:t>31</a:t>
-            </a:r>
-          </a:p>
-        </p:txBody>
-      </p:sp>
-    </p:spTree>
-  </p:cSld>
-  <p:clrMapOvr>
-    <a:masterClrMapping/>
-  </p:clrMapOvr>
-</p:sld>
-</file>
-
-<file path=ppt/slides/slide32.xml><?xml version="1.0" encoding="utf-8"?>
-<p:sld xmlns:a="http://schemas.openxmlformats.org/drawingml/2006/main" xmlns:p="http://schemas.openxmlformats.org/presentationml/2006/main" xmlns:r="http://schemas.openxmlformats.org/officeDocument/2006/relationships">
-  <p:cSld>
-    <p:bg>
-      <p:bgPr>
-        <a:solidFill>
-          <a:srgbClr val="FFFFFF"/>
-        </a:solidFill>
-        <a:effectLst/>
-      </p:bgPr>
-    </p:bg>
-    <p:spTree>
-      <p:nvGrpSpPr>
-        <p:cNvPr id="1" name=""/>
-        <p:cNvGrpSpPr/>
-        <p:nvPr/>
-      </p:nvGrpSpPr>
-      <p:grpSpPr/>
-      <p:sp>
-        <p:nvSpPr>
-          <p:cNvPr id="2" name="Rectangle 1"/>
-          <p:cNvSpPr/>
-          <p:nvPr/>
-        </p:nvSpPr>
-        <p:spPr>
-          <a:xfrm>
-            <a:off x="0" y="0"/>
-            <a:ext cx="12191695" cy="164592"/>
-          </a:xfrm>
-          <a:prstGeom prst="rect">
-            <a:avLst/>
-          </a:prstGeom>
-          <a:solidFill>
-            <a:srgbClr val="269CCB"/>
-          </a:solidFill>
-          <a:ln>
-            <a:noFill/>
-          </a:ln>
-        </p:spPr>
-        <p:style>
-          <a:lnRef idx="1">
-            <a:schemeClr val="accent1"/>
-          </a:lnRef>
-          <a:fillRef idx="3">
-            <a:schemeClr val="accent1"/>
-          </a:fillRef>
-          <a:effectRef idx="2">
-            <a:schemeClr val="accent1"/>
-          </a:effectRef>
-          <a:fontRef idx="minor">
-            <a:schemeClr val="lt1"/>
-          </a:fontRef>
-        </p:style>
-        <p:txBody>
-          <a:bodyPr rtlCol="0" anchor="ctr"/>
-          <a:lstStyle/>
-          <a:p>
-            <a:pPr algn="ctr"/>
-          </a:p>
-        </p:txBody>
-      </p:sp>
-      <p:pic>
-        <p:nvPicPr>
-          <p:cNvPr id="3" name="Picture 2" descr="logo_uniajc_color.png"/>
-          <p:cNvPicPr>
-            <a:picLocks noChangeAspect="1"/>
-          </p:cNvPicPr>
-          <p:nvPr/>
-        </p:nvPicPr>
-        <p:blipFill>
-          <a:blip r:embed="rId2"/>
-          <a:stretch>
-            <a:fillRect/>
-          </a:stretch>
-        </p:blipFill>
-        <p:spPr>
-          <a:xfrm>
-            <a:off x="10271455" y="5998464"/>
-            <a:ext cx="1463040" cy="643233"/>
-          </a:xfrm>
-          <a:prstGeom prst="rect">
-            <a:avLst/>
-          </a:prstGeom>
-        </p:spPr>
-      </p:pic>
-      <p:sp>
-        <p:nvSpPr>
-          <p:cNvPr id="4" name="TextBox 3"/>
-          <p:cNvSpPr txBox="1"/>
-          <p:nvPr/>
-        </p:nvSpPr>
-        <p:spPr>
-          <a:xfrm>
-            <a:off x="457200" y="1737360"/>
-            <a:ext cx="11277295" cy="1097280"/>
-          </a:xfrm>
-          <a:prstGeom prst="rect">
-            <a:avLst/>
-          </a:prstGeom>
-          <a:noFill/>
-        </p:spPr>
-        <p:txBody>
-          <a:bodyPr wrap="square" anchor="ctr"/>
-          <a:lstStyle/>
-          <a:p>
-            <a:pPr algn="ctr"/>
-            <a:r>
-              <a:rPr sz="3400" b="1" i="0">
-                <a:solidFill>
-                  <a:srgbClr val="095292"/>
-                </a:solidFill>
-                <a:latin typeface="Calibri"/>
-              </a:rPr>
-              <a:t>Clase 14 · VetCare avanza</a:t>
-            </a:r>
-          </a:p>
-        </p:txBody>
-      </p:sp>
-      <p:sp>
-        <p:nvSpPr>
-          <p:cNvPr id="5" name="TextBox 4"/>
-          <p:cNvSpPr txBox="1"/>
-          <p:nvPr/>
-        </p:nvSpPr>
-        <p:spPr>
-          <a:xfrm>
-            <a:off x="457200" y="3017520"/>
-            <a:ext cx="11277295" cy="1645920"/>
-          </a:xfrm>
-          <a:prstGeom prst="rect">
-            <a:avLst/>
-          </a:prstGeom>
-          <a:noFill/>
-        </p:spPr>
-        <p:txBody>
-          <a:bodyPr wrap="square">
-            <a:spAutoFit/>
-          </a:bodyPr>
-          <a:lstStyle/>
-          <a:p>
-            <a:pPr algn="ctr">
-              <a:spcAft>
-                <a:spcPts val="600"/>
-              </a:spcAft>
-            </a:pPr>
-            <a:r>
-              <a:rPr sz="1600" b="0" i="0">
-                <a:solidFill>
-                  <a:srgbClr val="333333"/>
-                </a:solidFill>
-                <a:latin typeface="Calibri"/>
-              </a:rPr>
-              <a:t>VetCare queda con guion de sustentacion, juego de datos de demostracion sembrado y ensayo cronometrado dentro de la ventana de 5 a 8 minutos.</a:t>
-            </a:r>
-          </a:p>
-          <a:p>
-            <a:pPr algn="ctr">
-              <a:spcAft>
-                <a:spcPts val="600"/>
-              </a:spcAft>
-            </a:pPr>
-            <a:r>
-              <a:rPr sz="1600" b="0" i="0">
-                <a:solidFill>
-                  <a:srgbClr val="333333"/>
-                </a:solidFill>
-                <a:latin typeface="Calibri"/>
-              </a:rPr>
-              <a:t>Entregable: Guion de sustentacion con bloques, minutos y evidencia que se muestra (mas el responsable nominal solo si el docente autorizo equipo), mas la planilla de tiempos de dos ensayos y el video de respaldo de la ruta feliz, subido a la plataforma del curso.</a:t>
-            </a:r>
-          </a:p>
-          <a:p>
-            <a:pPr algn="ctr">
-              <a:spcAft>
-                <a:spcPts val="600"/>
-              </a:spcAft>
-            </a:pPr>
-            <a:r>
-              <a:rPr sz="1600" b="0" i="0">
-                <a:solidFill>
-                  <a:srgbClr val="333333"/>
-                </a:solidFill>
-                <a:latin typeface="Calibri"/>
-              </a:rPr>
-              <a:t>Siguiente clase: continuamos el hilo del PI</a:t>
-            </a:r>
-          </a:p>
-        </p:txBody>
-      </p:sp>
-      <p:sp>
-        <p:nvSpPr>
-          <p:cNvPr id="6" name="TextBox 5"/>
-          <p:cNvSpPr txBox="1"/>
-          <p:nvPr/>
-        </p:nvSpPr>
-        <p:spPr>
-          <a:xfrm>
-            <a:off x="457200" y="4754880"/>
-            <a:ext cx="11277295" cy="640080"/>
-          </a:xfrm>
-          <a:prstGeom prst="rect">
-            <a:avLst/>
-          </a:prstGeom>
-          <a:noFill/>
-        </p:spPr>
-        <p:txBody>
-          <a:bodyPr wrap="square">
-            <a:spAutoFit/>
-          </a:bodyPr>
-          <a:lstStyle/>
-          <a:p>
-            <a:pPr algn="ctr"/>
-            <a:r>
-              <a:rPr sz="2000" b="1" i="0">
-                <a:solidFill>
-                  <a:srgbClr val="269CCB"/>
-                </a:solidFill>
-                <a:latin typeface="Calibri"/>
-              </a:rPr>
-              <a:t>Teoria al servicio del proyecto</a:t>
             </a:r>
           </a:p>
         </p:txBody>
@@ -17749,4 +15128,324 @@
   </a:objectDefaults>
   <a:extraClrSchemeLst/>
 </a:theme>
+</file>
+
+<file path=ppt/theme/theme2.xml><?xml version="1.0" encoding="utf-8"?>
+<a:theme xmlns:a="http://schemas.openxmlformats.org/drawingml/2006/main" name="Office Theme">
+  <a:themeElements>
+    <a:clrScheme name="Office">
+      <a:dk1>
+        <a:sysClr val="windowText" lastClr="000000"/>
+      </a:dk1>
+      <a:lt1>
+        <a:sysClr val="window" lastClr="FFFFFF"/>
+      </a:lt1>
+      <a:dk2>
+        <a:srgbClr val="1F497D"/>
+      </a:dk2>
+      <a:lt2>
+        <a:srgbClr val="EEECE1"/>
+      </a:lt2>
+      <a:accent1>
+        <a:srgbClr val="4F81BD"/>
+      </a:accent1>
+      <a:accent2>
+        <a:srgbClr val="C0504D"/>
+      </a:accent2>
+      <a:accent3>
+        <a:srgbClr val="9BBB59"/>
+      </a:accent3>
+      <a:accent4>
+        <a:srgbClr val="8064A2"/>
+      </a:accent4>
+      <a:accent5>
+        <a:srgbClr val="4BACC6"/>
+      </a:accent5>
+      <a:accent6>
+        <a:srgbClr val="F79646"/>
+      </a:accent6>
+      <a:hlink>
+        <a:srgbClr val="0000FF"/>
+      </a:hlink>
+      <a:folHlink>
+        <a:srgbClr val="800080"/>
+      </a:folHlink>
+    </a:clrScheme>
+    <a:fontScheme name="Office">
+      <a:majorFont>
+        <a:latin typeface="Calibri"/>
+        <a:ea typeface=""/>
+        <a:cs typeface=""/>
+        <a:font script="Jpan" typeface="ＭＳ Ｐゴシック"/>
+        <a:font script="Hang" typeface="맑은 고딕"/>
+        <a:font script="Hans" typeface="宋体"/>
+        <a:font script="Hant" typeface="新細明體"/>
+        <a:font script="Arab" typeface="Times New Roman"/>
+        <a:font script="Hebr" typeface="Times New Roman"/>
+        <a:font script="Thai" typeface="Angsana New"/>
+        <a:font script="Ethi" typeface="Nyala"/>
+        <a:font script="Beng" typeface="Vrinda"/>
+        <a:font script="Gujr" typeface="Shruti"/>
+        <a:font script="Khmr" typeface="MoolBoran"/>
+        <a:font script="Knda" typeface="Tunga"/>
+        <a:font script="Guru" typeface="Raavi"/>
+        <a:font script="Cans" typeface="Euphemia"/>
+        <a:font script="Cher" typeface="Plantagenet Cherokee"/>
+        <a:font script="Yiii" typeface="Microsoft Yi Baiti"/>
+        <a:font script="Tibt" typeface="Microsoft Himalaya"/>
+        <a:font script="Thaa" typeface="MV Boli"/>
+        <a:font script="Deva" typeface="Mangal"/>
+        <a:font script="Telu" typeface="Gautami"/>
+        <a:font script="Taml" typeface="Latha"/>
+        <a:font script="Syrc" typeface="Estrangelo Edessa"/>
+        <a:font script="Orya" typeface="Kalinga"/>
+        <a:font script="Mlym" typeface="Kartika"/>
+        <a:font script="Laoo" typeface="DokChampa"/>
+        <a:font script="Sinh" typeface="Iskoola Pota"/>
+        <a:font script="Mong" typeface="Mongolian Baiti"/>
+        <a:font script="Viet" typeface="Times New Roman"/>
+        <a:font script="Uigh" typeface="Microsoft Uighur"/>
+        <a:font script="Geor" typeface="Sylfaen"/>
+      </a:majorFont>
+      <a:minorFont>
+        <a:latin typeface="Calibri"/>
+        <a:ea typeface=""/>
+        <a:cs typeface=""/>
+        <a:font script="Jpan" typeface="ＭＳ Ｐゴシック"/>
+        <a:font script="Hang" typeface="맑은 고딕"/>
+        <a:font script="Hans" typeface="宋体"/>
+        <a:font script="Hant" typeface="新細明體"/>
+        <a:font script="Arab" typeface="Arial"/>
+        <a:font script="Hebr" typeface="Arial"/>
+        <a:font script="Thai" typeface="Cordia New"/>
+        <a:font script="Ethi" typeface="Nyala"/>
+        <a:font script="Beng" typeface="Vrinda"/>
+        <a:font script="Gujr" typeface="Shruti"/>
+        <a:font script="Khmr" typeface="DaunPenh"/>
+        <a:font script="Knda" typeface="Tunga"/>
+        <a:font script="Guru" typeface="Raavi"/>
+        <a:font script="Cans" typeface="Euphemia"/>
+        <a:font script="Cher" typeface="Plantagenet Cherokee"/>
+        <a:font script="Yiii" typeface="Microsoft Yi Baiti"/>
+        <a:font script="Tibt" typeface="Microsoft Himalaya"/>
+        <a:font script="Thaa" typeface="MV Boli"/>
+        <a:font script="Deva" typeface="Mangal"/>
+        <a:font script="Telu" typeface="Gautami"/>
+        <a:font script="Taml" typeface="Latha"/>
+        <a:font script="Syrc" typeface="Estrangelo Edessa"/>
+        <a:font script="Orya" typeface="Kalinga"/>
+        <a:font script="Mlym" typeface="Kartika"/>
+        <a:font script="Laoo" typeface="DokChampa"/>
+        <a:font script="Sinh" typeface="Iskoola Pota"/>
+        <a:font script="Mong" typeface="Mongolian Baiti"/>
+        <a:font script="Viet" typeface="Arial"/>
+        <a:font script="Uigh" typeface="Microsoft Uighur"/>
+        <a:font script="Geor" typeface="Sylfaen"/>
+      </a:minorFont>
+    </a:fontScheme>
+    <a:fmtScheme name="Office">
+      <a:fillStyleLst>
+        <a:solidFill>
+          <a:schemeClr val="phClr"/>
+        </a:solidFill>
+        <a:gradFill rotWithShape="1">
+          <a:gsLst>
+            <a:gs pos="0">
+              <a:schemeClr val="phClr">
+                <a:tint val="50000"/>
+                <a:satMod val="300000"/>
+              </a:schemeClr>
+            </a:gs>
+            <a:gs pos="35000">
+              <a:schemeClr val="phClr">
+                <a:tint val="37000"/>
+                <a:satMod val="300000"/>
+              </a:schemeClr>
+            </a:gs>
+            <a:gs pos="100000">
+              <a:schemeClr val="phClr">
+                <a:tint val="15000"/>
+                <a:satMod val="350000"/>
+              </a:schemeClr>
+            </a:gs>
+          </a:gsLst>
+          <a:lin ang="16200000" scaled="1"/>
+        </a:gradFill>
+        <a:gradFill rotWithShape="1">
+          <a:gsLst>
+            <a:gs pos="0">
+              <a:schemeClr val="phClr">
+                <a:tint val="100000"/>
+                <a:shade val="100000"/>
+                <a:satMod val="130000"/>
+              </a:schemeClr>
+            </a:gs>
+            <a:gs pos="100000">
+              <a:schemeClr val="phClr">
+                <a:tint val="50000"/>
+                <a:shade val="100000"/>
+                <a:satMod val="350000"/>
+              </a:schemeClr>
+            </a:gs>
+          </a:gsLst>
+          <a:lin ang="16200000" scaled="0"/>
+        </a:gradFill>
+      </a:fillStyleLst>
+      <a:lnStyleLst>
+        <a:ln w="9525" cap="flat" cmpd="sng" algn="ctr">
+          <a:solidFill>
+            <a:schemeClr val="phClr">
+              <a:shade val="95000"/>
+              <a:satMod val="105000"/>
+            </a:schemeClr>
+          </a:solidFill>
+          <a:prstDash val="solid"/>
+        </a:ln>
+        <a:ln w="25400" cap="flat" cmpd="sng" algn="ctr">
+          <a:solidFill>
+            <a:schemeClr val="phClr"/>
+          </a:solidFill>
+          <a:prstDash val="solid"/>
+        </a:ln>
+        <a:ln w="38100" cap="flat" cmpd="sng" algn="ctr">
+          <a:solidFill>
+            <a:schemeClr val="phClr"/>
+          </a:solidFill>
+          <a:prstDash val="solid"/>
+        </a:ln>
+      </a:lnStyleLst>
+      <a:effectStyleLst>
+        <a:effectStyle>
+          <a:effectLst>
+            <a:outerShdw blurRad="40000" dist="20000" dir="5400000" rotWithShape="0">
+              <a:srgbClr val="000000">
+                <a:alpha val="38000"/>
+              </a:srgbClr>
+            </a:outerShdw>
+          </a:effectLst>
+        </a:effectStyle>
+        <a:effectStyle>
+          <a:effectLst>
+            <a:outerShdw blurRad="40000" dist="23000" dir="5400000" rotWithShape="0">
+              <a:srgbClr val="000000">
+                <a:alpha val="35000"/>
+              </a:srgbClr>
+            </a:outerShdw>
+          </a:effectLst>
+        </a:effectStyle>
+        <a:effectStyle>
+          <a:effectLst>
+            <a:outerShdw blurRad="40000" dist="23000" dir="5400000" rotWithShape="0">
+              <a:srgbClr val="000000">
+                <a:alpha val="35000"/>
+              </a:srgbClr>
+            </a:outerShdw>
+          </a:effectLst>
+          <a:scene3d>
+            <a:camera prst="orthographicFront">
+              <a:rot lat="0" lon="0" rev="0"/>
+            </a:camera>
+            <a:lightRig rig="threePt" dir="t">
+              <a:rot lat="0" lon="0" rev="1200000"/>
+            </a:lightRig>
+          </a:scene3d>
+          <a:sp3d>
+            <a:bevelT w="63500" h="25400"/>
+          </a:sp3d>
+        </a:effectStyle>
+      </a:effectStyleLst>
+      <a:bgFillStyleLst>
+        <a:solidFill>
+          <a:schemeClr val="phClr"/>
+        </a:solidFill>
+        <a:gradFill rotWithShape="1">
+          <a:gsLst>
+            <a:gs pos="0">
+              <a:schemeClr val="phClr">
+                <a:tint val="40000"/>
+                <a:satMod val="350000"/>
+              </a:schemeClr>
+            </a:gs>
+            <a:gs pos="40000">
+              <a:schemeClr val="phClr">
+                <a:tint val="45000"/>
+                <a:shade val="99000"/>
+                <a:satMod val="350000"/>
+              </a:schemeClr>
+            </a:gs>
+            <a:gs pos="100000">
+              <a:schemeClr val="phClr">
+                <a:shade val="20000"/>
+                <a:satMod val="255000"/>
+              </a:schemeClr>
+            </a:gs>
+          </a:gsLst>
+          <a:path path="circle">
+            <a:fillToRect l="50000" t="-80000" r="50000" b="180000"/>
+          </a:path>
+        </a:gradFill>
+        <a:gradFill rotWithShape="1">
+          <a:gsLst>
+            <a:gs pos="0">
+              <a:schemeClr val="phClr">
+                <a:tint val="80000"/>
+                <a:satMod val="300000"/>
+              </a:schemeClr>
+            </a:gs>
+            <a:gs pos="100000">
+              <a:schemeClr val="phClr">
+                <a:shade val="30000"/>
+                <a:satMod val="200000"/>
+              </a:schemeClr>
+            </a:gs>
+          </a:gsLst>
+          <a:path path="circle">
+            <a:fillToRect l="50000" t="50000" r="50000" b="50000"/>
+          </a:path>
+        </a:gradFill>
+      </a:bgFillStyleLst>
+    </a:fmtScheme>
+  </a:themeElements>
+  <a:objectDefaults>
+    <a:spDef>
+      <a:spPr/>
+      <a:bodyPr/>
+      <a:lstStyle/>
+      <a:style>
+        <a:lnRef idx="1">
+          <a:schemeClr val="accent1"/>
+        </a:lnRef>
+        <a:fillRef idx="3">
+          <a:schemeClr val="accent1"/>
+        </a:fillRef>
+        <a:effectRef idx="2">
+          <a:schemeClr val="accent1"/>
+        </a:effectRef>
+        <a:fontRef idx="minor">
+          <a:schemeClr val="lt1"/>
+        </a:fontRef>
+      </a:style>
+    </a:spDef>
+    <a:lnDef>
+      <a:spPr/>
+      <a:bodyPr/>
+      <a:lstStyle/>
+      <a:style>
+        <a:lnRef idx="2">
+          <a:schemeClr val="accent1"/>
+        </a:lnRef>
+        <a:fillRef idx="0">
+          <a:schemeClr val="accent1"/>
+        </a:fillRef>
+        <a:effectRef idx="1">
+          <a:schemeClr val="accent1"/>
+        </a:effectRef>
+        <a:fontRef idx="minor">
+          <a:schemeClr val="tx1"/>
+        </a:fontRef>
+      </a:style>
+    </a:lnDef>
+  </a:objectDefaults>
+  <a:extraClrSchemeLst/>
+</a:theme>
 </file>
--- a/Programacion II/Clases/Clase 14 - Preparacion de la presentacion final/Presentacion.pptx
+++ b/Programacion II/Clases/Clase 14 - Preparacion de la presentacion final/Presentacion.pptx
@@ -527,7 +527,7 @@
           <a:lstStyle/>
           <a:p>
             <a:r>
-              <a:t>Un guion escrito, con minutos y evidencia por bloque (y el nombre del responsable si hay equipo), convierte una exposicion nerviosa en algo que se puede ensayar y medir; en VetCare ese guion tiene cinco bloques y suma siete minutos, con cuatro dedicados a la demo.</a:t>
+              <a:t>Un guion escrito, con minutos y evidencia por bloque (y el nombre del responsable si hay equipo), convierte una exposicion nerviosa en algo que se puede ensayar y medir; en el sistema de la clinica ese guion tiene cinco bloques y suma siete minutos, con cuatro dedicados a la demo.</a:t>
             </a:r>
           </a:p>
         </p:txBody>
@@ -3932,7 +3932,7 @@
                 </a:solidFill>
                 <a:latin typeface="Calibri"/>
               </a:rPr>
-              <a:t>Preparacion de la presentacion final · Sustentacion de VetCare</a:t>
+              <a:t>Preparacion de la presentacion final · Sustentacion del sistema de la clinica</a:t>
             </a:r>
           </a:p>
         </p:txBody>
@@ -4766,7 +4766,7 @@
                 </a:solidFill>
                 <a:latin typeface="Calibri"/>
               </a:rPr>
-              <a:t>–   Hay cosas que restan puntos siempre: leer las diapositivas de espaldas al jurado, pedir disculpas por el proyecto antes de mostrarlo, culpar al computador, hablar de lo que 'iban a hacer' en vez de mostrar lo que hicieron</a:t>
+              <a:t>–   Hay cosas que juegan en contra siempre: leer las diapositivas de espaldas al jurado, pedir disculpas por el proyecto antes de mostrarlo, culpar al computador, hablar de lo que 'iban a hacer' en vez de mostrar lo que hicieron</a:t>
             </a:r>
           </a:p>
           <a:p>
@@ -4979,7 +4979,7 @@
                 </a:solidFill>
                 <a:latin typeface="Calibri"/>
               </a:rPr>
-              <a:t>class EnsayoSustentacionVetCare</a:t>
+              <a:t>class EnsayoSustentacionClinica</a:t>
             </a:r>
           </a:p>
         </p:txBody>
@@ -5138,7 +5138,7 @@
                 </a:solidFill>
                 <a:latin typeface="Calibri"/>
               </a:rPr>
-              <a:t>public class EnsayoSustentacionVetCare {</a:t>
+              <a:t>public class EnsayoSustentacionClinica {</a:t>
             </a:r>
           </a:p>
           <a:p>
@@ -5353,7 +5353,7 @@
                 </a:solidFill>
                 <a:latin typeface="Calibri"/>
               </a:rPr>
-              <a:t>        {"Problema de la clinica Huellitas y solucion propuesta", "Diapositiva con los 3 dolores", "1"},</a:t>
+              <a:t>        {"Problema de la clinica y solucion propuesta", "Diapositiva con los 3 dolores", "1"},</a:t>
             </a:r>
           </a:p>
           <a:p>
@@ -5646,7 +5646,7 @@
                 </a:solidFill>
                 <a:latin typeface="Calibri"/>
               </a:rPr>
-              <a:t>EnsayoSustentacionVetCare.java — responsableDe()</a:t>
+              <a:t>EnsayoSustentacionClinica.java — responsableDe()</a:t>
             </a:r>
           </a:p>
         </p:txBody>
@@ -6082,7 +6082,7 @@
                 </a:solidFill>
                 <a:latin typeface="Calibri"/>
               </a:rPr>
-              <a:t>EnsayoSustentacionVetCare.java — main() (1/2)</a:t>
+              <a:t>EnsayoSustentacionClinica.java — main() (1/2)</a:t>
             </a:r>
           </a:p>
         </p:txBody>
@@ -6321,7 +6321,7 @@
                 </a:solidFill>
                 <a:latin typeface="Calibri"/>
               </a:rPr>
-              <a:t>            System.out.println("=== VetCare | Preparacion de la sustentacion ===");</a:t>
+              <a:t>            System.out.println("=== Clinica | Preparacion de la sustentacion ===");</a:t>
             </a:r>
           </a:p>
           <a:p>
@@ -6749,7 +6749,7 @@
                 </a:solidFill>
                 <a:latin typeface="Calibri"/>
               </a:rPr>
-              <a:t>EnsayoSustentacionVetCare.java — main() (2/2)</a:t>
+              <a:t>EnsayoSustentacionClinica.java — main() (2/2)</a:t>
             </a:r>
           </a:p>
         </p:txBody>
@@ -7361,7 +7361,7 @@
                 </a:solidFill>
                 <a:latin typeface="Calibri"/>
               </a:rPr>
-              <a:t>EnsayoSustentacionVetCare.java — sembrarDatosDemo() (1/2)</a:t>
+              <a:t>EnsayoSustentacionClinica.java — sembrarDatosDemo() (1/2)</a:t>
             </a:r>
           </a:p>
         </p:txBody>
@@ -8028,7 +8028,7 @@
                 </a:solidFill>
                 <a:latin typeface="Calibri"/>
               </a:rPr>
-              <a:t>EnsayoSustentacionVetCare.java — sembrarDatosDemo() (2/2)</a:t>
+              <a:t>EnsayoSustentacionClinica.java — sembrarDatosDemo() (2/2)</a:t>
             </a:r>
           </a:p>
         </p:txBody>
@@ -8416,7 +8416,7 @@
                 </a:solidFill>
                 <a:latin typeface="Calibri"/>
               </a:rPr>
-              <a:t>EnsayoSustentacionVetCare.java — escribir()</a:t>
+              <a:t>EnsayoSustentacionClinica.java — escribir()</a:t>
             </a:r>
           </a:p>
         </p:txBody>
@@ -8989,7 +8989,7 @@
                 </a:solidFill>
                 <a:latin typeface="Calibri"/>
               </a:rPr>
-              <a:t> Preparacion de la presentacion final · Sustentacion de VetCare — Que mostrar, en que orden y como lograr que la demo no falle</a:t>
+              <a:t> Preparacion de la presentacion final · Sustentacion del sistema de la clinica — Que mostrar, en que orden y como lograr que la demo no falle</a:t>
             </a:r>
           </a:p>
           <a:p>
@@ -9064,7 +9064,7 @@
                 </a:solidFill>
                 <a:latin typeface="Calibri"/>
               </a:rPr>
-              <a:t>–   Todo con el mismo dominio: la clinica veterinaria Huellitas (VetCare).</a:t>
+              <a:t>–   Todo con el mismo dominio: una clinica veterinaria.</a:t>
             </a:r>
           </a:p>
         </p:txBody>
@@ -9245,7 +9245,7 @@
                 </a:solidFill>
                 <a:latin typeface="Calibri"/>
               </a:rPr>
-              <a:t>EnsayoSustentacionVetCare.java — chequeoPreVuelo()</a:t>
+              <a:t>EnsayoSustentacionClinica.java — chequeoPreVuelo()</a:t>
             </a:r>
           </a:p>
         </p:txBody>
@@ -9809,7 +9809,7 @@
                 </a:solidFill>
                 <a:latin typeface="Calibri"/>
               </a:rPr>
-              <a:t>EnsayoSustentacionVetCare.java — contarFilas()</a:t>
+              <a:t>EnsayoSustentacionClinica.java — contarFilas()</a:t>
             </a:r>
           </a:p>
         </p:txBody>
@@ -10357,7 +10357,7 @@
                 </a:solidFill>
                 <a:latin typeface="Calibri"/>
               </a:rPr>
-              <a:t>EnsayoSustentacionVetCare.java — ensayo() (1/2)</a:t>
+              <a:t>EnsayoSustentacionClinica.java — ensayo() (1/2)</a:t>
             </a:r>
           </a:p>
         </p:txBody>
@@ -11024,7 +11024,7 @@
                 </a:solidFill>
                 <a:latin typeface="Calibri"/>
               </a:rPr>
-              <a:t>EnsayoSustentacionVetCare.java — ensayo() (2/2)</a:t>
+              <a:t>EnsayoSustentacionClinica.java — ensayo() (2/2)</a:t>
             </a:r>
           </a:p>
         </p:txBody>
@@ -12150,7 +12150,7 @@
                 </a:solidFill>
                 <a:latin typeface="Calibri"/>
               </a:rPr>
-              <a:t> El docente sustenta VetCare en 6 minutos delante del grupo, provoca a proposito un error de edad para mostrar la validacion, y luego repite la misma demo con la lista vacia para que se vea el desastre de no sembrar datos.</a:t>
+              <a:t> El docente sustenta el sistema de la clinica en 6 minutos delante del grupo, provoca a proposito un error de edad para mostrar la validacion, y luego repite la misma demo con la lista vacia para que se vea el desastre de no sembrar datos.</a:t>
             </a:r>
           </a:p>
           <a:p>
@@ -12166,7 +12166,7 @@
                 </a:solidFill>
                 <a:latin typeface="Calibri"/>
               </a:rPr>
-              <a:t>–   Mismo dominio VetCare — no otro ejemplo.</a:t>
+              <a:t>–   Mismo dominio de la clinica — no otro ejemplo.</a:t>
             </a:r>
           </a:p>
         </p:txBody>
@@ -12327,7 +12327,7 @@
                 </a:solidFill>
                 <a:latin typeface="Calibri"/>
               </a:rPr>
-              <a:t>Clase 14 · Preparacion de la presentacion final · Sustentacion de VetCare</a:t>
+              <a:t>Clase 14 · Preparacion de la presentacion final · Sustentacion del sistema de la clinica</a:t>
             </a:r>
           </a:p>
         </p:txBody>
@@ -12967,7 +12967,7 @@
                 </a:solidFill>
                 <a:latin typeface="Calibri"/>
               </a:rPr>
-              <a:t>Demo en vivo sobre VetCare</a:t>
+              <a:t>Demo en vivo sobre el tema</a:t>
             </a:r>
           </a:p>
         </p:txBody>
@@ -13502,7 +13502,7 @@
                 </a:solidFill>
                 <a:latin typeface="Calibri"/>
               </a:rPr>
-              <a:t>–   El orden que funciona es siempre el mismo y va de lo humano a lo tecnico y de vuelta a lo humano: primero el problema de la clinica Huellitas en una frase concreta (todo en papel, se pierden expedientes, no se sabe quien tiene cita manana)</a:t>
+              <a:t>–   El orden que funciona es siempre el mismo y va de lo humano a lo tecnico y de vuelta a lo humano: primero el problema de la clinica en una frase concreta (todo en papel</a:t>
             </a:r>
           </a:p>
         </p:txBody>
@@ -13722,7 +13722,7 @@
                 </a:solidFill>
                 <a:latin typeface="Calibri"/>
               </a:rPr>
-              <a:t>–   Luego la solucion en una frase (una aplicacion de escritorio en Java que registra duenos y mascotas, agenda citas y conserva los datos)</a:t>
+              <a:t>–   Se pierden expedientes, no se sabe quien tiene cita manana), luego la solucion en una frase (una aplicacion de escritorio en Java que registra duenos y mascotas</a:t>
             </a:r>
           </a:p>
           <a:p>
@@ -13738,7 +13738,7 @@
                 </a:solidFill>
                 <a:latin typeface="Calibri"/>
               </a:rPr>
-              <a:t>–   Despues la arquitectura en treinta segundos (las clases Dueno, Mascota y Cita y como se relacionan), enseguida la demo en vivo que es el corazon, y al cerrar los aprendizajes y las limitaciones.</a:t>
+              <a:t>–   Agenda citas y conserva los datos), despues la arquitectura en treinta segundos (las clases Dueno, Mascota y Cita y como se relacionan), enseguida la demo en vivo que es el corazon, y al cerrar los aprendizajes y las limitaciones.</a:t>
             </a:r>
           </a:p>
           <a:p>
@@ -14762,7 +14762,7 @@
                 </a:solidFill>
                 <a:latin typeface="Calibri"/>
               </a:rPr>
-              <a:t>–   Y hay un quinto detalle que suma puntos: provocar a proposito un error de edad para mostrar la validacion de la clase 13 como una fortaleza, no como un accidente.</a:t>
+              <a:t>–   Y hay un quinto detalle que juega a favor: provocar a proposito un error de edad para mostrar la validacion de la clase 13 como una fortaleza, no como un accidente.</a:t>
             </a:r>
           </a:p>
         </p:txBody>

--- a/Programacion II/Clases/Clase 14 - Preparacion de la presentacion final/Presentacion.pptx
+++ b/Programacion II/Clases/Clase 14 - Preparacion de la presentacion final/Presentacion.pptx
@@ -7,8 +7,8 @@
   <p:sldIdLst>
     <p:sldId id="256" r:id="rId7"/>
     <p:sldId id="257" r:id="rId8"/>
-    <p:sldId id="258" r:id="rId10"/>
-    <p:sldId id="259" r:id="rId11"/>
+    <p:sldId id="258" r:id="rId9"/>
+    <p:sldId id="259" r:id="rId10"/>
     <p:sldId id="260" r:id="rId12"/>
     <p:sldId id="261" r:id="rId13"/>
     <p:sldId id="262" r:id="rId14"/>
@@ -515,31 +515,13 @@
           <a:lstStyle/>
           <a:p>
             <a:r>
-              <a:t>TEXTO COMPLETO DE LA LÁMINA (se proyecta resumido):</a:t>
+              <a:t>DESARROLLO (para explicarlo, no se proyecta):</a:t>
             </a:r>
           </a:p>
           <a:p/>
           <a:p>
             <a:r>
-              <a:t>Tema de hoy: Preparacion de la presentacion final · Sustentacion del sistema de la clinica — Que mostrar, en que orden y como lograr que la demo no falle</a:t>
-            </a:r>
-          </a:p>
-          <a:p/>
-          <a:p>
-            <a:r>
-              <a:t>Herramienta: Visual Studio Code (Java) · Bloque 120 min</a:t>
-            </a:r>
-          </a:p>
-          <a:p/>
-          <a:p>
-            <a:r>
-              <a:t>Primero el concepto, despues el codigo que lo muestra y la demo en vivo.</a:t>
-            </a:r>
-          </a:p>
-          <a:p/>
-          <a:p>
-            <a:r>
-              <a:t>Todo con el mismo dominio: una clinica veterinaria.</a:t>
+              <a:t>Sustentar un proyecto de software no es exponer diapositivas: es demostrar, delante de un jurado que duda con razon, que un problema real quedo resuelto por un programa que corre. El jurado no compra promesas ni diagramas bonitos, compra evidencia; por eso la regla practica es que al menos la mitad del tiempo debe ser aplicacion corriendo en pantalla. El orden que funciona es siempre el mismo y va de lo humano a lo tecnico y de vuelta a lo humano: primero el problema de la clinica en una frase concreta (todo en papel, se pierden expedientes, no se sabe quien tiene cita manana), luego la solucion en una frase (una aplicacion de escritorio en Java que registra duenos y mascotas, agenda citas y conserva los datos), despues la arquitectura en treinta segundos (las clases Dueno, Mascota y Cita y como se relacionan), enseguida la demo en vivo que es el corazon, y al cerrar los aprendizajes y las limitaciones. Empezar por el diagrama de clases o por la lista de tecnologias es el error mas comun: nadie sabe todavia para que sirve eso.</a:t>
             </a:r>
           </a:p>
         </p:txBody>
@@ -615,7 +597,7 @@
           <a:p/>
           <a:p>
             <a:r>
-              <a:t>Sustentar un proyecto de software no es exponer diapositivas: es demostrar, delante de un jurado que duda con razon, que un problema real quedo resuelto por un programa que corre. El jurado no compra promesas ni diagramas bonitos, compra evidencia; por eso la regla practica es que al menos la mitad del tiempo debe ser aplicacion corriendo en pantalla. El orden que funciona es siempre el mismo y va de lo humano a lo tecnico y de vuelta a lo humano: primero el problema de la clinica en una frase concreta (todo en papel, se pierden expedientes, no se sabe quien tiene cita manana), luego la solucion en una frase (una aplicacion de escritorio en Java que registra duenos y mascotas, agenda citas y conserva los datos), despues la arquitectura en treinta segundos (las clases Dueno, Mascota y Cita y como se relacionan), enseguida la demo en vivo que es el corazon, y al cerrar los aprendizajes y las limitaciones. Empezar por el diagrama de clases o por la lista de tecnologias es el error mas comun: nadie sabe todavia para que sirve eso.</a:t>
+              <a:t>La sustentacion es una coreografia y hay que repartirla como se reparte una obra de teatro, aunque suba una sola persona. La sustentacion es individual por defecto: el estudiante trocea su exposicion en bloques completos con inicio, final y evidencia en pantalla —no frases sueltas—, define en que momento suelta la diapositiva y toma el mouse, y deja listo un computador de respaldo con el proyecto ya abierto. Las transiciones entre bloques se dicen en voz alta, con una formula corta del tipo 'para mostrar como quedan guardados esos datos, abro de nuevo la aplicacion', porque los silencios incomodos al cambiar de tema son lo que mas se nota. Si el docente autorizo equipo de 2 o 3, cada integrante toma bloques completos, ninguno se queda callado aunque otro domine mas el codigo, y las transiciones se nombran ('sigue Julian'), porque el jurado pregunta quien hizo que y tiene derecho a preguntarle a cualquiera sobre cualquier parte. Un guion escrito, con minutos y evidencia por bloque (y el nombre del responsable si hay equipo), convierte una exposicion nerviosa en algo que se puede ensayar y medir; en el sistema de la clinica ese guion tiene cinco bloques y suma siete minutos, con cuatro dedicados a la demo.</a:t>
             </a:r>
           </a:p>
         </p:txBody>
@@ -691,7 +673,7 @@
           <a:p/>
           <a:p>
             <a:r>
-              <a:t>La sustentacion es una coreografia y hay que repartirla como se reparte una obra de teatro, aunque suba una sola persona. La sustentacion es individual por defecto: el estudiante trocea su exposicion en bloques completos con inicio, final y evidencia en pantalla —no frases sueltas—, define en que momento suelta la diapositiva y toma el mouse, y deja listo un computador de respaldo con el proyecto ya abierto. Las transiciones entre bloques se dicen en voz alta, con una formula corta del tipo 'para mostrar como quedan guardados esos datos, abro de nuevo la aplicacion', porque los silencios incomodos al cambiar de tema son lo que mas se nota. Si el docente autorizo equipo de 2 o 3, cada integrante toma bloques completos, ninguno se queda callado aunque otro domine mas el codigo, y las transiciones se nombran ('sigue Julian'), porque el jurado pregunta quien hizo que y tiene derecho a preguntarle a cualquiera sobre cualquier parte. Un guion escrito, con minutos y evidencia por bloque (y el nombre del responsable si hay equipo), convierte una exposicion nerviosa en algo que se puede ensayar y medir; en el sistema de la clinica ese guion tiene cinco bloques y suma siete minutos, con cuatro dedicados a la demo.</a:t>
+              <a:t>La demo en vivo no falla por mala suerte, falla por falta de preparacion, y se blinda con un chequeo previo que llamaremos pre-vuelo. Lo primero es sembrar datos de demostracion: tres duenos, cuatro mascotas y tres citas ya cargadas en los CSV, porque una aplicacion con la lista vacia parece una aplicacion que no funciona, y ademas los datos deben ser creibles del dominio (Marta Lopez con Firulais, labrador de 4 anios) y nunca 'aaa' ni 'prueba1'. Lo segundo es tener ensayado el camino feliz exacto, es decir la secuencia de clics que se va a hacer, sin improvisar busquedas ni teclear rutas largas frente al publico. Lo tercero es la higiene de pantalla: aumentar el tamano de fuente del IDE, cerrar notificaciones y pestanas ajenas, dejar el proyecto ya compilado y, si es posible, ejecutar el .jar en lugar de compilar delante del jurado. Lo cuarto es el plan B: un video de dos o tres minutos de la ruta feliz y seis capturas de pantalla listas, para que si el computador falla la presentacion continue sin panico. Y hay un quinto detalle que juega a favor: provocar a proposito un error de edad para mostrar la validacion de la clase 13 como una fortaleza, no como un accidente.</a:t>
             </a:r>
           </a:p>
         </p:txBody>
@@ -767,7 +749,7 @@
           <a:p/>
           <a:p>
             <a:r>
-              <a:t>La demo en vivo no falla por mala suerte, falla por falta de preparacion, y se blinda con un chequeo previo que llamaremos pre-vuelo. Lo primero es sembrar datos de demostracion: tres duenos, cuatro mascotas y tres citas ya cargadas en los CSV, porque una aplicacion con la lista vacia parece una aplicacion que no funciona, y ademas los datos deben ser creibles del dominio (Marta Lopez con Firulais, labrador de 4 anios) y nunca 'aaa' ni 'prueba1'. Lo segundo es tener ensayado el camino feliz exacto, es decir la secuencia de clics que se va a hacer, sin improvisar busquedas ni teclear rutas largas frente al publico. Lo tercero es la higiene de pantalla: aumentar el tamano de fuente del IDE, cerrar notificaciones y pestanas ajenas, dejar el proyecto ya compilado y, si es posible, ejecutar el .jar en lugar de compilar delante del jurado. Lo cuarto es el plan B: un video de dos o tres minutos de la ruta feliz y seis capturas de pantalla listas, para que si el computador falla la presentacion continue sin panico. Y hay un quinto detalle que juega a favor: provocar a proposito un error de edad para mostrar la validacion de la clase 13 como una fortaleza, no como un accidente.</a:t>
+              <a:t>Las preguntas del jurado son casi siempre las mismas y se pueden preparar una por una. Donde esta la herencia y por que la usaron; por que ArrayList y no un arreglo fijo; que pasa si borro el archivo mascotas.csv; como controlan que alguien escriba texto donde va la edad; quien programo cada parte; que harian distinto si empezaran de nuevo. La forma de responder tiene tres reglas: responda con la aplicacion o el codigo en pantalla, porque mostrar vale mas que explicar; no se demore mas de treinta o cuarenta segundos por respuesta; y si no sabe, digalo con dignidad y proponga como lo averiguaria, que eso el jurado lo respeta mucho mas que un invento. Tambien conviene tener a la mano el archivo de cada respuesta ya abierto en una pestana del IDE (Dueno.java para la herencia, Mascota.java para las validaciones, la clase de persistencia para el CSV), de modo que la respuesta sea abrir una pestana y no buscar en vivo.</a:t>
             </a:r>
           </a:p>
         </p:txBody>
@@ -843,171 +825,7 @@
           <a:p/>
           <a:p>
             <a:r>
-              <a:t>Las preguntas del jurado son casi siempre las mismas y se pueden preparar una por una. Donde esta la herencia y por que la usaron; por que ArrayList y no un arreglo fijo; que pasa si borro el archivo mascotas.csv; como controlan que alguien escriba texto donde va la edad; quien programo cada parte; que harian distinto si empezaran de nuevo. La forma de responder tiene tres reglas: responda con la aplicacion o el codigo en pantalla, porque mostrar vale mas que explicar; no se demore mas de treinta o cuarenta segundos por respuesta; y si no sabe, digalo con dignidad y proponga como lo averiguaria, que eso el jurado lo respeta mucho mas que un invento. Tambien conviene tener a la mano el archivo de cada respuesta ya abierto en una pestana del IDE (Dueno.java para la herencia, Mascota.java para las validaciones, la clase de persistencia para el CSV), de modo que la respuesta sea abrir una pestana y no buscar en vivo.</a:t>
-            </a:r>
-          </a:p>
-        </p:txBody>
-      </p:sp>
-      <p:sp>
-        <p:nvSpPr>
-          <p:cNvPr id="4" name="Slide Number Placeholder 3"/>
-          <p:cNvSpPr>
-            <a:spLocks noGrp="1"/>
-          </p:cNvSpPr>
-          <p:nvPr>
-            <p:ph type="sldNum" idx="5" sz="quarter"/>
-          </p:nvPr>
-        </p:nvSpPr>
-        <p:spPr/>
-      </p:sp>
-    </p:spTree>
-  </p:cSld>
-  <p:clrMapOvr>
-    <a:masterClrMapping/>
-  </p:clrMapOvr>
-</p:notes>
-</file>
-
-<file path=ppt/notesSlides/notesSlide6.xml><?xml version="1.0" encoding="utf-8"?>
-<p:notes xmlns:a="http://schemas.openxmlformats.org/drawingml/2006/main" xmlns:p="http://schemas.openxmlformats.org/presentationml/2006/main" xmlns:r="http://schemas.openxmlformats.org/officeDocument/2006/relationships">
-  <p:cSld>
-    <p:spTree>
-      <p:nvGrpSpPr>
-        <p:cNvPr id="1" name=""/>
-        <p:cNvGrpSpPr/>
-        <p:nvPr/>
-      </p:nvGrpSpPr>
-      <p:grpSpPr>
-        <a:xfrm>
-          <a:off x="0" y="0"/>
-          <a:ext cx="0" cy="0"/>
-          <a:chOff x="0" y="0"/>
-          <a:chExt cx="0" cy="0"/>
-        </a:xfrm>
-      </p:grpSpPr>
-      <p:sp>
-        <p:nvSpPr>
-          <p:cNvPr id="2" name="Slide Image Placeholder 1"/>
-          <p:cNvSpPr>
-            <a:spLocks noGrp="1"/>
-          </p:cNvSpPr>
-          <p:nvPr>
-            <p:ph type="sldImg" idx="2"/>
-          </p:nvPr>
-        </p:nvSpPr>
-        <p:spPr/>
-      </p:sp>
-      <p:sp>
-        <p:nvSpPr>
-          <p:cNvPr id="3" name="Notes Placeholder 2"/>
-          <p:cNvSpPr>
-            <a:spLocks noGrp="1"/>
-          </p:cNvSpPr>
-          <p:nvPr>
-            <p:ph type="body" idx="3" sz="quarter"/>
-          </p:nvPr>
-        </p:nvSpPr>
-        <p:spPr/>
-        <p:txBody>
-          <a:bodyPr/>
-          <a:lstStyle/>
-          <a:p>
-            <a:r>
-              <a:t>DESARROLLO (para explicarlo, no se proyecta):</a:t>
-            </a:r>
-          </a:p>
-          <a:p/>
-          <a:p>
-            <a:r>
               <a:t>El manejo del tiempo y del nervio se entrena, no se improvisa. Un ensayo cronometrado revela cosas que el papel no muestra: que la introduccion se come tres minutos, que la demo se atasca en un formulario, que el cierre queda cortado. Por eso hoy ensayamos con reloj y anotamos el tiempo real de cada bloque frente al planeado, y se repite hasta que el total caiga entre cinco y ocho minutos con margen. Hay cosas que juegan en contra siempre: leer las diapositivas de espaldas al jurado, pedir disculpas por el proyecto antes de mostrarlo, culpar al computador, hablar de lo que 'iban a hacer' en vez de mostrar lo que hicieron, y pasarse del tiempo, porque eso obliga al jurado a cortar justo en la parte que mas les costo. Al reves, suman: hablar mirando al jurado, usar el vocabulario del dominio (dueno, mascota, cita, historia clinica) y reconocer con naturalidad las limitaciones conocidas.</a:t>
-            </a:r>
-          </a:p>
-        </p:txBody>
-      </p:sp>
-      <p:sp>
-        <p:nvSpPr>
-          <p:cNvPr id="4" name="Slide Number Placeholder 3"/>
-          <p:cNvSpPr>
-            <a:spLocks noGrp="1"/>
-          </p:cNvSpPr>
-          <p:nvPr>
-            <p:ph type="sldNum" idx="5" sz="quarter"/>
-          </p:nvPr>
-        </p:nvSpPr>
-        <p:spPr/>
-      </p:sp>
-    </p:spTree>
-  </p:cSld>
-  <p:clrMapOvr>
-    <a:masterClrMapping/>
-  </p:clrMapOvr>
-</p:notes>
-</file>
-
-<file path=ppt/notesSlides/notesSlide7.xml><?xml version="1.0" encoding="utf-8"?>
-<p:notes xmlns:a="http://schemas.openxmlformats.org/drawingml/2006/main" xmlns:p="http://schemas.openxmlformats.org/presentationml/2006/main" xmlns:r="http://schemas.openxmlformats.org/officeDocument/2006/relationships">
-  <p:cSld>
-    <p:spTree>
-      <p:nvGrpSpPr>
-        <p:cNvPr id="1" name=""/>
-        <p:cNvGrpSpPr/>
-        <p:nvPr/>
-      </p:nvGrpSpPr>
-      <p:grpSpPr>
-        <a:xfrm>
-          <a:off x="0" y="0"/>
-          <a:ext cx="0" cy="0"/>
-          <a:chOff x="0" y="0"/>
-          <a:chExt cx="0" cy="0"/>
-        </a:xfrm>
-      </p:grpSpPr>
-      <p:sp>
-        <p:nvSpPr>
-          <p:cNvPr id="2" name="Slide Image Placeholder 1"/>
-          <p:cNvSpPr>
-            <a:spLocks noGrp="1"/>
-          </p:cNvSpPr>
-          <p:nvPr>
-            <p:ph type="sldImg" idx="2"/>
-          </p:nvPr>
-        </p:nvSpPr>
-        <p:spPr/>
-      </p:sp>
-      <p:sp>
-        <p:nvSpPr>
-          <p:cNvPr id="3" name="Notes Placeholder 2"/>
-          <p:cNvSpPr>
-            <a:spLocks noGrp="1"/>
-          </p:cNvSpPr>
-          <p:nvPr>
-            <p:ph type="body" idx="3" sz="quarter"/>
-          </p:nvPr>
-        </p:nvSpPr>
-        <p:spPr/>
-        <p:txBody>
-          <a:bodyPr/>
-          <a:lstStyle/>
-          <a:p>
-            <a:r>
-              <a:t>TEXTO COMPLETO DE LA LÁMINA (se proyecta resumido):</a:t>
-            </a:r>
-          </a:p>
-          <a:p/>
-          <a:p>
-            <a:r>
-              <a:t>Herramienta: Visual Studio Code (Java)</a:t>
-            </a:r>
-          </a:p>
-          <a:p/>
-          <a:p>
-            <a:r>
-              <a:t>Demo: El docente sustenta el sistema de la clinica en 6 minutos delante del grupo, provoca a proposito un error de edad para mostrar la validacion, y luego repite la misma demo con la lista vacia para que se vea el desastre de no sembrar datos.</a:t>
-            </a:r>
-          </a:p>
-          <a:p/>
-          <a:p>
-            <a:r>
-              <a:t>Mismo dominio de la clinica — no otro ejemplo.</a:t>
             </a:r>
           </a:p>
         </p:txBody>
@@ -4538,118 +4356,14 @@
       </p:sp>
       <p:sp>
         <p:nvSpPr>
-          <p:cNvPr id="5" name="Rounded Rectangle 4"/>
-          <p:cNvSpPr/>
-          <p:nvPr/>
-        </p:nvSpPr>
-        <p:spPr>
-          <a:xfrm>
-            <a:off x="5797149" y="1573813"/>
-            <a:ext cx="6010497" cy="4057845"/>
-          </a:xfrm>
-          <a:prstGeom prst="roundRect">
-            <a:avLst>
-              <a:gd name="adj" fmla="val 4000"/>
-            </a:avLst>
-          </a:prstGeom>
-          <a:solidFill>
-            <a:srgbClr val="E8EEF4"/>
-          </a:solidFill>
-          <a:ln>
-            <a:noFill/>
-          </a:ln>
-        </p:spPr>
-        <p:style>
-          <a:lnRef idx="1">
-            <a:schemeClr val="accent1"/>
-          </a:lnRef>
-          <a:fillRef idx="3">
-            <a:schemeClr val="accent1"/>
-          </a:fillRef>
-          <a:effectRef idx="2">
-            <a:schemeClr val="accent1"/>
-          </a:effectRef>
-          <a:fontRef idx="minor">
-            <a:schemeClr val="lt1"/>
-          </a:fontRef>
-        </p:style>
-        <p:txBody>
-          <a:bodyPr rtlCol="0" anchor="ctr"/>
-          <a:lstStyle/>
-          <a:p>
-            <a:pPr algn="ctr"/>
-          </a:p>
-        </p:txBody>
-      </p:sp>
-      <p:pic>
-        <p:nvPicPr>
-          <p:cNvPr id="6" name="Picture 5" descr="business-meeting-people-asking-questions-table.jpg"/>
-          <p:cNvPicPr>
-            <a:picLocks noChangeAspect="1"/>
-          </p:cNvPicPr>
-          <p:nvPr/>
-        </p:nvPicPr>
-        <p:blipFill>
-          <a:blip r:embed="rId2"/>
-          <a:stretch>
-            <a:fillRect/>
-          </a:stretch>
-        </p:blipFill>
-        <p:spPr>
-          <a:xfrm>
-            <a:off x="5870301" y="1646965"/>
-            <a:ext cx="5864193" cy="3911541"/>
-          </a:xfrm>
-          <a:prstGeom prst="rect">
-            <a:avLst/>
-          </a:prstGeom>
-        </p:spPr>
-      </p:pic>
-      <p:sp>
-        <p:nvSpPr>
-          <p:cNvPr id="7" name="TextBox 6"/>
+          <p:cNvPr id="5" name="TextBox 4"/>
           <p:cNvSpPr txBox="1"/>
           <p:nvPr/>
         </p:nvSpPr>
         <p:spPr>
           <a:xfrm>
-            <a:off x="5870301" y="5961888"/>
-            <a:ext cx="5864193" cy="320040"/>
-          </a:xfrm>
-          <a:prstGeom prst="rect">
-            <a:avLst/>
-          </a:prstGeom>
-          <a:noFill/>
-        </p:spPr>
-        <p:txBody>
-          <a:bodyPr wrap="square">
-            <a:spAutoFit/>
-          </a:bodyPr>
-          <a:lstStyle/>
-          <a:p>
-            <a:pPr algn="ctr"/>
-            <a:r>
-              <a:rPr sz="1100" b="0" i="1">
-                <a:solidFill>
-                  <a:srgbClr val="666666"/>
-                </a:solidFill>
-                <a:latin typeface="Calibri"/>
-              </a:rPr>
-              <a:t>Foto: RDNE Stock project · Pexels</a:t>
-            </a:r>
-          </a:p>
-        </p:txBody>
-      </p:sp>
-      <p:sp>
-        <p:nvSpPr>
-          <p:cNvPr id="8" name="TextBox 7"/>
-          <p:cNvSpPr txBox="1"/>
-          <p:nvPr/>
-        </p:nvSpPr>
-        <p:spPr>
-          <a:xfrm>
-            <a:off x="457200" y="1353312"/>
-            <a:ext cx="5093061" cy="5047488"/>
+            <a:off x="457200" y="1170432"/>
+            <a:ext cx="11277295" cy="5230368"/>
           </a:xfrm>
           <a:prstGeom prst="rect">
             <a:avLst/>
@@ -4729,7 +4443,7 @@
       </p:sp>
       <p:sp>
         <p:nvSpPr>
-          <p:cNvPr id="9" name="TextBox 8"/>
+          <p:cNvPr id="6" name="TextBox 5"/>
           <p:cNvSpPr txBox="1"/>
           <p:nvPr/>
         </p:nvSpPr>
@@ -6851,118 +6565,14 @@
       </p:sp>
       <p:sp>
         <p:nvSpPr>
-          <p:cNvPr id="5" name="Rounded Rectangle 4"/>
-          <p:cNvSpPr/>
-          <p:nvPr/>
-        </p:nvSpPr>
-        <p:spPr>
-          <a:xfrm>
-            <a:off x="5797149" y="1573813"/>
-            <a:ext cx="6010497" cy="4057845"/>
-          </a:xfrm>
-          <a:prstGeom prst="roundRect">
-            <a:avLst>
-              <a:gd name="adj" fmla="val 4000"/>
-            </a:avLst>
-          </a:prstGeom>
-          <a:solidFill>
-            <a:srgbClr val="E8EEF4"/>
-          </a:solidFill>
-          <a:ln>
-            <a:noFill/>
-          </a:ln>
-        </p:spPr>
-        <p:style>
-          <a:lnRef idx="1">
-            <a:schemeClr val="accent1"/>
-          </a:lnRef>
-          <a:fillRef idx="3">
-            <a:schemeClr val="accent1"/>
-          </a:fillRef>
-          <a:effectRef idx="2">
-            <a:schemeClr val="accent1"/>
-          </a:effectRef>
-          <a:fontRef idx="minor">
-            <a:schemeClr val="lt1"/>
-          </a:fontRef>
-        </p:style>
-        <p:txBody>
-          <a:bodyPr rtlCol="0" anchor="ctr"/>
-          <a:lstStyle/>
-          <a:p>
-            <a:pPr algn="ctr"/>
-          </a:p>
-        </p:txBody>
-      </p:sp>
-      <p:pic>
-        <p:nvPicPr>
-          <p:cNvPr id="6" name="Picture 5" descr="laptop-code-live-demo.jpg"/>
-          <p:cNvPicPr>
-            <a:picLocks noChangeAspect="1"/>
-          </p:cNvPicPr>
-          <p:nvPr/>
-        </p:nvPicPr>
-        <p:blipFill>
-          <a:blip r:embed="rId2"/>
-          <a:stretch>
-            <a:fillRect/>
-          </a:stretch>
-        </p:blipFill>
-        <p:spPr>
-          <a:xfrm>
-            <a:off x="5870301" y="1646965"/>
-            <a:ext cx="5864193" cy="3911541"/>
-          </a:xfrm>
-          <a:prstGeom prst="rect">
-            <a:avLst/>
-          </a:prstGeom>
-        </p:spPr>
-      </p:pic>
-      <p:sp>
-        <p:nvSpPr>
-          <p:cNvPr id="7" name="TextBox 6"/>
+          <p:cNvPr id="5" name="TextBox 4"/>
           <p:cNvSpPr txBox="1"/>
           <p:nvPr/>
         </p:nvSpPr>
         <p:spPr>
           <a:xfrm>
-            <a:off x="5870301" y="5961888"/>
-            <a:ext cx="5864193" cy="320040"/>
-          </a:xfrm>
-          <a:prstGeom prst="rect">
-            <a:avLst/>
-          </a:prstGeom>
-          <a:noFill/>
-        </p:spPr>
-        <p:txBody>
-          <a:bodyPr wrap="square">
-            <a:spAutoFit/>
-          </a:bodyPr>
-          <a:lstStyle/>
-          <a:p>
-            <a:pPr algn="ctr"/>
-            <a:r>
-              <a:rPr sz="1100" b="0" i="1">
-                <a:solidFill>
-                  <a:srgbClr val="666666"/>
-                </a:solidFill>
-                <a:latin typeface="Calibri"/>
-              </a:rPr>
-              <a:t>Foto: olia danilevich · Pexels</a:t>
-            </a:r>
-          </a:p>
-        </p:txBody>
-      </p:sp>
-      <p:sp>
-        <p:nvSpPr>
-          <p:cNvPr id="8" name="TextBox 7"/>
-          <p:cNvSpPr txBox="1"/>
-          <p:nvPr/>
-        </p:nvSpPr>
-        <p:spPr>
-          <a:xfrm>
-            <a:off x="457200" y="1353312"/>
-            <a:ext cx="5093061" cy="5047488"/>
+            <a:off x="457200" y="1170432"/>
+            <a:ext cx="11277295" cy="5230368"/>
           </a:xfrm>
           <a:prstGeom prst="rect">
             <a:avLst/>
@@ -7032,6 +6642,15 @@
               </a:rPr>
               <a:t>Demo:</a:t>
             </a:r>
+            <a:r>
+              <a:rPr sz="2000" b="0" i="0">
+                <a:solidFill>
+                  <a:srgbClr val="333333"/>
+                </a:solidFill>
+                <a:latin typeface="Calibri"/>
+              </a:rPr>
+              <a:t> El docente sustenta el sistema de la clinica en 6 minutos delante del grupo, provoca a proposito un error de edad para mostrar la validacion, y luego repite la misma demo con la lista vacia para que se vea el desastre de no sembrar datos.</a:t>
+            </a:r>
           </a:p>
           <a:p>
             <a:pPr>
@@ -7053,7 +6672,7 @@
       </p:sp>
       <p:sp>
         <p:nvSpPr>
-          <p:cNvPr id="9" name="TextBox 8"/>
+          <p:cNvPr id="6" name="TextBox 5"/>
           <p:cNvSpPr txBox="1"/>
           <p:nvPr/>
         </p:nvSpPr>
@@ -7466,118 +7085,14 @@
       </p:sp>
       <p:sp>
         <p:nvSpPr>
-          <p:cNvPr id="5" name="Rounded Rectangle 4"/>
-          <p:cNvSpPr/>
-          <p:nvPr/>
-        </p:nvSpPr>
-        <p:spPr>
-          <a:xfrm>
-            <a:off x="5797149" y="1573813"/>
-            <a:ext cx="6010497" cy="4057845"/>
-          </a:xfrm>
-          <a:prstGeom prst="roundRect">
-            <a:avLst>
-              <a:gd name="adj" fmla="val 4000"/>
-            </a:avLst>
-          </a:prstGeom>
-          <a:solidFill>
-            <a:srgbClr val="E8EEF4"/>
-          </a:solidFill>
-          <a:ln>
-            <a:noFill/>
-          </a:ln>
-        </p:spPr>
-        <p:style>
-          <a:lnRef idx="1">
-            <a:schemeClr val="accent1"/>
-          </a:lnRef>
-          <a:fillRef idx="3">
-            <a:schemeClr val="accent1"/>
-          </a:fillRef>
-          <a:effectRef idx="2">
-            <a:schemeClr val="accent1"/>
-          </a:effectRef>
-          <a:fontRef idx="minor">
-            <a:schemeClr val="lt1"/>
-          </a:fontRef>
-        </p:style>
-        <p:txBody>
-          <a:bodyPr rtlCol="0" anchor="ctr"/>
-          <a:lstStyle/>
-          <a:p>
-            <a:pPr algn="ctr"/>
-          </a:p>
-        </p:txBody>
-      </p:sp>
-      <p:pic>
-        <p:nvPicPr>
-          <p:cNvPr id="6" name="Picture 5" descr="notebook-planning-desk-coffee.jpg"/>
-          <p:cNvPicPr>
-            <a:picLocks noChangeAspect="1"/>
-          </p:cNvPicPr>
-          <p:nvPr/>
-        </p:nvPicPr>
-        <p:blipFill>
-          <a:blip r:embed="rId2"/>
-          <a:stretch>
-            <a:fillRect/>
-          </a:stretch>
-        </p:blipFill>
-        <p:spPr>
-          <a:xfrm>
-            <a:off x="5870301" y="1646965"/>
-            <a:ext cx="5864193" cy="3911541"/>
-          </a:xfrm>
-          <a:prstGeom prst="rect">
-            <a:avLst/>
-          </a:prstGeom>
-        </p:spPr>
-      </p:pic>
-      <p:sp>
-        <p:nvSpPr>
-          <p:cNvPr id="7" name="TextBox 6"/>
+          <p:cNvPr id="5" name="TextBox 4"/>
           <p:cNvSpPr txBox="1"/>
           <p:nvPr/>
         </p:nvSpPr>
         <p:spPr>
           <a:xfrm>
-            <a:off x="5870301" y="5961888"/>
-            <a:ext cx="5864193" cy="320040"/>
-          </a:xfrm>
-          <a:prstGeom prst="rect">
-            <a:avLst/>
-          </a:prstGeom>
-          <a:noFill/>
-        </p:spPr>
-        <p:txBody>
-          <a:bodyPr wrap="square">
-            <a:spAutoFit/>
-          </a:bodyPr>
-          <a:lstStyle/>
-          <a:p>
-            <a:pPr algn="ctr"/>
-            <a:r>
-              <a:rPr sz="1100" b="0" i="1">
-                <a:solidFill>
-                  <a:srgbClr val="666666"/>
-                </a:solidFill>
-                <a:latin typeface="Calibri"/>
-              </a:rPr>
-              <a:t>Foto: Cup of  Couple · Pexels</a:t>
-            </a:r>
-          </a:p>
-        </p:txBody>
-      </p:sp>
-      <p:sp>
-        <p:nvSpPr>
-          <p:cNvPr id="8" name="TextBox 7"/>
-          <p:cNvSpPr txBox="1"/>
-          <p:nvPr/>
-        </p:nvSpPr>
-        <p:spPr>
-          <a:xfrm>
-            <a:off x="457200" y="1353312"/>
-            <a:ext cx="5093061" cy="5047488"/>
+            <a:off x="457200" y="1170432"/>
+            <a:ext cx="11277295" cy="5230368"/>
           </a:xfrm>
           <a:prstGeom prst="rect">
             <a:avLst/>
@@ -7613,6 +7128,15 @@
               </a:rPr>
               <a:t>Tema de hoy:</a:t>
             </a:r>
+            <a:r>
+              <a:rPr sz="2000" b="0" i="0">
+                <a:solidFill>
+                  <a:srgbClr val="333333"/>
+                </a:solidFill>
+                <a:latin typeface="Calibri"/>
+              </a:rPr>
+              <a:t> Preparacion de la presentacion final · Sustentacion del sistema de la clinica — Que mostrar, en que orden y como lograr que la demo no falle</a:t>
+            </a:r>
           </a:p>
           <a:p>
             <a:pPr>
@@ -7693,7 +7217,7 @@
       </p:sp>
       <p:sp>
         <p:nvSpPr>
-          <p:cNvPr id="9" name="TextBox 8"/>
+          <p:cNvPr id="6" name="TextBox 5"/>
           <p:cNvSpPr txBox="1"/>
           <p:nvPr/>
         </p:nvSpPr>
@@ -8726,118 +8250,14 @@
       </p:sp>
       <p:sp>
         <p:nvSpPr>
-          <p:cNvPr id="5" name="Rounded Rectangle 4"/>
-          <p:cNvSpPr/>
-          <p:nvPr/>
-        </p:nvSpPr>
-        <p:spPr>
-          <a:xfrm>
-            <a:off x="5797149" y="1879499"/>
-            <a:ext cx="6010497" cy="3446472"/>
-          </a:xfrm>
-          <a:prstGeom prst="roundRect">
-            <a:avLst>
-              <a:gd name="adj" fmla="val 4000"/>
-            </a:avLst>
-          </a:prstGeom>
-          <a:solidFill>
-            <a:srgbClr val="E8EEF4"/>
-          </a:solidFill>
-          <a:ln>
-            <a:noFill/>
-          </a:ln>
-        </p:spPr>
-        <p:style>
-          <a:lnRef idx="1">
-            <a:schemeClr val="accent1"/>
-          </a:lnRef>
-          <a:fillRef idx="3">
-            <a:schemeClr val="accent1"/>
-          </a:fillRef>
-          <a:effectRef idx="2">
-            <a:schemeClr val="accent1"/>
-          </a:effectRef>
-          <a:fontRef idx="minor">
-            <a:schemeClr val="lt1"/>
-          </a:fontRef>
-        </p:style>
-        <p:txBody>
-          <a:bodyPr rtlCol="0" anchor="ctr"/>
-          <a:lstStyle/>
-          <a:p>
-            <a:pPr algn="ctr"/>
-          </a:p>
-        </p:txBody>
-      </p:sp>
-      <p:pic>
-        <p:nvPicPr>
-          <p:cNvPr id="6" name="Picture 5" descr="developer-presenting-laptop-to-colleagues.jpg"/>
-          <p:cNvPicPr>
-            <a:picLocks noChangeAspect="1"/>
-          </p:cNvPicPr>
-          <p:nvPr/>
-        </p:nvPicPr>
-        <p:blipFill>
-          <a:blip r:embed="rId2"/>
-          <a:stretch>
-            <a:fillRect/>
-          </a:stretch>
-        </p:blipFill>
-        <p:spPr>
-          <a:xfrm>
-            <a:off x="5870301" y="1952651"/>
-            <a:ext cx="5864193" cy="3300168"/>
-          </a:xfrm>
-          <a:prstGeom prst="rect">
-            <a:avLst/>
-          </a:prstGeom>
-        </p:spPr>
-      </p:pic>
-      <p:sp>
-        <p:nvSpPr>
-          <p:cNvPr id="7" name="TextBox 6"/>
+          <p:cNvPr id="5" name="TextBox 4"/>
           <p:cNvSpPr txBox="1"/>
           <p:nvPr/>
         </p:nvSpPr>
         <p:spPr>
           <a:xfrm>
-            <a:off x="5870301" y="5961888"/>
-            <a:ext cx="5864193" cy="320040"/>
-          </a:xfrm>
-          <a:prstGeom prst="rect">
-            <a:avLst/>
-          </a:prstGeom>
-          <a:noFill/>
-        </p:spPr>
-        <p:txBody>
-          <a:bodyPr wrap="square">
-            <a:spAutoFit/>
-          </a:bodyPr>
-          <a:lstStyle/>
-          <a:p>
-            <a:pPr algn="ctr"/>
-            <a:r>
-              <a:rPr sz="1100" b="0" i="1">
-                <a:solidFill>
-                  <a:srgbClr val="666666"/>
-                </a:solidFill>
-                <a:latin typeface="Calibri"/>
-              </a:rPr>
-              <a:t>Foto: Artem Podrez · Pexels</a:t>
-            </a:r>
-          </a:p>
-        </p:txBody>
-      </p:sp>
-      <p:sp>
-        <p:nvSpPr>
-          <p:cNvPr id="8" name="TextBox 7"/>
-          <p:cNvSpPr txBox="1"/>
-          <p:nvPr/>
-        </p:nvSpPr>
-        <p:spPr>
-          <a:xfrm>
-            <a:off x="457200" y="1353312"/>
-            <a:ext cx="5093061" cy="5047488"/>
+            <a:off x="457200" y="1170432"/>
+            <a:ext cx="11277295" cy="5230368"/>
           </a:xfrm>
           <a:prstGeom prst="rect">
             <a:avLst/>
@@ -8901,7 +8321,7 @@
       </p:sp>
       <p:sp>
         <p:nvSpPr>
-          <p:cNvPr id="9" name="TextBox 8"/>
+          <p:cNvPr id="6" name="TextBox 5"/>
           <p:cNvSpPr txBox="1"/>
           <p:nvPr/>
         </p:nvSpPr>

--- a/Programacion II/Clases/Clase 14 - Preparacion de la presentacion final/Presentacion.pptx
+++ b/Programacion II/Clases/Clase 14 - Preparacion de la presentacion final/Presentacion.pptx
@@ -826,6 +826,94 @@
           <a:p>
             <a:r>
               <a:t>El manejo del tiempo y del nervio se entrena, no se improvisa. Un ensayo cronometrado revela cosas que el papel no muestra: que la introduccion se come tres minutos, que la demo se atasca en un formulario, que el cierre queda cortado. Por eso hoy ensayamos con reloj y anotamos el tiempo real de cada bloque frente al planeado, y se repite hasta que el total caiga entre cinco y ocho minutos con margen. Hay cosas que juegan en contra siempre: leer las diapositivas de espaldas al jurado, pedir disculpas por el proyecto antes de mostrarlo, culpar al computador, hablar de lo que 'iban a hacer' en vez de mostrar lo que hicieron, y pasarse del tiempo, porque eso obliga al jurado a cortar justo en la parte que mas les costo. Al reves, suman: hablar mirando al jurado, usar el vocabulario del dominio (dueno, mascota, cita, historia clinica) y reconocer con naturalidad las limitaciones conocidas.</a:t>
+            </a:r>
+          </a:p>
+        </p:txBody>
+      </p:sp>
+      <p:sp>
+        <p:nvSpPr>
+          <p:cNvPr id="4" name="Slide Number Placeholder 3"/>
+          <p:cNvSpPr>
+            <a:spLocks noGrp="1"/>
+          </p:cNvSpPr>
+          <p:nvPr>
+            <p:ph type="sldNum" idx="5" sz="quarter"/>
+          </p:nvPr>
+        </p:nvSpPr>
+        <p:spPr/>
+      </p:sp>
+    </p:spTree>
+  </p:cSld>
+  <p:clrMapOvr>
+    <a:masterClrMapping/>
+  </p:clrMapOvr>
+</p:notes>
+</file>
+
+<file path=ppt/notesSlides/notesSlide6.xml><?xml version="1.0" encoding="utf-8"?>
+<p:notes xmlns:a="http://schemas.openxmlformats.org/drawingml/2006/main" xmlns:p="http://schemas.openxmlformats.org/presentationml/2006/main" xmlns:r="http://schemas.openxmlformats.org/officeDocument/2006/relationships">
+  <p:cSld>
+    <p:spTree>
+      <p:nvGrpSpPr>
+        <p:cNvPr id="1" name=""/>
+        <p:cNvGrpSpPr/>
+        <p:nvPr/>
+      </p:nvGrpSpPr>
+      <p:grpSpPr>
+        <a:xfrm>
+          <a:off x="0" y="0"/>
+          <a:ext cx="0" cy="0"/>
+          <a:chOff x="0" y="0"/>
+          <a:chExt cx="0" cy="0"/>
+        </a:xfrm>
+      </p:grpSpPr>
+      <p:sp>
+        <p:nvSpPr>
+          <p:cNvPr id="2" name="Slide Image Placeholder 1"/>
+          <p:cNvSpPr>
+            <a:spLocks noGrp="1"/>
+          </p:cNvSpPr>
+          <p:nvPr>
+            <p:ph type="sldImg" idx="2"/>
+          </p:nvPr>
+        </p:nvSpPr>
+        <p:spPr/>
+      </p:sp>
+      <p:sp>
+        <p:nvSpPr>
+          <p:cNvPr id="3" name="Notes Placeholder 2"/>
+          <p:cNvSpPr>
+            <a:spLocks noGrp="1"/>
+          </p:cNvSpPr>
+          <p:nvPr>
+            <p:ph type="body" idx="3" sz="quarter"/>
+          </p:nvPr>
+        </p:nvSpPr>
+        <p:spPr/>
+        <p:txBody>
+          <a:bodyPr/>
+          <a:lstStyle/>
+          <a:p>
+            <a:r>
+              <a:t>TEXTO COMPLETO DE LA LÁMINA (se proyecta resumido):</a:t>
+            </a:r>
+          </a:p>
+          <a:p/>
+          <a:p>
+            <a:r>
+              <a:t>Herramienta: Visual Studio Code (Java)</a:t>
+            </a:r>
+          </a:p>
+          <a:p/>
+          <a:p>
+            <a:r>
+              <a:t>Demo: El docente sustenta el sistema de la clinica en 6 minutos delante del grupo, provoca a proposito un error de edad para mostrar la validacion, y luego repite la misma demo con la lista vacia para que se vea el desastre de no sembrar datos.</a:t>
+            </a:r>
+          </a:p>
+          <a:p/>
+          <a:p>
+            <a:r>
+              <a:t>Mismo dominio de la clinica — no otro ejemplo.</a:t>
             </a:r>
           </a:p>
         </p:txBody>
@@ -4356,14 +4444,83 @@
       </p:sp>
       <p:sp>
         <p:nvSpPr>
-          <p:cNvPr id="5" name="TextBox 4"/>
+          <p:cNvPr id="5" name="Rounded Rectangle 4"/>
+          <p:cNvSpPr/>
+          <p:nvPr/>
+        </p:nvSpPr>
+        <p:spPr>
+          <a:xfrm>
+            <a:off x="5797149" y="1343926"/>
+            <a:ext cx="6010497" cy="4837658"/>
+          </a:xfrm>
+          <a:prstGeom prst="roundRect">
+            <a:avLst>
+              <a:gd name="adj" fmla="val 4000"/>
+            </a:avLst>
+          </a:prstGeom>
+          <a:solidFill>
+            <a:srgbClr val="E8EEF4"/>
+          </a:solidFill>
+          <a:ln>
+            <a:noFill/>
+          </a:ln>
+        </p:spPr>
+        <p:style>
+          <a:lnRef idx="1">
+            <a:schemeClr val="accent1"/>
+          </a:lnRef>
+          <a:fillRef idx="3">
+            <a:schemeClr val="accent1"/>
+          </a:fillRef>
+          <a:effectRef idx="2">
+            <a:schemeClr val="accent1"/>
+          </a:effectRef>
+          <a:fontRef idx="minor">
+            <a:schemeClr val="lt1"/>
+          </a:fontRef>
+        </p:style>
+        <p:txBody>
+          <a:bodyPr rtlCol="0" anchor="ctr"/>
+          <a:lstStyle/>
+          <a:p>
+            <a:pPr algn="ctr"/>
+          </a:p>
+        </p:txBody>
+      </p:sp>
+      <p:pic>
+        <p:nvPicPr>
+          <p:cNvPr id="6" name="Picture 5" descr="ilus-preguntas-paso1.png"/>
+          <p:cNvPicPr>
+            <a:picLocks noChangeAspect="1"/>
+          </p:cNvPicPr>
+          <p:nvPr/>
+        </p:nvPicPr>
+        <p:blipFill>
+          <a:blip r:embed="rId2"/>
+          <a:stretch>
+            <a:fillRect/>
+          </a:stretch>
+        </p:blipFill>
+        <p:spPr>
+          <a:xfrm>
+            <a:off x="5870301" y="1417078"/>
+            <a:ext cx="5864193" cy="4691354"/>
+          </a:xfrm>
+          <a:prstGeom prst="rect">
+            <a:avLst/>
+          </a:prstGeom>
+        </p:spPr>
+      </p:pic>
+      <p:sp>
+        <p:nvSpPr>
+          <p:cNvPr id="7" name="TextBox 6"/>
           <p:cNvSpPr txBox="1"/>
           <p:nvPr/>
         </p:nvSpPr>
         <p:spPr>
           <a:xfrm>
-            <a:off x="457200" y="1170432"/>
-            <a:ext cx="11277295" cy="5230368"/>
+            <a:off x="457200" y="1353312"/>
+            <a:ext cx="5093061" cy="5047488"/>
           </a:xfrm>
           <a:prstGeom prst="rect">
             <a:avLst/>
@@ -4443,7 +4600,7 @@
       </p:sp>
       <p:sp>
         <p:nvSpPr>
-          <p:cNvPr id="6" name="TextBox 5"/>
+          <p:cNvPr id="8" name="TextBox 7"/>
           <p:cNvSpPr txBox="1"/>
           <p:nvPr/>
         </p:nvSpPr>
@@ -6565,14 +6722,83 @@
       </p:sp>
       <p:sp>
         <p:nvSpPr>
-          <p:cNvPr id="5" name="TextBox 4"/>
+          <p:cNvPr id="5" name="Rounded Rectangle 4"/>
+          <p:cNvSpPr/>
+          <p:nvPr/>
+        </p:nvSpPr>
+        <p:spPr>
+          <a:xfrm>
+            <a:off x="5797149" y="1343926"/>
+            <a:ext cx="6010497" cy="4837658"/>
+          </a:xfrm>
+          <a:prstGeom prst="roundRect">
+            <a:avLst>
+              <a:gd name="adj" fmla="val 4000"/>
+            </a:avLst>
+          </a:prstGeom>
+          <a:solidFill>
+            <a:srgbClr val="E8EEF4"/>
+          </a:solidFill>
+          <a:ln>
+            <a:noFill/>
+          </a:ln>
+        </p:spPr>
+        <p:style>
+          <a:lnRef idx="1">
+            <a:schemeClr val="accent1"/>
+          </a:lnRef>
+          <a:fillRef idx="3">
+            <a:schemeClr val="accent1"/>
+          </a:fillRef>
+          <a:effectRef idx="2">
+            <a:schemeClr val="accent1"/>
+          </a:effectRef>
+          <a:fontRef idx="minor">
+            <a:schemeClr val="lt1"/>
+          </a:fontRef>
+        </p:style>
+        <p:txBody>
+          <a:bodyPr rtlCol="0" anchor="ctr"/>
+          <a:lstStyle/>
+          <a:p>
+            <a:pPr algn="ctr"/>
+          </a:p>
+        </p:txBody>
+      </p:sp>
+      <p:pic>
+        <p:nvPicPr>
+          <p:cNvPr id="6" name="Picture 5" descr="ilus-demo-paso1.png"/>
+          <p:cNvPicPr>
+            <a:picLocks noChangeAspect="1"/>
+          </p:cNvPicPr>
+          <p:nvPr/>
+        </p:nvPicPr>
+        <p:blipFill>
+          <a:blip r:embed="rId2"/>
+          <a:stretch>
+            <a:fillRect/>
+          </a:stretch>
+        </p:blipFill>
+        <p:spPr>
+          <a:xfrm>
+            <a:off x="5870301" y="1417078"/>
+            <a:ext cx="5864193" cy="4691354"/>
+          </a:xfrm>
+          <a:prstGeom prst="rect">
+            <a:avLst/>
+          </a:prstGeom>
+        </p:spPr>
+      </p:pic>
+      <p:sp>
+        <p:nvSpPr>
+          <p:cNvPr id="7" name="TextBox 6"/>
           <p:cNvSpPr txBox="1"/>
           <p:nvPr/>
         </p:nvSpPr>
         <p:spPr>
           <a:xfrm>
-            <a:off x="457200" y="1170432"/>
-            <a:ext cx="11277295" cy="5230368"/>
+            <a:off x="457200" y="1353312"/>
+            <a:ext cx="5093061" cy="5047488"/>
           </a:xfrm>
           <a:prstGeom prst="rect">
             <a:avLst/>
@@ -6649,7 +6875,7 @@
                 </a:solidFill>
                 <a:latin typeface="Calibri"/>
               </a:rPr>
-              <a:t> El docente sustenta el sistema de la clinica en 6 minutos delante del grupo, provoca a proposito un error de edad para mostrar la validacion, y luego repite la misma demo con la lista vacia para que se vea el desastre de no sembrar datos.</a:t>
+              <a:t> El docente sustenta el sistema de la clinica en 6 minutos delante del grupo, provoca a proposito un error de edad para mostrar la…</a:t>
             </a:r>
           </a:p>
           <a:p>
@@ -6672,7 +6898,7 @@
       </p:sp>
       <p:sp>
         <p:nvSpPr>
-          <p:cNvPr id="6" name="TextBox 5"/>
+          <p:cNvPr id="8" name="TextBox 7"/>
           <p:cNvSpPr txBox="1"/>
           <p:nvPr/>
         </p:nvSpPr>
@@ -8250,14 +8476,83 @@
       </p:sp>
       <p:sp>
         <p:nvSpPr>
-          <p:cNvPr id="5" name="TextBox 4"/>
+          <p:cNvPr id="5" name="Rounded Rectangle 4"/>
+          <p:cNvSpPr/>
+          <p:nvPr/>
+        </p:nvSpPr>
+        <p:spPr>
+          <a:xfrm>
+            <a:off x="5797149" y="1343926"/>
+            <a:ext cx="6010497" cy="4837658"/>
+          </a:xfrm>
+          <a:prstGeom prst="roundRect">
+            <a:avLst>
+              <a:gd name="adj" fmla="val 4000"/>
+            </a:avLst>
+          </a:prstGeom>
+          <a:solidFill>
+            <a:srgbClr val="E8EEF4"/>
+          </a:solidFill>
+          <a:ln>
+            <a:noFill/>
+          </a:ln>
+        </p:spPr>
+        <p:style>
+          <a:lnRef idx="1">
+            <a:schemeClr val="accent1"/>
+          </a:lnRef>
+          <a:fillRef idx="3">
+            <a:schemeClr val="accent1"/>
+          </a:fillRef>
+          <a:effectRef idx="2">
+            <a:schemeClr val="accent1"/>
+          </a:effectRef>
+          <a:fontRef idx="minor">
+            <a:schemeClr val="lt1"/>
+          </a:fontRef>
+        </p:style>
+        <p:txBody>
+          <a:bodyPr rtlCol="0" anchor="ctr"/>
+          <a:lstStyle/>
+          <a:p>
+            <a:pPr algn="ctr"/>
+          </a:p>
+        </p:txBody>
+      </p:sp>
+      <p:pic>
+        <p:nvPicPr>
+          <p:cNvPr id="6" name="Picture 5" descr="ilus-sustentar-paso1.png"/>
+          <p:cNvPicPr>
+            <a:picLocks noChangeAspect="1"/>
+          </p:cNvPicPr>
+          <p:nvPr/>
+        </p:nvPicPr>
+        <p:blipFill>
+          <a:blip r:embed="rId2"/>
+          <a:stretch>
+            <a:fillRect/>
+          </a:stretch>
+        </p:blipFill>
+        <p:spPr>
+          <a:xfrm>
+            <a:off x="5870301" y="1417078"/>
+            <a:ext cx="5864193" cy="4691354"/>
+          </a:xfrm>
+          <a:prstGeom prst="rect">
+            <a:avLst/>
+          </a:prstGeom>
+        </p:spPr>
+      </p:pic>
+      <p:sp>
+        <p:nvSpPr>
+          <p:cNvPr id="7" name="TextBox 6"/>
           <p:cNvSpPr txBox="1"/>
           <p:nvPr/>
         </p:nvSpPr>
         <p:spPr>
           <a:xfrm>
-            <a:off x="457200" y="1170432"/>
-            <a:ext cx="11277295" cy="5230368"/>
+            <a:off x="457200" y="1353312"/>
+            <a:ext cx="5093061" cy="5047488"/>
           </a:xfrm>
           <a:prstGeom prst="rect">
             <a:avLst/>
@@ -8321,7 +8616,7 @@
       </p:sp>
       <p:sp>
         <p:nvSpPr>
-          <p:cNvPr id="6" name="TextBox 5"/>
+          <p:cNvPr id="8" name="TextBox 7"/>
           <p:cNvSpPr txBox="1"/>
           <p:nvPr/>
         </p:nvSpPr>

--- a/Programacion II/Clases/Clase 14 - Preparacion de la presentacion final/Presentacion.pptx
+++ b/Programacion II/Clases/Clase 14 - Preparacion de la presentacion final/Presentacion.pptx
@@ -5344,7 +5344,7 @@
         <p:spPr>
           <a:xfrm>
             <a:off x="457200" y="1261872"/>
-            <a:ext cx="11277295" cy="4692907"/>
+            <a:ext cx="11277295" cy="3375158"/>
           </a:xfrm>
           <a:prstGeom prst="roundRect">
             <a:avLst>
@@ -5593,8 +5593,8 @@
         </p:nvSpPr>
         <p:spPr>
           <a:xfrm>
-            <a:off x="1188720" y="1719072"/>
-            <a:ext cx="10271455" cy="4098547"/>
+            <a:off x="685800" y="1719072"/>
+            <a:ext cx="502920" cy="2780798"/>
           </a:xfrm>
           <a:prstGeom prst="rect">
             <a:avLst/>
@@ -5607,899 +5607,179 @@
           </a:bodyPr>
           <a:lstStyle/>
           <a:p>
-            <a:pPr>
+            <a:pPr algn="r">
               <a:spcAft>
-                <a:spcPts val="407"/>
+                <a:spcPts val="278"/>
               </a:spcAft>
             </a:pPr>
             <a:r>
-              <a:rPr sz="1900" i="0" b="0">
-                <a:solidFill>
-                  <a:srgbClr val="569CD6"/>
-                </a:solidFill>
-                <a:latin typeface="Consolas"/>
-              </a:rPr>
-              <a:t>for</a:t>
-            </a:r>
-            <a:r>
-              <a:rPr sz="1900" i="0" b="0">
-                <a:solidFill>
-                  <a:srgbClr val="D4D4D4"/>
-                </a:solidFill>
-                <a:latin typeface="Consolas"/>
-              </a:rPr>
-              <a:t> (</a:t>
-            </a:r>
-            <a:r>
-              <a:rPr sz="1900" i="0" b="0">
-                <a:solidFill>
-                  <a:srgbClr val="4EC9B0"/>
-                </a:solidFill>
-                <a:latin typeface="Consolas"/>
-              </a:rPr>
-              <a:t>int</a:t>
-            </a:r>
-            <a:r>
-              <a:rPr sz="1900" i="0" b="0">
-                <a:solidFill>
-                  <a:srgbClr val="D4D4D4"/>
-                </a:solidFill>
-                <a:latin typeface="Consolas"/>
-              </a:rPr>
-              <a:t> </a:t>
-            </a:r>
-            <a:r>
-              <a:rPr sz="1900" i="0" b="0">
-                <a:solidFill>
-                  <a:srgbClr val="D4D4D4"/>
-                </a:solidFill>
-                <a:latin typeface="Consolas"/>
-              </a:rPr>
-              <a:t>i</a:t>
-            </a:r>
-            <a:r>
-              <a:rPr sz="1900" i="0" b="0">
-                <a:solidFill>
-                  <a:srgbClr val="D4D4D4"/>
-                </a:solidFill>
-                <a:latin typeface="Consolas"/>
-              </a:rPr>
-              <a:t> = </a:t>
-            </a:r>
-            <a:r>
-              <a:rPr sz="1900" i="0" b="0">
-                <a:solidFill>
-                  <a:srgbClr val="B5CEA8"/>
-                </a:solidFill>
-                <a:latin typeface="Consolas"/>
-              </a:rPr>
-              <a:t>0</a:t>
-            </a:r>
-            <a:r>
-              <a:rPr sz="1900" i="0" b="0">
-                <a:solidFill>
-                  <a:srgbClr val="D4D4D4"/>
-                </a:solidFill>
-                <a:latin typeface="Consolas"/>
-              </a:rPr>
-              <a:t>; </a:t>
-            </a:r>
-            <a:r>
-              <a:rPr sz="1900" i="0" b="0">
-                <a:solidFill>
-                  <a:srgbClr val="D4D4D4"/>
-                </a:solidFill>
-                <a:latin typeface="Consolas"/>
-              </a:rPr>
-              <a:t>i</a:t>
-            </a:r>
-            <a:r>
-              <a:rPr sz="1900" i="0" b="0">
-                <a:solidFill>
-                  <a:srgbClr val="D4D4D4"/>
-                </a:solidFill>
-                <a:latin typeface="Consolas"/>
-              </a:rPr>
-              <a:t> &lt; </a:t>
-            </a:r>
-            <a:r>
-              <a:rPr sz="1900" i="0" b="0">
-                <a:solidFill>
-                  <a:srgbClr val="D4D4D4"/>
-                </a:solidFill>
-                <a:latin typeface="Consolas"/>
-              </a:rPr>
-              <a:t>GUION</a:t>
-            </a:r>
-            <a:r>
-              <a:rPr sz="1900" i="0" b="0">
-                <a:solidFill>
-                  <a:srgbClr val="D4D4D4"/>
-                </a:solidFill>
-                <a:latin typeface="Consolas"/>
-              </a:rPr>
-              <a:t>.</a:t>
-            </a:r>
-            <a:r>
-              <a:rPr sz="1900" i="0" b="0">
-                <a:solidFill>
-                  <a:srgbClr val="D4D4D4"/>
-                </a:solidFill>
-                <a:latin typeface="Consolas"/>
-              </a:rPr>
-              <a:t>length</a:t>
-            </a:r>
-            <a:r>
-              <a:rPr sz="1900" i="0" b="0">
-                <a:solidFill>
-                  <a:srgbClr val="D4D4D4"/>
-                </a:solidFill>
-                <a:latin typeface="Consolas"/>
-              </a:rPr>
-              <a:t>; </a:t>
-            </a:r>
-            <a:r>
-              <a:rPr sz="1900" i="0" b="0">
-                <a:solidFill>
-                  <a:srgbClr val="D4D4D4"/>
-                </a:solidFill>
-                <a:latin typeface="Consolas"/>
-              </a:rPr>
-              <a:t>i</a:t>
-            </a:r>
-            <a:r>
-              <a:rPr sz="1900" i="0" b="0">
-                <a:solidFill>
-                  <a:srgbClr val="D4D4D4"/>
-                </a:solidFill>
-                <a:latin typeface="Consolas"/>
-              </a:rPr>
-              <a:t>++) {</a:t>
-            </a:r>
-          </a:p>
-          <a:p>
-            <a:pPr>
+              <a:rPr sz="1300" i="0" b="0">
+                <a:solidFill>
+                  <a:srgbClr val="858585"/>
+                </a:solidFill>
+                <a:latin typeface="Consolas"/>
+              </a:rPr>
+              <a:t>1</a:t>
+            </a:r>
+          </a:p>
+          <a:p>
+            <a:pPr algn="r">
               <a:spcAft>
-                <a:spcPts val="407"/>
+                <a:spcPts val="278"/>
               </a:spcAft>
             </a:pPr>
             <a:r>
-              <a:rPr sz="1900" i="0" b="0">
-                <a:solidFill>
-                  <a:srgbClr val="D4D4D4"/>
-                </a:solidFill>
-                <a:latin typeface="Consolas"/>
-              </a:rPr>
-              <a:t>    </a:t>
-            </a:r>
-            <a:r>
-              <a:rPr sz="1900" i="0" b="0">
-                <a:solidFill>
-                  <a:srgbClr val="4EC9B0"/>
-                </a:solidFill>
-                <a:latin typeface="Consolas"/>
-              </a:rPr>
-              <a:t>String</a:t>
-            </a:r>
-            <a:r>
-              <a:rPr sz="1900" i="0" b="0">
-                <a:solidFill>
-                  <a:srgbClr val="D4D4D4"/>
-                </a:solidFill>
-                <a:latin typeface="Consolas"/>
-              </a:rPr>
-              <a:t>[] </a:t>
-            </a:r>
-            <a:r>
-              <a:rPr sz="1900" i="0" b="0">
-                <a:solidFill>
-                  <a:srgbClr val="D4D4D4"/>
-                </a:solidFill>
-                <a:latin typeface="Consolas"/>
-              </a:rPr>
-              <a:t>bloque</a:t>
-            </a:r>
-            <a:r>
-              <a:rPr sz="1900" i="0" b="0">
-                <a:solidFill>
-                  <a:srgbClr val="D4D4D4"/>
-                </a:solidFill>
-                <a:latin typeface="Consolas"/>
-              </a:rPr>
-              <a:t> = </a:t>
-            </a:r>
-            <a:r>
-              <a:rPr sz="1900" i="0" b="0">
-                <a:solidFill>
-                  <a:srgbClr val="D4D4D4"/>
-                </a:solidFill>
-                <a:latin typeface="Consolas"/>
-              </a:rPr>
-              <a:t>GUION</a:t>
-            </a:r>
-            <a:r>
-              <a:rPr sz="1900" i="0" b="0">
-                <a:solidFill>
-                  <a:srgbClr val="D4D4D4"/>
-                </a:solidFill>
-                <a:latin typeface="Consolas"/>
-              </a:rPr>
-              <a:t>[</a:t>
-            </a:r>
-            <a:r>
-              <a:rPr sz="1900" i="0" b="0">
-                <a:solidFill>
-                  <a:srgbClr val="D4D4D4"/>
-                </a:solidFill>
-                <a:latin typeface="Consolas"/>
-              </a:rPr>
-              <a:t>i</a:t>
-            </a:r>
-            <a:r>
-              <a:rPr sz="1900" i="0" b="0">
-                <a:solidFill>
-                  <a:srgbClr val="D4D4D4"/>
-                </a:solidFill>
-                <a:latin typeface="Consolas"/>
-              </a:rPr>
-              <a:t>];</a:t>
-            </a:r>
-          </a:p>
-          <a:p>
-            <a:pPr>
+              <a:rPr sz="1300" i="0" b="0">
+                <a:solidFill>
+                  <a:srgbClr val="858585"/>
+                </a:solidFill>
+                <a:latin typeface="Consolas"/>
+              </a:rPr>
+              <a:t>2</a:t>
+            </a:r>
+          </a:p>
+          <a:p>
+            <a:pPr algn="r">
               <a:spcAft>
-                <a:spcPts val="407"/>
+                <a:spcPts val="278"/>
               </a:spcAft>
             </a:pPr>
             <a:r>
-              <a:rPr sz="1900" i="0" b="0">
-                <a:solidFill>
-                  <a:srgbClr val="D4D4D4"/>
-                </a:solidFill>
-                <a:latin typeface="Consolas"/>
-              </a:rPr>
-              <a:t>    </a:t>
-            </a:r>
-            <a:r>
-              <a:rPr sz="1900" i="1" b="0">
-                <a:solidFill>
-                  <a:srgbClr val="6A9955"/>
-                </a:solidFill>
-                <a:latin typeface="Consolas"/>
-              </a:rPr>
-              <a:t>// ...</a:t>
-            </a:r>
-          </a:p>
-          <a:p>
-            <a:pPr>
+              <a:rPr sz="1300" i="0" b="0">
+                <a:solidFill>
+                  <a:srgbClr val="858585"/>
+                </a:solidFill>
+                <a:latin typeface="Consolas"/>
+              </a:rPr>
+              <a:t>3</a:t>
+            </a:r>
+          </a:p>
+          <a:p>
+            <a:pPr algn="r">
               <a:spcAft>
-                <a:spcPts val="407"/>
+                <a:spcPts val="278"/>
               </a:spcAft>
             </a:pPr>
             <a:r>
-              <a:rPr sz="1900" i="0" b="0">
-                <a:solidFill>
-                  <a:srgbClr val="D4D4D4"/>
-                </a:solidFill>
-                <a:latin typeface="Consolas"/>
-              </a:rPr>
-              <a:t>    </a:t>
-            </a:r>
-            <a:r>
-              <a:rPr sz="1900" i="0" b="0">
-                <a:solidFill>
-                  <a:srgbClr val="DCDCAA"/>
-                </a:solidFill>
-                <a:latin typeface="Consolas"/>
-              </a:rPr>
-              <a:t>teclado.nextLine</a:t>
-            </a:r>
-            <a:r>
-              <a:rPr sz="1900" i="0" b="0">
-                <a:solidFill>
-                  <a:srgbClr val="D4D4D4"/>
-                </a:solidFill>
-                <a:latin typeface="Consolas"/>
-              </a:rPr>
-              <a:t>();</a:t>
-            </a:r>
-          </a:p>
-          <a:p>
-            <a:pPr>
+              <a:rPr sz="1300" i="0" b="0">
+                <a:solidFill>
+                  <a:srgbClr val="858585"/>
+                </a:solidFill>
+                <a:latin typeface="Consolas"/>
+              </a:rPr>
+              <a:t>4</a:t>
+            </a:r>
+          </a:p>
+          <a:p>
+            <a:pPr algn="r">
               <a:spcAft>
-                <a:spcPts val="407"/>
+                <a:spcPts val="278"/>
               </a:spcAft>
             </a:pPr>
             <a:r>
-              <a:rPr sz="1900" i="0" b="0">
-                <a:solidFill>
-                  <a:srgbClr val="D4D4D4"/>
-                </a:solidFill>
-                <a:latin typeface="Consolas"/>
-              </a:rPr>
-              <a:t>    </a:t>
-            </a:r>
-            <a:r>
-              <a:rPr sz="1900" i="0" b="0">
-                <a:solidFill>
-                  <a:srgbClr val="4EC9B0"/>
-                </a:solidFill>
-                <a:latin typeface="Consolas"/>
-              </a:rPr>
-              <a:t>long</a:t>
-            </a:r>
-            <a:r>
-              <a:rPr sz="1900" i="0" b="0">
-                <a:solidFill>
-                  <a:srgbClr val="D4D4D4"/>
-                </a:solidFill>
-                <a:latin typeface="Consolas"/>
-              </a:rPr>
-              <a:t> </a:t>
-            </a:r>
-            <a:r>
-              <a:rPr sz="1900" i="0" b="0">
-                <a:solidFill>
-                  <a:srgbClr val="D4D4D4"/>
-                </a:solidFill>
-                <a:latin typeface="Consolas"/>
-              </a:rPr>
-              <a:t>ahora</a:t>
-            </a:r>
-            <a:r>
-              <a:rPr sz="1900" i="0" b="0">
-                <a:solidFill>
-                  <a:srgbClr val="D4D4D4"/>
-                </a:solidFill>
-                <a:latin typeface="Consolas"/>
-              </a:rPr>
-              <a:t> = </a:t>
-            </a:r>
-            <a:r>
-              <a:rPr sz="1900" i="0" b="0">
-                <a:solidFill>
-                  <a:srgbClr val="DCDCAA"/>
-                </a:solidFill>
-                <a:latin typeface="Consolas"/>
-              </a:rPr>
-              <a:t>System.currentTimeMillis</a:t>
-            </a:r>
-            <a:r>
-              <a:rPr sz="1900" i="0" b="0">
-                <a:solidFill>
-                  <a:srgbClr val="D4D4D4"/>
-                </a:solidFill>
-                <a:latin typeface="Consolas"/>
-              </a:rPr>
-              <a:t>();</a:t>
-            </a:r>
-          </a:p>
-          <a:p>
-            <a:pPr>
+              <a:rPr sz="1300" i="0" b="0">
+                <a:solidFill>
+                  <a:srgbClr val="858585"/>
+                </a:solidFill>
+                <a:latin typeface="Consolas"/>
+              </a:rPr>
+              <a:t>5</a:t>
+            </a:r>
+          </a:p>
+          <a:p>
+            <a:pPr algn="r">
               <a:spcAft>
-                <a:spcPts val="407"/>
+                <a:spcPts val="278"/>
               </a:spcAft>
             </a:pPr>
             <a:r>
-              <a:rPr sz="1900" i="0" b="0">
-                <a:solidFill>
-                  <a:srgbClr val="D4D4D4"/>
-                </a:solidFill>
-                <a:latin typeface="Consolas"/>
-              </a:rPr>
-              <a:t>    </a:t>
-            </a:r>
-            <a:r>
-              <a:rPr sz="1900" i="0" b="0">
-                <a:solidFill>
-                  <a:srgbClr val="4EC9B0"/>
-                </a:solidFill>
-                <a:latin typeface="Consolas"/>
-              </a:rPr>
-              <a:t>double</a:t>
-            </a:r>
-            <a:r>
-              <a:rPr sz="1900" i="0" b="0">
-                <a:solidFill>
-                  <a:srgbClr val="D4D4D4"/>
-                </a:solidFill>
-                <a:latin typeface="Consolas"/>
-              </a:rPr>
-              <a:t> </a:t>
-            </a:r>
-            <a:r>
-              <a:rPr sz="1900" i="0" b="0">
-                <a:solidFill>
-                  <a:srgbClr val="D4D4D4"/>
-                </a:solidFill>
-                <a:latin typeface="Consolas"/>
-              </a:rPr>
-              <a:t>real</a:t>
-            </a:r>
-            <a:r>
-              <a:rPr sz="1900" i="0" b="0">
-                <a:solidFill>
-                  <a:srgbClr val="D4D4D4"/>
-                </a:solidFill>
-                <a:latin typeface="Consolas"/>
-              </a:rPr>
-              <a:t> = (</a:t>
-            </a:r>
-            <a:r>
-              <a:rPr sz="1900" i="0" b="0">
-                <a:solidFill>
-                  <a:srgbClr val="D4D4D4"/>
-                </a:solidFill>
-                <a:latin typeface="Consolas"/>
-              </a:rPr>
-              <a:t>ahora</a:t>
-            </a:r>
-            <a:r>
-              <a:rPr sz="1900" i="0" b="0">
-                <a:solidFill>
-                  <a:srgbClr val="D4D4D4"/>
-                </a:solidFill>
-                <a:latin typeface="Consolas"/>
-              </a:rPr>
-              <a:t> - </a:t>
-            </a:r>
-            <a:r>
-              <a:rPr sz="1900" i="0" b="0">
-                <a:solidFill>
-                  <a:srgbClr val="D4D4D4"/>
-                </a:solidFill>
-                <a:latin typeface="Consolas"/>
-              </a:rPr>
-              <a:t>anterior</a:t>
-            </a:r>
-            <a:r>
-              <a:rPr sz="1900" i="0" b="0">
-                <a:solidFill>
-                  <a:srgbClr val="D4D4D4"/>
-                </a:solidFill>
-                <a:latin typeface="Consolas"/>
-              </a:rPr>
-              <a:t>) / </a:t>
-            </a:r>
-            <a:r>
-              <a:rPr sz="1900" i="0" b="0">
-                <a:solidFill>
-                  <a:srgbClr val="B5CEA8"/>
-                </a:solidFill>
-                <a:latin typeface="Consolas"/>
-              </a:rPr>
-              <a:t>60000.0</a:t>
-            </a:r>
-            <a:r>
-              <a:rPr sz="1900" i="0" b="0">
-                <a:solidFill>
-                  <a:srgbClr val="D4D4D4"/>
-                </a:solidFill>
-                <a:latin typeface="Consolas"/>
-              </a:rPr>
-              <a:t>;</a:t>
-            </a:r>
-          </a:p>
-          <a:p>
-            <a:pPr>
+              <a:rPr sz="1300" i="0" b="0">
+                <a:solidFill>
+                  <a:srgbClr val="858585"/>
+                </a:solidFill>
+                <a:latin typeface="Consolas"/>
+              </a:rPr>
+              <a:t>6</a:t>
+            </a:r>
+          </a:p>
+          <a:p>
+            <a:pPr algn="r">
               <a:spcAft>
-                <a:spcPts val="407"/>
+                <a:spcPts val="278"/>
               </a:spcAft>
             </a:pPr>
             <a:r>
-              <a:rPr sz="1900" i="0" b="0">
-                <a:solidFill>
-                  <a:srgbClr val="D4D4D4"/>
-                </a:solidFill>
-                <a:latin typeface="Consolas"/>
-              </a:rPr>
-              <a:t>    </a:t>
-            </a:r>
-            <a:r>
-              <a:rPr sz="1900" i="0" b="0">
-                <a:solidFill>
-                  <a:srgbClr val="4EC9B0"/>
-                </a:solidFill>
-                <a:latin typeface="Consolas"/>
-              </a:rPr>
-              <a:t>double</a:t>
-            </a:r>
-            <a:r>
-              <a:rPr sz="1900" i="0" b="0">
-                <a:solidFill>
-                  <a:srgbClr val="D4D4D4"/>
-                </a:solidFill>
-                <a:latin typeface="Consolas"/>
-              </a:rPr>
-              <a:t> </a:t>
-            </a:r>
-            <a:r>
-              <a:rPr sz="1900" i="0" b="0">
-                <a:solidFill>
-                  <a:srgbClr val="D4D4D4"/>
-                </a:solidFill>
-                <a:latin typeface="Consolas"/>
-              </a:rPr>
-              <a:t>plan</a:t>
-            </a:r>
-            <a:r>
-              <a:rPr sz="1900" i="0" b="0">
-                <a:solidFill>
-                  <a:srgbClr val="D4D4D4"/>
-                </a:solidFill>
-                <a:latin typeface="Consolas"/>
-              </a:rPr>
-              <a:t> = </a:t>
-            </a:r>
-            <a:r>
-              <a:rPr sz="1900" i="0" b="0">
-                <a:solidFill>
-                  <a:srgbClr val="DCDCAA"/>
-                </a:solidFill>
-                <a:latin typeface="Consolas"/>
-              </a:rPr>
-              <a:t>Double.parseDouble</a:t>
-            </a:r>
-            <a:r>
-              <a:rPr sz="1900" i="0" b="0">
-                <a:solidFill>
-                  <a:srgbClr val="D4D4D4"/>
-                </a:solidFill>
-                <a:latin typeface="Consolas"/>
-              </a:rPr>
-              <a:t>(</a:t>
-            </a:r>
-            <a:r>
-              <a:rPr sz="1900" i="0" b="0">
-                <a:solidFill>
-                  <a:srgbClr val="D4D4D4"/>
-                </a:solidFill>
-                <a:latin typeface="Consolas"/>
-              </a:rPr>
-              <a:t>bloque</a:t>
-            </a:r>
-            <a:r>
-              <a:rPr sz="1900" i="0" b="0">
-                <a:solidFill>
-                  <a:srgbClr val="D4D4D4"/>
-                </a:solidFill>
-                <a:latin typeface="Consolas"/>
-              </a:rPr>
-              <a:t>[</a:t>
-            </a:r>
-            <a:r>
-              <a:rPr sz="1900" i="0" b="0">
-                <a:solidFill>
-                  <a:srgbClr val="B5CEA8"/>
-                </a:solidFill>
-                <a:latin typeface="Consolas"/>
-              </a:rPr>
-              <a:t>2</a:t>
-            </a:r>
-            <a:r>
-              <a:rPr sz="1900" i="0" b="0">
-                <a:solidFill>
-                  <a:srgbClr val="D4D4D4"/>
-                </a:solidFill>
-                <a:latin typeface="Consolas"/>
-              </a:rPr>
-              <a:t>]);</a:t>
-            </a:r>
-          </a:p>
-          <a:p>
-            <a:pPr>
+              <a:rPr sz="1300" i="0" b="0">
+                <a:solidFill>
+                  <a:srgbClr val="858585"/>
+                </a:solidFill>
+                <a:latin typeface="Consolas"/>
+              </a:rPr>
+              <a:t>7</a:t>
+            </a:r>
+          </a:p>
+          <a:p>
+            <a:pPr algn="r">
               <a:spcAft>
-                <a:spcPts val="407"/>
+                <a:spcPts val="278"/>
               </a:spcAft>
             </a:pPr>
             <a:r>
-              <a:rPr sz="1900" i="0" b="0">
-                <a:solidFill>
-                  <a:srgbClr val="D4D4D4"/>
-                </a:solidFill>
-                <a:latin typeface="Consolas"/>
-              </a:rPr>
-              <a:t>    </a:t>
-            </a:r>
-            <a:r>
-              <a:rPr sz="1900" i="0" b="0">
-                <a:solidFill>
-                  <a:srgbClr val="4EC9B0"/>
-                </a:solidFill>
-                <a:latin typeface="Consolas"/>
-              </a:rPr>
-              <a:t>String</a:t>
-            </a:r>
-            <a:r>
-              <a:rPr sz="1900" i="0" b="0">
-                <a:solidFill>
-                  <a:srgbClr val="D4D4D4"/>
-                </a:solidFill>
-                <a:latin typeface="Consolas"/>
-              </a:rPr>
-              <a:t> </a:t>
-            </a:r>
-            <a:r>
-              <a:rPr sz="1900" i="0" b="0">
-                <a:solidFill>
-                  <a:srgbClr val="D4D4D4"/>
-                </a:solidFill>
-                <a:latin typeface="Consolas"/>
-              </a:rPr>
-              <a:t>veredicto</a:t>
-            </a:r>
-            <a:r>
-              <a:rPr sz="1900" i="0" b="0">
-                <a:solidFill>
-                  <a:srgbClr val="D4D4D4"/>
-                </a:solidFill>
-                <a:latin typeface="Consolas"/>
-              </a:rPr>
-              <a:t> = </a:t>
-            </a:r>
-            <a:r>
-              <a:rPr sz="1900" i="0" b="0">
-                <a:solidFill>
-                  <a:srgbClr val="D4D4D4"/>
-                </a:solidFill>
-                <a:latin typeface="Consolas"/>
-              </a:rPr>
-              <a:t>real</a:t>
-            </a:r>
-            <a:r>
-              <a:rPr sz="1900" i="0" b="0">
-                <a:solidFill>
-                  <a:srgbClr val="D4D4D4"/>
-                </a:solidFill>
-                <a:latin typeface="Consolas"/>
-              </a:rPr>
-              <a:t> &gt; </a:t>
-            </a:r>
-            <a:r>
-              <a:rPr sz="1900" i="0" b="0">
-                <a:solidFill>
-                  <a:srgbClr val="D4D4D4"/>
-                </a:solidFill>
-                <a:latin typeface="Consolas"/>
-              </a:rPr>
-              <a:t>plan</a:t>
-            </a:r>
-            <a:r>
-              <a:rPr sz="1900" i="0" b="0">
-                <a:solidFill>
-                  <a:srgbClr val="D4D4D4"/>
-                </a:solidFill>
-                <a:latin typeface="Consolas"/>
-              </a:rPr>
-              <a:t> ? </a:t>
-            </a:r>
-            <a:r>
-              <a:rPr sz="1900" i="0" b="0">
-                <a:solidFill>
-                  <a:srgbClr val="CE9178"/>
-                </a:solidFill>
-                <a:latin typeface="Consolas"/>
-              </a:rPr>
-              <a:t>"SE PASO"</a:t>
-            </a:r>
-            <a:r>
-              <a:rPr sz="1900" i="0" b="0">
-                <a:solidFill>
-                  <a:srgbClr val="D4D4D4"/>
-                </a:solidFill>
-                <a:latin typeface="Consolas"/>
-              </a:rPr>
-              <a:t> : </a:t>
-            </a:r>
-            <a:r>
-              <a:rPr sz="1900" i="0" b="0">
-                <a:solidFill>
-                  <a:srgbClr val="CE9178"/>
-                </a:solidFill>
-                <a:latin typeface="Consolas"/>
-              </a:rPr>
-              <a:t>"en tiempo"</a:t>
-            </a:r>
-            <a:r>
-              <a:rPr sz="1900" i="0" b="0">
-                <a:solidFill>
-                  <a:srgbClr val="D4D4D4"/>
-                </a:solidFill>
-                <a:latin typeface="Consolas"/>
-              </a:rPr>
-              <a:t>;</a:t>
-            </a:r>
-          </a:p>
-          <a:p>
-            <a:pPr>
+              <a:rPr sz="1300" i="0" b="0">
+                <a:solidFill>
+                  <a:srgbClr val="858585"/>
+                </a:solidFill>
+                <a:latin typeface="Consolas"/>
+              </a:rPr>
+              <a:t>8</a:t>
+            </a:r>
+          </a:p>
+          <a:p>
+            <a:pPr algn="r">
               <a:spcAft>
-                <a:spcPts val="407"/>
+                <a:spcPts val="278"/>
               </a:spcAft>
             </a:pPr>
             <a:r>
-              <a:rPr sz="1900" i="0" b="0">
-                <a:solidFill>
-                  <a:srgbClr val="D4D4D4"/>
-                </a:solidFill>
-                <a:latin typeface="Consolas"/>
-              </a:rPr>
-              <a:t>    </a:t>
-            </a:r>
-            <a:r>
-              <a:rPr sz="1900" i="0" b="0">
-                <a:solidFill>
-                  <a:srgbClr val="DCDCAA"/>
-                </a:solidFill>
-                <a:latin typeface="Consolas"/>
-              </a:rPr>
-              <a:t>System.out.println</a:t>
-            </a:r>
-            <a:r>
-              <a:rPr sz="1900" i="0" b="0">
-                <a:solidFill>
-                  <a:srgbClr val="D4D4D4"/>
-                </a:solidFill>
-                <a:latin typeface="Consolas"/>
-              </a:rPr>
-              <a:t>(</a:t>
-            </a:r>
-            <a:r>
-              <a:rPr sz="1900" i="0" b="0">
-                <a:solidFill>
-                  <a:srgbClr val="DCDCAA"/>
-                </a:solidFill>
-                <a:latin typeface="Consolas"/>
-              </a:rPr>
-              <a:t>String.format</a:t>
-            </a:r>
-            <a:r>
-              <a:rPr sz="1900" i="0" b="0">
-                <a:solidFill>
-                  <a:srgbClr val="D4D4D4"/>
-                </a:solidFill>
-                <a:latin typeface="Consolas"/>
-              </a:rPr>
-              <a:t>(</a:t>
-            </a:r>
-            <a:r>
-              <a:rPr sz="1900" i="0" b="0">
-                <a:solidFill>
-                  <a:srgbClr val="CE9178"/>
-                </a:solidFill>
-                <a:latin typeface="Consolas"/>
-              </a:rPr>
-              <a:t>"   Real: %.2f min | Planeado: %.0f min | %s"</a:t>
-            </a:r>
-            <a:r>
-              <a:rPr sz="1900" i="0" b="0">
-                <a:solidFill>
-                  <a:srgbClr val="D4D4D4"/>
-                </a:solidFill>
-                <a:latin typeface="Consolas"/>
-              </a:rPr>
-              <a:t>, </a:t>
-            </a:r>
-            <a:r>
-              <a:rPr sz="1900" i="0" b="0">
-                <a:solidFill>
-                  <a:srgbClr val="D4D4D4"/>
-                </a:solidFill>
-                <a:latin typeface="Consolas"/>
-              </a:rPr>
-              <a:t>real</a:t>
-            </a:r>
-            <a:r>
-              <a:rPr sz="1900" i="0" b="0">
-                <a:solidFill>
-                  <a:srgbClr val="D4D4D4"/>
-                </a:solidFill>
-                <a:latin typeface="Consolas"/>
-              </a:rPr>
-              <a:t>, </a:t>
-            </a:r>
-            <a:r>
-              <a:rPr sz="1900" i="0" b="0">
-                <a:solidFill>
-                  <a:srgbClr val="D4D4D4"/>
-                </a:solidFill>
-                <a:latin typeface="Consolas"/>
-              </a:rPr>
-              <a:t>plan</a:t>
-            </a:r>
-            <a:r>
-              <a:rPr sz="1900" i="0" b="0">
-                <a:solidFill>
-                  <a:srgbClr val="D4D4D4"/>
-                </a:solidFill>
-                <a:latin typeface="Consolas"/>
-              </a:rPr>
-              <a:t>, </a:t>
-            </a:r>
-            <a:r>
-              <a:rPr sz="1900" i="0" b="0">
-                <a:solidFill>
-                  <a:srgbClr val="D4D4D4"/>
-                </a:solidFill>
-                <a:latin typeface="Consolas"/>
-              </a:rPr>
-              <a:t>veredicto</a:t>
-            </a:r>
-            <a:r>
-              <a:rPr sz="1900" i="0" b="0">
-                <a:solidFill>
-                  <a:srgbClr val="D4D4D4"/>
-                </a:solidFill>
-                <a:latin typeface="Consolas"/>
-              </a:rPr>
-              <a:t>));</a:t>
-            </a:r>
-          </a:p>
-          <a:p>
-            <a:pPr>
+              <a:rPr sz="1300" i="0" b="0">
+                <a:solidFill>
+                  <a:srgbClr val="858585"/>
+                </a:solidFill>
+                <a:latin typeface="Consolas"/>
+              </a:rPr>
+              <a:t>9</a:t>
+            </a:r>
+          </a:p>
+          <a:p>
+            <a:pPr algn="r">
               <a:spcAft>
-                <a:spcPts val="407"/>
+                <a:spcPts val="278"/>
               </a:spcAft>
             </a:pPr>
             <a:r>
-              <a:rPr sz="1900" i="0" b="0">
-                <a:solidFill>
-                  <a:srgbClr val="D4D4D4"/>
-                </a:solidFill>
-                <a:latin typeface="Consolas"/>
-              </a:rPr>
-              <a:t>    </a:t>
-            </a:r>
-            <a:r>
-              <a:rPr sz="1900" i="0" b="0">
-                <a:solidFill>
-                  <a:srgbClr val="D4D4D4"/>
-                </a:solidFill>
-                <a:latin typeface="Consolas"/>
-              </a:rPr>
-              <a:t>anterior</a:t>
-            </a:r>
-            <a:r>
-              <a:rPr sz="1900" i="0" b="0">
-                <a:solidFill>
-                  <a:srgbClr val="D4D4D4"/>
-                </a:solidFill>
-                <a:latin typeface="Consolas"/>
-              </a:rPr>
-              <a:t> = </a:t>
-            </a:r>
-            <a:r>
-              <a:rPr sz="1900" i="0" b="0">
-                <a:solidFill>
-                  <a:srgbClr val="D4D4D4"/>
-                </a:solidFill>
-                <a:latin typeface="Consolas"/>
-              </a:rPr>
-              <a:t>ahora</a:t>
-            </a:r>
-            <a:r>
-              <a:rPr sz="1900" i="0" b="0">
-                <a:solidFill>
-                  <a:srgbClr val="D4D4D4"/>
-                </a:solidFill>
-                <a:latin typeface="Consolas"/>
-              </a:rPr>
-              <a:t>;</a:t>
-            </a:r>
-          </a:p>
-          <a:p>
-            <a:pPr>
+              <a:rPr sz="1300" i="0" b="0">
+                <a:solidFill>
+                  <a:srgbClr val="858585"/>
+                </a:solidFill>
+                <a:latin typeface="Consolas"/>
+              </a:rPr>
+              <a:t>10</a:t>
+            </a:r>
+          </a:p>
+          <a:p>
+            <a:pPr algn="r">
               <a:spcAft>
-                <a:spcPts val="407"/>
+                <a:spcPts val="278"/>
               </a:spcAft>
             </a:pPr>
             <a:r>
-              <a:rPr sz="1900" i="0" b="0">
-                <a:solidFill>
-                  <a:srgbClr val="D4D4D4"/>
-                </a:solidFill>
-                <a:latin typeface="Consolas"/>
-              </a:rPr>
-              <a:t>}</a:t>
+              <a:rPr sz="1300" i="0" b="0">
+                <a:solidFill>
+                  <a:srgbClr val="858585"/>
+                </a:solidFill>
+                <a:latin typeface="Consolas"/>
+              </a:rPr>
+              <a:t>11</a:t>
             </a:r>
           </a:p>
         </p:txBody>
@@ -6512,8 +5792,8 @@
         </p:nvSpPr>
         <p:spPr>
           <a:xfrm>
-            <a:off x="457200" y="6035040"/>
-            <a:ext cx="11277295" cy="365760"/>
+            <a:off x="1188720" y="1719072"/>
+            <a:ext cx="10271455" cy="2780798"/>
           </a:xfrm>
           <a:prstGeom prst="rect">
             <a:avLst/>
@@ -6526,6 +5806,925 @@
           </a:bodyPr>
           <a:lstStyle/>
           <a:p>
+            <a:pPr>
+              <a:spcAft>
+                <a:spcPts val="278"/>
+              </a:spcAft>
+            </a:pPr>
+            <a:r>
+              <a:rPr sz="1300" i="0" b="0">
+                <a:solidFill>
+                  <a:srgbClr val="569CD6"/>
+                </a:solidFill>
+                <a:latin typeface="Consolas"/>
+              </a:rPr>
+              <a:t>for</a:t>
+            </a:r>
+            <a:r>
+              <a:rPr sz="1300" i="0" b="0">
+                <a:solidFill>
+                  <a:srgbClr val="D4D4D4"/>
+                </a:solidFill>
+                <a:latin typeface="Consolas"/>
+              </a:rPr>
+              <a:t> (</a:t>
+            </a:r>
+            <a:r>
+              <a:rPr sz="1300" i="0" b="0">
+                <a:solidFill>
+                  <a:srgbClr val="4EC9B0"/>
+                </a:solidFill>
+                <a:latin typeface="Consolas"/>
+              </a:rPr>
+              <a:t>int</a:t>
+            </a:r>
+            <a:r>
+              <a:rPr sz="1300" i="0" b="0">
+                <a:solidFill>
+                  <a:srgbClr val="D4D4D4"/>
+                </a:solidFill>
+                <a:latin typeface="Consolas"/>
+              </a:rPr>
+              <a:t> </a:t>
+            </a:r>
+            <a:r>
+              <a:rPr sz="1300" i="0" b="0">
+                <a:solidFill>
+                  <a:srgbClr val="D4D4D4"/>
+                </a:solidFill>
+                <a:latin typeface="Consolas"/>
+              </a:rPr>
+              <a:t>i</a:t>
+            </a:r>
+            <a:r>
+              <a:rPr sz="1300" i="0" b="0">
+                <a:solidFill>
+                  <a:srgbClr val="D4D4D4"/>
+                </a:solidFill>
+                <a:latin typeface="Consolas"/>
+              </a:rPr>
+              <a:t> = </a:t>
+            </a:r>
+            <a:r>
+              <a:rPr sz="1300" i="0" b="0">
+                <a:solidFill>
+                  <a:srgbClr val="B5CEA8"/>
+                </a:solidFill>
+                <a:latin typeface="Consolas"/>
+              </a:rPr>
+              <a:t>0</a:t>
+            </a:r>
+            <a:r>
+              <a:rPr sz="1300" i="0" b="0">
+                <a:solidFill>
+                  <a:srgbClr val="D4D4D4"/>
+                </a:solidFill>
+                <a:latin typeface="Consolas"/>
+              </a:rPr>
+              <a:t>; </a:t>
+            </a:r>
+            <a:r>
+              <a:rPr sz="1300" i="0" b="0">
+                <a:solidFill>
+                  <a:srgbClr val="D4D4D4"/>
+                </a:solidFill>
+                <a:latin typeface="Consolas"/>
+              </a:rPr>
+              <a:t>i</a:t>
+            </a:r>
+            <a:r>
+              <a:rPr sz="1300" i="0" b="0">
+                <a:solidFill>
+                  <a:srgbClr val="D4D4D4"/>
+                </a:solidFill>
+                <a:latin typeface="Consolas"/>
+              </a:rPr>
+              <a:t> &lt; </a:t>
+            </a:r>
+            <a:r>
+              <a:rPr sz="1300" i="0" b="0">
+                <a:solidFill>
+                  <a:srgbClr val="D4D4D4"/>
+                </a:solidFill>
+                <a:latin typeface="Consolas"/>
+              </a:rPr>
+              <a:t>GUION</a:t>
+            </a:r>
+            <a:r>
+              <a:rPr sz="1300" i="0" b="0">
+                <a:solidFill>
+                  <a:srgbClr val="D4D4D4"/>
+                </a:solidFill>
+                <a:latin typeface="Consolas"/>
+              </a:rPr>
+              <a:t>.</a:t>
+            </a:r>
+            <a:r>
+              <a:rPr sz="1300" i="0" b="0">
+                <a:solidFill>
+                  <a:srgbClr val="D4D4D4"/>
+                </a:solidFill>
+                <a:latin typeface="Consolas"/>
+              </a:rPr>
+              <a:t>length</a:t>
+            </a:r>
+            <a:r>
+              <a:rPr sz="1300" i="0" b="0">
+                <a:solidFill>
+                  <a:srgbClr val="D4D4D4"/>
+                </a:solidFill>
+                <a:latin typeface="Consolas"/>
+              </a:rPr>
+              <a:t>; </a:t>
+            </a:r>
+            <a:r>
+              <a:rPr sz="1300" i="0" b="0">
+                <a:solidFill>
+                  <a:srgbClr val="D4D4D4"/>
+                </a:solidFill>
+                <a:latin typeface="Consolas"/>
+              </a:rPr>
+              <a:t>i</a:t>
+            </a:r>
+            <a:r>
+              <a:rPr sz="1300" i="0" b="0">
+                <a:solidFill>
+                  <a:srgbClr val="D4D4D4"/>
+                </a:solidFill>
+                <a:latin typeface="Consolas"/>
+              </a:rPr>
+              <a:t>++) {</a:t>
+            </a:r>
+          </a:p>
+          <a:p>
+            <a:pPr>
+              <a:spcAft>
+                <a:spcPts val="278"/>
+              </a:spcAft>
+            </a:pPr>
+            <a:r>
+              <a:rPr sz="1300" i="0" b="0">
+                <a:solidFill>
+                  <a:srgbClr val="D4D4D4"/>
+                </a:solidFill>
+                <a:latin typeface="Consolas"/>
+              </a:rPr>
+              <a:t>    </a:t>
+            </a:r>
+            <a:r>
+              <a:rPr sz="1300" i="0" b="0">
+                <a:solidFill>
+                  <a:srgbClr val="4EC9B0"/>
+                </a:solidFill>
+                <a:latin typeface="Consolas"/>
+              </a:rPr>
+              <a:t>String</a:t>
+            </a:r>
+            <a:r>
+              <a:rPr sz="1300" i="0" b="0">
+                <a:solidFill>
+                  <a:srgbClr val="D4D4D4"/>
+                </a:solidFill>
+                <a:latin typeface="Consolas"/>
+              </a:rPr>
+              <a:t>[] </a:t>
+            </a:r>
+            <a:r>
+              <a:rPr sz="1300" i="0" b="0">
+                <a:solidFill>
+                  <a:srgbClr val="D4D4D4"/>
+                </a:solidFill>
+                <a:latin typeface="Consolas"/>
+              </a:rPr>
+              <a:t>bloque</a:t>
+            </a:r>
+            <a:r>
+              <a:rPr sz="1300" i="0" b="0">
+                <a:solidFill>
+                  <a:srgbClr val="D4D4D4"/>
+                </a:solidFill>
+                <a:latin typeface="Consolas"/>
+              </a:rPr>
+              <a:t> = </a:t>
+            </a:r>
+            <a:r>
+              <a:rPr sz="1300" i="0" b="0">
+                <a:solidFill>
+                  <a:srgbClr val="D4D4D4"/>
+                </a:solidFill>
+                <a:latin typeface="Consolas"/>
+              </a:rPr>
+              <a:t>GUION</a:t>
+            </a:r>
+            <a:r>
+              <a:rPr sz="1300" i="0" b="0">
+                <a:solidFill>
+                  <a:srgbClr val="D4D4D4"/>
+                </a:solidFill>
+                <a:latin typeface="Consolas"/>
+              </a:rPr>
+              <a:t>[</a:t>
+            </a:r>
+            <a:r>
+              <a:rPr sz="1300" i="0" b="0">
+                <a:solidFill>
+                  <a:srgbClr val="D4D4D4"/>
+                </a:solidFill>
+                <a:latin typeface="Consolas"/>
+              </a:rPr>
+              <a:t>i</a:t>
+            </a:r>
+            <a:r>
+              <a:rPr sz="1300" i="0" b="0">
+                <a:solidFill>
+                  <a:srgbClr val="D4D4D4"/>
+                </a:solidFill>
+                <a:latin typeface="Consolas"/>
+              </a:rPr>
+              <a:t>];</a:t>
+            </a:r>
+          </a:p>
+          <a:p>
+            <a:pPr>
+              <a:spcAft>
+                <a:spcPts val="278"/>
+              </a:spcAft>
+            </a:pPr>
+            <a:r>
+              <a:rPr sz="1300" i="0" b="0">
+                <a:solidFill>
+                  <a:srgbClr val="D4D4D4"/>
+                </a:solidFill>
+                <a:latin typeface="Consolas"/>
+              </a:rPr>
+              <a:t>    </a:t>
+            </a:r>
+            <a:r>
+              <a:rPr sz="1300" i="1" b="0">
+                <a:solidFill>
+                  <a:srgbClr val="6A9955"/>
+                </a:solidFill>
+                <a:latin typeface="Consolas"/>
+              </a:rPr>
+              <a:t>// ...</a:t>
+            </a:r>
+          </a:p>
+          <a:p>
+            <a:pPr>
+              <a:spcAft>
+                <a:spcPts val="278"/>
+              </a:spcAft>
+            </a:pPr>
+            <a:r>
+              <a:rPr sz="1300" i="0" b="0">
+                <a:solidFill>
+                  <a:srgbClr val="D4D4D4"/>
+                </a:solidFill>
+                <a:latin typeface="Consolas"/>
+              </a:rPr>
+              <a:t>    </a:t>
+            </a:r>
+            <a:r>
+              <a:rPr sz="1300" i="0" b="0">
+                <a:solidFill>
+                  <a:srgbClr val="DCDCAA"/>
+                </a:solidFill>
+                <a:latin typeface="Consolas"/>
+              </a:rPr>
+              <a:t>teclado.nextLine</a:t>
+            </a:r>
+            <a:r>
+              <a:rPr sz="1300" i="0" b="0">
+                <a:solidFill>
+                  <a:srgbClr val="D4D4D4"/>
+                </a:solidFill>
+                <a:latin typeface="Consolas"/>
+              </a:rPr>
+              <a:t>();</a:t>
+            </a:r>
+          </a:p>
+          <a:p>
+            <a:pPr>
+              <a:spcAft>
+                <a:spcPts val="278"/>
+              </a:spcAft>
+            </a:pPr>
+            <a:r>
+              <a:rPr sz="1300" i="0" b="0">
+                <a:solidFill>
+                  <a:srgbClr val="D4D4D4"/>
+                </a:solidFill>
+                <a:latin typeface="Consolas"/>
+              </a:rPr>
+              <a:t>    </a:t>
+            </a:r>
+            <a:r>
+              <a:rPr sz="1300" i="0" b="0">
+                <a:solidFill>
+                  <a:srgbClr val="4EC9B0"/>
+                </a:solidFill>
+                <a:latin typeface="Consolas"/>
+              </a:rPr>
+              <a:t>long</a:t>
+            </a:r>
+            <a:r>
+              <a:rPr sz="1300" i="0" b="0">
+                <a:solidFill>
+                  <a:srgbClr val="D4D4D4"/>
+                </a:solidFill>
+                <a:latin typeface="Consolas"/>
+              </a:rPr>
+              <a:t> </a:t>
+            </a:r>
+            <a:r>
+              <a:rPr sz="1300" i="0" b="0">
+                <a:solidFill>
+                  <a:srgbClr val="D4D4D4"/>
+                </a:solidFill>
+                <a:latin typeface="Consolas"/>
+              </a:rPr>
+              <a:t>ahora</a:t>
+            </a:r>
+            <a:r>
+              <a:rPr sz="1300" i="0" b="0">
+                <a:solidFill>
+                  <a:srgbClr val="D4D4D4"/>
+                </a:solidFill>
+                <a:latin typeface="Consolas"/>
+              </a:rPr>
+              <a:t> = </a:t>
+            </a:r>
+            <a:r>
+              <a:rPr sz="1300" i="0" b="0">
+                <a:solidFill>
+                  <a:srgbClr val="DCDCAA"/>
+                </a:solidFill>
+                <a:latin typeface="Consolas"/>
+              </a:rPr>
+              <a:t>System.currentTimeMillis</a:t>
+            </a:r>
+            <a:r>
+              <a:rPr sz="1300" i="0" b="0">
+                <a:solidFill>
+                  <a:srgbClr val="D4D4D4"/>
+                </a:solidFill>
+                <a:latin typeface="Consolas"/>
+              </a:rPr>
+              <a:t>();</a:t>
+            </a:r>
+          </a:p>
+          <a:p>
+            <a:pPr>
+              <a:spcAft>
+                <a:spcPts val="278"/>
+              </a:spcAft>
+            </a:pPr>
+            <a:r>
+              <a:rPr sz="1300" i="0" b="0">
+                <a:solidFill>
+                  <a:srgbClr val="D4D4D4"/>
+                </a:solidFill>
+                <a:latin typeface="Consolas"/>
+              </a:rPr>
+              <a:t>    </a:t>
+            </a:r>
+            <a:r>
+              <a:rPr sz="1300" i="0" b="0">
+                <a:solidFill>
+                  <a:srgbClr val="4EC9B0"/>
+                </a:solidFill>
+                <a:latin typeface="Consolas"/>
+              </a:rPr>
+              <a:t>double</a:t>
+            </a:r>
+            <a:r>
+              <a:rPr sz="1300" i="0" b="0">
+                <a:solidFill>
+                  <a:srgbClr val="D4D4D4"/>
+                </a:solidFill>
+                <a:latin typeface="Consolas"/>
+              </a:rPr>
+              <a:t> </a:t>
+            </a:r>
+            <a:r>
+              <a:rPr sz="1300" i="0" b="0">
+                <a:solidFill>
+                  <a:srgbClr val="D4D4D4"/>
+                </a:solidFill>
+                <a:latin typeface="Consolas"/>
+              </a:rPr>
+              <a:t>real</a:t>
+            </a:r>
+            <a:r>
+              <a:rPr sz="1300" i="0" b="0">
+                <a:solidFill>
+                  <a:srgbClr val="D4D4D4"/>
+                </a:solidFill>
+                <a:latin typeface="Consolas"/>
+              </a:rPr>
+              <a:t> = (</a:t>
+            </a:r>
+            <a:r>
+              <a:rPr sz="1300" i="0" b="0">
+                <a:solidFill>
+                  <a:srgbClr val="D4D4D4"/>
+                </a:solidFill>
+                <a:latin typeface="Consolas"/>
+              </a:rPr>
+              <a:t>ahora</a:t>
+            </a:r>
+            <a:r>
+              <a:rPr sz="1300" i="0" b="0">
+                <a:solidFill>
+                  <a:srgbClr val="D4D4D4"/>
+                </a:solidFill>
+                <a:latin typeface="Consolas"/>
+              </a:rPr>
+              <a:t> - </a:t>
+            </a:r>
+            <a:r>
+              <a:rPr sz="1300" i="0" b="0">
+                <a:solidFill>
+                  <a:srgbClr val="D4D4D4"/>
+                </a:solidFill>
+                <a:latin typeface="Consolas"/>
+              </a:rPr>
+              <a:t>anterior</a:t>
+            </a:r>
+            <a:r>
+              <a:rPr sz="1300" i="0" b="0">
+                <a:solidFill>
+                  <a:srgbClr val="D4D4D4"/>
+                </a:solidFill>
+                <a:latin typeface="Consolas"/>
+              </a:rPr>
+              <a:t>) / </a:t>
+            </a:r>
+            <a:r>
+              <a:rPr sz="1300" i="0" b="0">
+                <a:solidFill>
+                  <a:srgbClr val="B5CEA8"/>
+                </a:solidFill>
+                <a:latin typeface="Consolas"/>
+              </a:rPr>
+              <a:t>60000.0</a:t>
+            </a:r>
+            <a:r>
+              <a:rPr sz="1300" i="0" b="0">
+                <a:solidFill>
+                  <a:srgbClr val="D4D4D4"/>
+                </a:solidFill>
+                <a:latin typeface="Consolas"/>
+              </a:rPr>
+              <a:t>;</a:t>
+            </a:r>
+          </a:p>
+          <a:p>
+            <a:pPr>
+              <a:spcAft>
+                <a:spcPts val="278"/>
+              </a:spcAft>
+            </a:pPr>
+            <a:r>
+              <a:rPr sz="1300" i="0" b="0">
+                <a:solidFill>
+                  <a:srgbClr val="D4D4D4"/>
+                </a:solidFill>
+                <a:latin typeface="Consolas"/>
+              </a:rPr>
+              <a:t>    </a:t>
+            </a:r>
+            <a:r>
+              <a:rPr sz="1300" i="0" b="0">
+                <a:solidFill>
+                  <a:srgbClr val="4EC9B0"/>
+                </a:solidFill>
+                <a:latin typeface="Consolas"/>
+              </a:rPr>
+              <a:t>double</a:t>
+            </a:r>
+            <a:r>
+              <a:rPr sz="1300" i="0" b="0">
+                <a:solidFill>
+                  <a:srgbClr val="D4D4D4"/>
+                </a:solidFill>
+                <a:latin typeface="Consolas"/>
+              </a:rPr>
+              <a:t> </a:t>
+            </a:r>
+            <a:r>
+              <a:rPr sz="1300" i="0" b="0">
+                <a:solidFill>
+                  <a:srgbClr val="D4D4D4"/>
+                </a:solidFill>
+                <a:latin typeface="Consolas"/>
+              </a:rPr>
+              <a:t>plan</a:t>
+            </a:r>
+            <a:r>
+              <a:rPr sz="1300" i="0" b="0">
+                <a:solidFill>
+                  <a:srgbClr val="D4D4D4"/>
+                </a:solidFill>
+                <a:latin typeface="Consolas"/>
+              </a:rPr>
+              <a:t> = </a:t>
+            </a:r>
+            <a:r>
+              <a:rPr sz="1300" i="0" b="0">
+                <a:solidFill>
+                  <a:srgbClr val="DCDCAA"/>
+                </a:solidFill>
+                <a:latin typeface="Consolas"/>
+              </a:rPr>
+              <a:t>Double.parseDouble</a:t>
+            </a:r>
+            <a:r>
+              <a:rPr sz="1300" i="0" b="0">
+                <a:solidFill>
+                  <a:srgbClr val="D4D4D4"/>
+                </a:solidFill>
+                <a:latin typeface="Consolas"/>
+              </a:rPr>
+              <a:t>(</a:t>
+            </a:r>
+            <a:r>
+              <a:rPr sz="1300" i="0" b="0">
+                <a:solidFill>
+                  <a:srgbClr val="D4D4D4"/>
+                </a:solidFill>
+                <a:latin typeface="Consolas"/>
+              </a:rPr>
+              <a:t>bloque</a:t>
+            </a:r>
+            <a:r>
+              <a:rPr sz="1300" i="0" b="0">
+                <a:solidFill>
+                  <a:srgbClr val="D4D4D4"/>
+                </a:solidFill>
+                <a:latin typeface="Consolas"/>
+              </a:rPr>
+              <a:t>[</a:t>
+            </a:r>
+            <a:r>
+              <a:rPr sz="1300" i="0" b="0">
+                <a:solidFill>
+                  <a:srgbClr val="B5CEA8"/>
+                </a:solidFill>
+                <a:latin typeface="Consolas"/>
+              </a:rPr>
+              <a:t>2</a:t>
+            </a:r>
+            <a:r>
+              <a:rPr sz="1300" i="0" b="0">
+                <a:solidFill>
+                  <a:srgbClr val="D4D4D4"/>
+                </a:solidFill>
+                <a:latin typeface="Consolas"/>
+              </a:rPr>
+              <a:t>]);</a:t>
+            </a:r>
+          </a:p>
+          <a:p>
+            <a:pPr>
+              <a:spcAft>
+                <a:spcPts val="278"/>
+              </a:spcAft>
+            </a:pPr>
+            <a:r>
+              <a:rPr sz="1300" i="0" b="0">
+                <a:solidFill>
+                  <a:srgbClr val="D4D4D4"/>
+                </a:solidFill>
+                <a:latin typeface="Consolas"/>
+              </a:rPr>
+              <a:t>    </a:t>
+            </a:r>
+            <a:r>
+              <a:rPr sz="1300" i="0" b="0">
+                <a:solidFill>
+                  <a:srgbClr val="4EC9B0"/>
+                </a:solidFill>
+                <a:latin typeface="Consolas"/>
+              </a:rPr>
+              <a:t>String</a:t>
+            </a:r>
+            <a:r>
+              <a:rPr sz="1300" i="0" b="0">
+                <a:solidFill>
+                  <a:srgbClr val="D4D4D4"/>
+                </a:solidFill>
+                <a:latin typeface="Consolas"/>
+              </a:rPr>
+              <a:t> </a:t>
+            </a:r>
+            <a:r>
+              <a:rPr sz="1300" i="0" b="0">
+                <a:solidFill>
+                  <a:srgbClr val="D4D4D4"/>
+                </a:solidFill>
+                <a:latin typeface="Consolas"/>
+              </a:rPr>
+              <a:t>veredicto</a:t>
+            </a:r>
+            <a:r>
+              <a:rPr sz="1300" i="0" b="0">
+                <a:solidFill>
+                  <a:srgbClr val="D4D4D4"/>
+                </a:solidFill>
+                <a:latin typeface="Consolas"/>
+              </a:rPr>
+              <a:t> = </a:t>
+            </a:r>
+            <a:r>
+              <a:rPr sz="1300" i="0" b="0">
+                <a:solidFill>
+                  <a:srgbClr val="D4D4D4"/>
+                </a:solidFill>
+                <a:latin typeface="Consolas"/>
+              </a:rPr>
+              <a:t>real</a:t>
+            </a:r>
+            <a:r>
+              <a:rPr sz="1300" i="0" b="0">
+                <a:solidFill>
+                  <a:srgbClr val="D4D4D4"/>
+                </a:solidFill>
+                <a:latin typeface="Consolas"/>
+              </a:rPr>
+              <a:t> &gt; </a:t>
+            </a:r>
+            <a:r>
+              <a:rPr sz="1300" i="0" b="0">
+                <a:solidFill>
+                  <a:srgbClr val="D4D4D4"/>
+                </a:solidFill>
+                <a:latin typeface="Consolas"/>
+              </a:rPr>
+              <a:t>plan</a:t>
+            </a:r>
+            <a:r>
+              <a:rPr sz="1300" i="0" b="0">
+                <a:solidFill>
+                  <a:srgbClr val="D4D4D4"/>
+                </a:solidFill>
+                <a:latin typeface="Consolas"/>
+              </a:rPr>
+              <a:t> ? </a:t>
+            </a:r>
+            <a:r>
+              <a:rPr sz="1300" i="0" b="0">
+                <a:solidFill>
+                  <a:srgbClr val="CE9178"/>
+                </a:solidFill>
+                <a:latin typeface="Consolas"/>
+              </a:rPr>
+              <a:t>"SE PASO"</a:t>
+            </a:r>
+            <a:r>
+              <a:rPr sz="1300" i="0" b="0">
+                <a:solidFill>
+                  <a:srgbClr val="D4D4D4"/>
+                </a:solidFill>
+                <a:latin typeface="Consolas"/>
+              </a:rPr>
+              <a:t> : </a:t>
+            </a:r>
+            <a:r>
+              <a:rPr sz="1300" i="0" b="0">
+                <a:solidFill>
+                  <a:srgbClr val="CE9178"/>
+                </a:solidFill>
+                <a:latin typeface="Consolas"/>
+              </a:rPr>
+              <a:t>"en tiempo"</a:t>
+            </a:r>
+            <a:r>
+              <a:rPr sz="1300" i="0" b="0">
+                <a:solidFill>
+                  <a:srgbClr val="D4D4D4"/>
+                </a:solidFill>
+                <a:latin typeface="Consolas"/>
+              </a:rPr>
+              <a:t>;</a:t>
+            </a:r>
+          </a:p>
+          <a:p>
+            <a:pPr>
+              <a:spcAft>
+                <a:spcPts val="278"/>
+              </a:spcAft>
+            </a:pPr>
+            <a:r>
+              <a:rPr sz="1300" i="0" b="0">
+                <a:solidFill>
+                  <a:srgbClr val="D4D4D4"/>
+                </a:solidFill>
+                <a:latin typeface="Consolas"/>
+              </a:rPr>
+              <a:t>    </a:t>
+            </a:r>
+            <a:r>
+              <a:rPr sz="1300" i="0" b="0">
+                <a:solidFill>
+                  <a:srgbClr val="DCDCAA"/>
+                </a:solidFill>
+                <a:latin typeface="Consolas"/>
+              </a:rPr>
+              <a:t>System.out.println</a:t>
+            </a:r>
+            <a:r>
+              <a:rPr sz="1300" i="0" b="0">
+                <a:solidFill>
+                  <a:srgbClr val="D4D4D4"/>
+                </a:solidFill>
+                <a:latin typeface="Consolas"/>
+              </a:rPr>
+              <a:t>(</a:t>
+            </a:r>
+            <a:r>
+              <a:rPr sz="1300" i="0" b="0">
+                <a:solidFill>
+                  <a:srgbClr val="DCDCAA"/>
+                </a:solidFill>
+                <a:latin typeface="Consolas"/>
+              </a:rPr>
+              <a:t>String.format</a:t>
+            </a:r>
+            <a:r>
+              <a:rPr sz="1300" i="0" b="0">
+                <a:solidFill>
+                  <a:srgbClr val="D4D4D4"/>
+                </a:solidFill>
+                <a:latin typeface="Consolas"/>
+              </a:rPr>
+              <a:t>(</a:t>
+            </a:r>
+            <a:r>
+              <a:rPr sz="1300" i="0" b="0">
+                <a:solidFill>
+                  <a:srgbClr val="CE9178"/>
+                </a:solidFill>
+                <a:latin typeface="Consolas"/>
+              </a:rPr>
+              <a:t>"   Real: %.2f min | Planeado: %.0f min | %s"</a:t>
+            </a:r>
+            <a:r>
+              <a:rPr sz="1300" i="0" b="0">
+                <a:solidFill>
+                  <a:srgbClr val="D4D4D4"/>
+                </a:solidFill>
+                <a:latin typeface="Consolas"/>
+              </a:rPr>
+              <a:t>, </a:t>
+            </a:r>
+            <a:r>
+              <a:rPr sz="1300" i="0" b="0">
+                <a:solidFill>
+                  <a:srgbClr val="D4D4D4"/>
+                </a:solidFill>
+                <a:latin typeface="Consolas"/>
+              </a:rPr>
+              <a:t>real</a:t>
+            </a:r>
+            <a:r>
+              <a:rPr sz="1300" i="0" b="0">
+                <a:solidFill>
+                  <a:srgbClr val="D4D4D4"/>
+                </a:solidFill>
+                <a:latin typeface="Consolas"/>
+              </a:rPr>
+              <a:t>, </a:t>
+            </a:r>
+            <a:r>
+              <a:rPr sz="1300" i="0" b="0">
+                <a:solidFill>
+                  <a:srgbClr val="D4D4D4"/>
+                </a:solidFill>
+                <a:latin typeface="Consolas"/>
+              </a:rPr>
+              <a:t>plan</a:t>
+            </a:r>
+            <a:r>
+              <a:rPr sz="1300" i="0" b="0">
+                <a:solidFill>
+                  <a:srgbClr val="D4D4D4"/>
+                </a:solidFill>
+                <a:latin typeface="Consolas"/>
+              </a:rPr>
+              <a:t>, </a:t>
+            </a:r>
+            <a:r>
+              <a:rPr sz="1300" i="0" b="0">
+                <a:solidFill>
+                  <a:srgbClr val="D4D4D4"/>
+                </a:solidFill>
+                <a:latin typeface="Consolas"/>
+              </a:rPr>
+              <a:t>veredicto</a:t>
+            </a:r>
+            <a:r>
+              <a:rPr sz="1300" i="0" b="0">
+                <a:solidFill>
+                  <a:srgbClr val="D4D4D4"/>
+                </a:solidFill>
+                <a:latin typeface="Consolas"/>
+              </a:rPr>
+              <a:t>));</a:t>
+            </a:r>
+          </a:p>
+          <a:p>
+            <a:pPr>
+              <a:spcAft>
+                <a:spcPts val="278"/>
+              </a:spcAft>
+            </a:pPr>
+            <a:r>
+              <a:rPr sz="1300" i="0" b="0">
+                <a:solidFill>
+                  <a:srgbClr val="D4D4D4"/>
+                </a:solidFill>
+                <a:latin typeface="Consolas"/>
+              </a:rPr>
+              <a:t>    </a:t>
+            </a:r>
+            <a:r>
+              <a:rPr sz="1300" i="0" b="0">
+                <a:solidFill>
+                  <a:srgbClr val="D4D4D4"/>
+                </a:solidFill>
+                <a:latin typeface="Consolas"/>
+              </a:rPr>
+              <a:t>anterior</a:t>
+            </a:r>
+            <a:r>
+              <a:rPr sz="1300" i="0" b="0">
+                <a:solidFill>
+                  <a:srgbClr val="D4D4D4"/>
+                </a:solidFill>
+                <a:latin typeface="Consolas"/>
+              </a:rPr>
+              <a:t> = </a:t>
+            </a:r>
+            <a:r>
+              <a:rPr sz="1300" i="0" b="0">
+                <a:solidFill>
+                  <a:srgbClr val="D4D4D4"/>
+                </a:solidFill>
+                <a:latin typeface="Consolas"/>
+              </a:rPr>
+              <a:t>ahora</a:t>
+            </a:r>
+            <a:r>
+              <a:rPr sz="1300" i="0" b="0">
+                <a:solidFill>
+                  <a:srgbClr val="D4D4D4"/>
+                </a:solidFill>
+                <a:latin typeface="Consolas"/>
+              </a:rPr>
+              <a:t>;</a:t>
+            </a:r>
+          </a:p>
+          <a:p>
+            <a:pPr>
+              <a:spcAft>
+                <a:spcPts val="278"/>
+              </a:spcAft>
+            </a:pPr>
+            <a:r>
+              <a:rPr sz="1300" i="0" b="0">
+                <a:solidFill>
+                  <a:srgbClr val="D4D4D4"/>
+                </a:solidFill>
+                <a:latin typeface="Consolas"/>
+              </a:rPr>
+              <a:t>}</a:t>
+            </a:r>
+          </a:p>
+        </p:txBody>
+      </p:sp>
+      <p:sp>
+        <p:nvSpPr>
+          <p:cNvPr id="13" name="TextBox 12"/>
+          <p:cNvSpPr txBox="1"/>
+          <p:nvPr/>
+        </p:nvSpPr>
+        <p:spPr>
+          <a:xfrm>
+            <a:off x="457200" y="6035040"/>
+            <a:ext cx="11277295" cy="365760"/>
+          </a:xfrm>
+          <a:prstGeom prst="rect">
+            <a:avLst/>
+          </a:prstGeom>
+          <a:noFill/>
+        </p:spPr>
+        <p:txBody>
+          <a:bodyPr wrap="square">
+            <a:spAutoFit/>
+          </a:bodyPr>
+          <a:lstStyle/>
+          <a:p>
             <a:pPr algn="ctr"/>
             <a:r>
               <a:rPr sz="1300" b="0" i="1">
@@ -6541,7 +6740,7 @@
       </p:sp>
       <p:sp>
         <p:nvSpPr>
-          <p:cNvPr id="13" name="TextBox 12"/>
+          <p:cNvPr id="14" name="TextBox 13"/>
           <p:cNvSpPr txBox="1"/>
           <p:nvPr/>
         </p:nvSpPr>
@@ -9360,7 +9559,7 @@
         <p:spPr>
           <a:xfrm>
             <a:off x="457200" y="1261872"/>
-            <a:ext cx="11277295" cy="4771737"/>
+            <a:ext cx="11277295" cy="2895882"/>
           </a:xfrm>
           <a:prstGeom prst="roundRect">
             <a:avLst>
@@ -9609,8 +9808,8 @@
         </p:nvSpPr>
         <p:spPr>
           <a:xfrm>
-            <a:off x="1188720" y="1719072"/>
-            <a:ext cx="10271455" cy="4177377"/>
+            <a:off x="685800" y="1719072"/>
+            <a:ext cx="502920" cy="2301522"/>
           </a:xfrm>
           <a:prstGeom prst="rect">
             <a:avLst/>
@@ -9623,498 +9822,147 @@
           </a:bodyPr>
           <a:lstStyle/>
           <a:p>
-            <a:pPr>
+            <a:pPr algn="r">
               <a:spcAft>
-                <a:spcPts val="364"/>
+                <a:spcPts val="278"/>
               </a:spcAft>
             </a:pPr>
             <a:r>
-              <a:rPr sz="1700" i="1" b="0">
-                <a:solidFill>
-                  <a:srgbClr val="6A9955"/>
-                </a:solidFill>
-                <a:latin typeface="Consolas"/>
-              </a:rPr>
-              <a:t>// Guion: bloque, evidencia que se muestra en pantalla y minutos planeados.</a:t>
-            </a:r>
-          </a:p>
-          <a:p>
-            <a:pPr>
+              <a:rPr sz="1300" i="0" b="0">
+                <a:solidFill>
+                  <a:srgbClr val="858585"/>
+                </a:solidFill>
+                <a:latin typeface="Consolas"/>
+              </a:rPr>
+              <a:t>1</a:t>
+            </a:r>
+          </a:p>
+          <a:p>
+            <a:pPr algn="r">
               <a:spcAft>
-                <a:spcPts val="364"/>
+                <a:spcPts val="278"/>
               </a:spcAft>
             </a:pPr>
             <a:r>
-              <a:rPr sz="1700" i="1" b="0">
-                <a:solidFill>
-                  <a:srgbClr val="6A9955"/>
-                </a:solidFill>
-                <a:latin typeface="Consolas"/>
-              </a:rPr>
-              <a:t>// Total 7 minutos, con la demo ocupando 4. El guion no cambia por el numero de expositores.</a:t>
-            </a:r>
-          </a:p>
-          <a:p>
-            <a:pPr>
+              <a:rPr sz="1300" i="0" b="0">
+                <a:solidFill>
+                  <a:srgbClr val="858585"/>
+                </a:solidFill>
+                <a:latin typeface="Consolas"/>
+              </a:rPr>
+              <a:t>2</a:t>
+            </a:r>
+          </a:p>
+          <a:p>
+            <a:pPr algn="r">
               <a:spcAft>
-                <a:spcPts val="364"/>
+                <a:spcPts val="278"/>
               </a:spcAft>
             </a:pPr>
             <a:r>
-              <a:rPr sz="1700" i="0" b="0">
-                <a:solidFill>
-                  <a:srgbClr val="569CD6"/>
-                </a:solidFill>
-                <a:latin typeface="Consolas"/>
-              </a:rPr>
-              <a:t>private</a:t>
-            </a:r>
-            <a:r>
-              <a:rPr sz="1700" i="0" b="0">
-                <a:solidFill>
-                  <a:srgbClr val="D4D4D4"/>
-                </a:solidFill>
-                <a:latin typeface="Consolas"/>
-              </a:rPr>
-              <a:t> </a:t>
-            </a:r>
-            <a:r>
-              <a:rPr sz="1700" i="0" b="0">
-                <a:solidFill>
-                  <a:srgbClr val="569CD6"/>
-                </a:solidFill>
-                <a:latin typeface="Consolas"/>
-              </a:rPr>
-              <a:t>static</a:t>
-            </a:r>
-            <a:r>
-              <a:rPr sz="1700" i="0" b="0">
-                <a:solidFill>
-                  <a:srgbClr val="D4D4D4"/>
-                </a:solidFill>
-                <a:latin typeface="Consolas"/>
-              </a:rPr>
-              <a:t> </a:t>
-            </a:r>
-            <a:r>
-              <a:rPr sz="1700" i="0" b="0">
-                <a:solidFill>
-                  <a:srgbClr val="569CD6"/>
-                </a:solidFill>
-                <a:latin typeface="Consolas"/>
-              </a:rPr>
-              <a:t>final</a:t>
-            </a:r>
-            <a:r>
-              <a:rPr sz="1700" i="0" b="0">
-                <a:solidFill>
-                  <a:srgbClr val="D4D4D4"/>
-                </a:solidFill>
-                <a:latin typeface="Consolas"/>
-              </a:rPr>
-              <a:t> </a:t>
-            </a:r>
-            <a:r>
-              <a:rPr sz="1700" i="0" b="0">
-                <a:solidFill>
-                  <a:srgbClr val="4EC9B0"/>
-                </a:solidFill>
-                <a:latin typeface="Consolas"/>
-              </a:rPr>
-              <a:t>String</a:t>
-            </a:r>
-            <a:r>
-              <a:rPr sz="1700" i="0" b="0">
-                <a:solidFill>
-                  <a:srgbClr val="D4D4D4"/>
-                </a:solidFill>
-                <a:latin typeface="Consolas"/>
-              </a:rPr>
-              <a:t>[][] </a:t>
-            </a:r>
-            <a:r>
-              <a:rPr sz="1700" i="0" b="0">
-                <a:solidFill>
-                  <a:srgbClr val="D4D4D4"/>
-                </a:solidFill>
-                <a:latin typeface="Consolas"/>
-              </a:rPr>
-              <a:t>GUION</a:t>
-            </a:r>
-            <a:r>
-              <a:rPr sz="1700" i="0" b="0">
-                <a:solidFill>
-                  <a:srgbClr val="D4D4D4"/>
-                </a:solidFill>
-                <a:latin typeface="Consolas"/>
-              </a:rPr>
-              <a:t> = {</a:t>
-            </a:r>
-          </a:p>
-          <a:p>
-            <a:pPr>
+              <a:rPr sz="1300" i="0" b="0">
+                <a:solidFill>
+                  <a:srgbClr val="858585"/>
+                </a:solidFill>
+                <a:latin typeface="Consolas"/>
+              </a:rPr>
+              <a:t>3</a:t>
+            </a:r>
+          </a:p>
+          <a:p>
+            <a:pPr algn="r">
               <a:spcAft>
-                <a:spcPts val="364"/>
+                <a:spcPts val="278"/>
               </a:spcAft>
             </a:pPr>
             <a:r>
-              <a:rPr sz="1700" i="0" b="0">
-                <a:solidFill>
-                  <a:srgbClr val="D4D4D4"/>
-                </a:solidFill>
-                <a:latin typeface="Consolas"/>
-              </a:rPr>
-              <a:t>    {</a:t>
-            </a:r>
-            <a:r>
-              <a:rPr sz="1700" i="0" b="0">
-                <a:solidFill>
-                  <a:srgbClr val="CE9178"/>
-                </a:solidFill>
-                <a:latin typeface="Consolas"/>
-              </a:rPr>
-              <a:t>"Problema de la clinica y solucion propuesta"</a:t>
-            </a:r>
-            <a:r>
-              <a:rPr sz="1700" i="0" b="0">
-                <a:solidFill>
-                  <a:srgbClr val="D4D4D4"/>
-                </a:solidFill>
-                <a:latin typeface="Consolas"/>
-              </a:rPr>
-              <a:t>, </a:t>
-            </a:r>
-            <a:r>
-              <a:rPr sz="1700" i="0" b="0">
-                <a:solidFill>
-                  <a:srgbClr val="CE9178"/>
-                </a:solidFill>
-                <a:latin typeface="Consolas"/>
-              </a:rPr>
-              <a:t>"Diapositiva con los 3 dolores"</a:t>
-            </a:r>
-            <a:r>
-              <a:rPr sz="1700" i="0" b="0">
-                <a:solidFill>
-                  <a:srgbClr val="D4D4D4"/>
-                </a:solidFill>
-                <a:latin typeface="Consolas"/>
-              </a:rPr>
-              <a:t>, </a:t>
-            </a:r>
-            <a:r>
-              <a:rPr sz="1700" i="0" b="0">
-                <a:solidFill>
-                  <a:srgbClr val="CE9178"/>
-                </a:solidFill>
-                <a:latin typeface="Consolas"/>
-              </a:rPr>
-              <a:t>"1"</a:t>
-            </a:r>
-            <a:r>
-              <a:rPr sz="1700" i="0" b="0">
-                <a:solidFill>
-                  <a:srgbClr val="D4D4D4"/>
-                </a:solidFill>
-                <a:latin typeface="Consolas"/>
-              </a:rPr>
-              <a:t>},</a:t>
-            </a:r>
-          </a:p>
-          <a:p>
-            <a:pPr>
+              <a:rPr sz="1300" i="0" b="0">
+                <a:solidFill>
+                  <a:srgbClr val="858585"/>
+                </a:solidFill>
+                <a:latin typeface="Consolas"/>
+              </a:rPr>
+              <a:t>4</a:t>
+            </a:r>
+          </a:p>
+          <a:p>
+            <a:pPr algn="r">
               <a:spcAft>
-                <a:spcPts val="364"/>
+                <a:spcPts val="278"/>
               </a:spcAft>
             </a:pPr>
             <a:r>
-              <a:rPr sz="1700" i="0" b="0">
-                <a:solidFill>
-                  <a:srgbClr val="D4D4D4"/>
-                </a:solidFill>
-                <a:latin typeface="Consolas"/>
-              </a:rPr>
-              <a:t>    {</a:t>
-            </a:r>
-            <a:r>
-              <a:rPr sz="1700" i="0" b="0">
-                <a:solidFill>
-                  <a:srgbClr val="CE9178"/>
-                </a:solidFill>
-                <a:latin typeface="Consolas"/>
-              </a:rPr>
-              <a:t>"Arquitectura: clases, herencia y colecciones"</a:t>
-            </a:r>
-            <a:r>
-              <a:rPr sz="1700" i="0" b="0">
-                <a:solidFill>
-                  <a:srgbClr val="D4D4D4"/>
-                </a:solidFill>
-                <a:latin typeface="Consolas"/>
-              </a:rPr>
-              <a:t>, </a:t>
-            </a:r>
-            <a:r>
-              <a:rPr sz="1700" i="0" b="0">
-                <a:solidFill>
-                  <a:srgbClr val="CE9178"/>
-                </a:solidFill>
-                <a:latin typeface="Consolas"/>
-              </a:rPr>
-              <a:t>"Persona.java al lado de Dueno.java"</a:t>
-            </a:r>
-            <a:r>
-              <a:rPr sz="1700" i="0" b="0">
-                <a:solidFill>
-                  <a:srgbClr val="D4D4D4"/>
-                </a:solidFill>
-                <a:latin typeface="Consolas"/>
-              </a:rPr>
-              <a:t>, </a:t>
-            </a:r>
-            <a:r>
-              <a:rPr sz="1700" i="0" b="0">
-                <a:solidFill>
-                  <a:srgbClr val="CE9178"/>
-                </a:solidFill>
-                <a:latin typeface="Consolas"/>
-              </a:rPr>
-              <a:t>"1"</a:t>
-            </a:r>
-            <a:r>
-              <a:rPr sz="1700" i="0" b="0">
-                <a:solidFill>
-                  <a:srgbClr val="D4D4D4"/>
-                </a:solidFill>
-                <a:latin typeface="Consolas"/>
-              </a:rPr>
-              <a:t>},</a:t>
-            </a:r>
-          </a:p>
-          <a:p>
-            <a:pPr>
+              <a:rPr sz="1300" i="0" b="0">
+                <a:solidFill>
+                  <a:srgbClr val="858585"/>
+                </a:solidFill>
+                <a:latin typeface="Consolas"/>
+              </a:rPr>
+              <a:t>5</a:t>
+            </a:r>
+          </a:p>
+          <a:p>
+            <a:pPr algn="r">
               <a:spcAft>
-                <a:spcPts val="364"/>
+                <a:spcPts val="278"/>
               </a:spcAft>
             </a:pPr>
             <a:r>
-              <a:rPr sz="1700" i="0" b="0">
-                <a:solidFill>
-                  <a:srgbClr val="D4D4D4"/>
-                </a:solidFill>
-                <a:latin typeface="Consolas"/>
-              </a:rPr>
-              <a:t>    {</a:t>
-            </a:r>
-            <a:r>
-              <a:rPr sz="1700" i="0" b="0">
-                <a:solidFill>
-                  <a:srgbClr val="CE9178"/>
-                </a:solidFill>
-                <a:latin typeface="Consolas"/>
-              </a:rPr>
-              <a:t>"DEMO: registrar dueno y mascota (con validacion de edad)"</a:t>
-            </a:r>
-            <a:r>
-              <a:rPr sz="1700" i="0" b="0">
-                <a:solidFill>
-                  <a:srgbClr val="D4D4D4"/>
-                </a:solidFill>
-                <a:latin typeface="Consolas"/>
-              </a:rPr>
-              <a:t>, </a:t>
-            </a:r>
-            <a:r>
-              <a:rPr sz="1700" i="0" b="0">
-                <a:solidFill>
-                  <a:srgbClr val="CE9178"/>
-                </a:solidFill>
-                <a:latin typeface="Consolas"/>
-              </a:rPr>
-              <a:t>"La aplicacion corriendo"</a:t>
-            </a:r>
-            <a:r>
-              <a:rPr sz="1700" i="0" b="0">
-                <a:solidFill>
-                  <a:srgbClr val="D4D4D4"/>
-                </a:solidFill>
-                <a:latin typeface="Consolas"/>
-              </a:rPr>
-              <a:t>, </a:t>
-            </a:r>
-            <a:r>
-              <a:rPr sz="1700" i="0" b="0">
-                <a:solidFill>
-                  <a:srgbClr val="CE9178"/>
-                </a:solidFill>
-                <a:latin typeface="Consolas"/>
-              </a:rPr>
-              <a:t>"2"</a:t>
-            </a:r>
-            <a:r>
-              <a:rPr sz="1700" i="0" b="0">
-                <a:solidFill>
-                  <a:srgbClr val="D4D4D4"/>
-                </a:solidFill>
-                <a:latin typeface="Consolas"/>
-              </a:rPr>
-              <a:t>},</a:t>
-            </a:r>
-          </a:p>
-          <a:p>
-            <a:pPr>
+              <a:rPr sz="1300" i="0" b="0">
+                <a:solidFill>
+                  <a:srgbClr val="858585"/>
+                </a:solidFill>
+                <a:latin typeface="Consolas"/>
+              </a:rPr>
+              <a:t>6</a:t>
+            </a:r>
+          </a:p>
+          <a:p>
+            <a:pPr algn="r">
               <a:spcAft>
-                <a:spcPts val="364"/>
+                <a:spcPts val="278"/>
               </a:spcAft>
             </a:pPr>
             <a:r>
-              <a:rPr sz="1700" i="0" b="0">
-                <a:solidFill>
-                  <a:srgbClr val="D4D4D4"/>
-                </a:solidFill>
-                <a:latin typeface="Consolas"/>
-              </a:rPr>
-              <a:t>    {</a:t>
-            </a:r>
-            <a:r>
-              <a:rPr sz="1700" i="0" b="0">
-                <a:solidFill>
-                  <a:srgbClr val="CE9178"/>
-                </a:solidFill>
-                <a:latin typeface="Consolas"/>
-              </a:rPr>
-              <a:t>"DEMO: agendar cita, buscar por ID y guardar en CSV"</a:t>
-            </a:r>
-            <a:r>
-              <a:rPr sz="1700" i="0" b="0">
-                <a:solidFill>
-                  <a:srgbClr val="D4D4D4"/>
-                </a:solidFill>
-                <a:latin typeface="Consolas"/>
-              </a:rPr>
-              <a:t>, </a:t>
-            </a:r>
-            <a:r>
-              <a:rPr sz="1700" i="0" b="0">
-                <a:solidFill>
-                  <a:srgbClr val="CE9178"/>
-                </a:solidFill>
-                <a:latin typeface="Consolas"/>
-              </a:rPr>
-              <a:t>"Cerrar y reabrir con los datos ahi"</a:t>
-            </a:r>
-            <a:r>
-              <a:rPr sz="1700" i="0" b="0">
-                <a:solidFill>
-                  <a:srgbClr val="D4D4D4"/>
-                </a:solidFill>
-                <a:latin typeface="Consolas"/>
-              </a:rPr>
-              <a:t>, </a:t>
-            </a:r>
-            <a:r>
-              <a:rPr sz="1700" i="0" b="0">
-                <a:solidFill>
-                  <a:srgbClr val="CE9178"/>
-                </a:solidFill>
-                <a:latin typeface="Consolas"/>
-              </a:rPr>
-              <a:t>"2"</a:t>
-            </a:r>
-            <a:r>
-              <a:rPr sz="1700" i="0" b="0">
-                <a:solidFill>
-                  <a:srgbClr val="D4D4D4"/>
-                </a:solidFill>
-                <a:latin typeface="Consolas"/>
-              </a:rPr>
-              <a:t>},</a:t>
-            </a:r>
-          </a:p>
-          <a:p>
-            <a:pPr>
+              <a:rPr sz="1300" i="0" b="0">
+                <a:solidFill>
+                  <a:srgbClr val="858585"/>
+                </a:solidFill>
+                <a:latin typeface="Consolas"/>
+              </a:rPr>
+              <a:t>7</a:t>
+            </a:r>
+          </a:p>
+          <a:p>
+            <a:pPr algn="r">
               <a:spcAft>
-                <a:spcPts val="364"/>
+                <a:spcPts val="278"/>
               </a:spcAft>
             </a:pPr>
             <a:r>
-              <a:rPr sz="1700" i="0" b="0">
-                <a:solidFill>
-                  <a:srgbClr val="D4D4D4"/>
-                </a:solidFill>
-                <a:latin typeface="Consolas"/>
-              </a:rPr>
-              <a:t>    {</a:t>
-            </a:r>
-            <a:r>
-              <a:rPr sz="1700" i="0" b="0">
-                <a:solidFill>
-                  <a:srgbClr val="CE9178"/>
-                </a:solidFill>
-                <a:latin typeface="Consolas"/>
-              </a:rPr>
-              <a:t>"Limitaciones, aprendizajes y cierre"</a:t>
-            </a:r>
-            <a:r>
-              <a:rPr sz="1700" i="0" b="0">
-                <a:solidFill>
-                  <a:srgbClr val="D4D4D4"/>
-                </a:solidFill>
-                <a:latin typeface="Consolas"/>
-              </a:rPr>
-              <a:t>, </a:t>
-            </a:r>
-            <a:r>
-              <a:rPr sz="1700" i="0" b="0">
-                <a:solidFill>
-                  <a:srgbClr val="CE9178"/>
-                </a:solidFill>
-                <a:latin typeface="Consolas"/>
-              </a:rPr>
-              <a:t>"Lista de 3 limitaciones"</a:t>
-            </a:r>
-            <a:r>
-              <a:rPr sz="1700" i="0" b="0">
-                <a:solidFill>
-                  <a:srgbClr val="D4D4D4"/>
-                </a:solidFill>
-                <a:latin typeface="Consolas"/>
-              </a:rPr>
-              <a:t>, </a:t>
-            </a:r>
-            <a:r>
-              <a:rPr sz="1700" i="0" b="0">
-                <a:solidFill>
-                  <a:srgbClr val="CE9178"/>
-                </a:solidFill>
-                <a:latin typeface="Consolas"/>
-              </a:rPr>
-              <a:t>"1"</a:t>
-            </a:r>
-            <a:r>
-              <a:rPr sz="1700" i="0" b="0">
-                <a:solidFill>
-                  <a:srgbClr val="D4D4D4"/>
-                </a:solidFill>
-                <a:latin typeface="Consolas"/>
-              </a:rPr>
-              <a:t>}</a:t>
-            </a:r>
-          </a:p>
-          <a:p>
-            <a:pPr>
+              <a:rPr sz="1300" i="0" b="0">
+                <a:solidFill>
+                  <a:srgbClr val="858585"/>
+                </a:solidFill>
+                <a:latin typeface="Consolas"/>
+              </a:rPr>
+              <a:t>8</a:t>
+            </a:r>
+          </a:p>
+          <a:p>
+            <a:pPr algn="r">
               <a:spcAft>
-                <a:spcPts val="364"/>
+                <a:spcPts val="278"/>
               </a:spcAft>
             </a:pPr>
             <a:r>
-              <a:rPr sz="1700" i="0" b="0">
-                <a:solidFill>
-                  <a:srgbClr val="D4D4D4"/>
-                </a:solidFill>
-                <a:latin typeface="Consolas"/>
-              </a:rPr>
-              <a:t>};</a:t>
+              <a:rPr sz="1300" i="0" b="0">
+                <a:solidFill>
+                  <a:srgbClr val="858585"/>
+                </a:solidFill>
+                <a:latin typeface="Consolas"/>
+              </a:rPr>
+              <a:t>9</a:t>
             </a:r>
           </a:p>
         </p:txBody>
@@ -10127,8 +9975,8 @@
         </p:nvSpPr>
         <p:spPr>
           <a:xfrm>
-            <a:off x="457200" y="6035040"/>
-            <a:ext cx="11277295" cy="365760"/>
+            <a:off x="1188720" y="1719072"/>
+            <a:ext cx="10271455" cy="2301522"/>
           </a:xfrm>
           <a:prstGeom prst="rect">
             <a:avLst/>
@@ -10141,6 +9989,524 @@
           </a:bodyPr>
           <a:lstStyle/>
           <a:p>
+            <a:pPr>
+              <a:spcAft>
+                <a:spcPts val="278"/>
+              </a:spcAft>
+            </a:pPr>
+            <a:r>
+              <a:rPr sz="1300" i="1" b="0">
+                <a:solidFill>
+                  <a:srgbClr val="6A9955"/>
+                </a:solidFill>
+                <a:latin typeface="Consolas"/>
+              </a:rPr>
+              <a:t>// Guion: bloque, evidencia que se muestra en pantalla y minutos planeados.</a:t>
+            </a:r>
+          </a:p>
+          <a:p>
+            <a:pPr>
+              <a:spcAft>
+                <a:spcPts val="278"/>
+              </a:spcAft>
+            </a:pPr>
+            <a:r>
+              <a:rPr sz="1300" i="1" b="0">
+                <a:solidFill>
+                  <a:srgbClr val="6A9955"/>
+                </a:solidFill>
+                <a:latin typeface="Consolas"/>
+              </a:rPr>
+              <a:t>// Total 7 minutos, con la demo ocupando 4. El guion no cambia por el numero de expositores.</a:t>
+            </a:r>
+          </a:p>
+          <a:p>
+            <a:pPr>
+              <a:spcAft>
+                <a:spcPts val="278"/>
+              </a:spcAft>
+            </a:pPr>
+            <a:r>
+              <a:rPr sz="1300" i="0" b="0">
+                <a:solidFill>
+                  <a:srgbClr val="569CD6"/>
+                </a:solidFill>
+                <a:latin typeface="Consolas"/>
+              </a:rPr>
+              <a:t>private</a:t>
+            </a:r>
+            <a:r>
+              <a:rPr sz="1300" i="0" b="0">
+                <a:solidFill>
+                  <a:srgbClr val="D4D4D4"/>
+                </a:solidFill>
+                <a:latin typeface="Consolas"/>
+              </a:rPr>
+              <a:t> </a:t>
+            </a:r>
+            <a:r>
+              <a:rPr sz="1300" i="0" b="0">
+                <a:solidFill>
+                  <a:srgbClr val="569CD6"/>
+                </a:solidFill>
+                <a:latin typeface="Consolas"/>
+              </a:rPr>
+              <a:t>static</a:t>
+            </a:r>
+            <a:r>
+              <a:rPr sz="1300" i="0" b="0">
+                <a:solidFill>
+                  <a:srgbClr val="D4D4D4"/>
+                </a:solidFill>
+                <a:latin typeface="Consolas"/>
+              </a:rPr>
+              <a:t> </a:t>
+            </a:r>
+            <a:r>
+              <a:rPr sz="1300" i="0" b="0">
+                <a:solidFill>
+                  <a:srgbClr val="569CD6"/>
+                </a:solidFill>
+                <a:latin typeface="Consolas"/>
+              </a:rPr>
+              <a:t>final</a:t>
+            </a:r>
+            <a:r>
+              <a:rPr sz="1300" i="0" b="0">
+                <a:solidFill>
+                  <a:srgbClr val="D4D4D4"/>
+                </a:solidFill>
+                <a:latin typeface="Consolas"/>
+              </a:rPr>
+              <a:t> </a:t>
+            </a:r>
+            <a:r>
+              <a:rPr sz="1300" i="0" b="0">
+                <a:solidFill>
+                  <a:srgbClr val="4EC9B0"/>
+                </a:solidFill>
+                <a:latin typeface="Consolas"/>
+              </a:rPr>
+              <a:t>String</a:t>
+            </a:r>
+            <a:r>
+              <a:rPr sz="1300" i="0" b="0">
+                <a:solidFill>
+                  <a:srgbClr val="D4D4D4"/>
+                </a:solidFill>
+                <a:latin typeface="Consolas"/>
+              </a:rPr>
+              <a:t>[][] </a:t>
+            </a:r>
+            <a:r>
+              <a:rPr sz="1300" i="0" b="0">
+                <a:solidFill>
+                  <a:srgbClr val="D4D4D4"/>
+                </a:solidFill>
+                <a:latin typeface="Consolas"/>
+              </a:rPr>
+              <a:t>GUION</a:t>
+            </a:r>
+            <a:r>
+              <a:rPr sz="1300" i="0" b="0">
+                <a:solidFill>
+                  <a:srgbClr val="D4D4D4"/>
+                </a:solidFill>
+                <a:latin typeface="Consolas"/>
+              </a:rPr>
+              <a:t> = {</a:t>
+            </a:r>
+          </a:p>
+          <a:p>
+            <a:pPr>
+              <a:spcAft>
+                <a:spcPts val="278"/>
+              </a:spcAft>
+            </a:pPr>
+            <a:r>
+              <a:rPr sz="1300" i="0" b="0">
+                <a:solidFill>
+                  <a:srgbClr val="D4D4D4"/>
+                </a:solidFill>
+                <a:latin typeface="Consolas"/>
+              </a:rPr>
+              <a:t>    {</a:t>
+            </a:r>
+            <a:r>
+              <a:rPr sz="1300" i="0" b="0">
+                <a:solidFill>
+                  <a:srgbClr val="CE9178"/>
+                </a:solidFill>
+                <a:latin typeface="Consolas"/>
+              </a:rPr>
+              <a:t>"Problema de la clinica y solucion propuesta"</a:t>
+            </a:r>
+            <a:r>
+              <a:rPr sz="1300" i="0" b="0">
+                <a:solidFill>
+                  <a:srgbClr val="D4D4D4"/>
+                </a:solidFill>
+                <a:latin typeface="Consolas"/>
+              </a:rPr>
+              <a:t>, </a:t>
+            </a:r>
+            <a:r>
+              <a:rPr sz="1300" i="0" b="0">
+                <a:solidFill>
+                  <a:srgbClr val="CE9178"/>
+                </a:solidFill>
+                <a:latin typeface="Consolas"/>
+              </a:rPr>
+              <a:t>"Diapositiva con los 3 dolores"</a:t>
+            </a:r>
+            <a:r>
+              <a:rPr sz="1300" i="0" b="0">
+                <a:solidFill>
+                  <a:srgbClr val="D4D4D4"/>
+                </a:solidFill>
+                <a:latin typeface="Consolas"/>
+              </a:rPr>
+              <a:t>, </a:t>
+            </a:r>
+            <a:r>
+              <a:rPr sz="1300" i="0" b="0">
+                <a:solidFill>
+                  <a:srgbClr val="CE9178"/>
+                </a:solidFill>
+                <a:latin typeface="Consolas"/>
+              </a:rPr>
+              <a:t>"1"</a:t>
+            </a:r>
+            <a:r>
+              <a:rPr sz="1300" i="0" b="0">
+                <a:solidFill>
+                  <a:srgbClr val="D4D4D4"/>
+                </a:solidFill>
+                <a:latin typeface="Consolas"/>
+              </a:rPr>
+              <a:t>},</a:t>
+            </a:r>
+          </a:p>
+          <a:p>
+            <a:pPr>
+              <a:spcAft>
+                <a:spcPts val="278"/>
+              </a:spcAft>
+            </a:pPr>
+            <a:r>
+              <a:rPr sz="1300" i="0" b="0">
+                <a:solidFill>
+                  <a:srgbClr val="D4D4D4"/>
+                </a:solidFill>
+                <a:latin typeface="Consolas"/>
+              </a:rPr>
+              <a:t>    {</a:t>
+            </a:r>
+            <a:r>
+              <a:rPr sz="1300" i="0" b="0">
+                <a:solidFill>
+                  <a:srgbClr val="CE9178"/>
+                </a:solidFill>
+                <a:latin typeface="Consolas"/>
+              </a:rPr>
+              <a:t>"Arquitectura: clases, herencia y colecciones"</a:t>
+            </a:r>
+            <a:r>
+              <a:rPr sz="1300" i="0" b="0">
+                <a:solidFill>
+                  <a:srgbClr val="D4D4D4"/>
+                </a:solidFill>
+                <a:latin typeface="Consolas"/>
+              </a:rPr>
+              <a:t>, </a:t>
+            </a:r>
+            <a:r>
+              <a:rPr sz="1300" i="0" b="0">
+                <a:solidFill>
+                  <a:srgbClr val="CE9178"/>
+                </a:solidFill>
+                <a:latin typeface="Consolas"/>
+              </a:rPr>
+              <a:t>"Persona.java al lado de Dueno.java"</a:t>
+            </a:r>
+            <a:r>
+              <a:rPr sz="1300" i="0" b="0">
+                <a:solidFill>
+                  <a:srgbClr val="D4D4D4"/>
+                </a:solidFill>
+                <a:latin typeface="Consolas"/>
+              </a:rPr>
+              <a:t>, </a:t>
+            </a:r>
+            <a:r>
+              <a:rPr sz="1300" i="0" b="0">
+                <a:solidFill>
+                  <a:srgbClr val="CE9178"/>
+                </a:solidFill>
+                <a:latin typeface="Consolas"/>
+              </a:rPr>
+              <a:t>"1"</a:t>
+            </a:r>
+            <a:r>
+              <a:rPr sz="1300" i="0" b="0">
+                <a:solidFill>
+                  <a:srgbClr val="D4D4D4"/>
+                </a:solidFill>
+                <a:latin typeface="Consolas"/>
+              </a:rPr>
+              <a:t>},</a:t>
+            </a:r>
+          </a:p>
+          <a:p>
+            <a:pPr>
+              <a:spcAft>
+                <a:spcPts val="278"/>
+              </a:spcAft>
+            </a:pPr>
+            <a:r>
+              <a:rPr sz="1300" i="0" b="0">
+                <a:solidFill>
+                  <a:srgbClr val="D4D4D4"/>
+                </a:solidFill>
+                <a:latin typeface="Consolas"/>
+              </a:rPr>
+              <a:t>    {</a:t>
+            </a:r>
+            <a:r>
+              <a:rPr sz="1300" i="0" b="0">
+                <a:solidFill>
+                  <a:srgbClr val="CE9178"/>
+                </a:solidFill>
+                <a:latin typeface="Consolas"/>
+              </a:rPr>
+              <a:t>"DEMO: registrar dueno y mascota (con validacion de edad)"</a:t>
+            </a:r>
+            <a:r>
+              <a:rPr sz="1300" i="0" b="0">
+                <a:solidFill>
+                  <a:srgbClr val="D4D4D4"/>
+                </a:solidFill>
+                <a:latin typeface="Consolas"/>
+              </a:rPr>
+              <a:t>, </a:t>
+            </a:r>
+            <a:r>
+              <a:rPr sz="1300" i="0" b="0">
+                <a:solidFill>
+                  <a:srgbClr val="CE9178"/>
+                </a:solidFill>
+                <a:latin typeface="Consolas"/>
+              </a:rPr>
+              <a:t>"La aplicacion corriendo"</a:t>
+            </a:r>
+            <a:r>
+              <a:rPr sz="1300" i="0" b="0">
+                <a:solidFill>
+                  <a:srgbClr val="D4D4D4"/>
+                </a:solidFill>
+                <a:latin typeface="Consolas"/>
+              </a:rPr>
+              <a:t>, </a:t>
+            </a:r>
+            <a:r>
+              <a:rPr sz="1300" i="0" b="0">
+                <a:solidFill>
+                  <a:srgbClr val="CE9178"/>
+                </a:solidFill>
+                <a:latin typeface="Consolas"/>
+              </a:rPr>
+              <a:t>"2"</a:t>
+            </a:r>
+            <a:r>
+              <a:rPr sz="1300" i="0" b="0">
+                <a:solidFill>
+                  <a:srgbClr val="D4D4D4"/>
+                </a:solidFill>
+                <a:latin typeface="Consolas"/>
+              </a:rPr>
+              <a:t>},</a:t>
+            </a:r>
+          </a:p>
+          <a:p>
+            <a:pPr>
+              <a:spcAft>
+                <a:spcPts val="278"/>
+              </a:spcAft>
+            </a:pPr>
+            <a:r>
+              <a:rPr sz="1300" i="0" b="0">
+                <a:solidFill>
+                  <a:srgbClr val="D4D4D4"/>
+                </a:solidFill>
+                <a:latin typeface="Consolas"/>
+              </a:rPr>
+              <a:t>    {</a:t>
+            </a:r>
+            <a:r>
+              <a:rPr sz="1300" i="0" b="0">
+                <a:solidFill>
+                  <a:srgbClr val="CE9178"/>
+                </a:solidFill>
+                <a:latin typeface="Consolas"/>
+              </a:rPr>
+              <a:t>"DEMO: agendar cita, buscar por ID y guardar en CSV"</a:t>
+            </a:r>
+            <a:r>
+              <a:rPr sz="1300" i="0" b="0">
+                <a:solidFill>
+                  <a:srgbClr val="D4D4D4"/>
+                </a:solidFill>
+                <a:latin typeface="Consolas"/>
+              </a:rPr>
+              <a:t>, </a:t>
+            </a:r>
+            <a:r>
+              <a:rPr sz="1300" i="0" b="0">
+                <a:solidFill>
+                  <a:srgbClr val="CE9178"/>
+                </a:solidFill>
+                <a:latin typeface="Consolas"/>
+              </a:rPr>
+              <a:t>"Cerrar y reabrir con los datos ahi"</a:t>
+            </a:r>
+            <a:r>
+              <a:rPr sz="1300" i="0" b="0">
+                <a:solidFill>
+                  <a:srgbClr val="D4D4D4"/>
+                </a:solidFill>
+                <a:latin typeface="Consolas"/>
+              </a:rPr>
+              <a:t>, </a:t>
+            </a:r>
+            <a:r>
+              <a:rPr sz="1300" i="0" b="0">
+                <a:solidFill>
+                  <a:srgbClr val="CE9178"/>
+                </a:solidFill>
+                <a:latin typeface="Consolas"/>
+              </a:rPr>
+              <a:t>"2"</a:t>
+            </a:r>
+            <a:r>
+              <a:rPr sz="1300" i="0" b="0">
+                <a:solidFill>
+                  <a:srgbClr val="D4D4D4"/>
+                </a:solidFill>
+                <a:latin typeface="Consolas"/>
+              </a:rPr>
+              <a:t>},</a:t>
+            </a:r>
+          </a:p>
+          <a:p>
+            <a:pPr>
+              <a:spcAft>
+                <a:spcPts val="278"/>
+              </a:spcAft>
+            </a:pPr>
+            <a:r>
+              <a:rPr sz="1300" i="0" b="0">
+                <a:solidFill>
+                  <a:srgbClr val="D4D4D4"/>
+                </a:solidFill>
+                <a:latin typeface="Consolas"/>
+              </a:rPr>
+              <a:t>    {</a:t>
+            </a:r>
+            <a:r>
+              <a:rPr sz="1300" i="0" b="0">
+                <a:solidFill>
+                  <a:srgbClr val="CE9178"/>
+                </a:solidFill>
+                <a:latin typeface="Consolas"/>
+              </a:rPr>
+              <a:t>"Limitaciones, aprendizajes y cierre"</a:t>
+            </a:r>
+            <a:r>
+              <a:rPr sz="1300" i="0" b="0">
+                <a:solidFill>
+                  <a:srgbClr val="D4D4D4"/>
+                </a:solidFill>
+                <a:latin typeface="Consolas"/>
+              </a:rPr>
+              <a:t>, </a:t>
+            </a:r>
+            <a:r>
+              <a:rPr sz="1300" i="0" b="0">
+                <a:solidFill>
+                  <a:srgbClr val="CE9178"/>
+                </a:solidFill>
+                <a:latin typeface="Consolas"/>
+              </a:rPr>
+              <a:t>"Lista de 3 limitaciones"</a:t>
+            </a:r>
+            <a:r>
+              <a:rPr sz="1300" i="0" b="0">
+                <a:solidFill>
+                  <a:srgbClr val="D4D4D4"/>
+                </a:solidFill>
+                <a:latin typeface="Consolas"/>
+              </a:rPr>
+              <a:t>, </a:t>
+            </a:r>
+            <a:r>
+              <a:rPr sz="1300" i="0" b="0">
+                <a:solidFill>
+                  <a:srgbClr val="CE9178"/>
+                </a:solidFill>
+                <a:latin typeface="Consolas"/>
+              </a:rPr>
+              <a:t>"1"</a:t>
+            </a:r>
+            <a:r>
+              <a:rPr sz="1300" i="0" b="0">
+                <a:solidFill>
+                  <a:srgbClr val="D4D4D4"/>
+                </a:solidFill>
+                <a:latin typeface="Consolas"/>
+              </a:rPr>
+              <a:t>}</a:t>
+            </a:r>
+          </a:p>
+          <a:p>
+            <a:pPr>
+              <a:spcAft>
+                <a:spcPts val="278"/>
+              </a:spcAft>
+            </a:pPr>
+            <a:r>
+              <a:rPr sz="1300" i="0" b="0">
+                <a:solidFill>
+                  <a:srgbClr val="D4D4D4"/>
+                </a:solidFill>
+                <a:latin typeface="Consolas"/>
+              </a:rPr>
+              <a:t>};</a:t>
+            </a:r>
+          </a:p>
+        </p:txBody>
+      </p:sp>
+      <p:sp>
+        <p:nvSpPr>
+          <p:cNvPr id="13" name="TextBox 12"/>
+          <p:cNvSpPr txBox="1"/>
+          <p:nvPr/>
+        </p:nvSpPr>
+        <p:spPr>
+          <a:xfrm>
+            <a:off x="457200" y="6035040"/>
+            <a:ext cx="11277295" cy="365760"/>
+          </a:xfrm>
+          <a:prstGeom prst="rect">
+            <a:avLst/>
+          </a:prstGeom>
+          <a:noFill/>
+        </p:spPr>
+        <p:txBody>
+          <a:bodyPr wrap="square">
+            <a:spAutoFit/>
+          </a:bodyPr>
+          <a:lstStyle/>
+          <a:p>
             <a:pPr algn="ctr"/>
             <a:r>
               <a:rPr sz="1300" b="0" i="1">
@@ -10156,7 +10522,7 @@
       </p:sp>
       <p:sp>
         <p:nvSpPr>
-          <p:cNvPr id="13" name="TextBox 12"/>
+          <p:cNvPr id="14" name="TextBox 13"/>
           <p:cNvSpPr txBox="1"/>
           <p:nvPr/>
         </p:nvSpPr>
@@ -12433,7 +12799,7 @@
         <p:spPr>
           <a:xfrm>
             <a:off x="457200" y="1261872"/>
-            <a:ext cx="11277295" cy="4783296"/>
+            <a:ext cx="11277295" cy="3868623"/>
           </a:xfrm>
           <a:prstGeom prst="roundRect">
             <a:avLst>
@@ -12682,8 +13048,8 @@
         </p:nvSpPr>
         <p:spPr>
           <a:xfrm>
-            <a:off x="1188720" y="1719072"/>
-            <a:ext cx="10271455" cy="4188936"/>
+            <a:off x="685800" y="1719072"/>
+            <a:ext cx="502920" cy="3274263"/>
           </a:xfrm>
           <a:prstGeom prst="rect">
             <a:avLst/>
@@ -12696,1044 +13062,243 @@
           </a:bodyPr>
           <a:lstStyle/>
           <a:p>
-            <a:pPr>
+            <a:pPr algn="r">
               <a:spcAft>
-                <a:spcPts val="300"/>
+                <a:spcPts val="235"/>
               </a:spcAft>
             </a:pPr>
             <a:r>
-              <a:rPr sz="1400" i="1" b="0">
-                <a:solidFill>
-                  <a:srgbClr val="6A9955"/>
-                </a:solidFill>
-                <a:latin typeface="Consolas"/>
-              </a:rPr>
-              <a:t>/** Si esto no da verde, no se comparte pantalla. */</a:t>
-            </a:r>
-          </a:p>
-          <a:p>
-            <a:pPr>
+              <a:rPr sz="1100" i="0" b="0">
+                <a:solidFill>
+                  <a:srgbClr val="858585"/>
+                </a:solidFill>
+                <a:latin typeface="Consolas"/>
+              </a:rPr>
+              <a:t>1</a:t>
+            </a:r>
+          </a:p>
+          <a:p>
+            <a:pPr algn="r">
               <a:spcAft>
-                <a:spcPts val="300"/>
+                <a:spcPts val="235"/>
               </a:spcAft>
             </a:pPr>
             <a:r>
-              <a:rPr sz="1400" i="0" b="0">
-                <a:solidFill>
-                  <a:srgbClr val="569CD6"/>
-                </a:solidFill>
-                <a:latin typeface="Consolas"/>
-              </a:rPr>
-              <a:t>private</a:t>
-            </a:r>
-            <a:r>
-              <a:rPr sz="1400" i="0" b="0">
-                <a:solidFill>
-                  <a:srgbClr val="D4D4D4"/>
-                </a:solidFill>
-                <a:latin typeface="Consolas"/>
-              </a:rPr>
-              <a:t> </a:t>
-            </a:r>
-            <a:r>
-              <a:rPr sz="1400" i="0" b="0">
-                <a:solidFill>
-                  <a:srgbClr val="569CD6"/>
-                </a:solidFill>
-                <a:latin typeface="Consolas"/>
-              </a:rPr>
-              <a:t>static</a:t>
-            </a:r>
-            <a:r>
-              <a:rPr sz="1400" i="0" b="0">
-                <a:solidFill>
-                  <a:srgbClr val="D4D4D4"/>
-                </a:solidFill>
-                <a:latin typeface="Consolas"/>
-              </a:rPr>
-              <a:t> </a:t>
-            </a:r>
-            <a:r>
-              <a:rPr sz="1400" i="0" b="0">
-                <a:solidFill>
-                  <a:srgbClr val="4EC9B0"/>
-                </a:solidFill>
-                <a:latin typeface="Consolas"/>
-              </a:rPr>
-              <a:t>boolean</a:t>
-            </a:r>
-            <a:r>
-              <a:rPr sz="1400" i="0" b="0">
-                <a:solidFill>
-                  <a:srgbClr val="D4D4D4"/>
-                </a:solidFill>
-                <a:latin typeface="Consolas"/>
-              </a:rPr>
-              <a:t> </a:t>
-            </a:r>
-            <a:r>
-              <a:rPr sz="1400" i="0" b="0">
-                <a:solidFill>
-                  <a:srgbClr val="DCDCAA"/>
-                </a:solidFill>
-                <a:latin typeface="Consolas"/>
-              </a:rPr>
-              <a:t>chequeoPreVuelo</a:t>
-            </a:r>
-            <a:r>
-              <a:rPr sz="1400" i="0" b="0">
-                <a:solidFill>
-                  <a:srgbClr val="D4D4D4"/>
-                </a:solidFill>
-                <a:latin typeface="Consolas"/>
-              </a:rPr>
-              <a:t>() {</a:t>
-            </a:r>
-          </a:p>
-          <a:p>
-            <a:pPr>
+              <a:rPr sz="1100" i="0" b="0">
+                <a:solidFill>
+                  <a:srgbClr val="858585"/>
+                </a:solidFill>
+                <a:latin typeface="Consolas"/>
+              </a:rPr>
+              <a:t>2</a:t>
+            </a:r>
+          </a:p>
+          <a:p>
+            <a:pPr algn="r">
               <a:spcAft>
-                <a:spcPts val="300"/>
+                <a:spcPts val="235"/>
               </a:spcAft>
             </a:pPr>
             <a:r>
-              <a:rPr sz="1400" i="0" b="0">
-                <a:solidFill>
-                  <a:srgbClr val="D4D4D4"/>
-                </a:solidFill>
-                <a:latin typeface="Consolas"/>
-              </a:rPr>
-              <a:t>    </a:t>
-            </a:r>
-            <a:r>
-              <a:rPr sz="1400" i="0" b="0">
-                <a:solidFill>
-                  <a:srgbClr val="4EC9B0"/>
-                </a:solidFill>
-                <a:latin typeface="Consolas"/>
-              </a:rPr>
-              <a:t>String</a:t>
-            </a:r>
-            <a:r>
-              <a:rPr sz="1400" i="0" b="0">
-                <a:solidFill>
-                  <a:srgbClr val="D4D4D4"/>
-                </a:solidFill>
-                <a:latin typeface="Consolas"/>
-              </a:rPr>
-              <a:t>[] </a:t>
-            </a:r>
-            <a:r>
-              <a:rPr sz="1400" i="0" b="0">
-                <a:solidFill>
-                  <a:srgbClr val="D4D4D4"/>
-                </a:solidFill>
-                <a:latin typeface="Consolas"/>
-              </a:rPr>
-              <a:t>requeridos</a:t>
-            </a:r>
-            <a:r>
-              <a:rPr sz="1400" i="0" b="0">
-                <a:solidFill>
-                  <a:srgbClr val="D4D4D4"/>
-                </a:solidFill>
-                <a:latin typeface="Consolas"/>
-              </a:rPr>
-              <a:t> = {</a:t>
-            </a:r>
-            <a:r>
-              <a:rPr sz="1400" i="0" b="0">
-                <a:solidFill>
-                  <a:srgbClr val="D4D4D4"/>
-                </a:solidFill>
-                <a:latin typeface="Consolas"/>
-              </a:rPr>
-              <a:t>CARPETA</a:t>
-            </a:r>
-            <a:r>
-              <a:rPr sz="1400" i="0" b="0">
-                <a:solidFill>
-                  <a:srgbClr val="D4D4D4"/>
-                </a:solidFill>
-                <a:latin typeface="Consolas"/>
-              </a:rPr>
-              <a:t> + </a:t>
-            </a:r>
-            <a:r>
-              <a:rPr sz="1400" i="0" b="0">
-                <a:solidFill>
-                  <a:srgbClr val="CE9178"/>
-                </a:solidFill>
-                <a:latin typeface="Consolas"/>
-              </a:rPr>
-              <a:t>"/duenos.csv"</a:t>
-            </a:r>
-            <a:r>
-              <a:rPr sz="1400" i="0" b="0">
-                <a:solidFill>
-                  <a:srgbClr val="D4D4D4"/>
-                </a:solidFill>
-                <a:latin typeface="Consolas"/>
-              </a:rPr>
-              <a:t>, </a:t>
-            </a:r>
-            <a:r>
-              <a:rPr sz="1400" i="0" b="0">
-                <a:solidFill>
-                  <a:srgbClr val="D4D4D4"/>
-                </a:solidFill>
-                <a:latin typeface="Consolas"/>
-              </a:rPr>
-              <a:t>CARPETA</a:t>
-            </a:r>
-            <a:r>
-              <a:rPr sz="1400" i="0" b="0">
-                <a:solidFill>
-                  <a:srgbClr val="D4D4D4"/>
-                </a:solidFill>
-                <a:latin typeface="Consolas"/>
-              </a:rPr>
-              <a:t> + </a:t>
-            </a:r>
-            <a:r>
-              <a:rPr sz="1400" i="0" b="0">
-                <a:solidFill>
-                  <a:srgbClr val="CE9178"/>
-                </a:solidFill>
-                <a:latin typeface="Consolas"/>
-              </a:rPr>
-              <a:t>"/mascotas.csv"</a:t>
-            </a:r>
-            <a:r>
-              <a:rPr sz="1400" i="0" b="0">
-                <a:solidFill>
-                  <a:srgbClr val="D4D4D4"/>
-                </a:solidFill>
-                <a:latin typeface="Consolas"/>
-              </a:rPr>
-              <a:t>, </a:t>
-            </a:r>
-            <a:r>
-              <a:rPr sz="1400" i="0" b="0">
-                <a:solidFill>
-                  <a:srgbClr val="D4D4D4"/>
-                </a:solidFill>
-                <a:latin typeface="Consolas"/>
-              </a:rPr>
-              <a:t>CARPETA</a:t>
-            </a:r>
-            <a:r>
-              <a:rPr sz="1400" i="0" b="0">
-                <a:solidFill>
-                  <a:srgbClr val="D4D4D4"/>
-                </a:solidFill>
-                <a:latin typeface="Consolas"/>
-              </a:rPr>
-              <a:t> + </a:t>
-            </a:r>
-            <a:r>
-              <a:rPr sz="1400" i="0" b="0">
-                <a:solidFill>
-                  <a:srgbClr val="CE9178"/>
-                </a:solidFill>
-                <a:latin typeface="Consolas"/>
-              </a:rPr>
-              <a:t>"/citas.csv"</a:t>
-            </a:r>
-            <a:r>
-              <a:rPr sz="1400" i="0" b="0">
-                <a:solidFill>
-                  <a:srgbClr val="D4D4D4"/>
-                </a:solidFill>
-                <a:latin typeface="Consolas"/>
-              </a:rPr>
-              <a:t>};</a:t>
-            </a:r>
-          </a:p>
-          <a:p>
-            <a:pPr>
+              <a:rPr sz="1100" i="0" b="0">
+                <a:solidFill>
+                  <a:srgbClr val="858585"/>
+                </a:solidFill>
+                <a:latin typeface="Consolas"/>
+              </a:rPr>
+              <a:t>3</a:t>
+            </a:r>
+          </a:p>
+          <a:p>
+            <a:pPr algn="r">
               <a:spcAft>
-                <a:spcPts val="300"/>
+                <a:spcPts val="235"/>
               </a:spcAft>
             </a:pPr>
             <a:r>
-              <a:rPr sz="1400" i="0" b="0">
-                <a:solidFill>
-                  <a:srgbClr val="D4D4D4"/>
-                </a:solidFill>
-                <a:latin typeface="Consolas"/>
-              </a:rPr>
-              <a:t>    </a:t>
-            </a:r>
-            <a:r>
-              <a:rPr sz="1400" i="0" b="0">
-                <a:solidFill>
-                  <a:srgbClr val="4EC9B0"/>
-                </a:solidFill>
-                <a:latin typeface="Consolas"/>
-              </a:rPr>
-              <a:t>boolean</a:t>
-            </a:r>
-            <a:r>
-              <a:rPr sz="1400" i="0" b="0">
-                <a:solidFill>
-                  <a:srgbClr val="D4D4D4"/>
-                </a:solidFill>
-                <a:latin typeface="Consolas"/>
-              </a:rPr>
-              <a:t> </a:t>
-            </a:r>
-            <a:r>
-              <a:rPr sz="1400" i="0" b="0">
-                <a:solidFill>
-                  <a:srgbClr val="D4D4D4"/>
-                </a:solidFill>
-                <a:latin typeface="Consolas"/>
-              </a:rPr>
-              <a:t>listo</a:t>
-            </a:r>
-            <a:r>
-              <a:rPr sz="1400" i="0" b="0">
-                <a:solidFill>
-                  <a:srgbClr val="D4D4D4"/>
-                </a:solidFill>
-                <a:latin typeface="Consolas"/>
-              </a:rPr>
-              <a:t> = </a:t>
-            </a:r>
-            <a:r>
-              <a:rPr sz="1400" i="0" b="0">
-                <a:solidFill>
-                  <a:srgbClr val="569CD6"/>
-                </a:solidFill>
-                <a:latin typeface="Consolas"/>
-              </a:rPr>
-              <a:t>true</a:t>
-            </a:r>
-            <a:r>
-              <a:rPr sz="1400" i="0" b="0">
-                <a:solidFill>
-                  <a:srgbClr val="D4D4D4"/>
-                </a:solidFill>
-                <a:latin typeface="Consolas"/>
-              </a:rPr>
-              <a:t>;</a:t>
-            </a:r>
-          </a:p>
-          <a:p>
-            <a:pPr>
+              <a:rPr sz="1100" i="0" b="0">
+                <a:solidFill>
+                  <a:srgbClr val="858585"/>
+                </a:solidFill>
+                <a:latin typeface="Consolas"/>
+              </a:rPr>
+              <a:t>4</a:t>
+            </a:r>
+          </a:p>
+          <a:p>
+            <a:pPr algn="r">
               <a:spcAft>
-                <a:spcPts val="300"/>
+                <a:spcPts val="235"/>
               </a:spcAft>
             </a:pPr>
             <a:r>
-              <a:rPr sz="1400" i="0" b="0">
-                <a:solidFill>
-                  <a:srgbClr val="D4D4D4"/>
-                </a:solidFill>
-                <a:latin typeface="Consolas"/>
-              </a:rPr>
-              <a:t>    </a:t>
-            </a:r>
-            <a:r>
-              <a:rPr sz="1400" i="0" b="0">
-                <a:solidFill>
-                  <a:srgbClr val="DCDCAA"/>
-                </a:solidFill>
-                <a:latin typeface="Consolas"/>
-              </a:rPr>
-              <a:t>System.out.println</a:t>
-            </a:r>
-            <a:r>
-              <a:rPr sz="1400" i="0" b="0">
-                <a:solidFill>
-                  <a:srgbClr val="D4D4D4"/>
-                </a:solidFill>
-                <a:latin typeface="Consolas"/>
-              </a:rPr>
-              <a:t>(</a:t>
-            </a:r>
-            <a:r>
-              <a:rPr sz="1400" i="0" b="0">
-                <a:solidFill>
-                  <a:srgbClr val="CE9178"/>
-                </a:solidFill>
-                <a:latin typeface="Consolas"/>
-              </a:rPr>
-              <a:t>"--- Chequeo pre-vuelo ---"</a:t>
-            </a:r>
-            <a:r>
-              <a:rPr sz="1400" i="0" b="0">
-                <a:solidFill>
-                  <a:srgbClr val="D4D4D4"/>
-                </a:solidFill>
-                <a:latin typeface="Consolas"/>
-              </a:rPr>
-              <a:t>);</a:t>
-            </a:r>
-          </a:p>
-          <a:p>
-            <a:pPr>
+              <a:rPr sz="1100" i="0" b="0">
+                <a:solidFill>
+                  <a:srgbClr val="858585"/>
+                </a:solidFill>
+                <a:latin typeface="Consolas"/>
+              </a:rPr>
+              <a:t>5</a:t>
+            </a:r>
+          </a:p>
+          <a:p>
+            <a:pPr algn="r">
               <a:spcAft>
-                <a:spcPts val="300"/>
+                <a:spcPts val="235"/>
               </a:spcAft>
             </a:pPr>
             <a:r>
-              <a:rPr sz="1400" i="0" b="0">
-                <a:solidFill>
-                  <a:srgbClr val="D4D4D4"/>
-                </a:solidFill>
-                <a:latin typeface="Consolas"/>
-              </a:rPr>
-              <a:t>    </a:t>
-            </a:r>
-            <a:r>
-              <a:rPr sz="1400" i="0" b="0">
-                <a:solidFill>
-                  <a:srgbClr val="569CD6"/>
-                </a:solidFill>
-                <a:latin typeface="Consolas"/>
-              </a:rPr>
-              <a:t>for</a:t>
-            </a:r>
-            <a:r>
-              <a:rPr sz="1400" i="0" b="0">
-                <a:solidFill>
-                  <a:srgbClr val="D4D4D4"/>
-                </a:solidFill>
-                <a:latin typeface="Consolas"/>
-              </a:rPr>
-              <a:t> (</a:t>
-            </a:r>
-            <a:r>
-              <a:rPr sz="1400" i="0" b="0">
-                <a:solidFill>
-                  <a:srgbClr val="4EC9B0"/>
-                </a:solidFill>
-                <a:latin typeface="Consolas"/>
-              </a:rPr>
-              <a:t>String</a:t>
-            </a:r>
-            <a:r>
-              <a:rPr sz="1400" i="0" b="0">
-                <a:solidFill>
-                  <a:srgbClr val="D4D4D4"/>
-                </a:solidFill>
-                <a:latin typeface="Consolas"/>
-              </a:rPr>
-              <a:t> </a:t>
-            </a:r>
-            <a:r>
-              <a:rPr sz="1400" i="0" b="0">
-                <a:solidFill>
-                  <a:srgbClr val="D4D4D4"/>
-                </a:solidFill>
-                <a:latin typeface="Consolas"/>
-              </a:rPr>
-              <a:t>ruta</a:t>
-            </a:r>
-            <a:r>
-              <a:rPr sz="1400" i="0" b="0">
-                <a:solidFill>
-                  <a:srgbClr val="D4D4D4"/>
-                </a:solidFill>
-                <a:latin typeface="Consolas"/>
-              </a:rPr>
-              <a:t> : </a:t>
-            </a:r>
-            <a:r>
-              <a:rPr sz="1400" i="0" b="0">
-                <a:solidFill>
-                  <a:srgbClr val="D4D4D4"/>
-                </a:solidFill>
-                <a:latin typeface="Consolas"/>
-              </a:rPr>
-              <a:t>requeridos</a:t>
-            </a:r>
-            <a:r>
-              <a:rPr sz="1400" i="0" b="0">
-                <a:solidFill>
-                  <a:srgbClr val="D4D4D4"/>
-                </a:solidFill>
-                <a:latin typeface="Consolas"/>
-              </a:rPr>
-              <a:t>) {</a:t>
-            </a:r>
-          </a:p>
-          <a:p>
-            <a:pPr>
+              <a:rPr sz="1100" i="0" b="0">
+                <a:solidFill>
+                  <a:srgbClr val="858585"/>
+                </a:solidFill>
+                <a:latin typeface="Consolas"/>
+              </a:rPr>
+              <a:t>6</a:t>
+            </a:r>
+          </a:p>
+          <a:p>
+            <a:pPr algn="r">
               <a:spcAft>
-                <a:spcPts val="300"/>
+                <a:spcPts val="235"/>
               </a:spcAft>
             </a:pPr>
             <a:r>
-              <a:rPr sz="1400" i="0" b="0">
-                <a:solidFill>
-                  <a:srgbClr val="D4D4D4"/>
-                </a:solidFill>
-                <a:latin typeface="Consolas"/>
-              </a:rPr>
-              <a:t>        </a:t>
-            </a:r>
-            <a:r>
-              <a:rPr sz="1400" i="0" b="0">
-                <a:solidFill>
-                  <a:srgbClr val="4EC9B0"/>
-                </a:solidFill>
-                <a:latin typeface="Consolas"/>
-              </a:rPr>
-              <a:t>int</a:t>
-            </a:r>
-            <a:r>
-              <a:rPr sz="1400" i="0" b="0">
-                <a:solidFill>
-                  <a:srgbClr val="D4D4D4"/>
-                </a:solidFill>
-                <a:latin typeface="Consolas"/>
-              </a:rPr>
-              <a:t> </a:t>
-            </a:r>
-            <a:r>
-              <a:rPr sz="1400" i="0" b="0">
-                <a:solidFill>
-                  <a:srgbClr val="D4D4D4"/>
-                </a:solidFill>
-                <a:latin typeface="Consolas"/>
-              </a:rPr>
-              <a:t>filas</a:t>
-            </a:r>
-            <a:r>
-              <a:rPr sz="1400" i="0" b="0">
-                <a:solidFill>
-                  <a:srgbClr val="D4D4D4"/>
-                </a:solidFill>
-                <a:latin typeface="Consolas"/>
-              </a:rPr>
-              <a:t> = </a:t>
-            </a:r>
-            <a:r>
-              <a:rPr sz="1400" i="0" b="0">
-                <a:solidFill>
-                  <a:srgbClr val="DCDCAA"/>
-                </a:solidFill>
-                <a:latin typeface="Consolas"/>
-              </a:rPr>
-              <a:t>contarFilas</a:t>
-            </a:r>
-            <a:r>
-              <a:rPr sz="1400" i="0" b="0">
-                <a:solidFill>
-                  <a:srgbClr val="D4D4D4"/>
-                </a:solidFill>
-                <a:latin typeface="Consolas"/>
-              </a:rPr>
-              <a:t>(</a:t>
-            </a:r>
-            <a:r>
-              <a:rPr sz="1400" i="0" b="0">
-                <a:solidFill>
-                  <a:srgbClr val="D4D4D4"/>
-                </a:solidFill>
-                <a:latin typeface="Consolas"/>
-              </a:rPr>
-              <a:t>ruta</a:t>
-            </a:r>
-            <a:r>
-              <a:rPr sz="1400" i="0" b="0">
-                <a:solidFill>
-                  <a:srgbClr val="D4D4D4"/>
-                </a:solidFill>
-                <a:latin typeface="Consolas"/>
-              </a:rPr>
-              <a:t>);</a:t>
-            </a:r>
-          </a:p>
-          <a:p>
-            <a:pPr>
+              <a:rPr sz="1100" i="0" b="0">
+                <a:solidFill>
+                  <a:srgbClr val="858585"/>
+                </a:solidFill>
+                <a:latin typeface="Consolas"/>
+              </a:rPr>
+              <a:t>7</a:t>
+            </a:r>
+          </a:p>
+          <a:p>
+            <a:pPr algn="r">
               <a:spcAft>
-                <a:spcPts val="300"/>
+                <a:spcPts val="235"/>
               </a:spcAft>
             </a:pPr>
             <a:r>
-              <a:rPr sz="1400" i="0" b="0">
-                <a:solidFill>
-                  <a:srgbClr val="D4D4D4"/>
-                </a:solidFill>
-                <a:latin typeface="Consolas"/>
-              </a:rPr>
-              <a:t>        </a:t>
-            </a:r>
-            <a:r>
-              <a:rPr sz="1400" i="0" b="0">
-                <a:solidFill>
-                  <a:srgbClr val="DCDCAA"/>
-                </a:solidFill>
-                <a:latin typeface="Consolas"/>
-              </a:rPr>
-              <a:t>System.out.println</a:t>
-            </a:r>
-            <a:r>
-              <a:rPr sz="1400" i="0" b="0">
-                <a:solidFill>
-                  <a:srgbClr val="D4D4D4"/>
-                </a:solidFill>
-                <a:latin typeface="Consolas"/>
-              </a:rPr>
-              <a:t>((</a:t>
-            </a:r>
-            <a:r>
-              <a:rPr sz="1400" i="0" b="0">
-                <a:solidFill>
-                  <a:srgbClr val="D4D4D4"/>
-                </a:solidFill>
-                <a:latin typeface="Consolas"/>
-              </a:rPr>
-              <a:t>filas</a:t>
-            </a:r>
-            <a:r>
-              <a:rPr sz="1400" i="0" b="0">
-                <a:solidFill>
-                  <a:srgbClr val="D4D4D4"/>
-                </a:solidFill>
-                <a:latin typeface="Consolas"/>
-              </a:rPr>
-              <a:t> &gt; </a:t>
-            </a:r>
-            <a:r>
-              <a:rPr sz="1400" i="0" b="0">
-                <a:solidFill>
-                  <a:srgbClr val="B5CEA8"/>
-                </a:solidFill>
-                <a:latin typeface="Consolas"/>
-              </a:rPr>
-              <a:t>0</a:t>
-            </a:r>
-            <a:r>
-              <a:rPr sz="1400" i="0" b="0">
-                <a:solidFill>
-                  <a:srgbClr val="D4D4D4"/>
-                </a:solidFill>
-                <a:latin typeface="Consolas"/>
-              </a:rPr>
-              <a:t> ? </a:t>
-            </a:r>
-            <a:r>
-              <a:rPr sz="1400" i="0" b="0">
-                <a:solidFill>
-                  <a:srgbClr val="CE9178"/>
-                </a:solidFill>
-                <a:latin typeface="Consolas"/>
-              </a:rPr>
-              <a:t>"  [OK]    "</a:t>
-            </a:r>
-            <a:r>
-              <a:rPr sz="1400" i="0" b="0">
-                <a:solidFill>
-                  <a:srgbClr val="D4D4D4"/>
-                </a:solidFill>
-                <a:latin typeface="Consolas"/>
-              </a:rPr>
-              <a:t> : </a:t>
-            </a:r>
-            <a:r>
-              <a:rPr sz="1400" i="0" b="0">
-                <a:solidFill>
-                  <a:srgbClr val="CE9178"/>
-                </a:solidFill>
-                <a:latin typeface="Consolas"/>
-              </a:rPr>
-              <a:t>"  [FALLA] "</a:t>
-            </a:r>
-            <a:r>
-              <a:rPr sz="1400" i="0" b="0">
-                <a:solidFill>
-                  <a:srgbClr val="D4D4D4"/>
-                </a:solidFill>
-                <a:latin typeface="Consolas"/>
-              </a:rPr>
-              <a:t>) + </a:t>
-            </a:r>
-            <a:r>
-              <a:rPr sz="1400" i="0" b="0">
-                <a:solidFill>
-                  <a:srgbClr val="D4D4D4"/>
-                </a:solidFill>
-                <a:latin typeface="Consolas"/>
-              </a:rPr>
-              <a:t>ruta</a:t>
-            </a:r>
-            <a:r>
-              <a:rPr sz="1400" i="0" b="0">
-                <a:solidFill>
-                  <a:srgbClr val="D4D4D4"/>
-                </a:solidFill>
-                <a:latin typeface="Consolas"/>
-              </a:rPr>
-              <a:t> + </a:t>
-            </a:r>
-            <a:r>
-              <a:rPr sz="1400" i="0" b="0">
-                <a:solidFill>
-                  <a:srgbClr val="CE9178"/>
-                </a:solidFill>
-                <a:latin typeface="Consolas"/>
-              </a:rPr>
-              <a:t>" -&gt; "</a:t>
-            </a:r>
-            <a:r>
-              <a:rPr sz="1400" i="0" b="0">
-                <a:solidFill>
-                  <a:srgbClr val="D4D4D4"/>
-                </a:solidFill>
-                <a:latin typeface="Consolas"/>
-              </a:rPr>
-              <a:t> + </a:t>
-            </a:r>
-            <a:r>
-              <a:rPr sz="1400" i="0" b="0">
-                <a:solidFill>
-                  <a:srgbClr val="D4D4D4"/>
-                </a:solidFill>
-                <a:latin typeface="Consolas"/>
-              </a:rPr>
-              <a:t>filas</a:t>
-            </a:r>
-            <a:r>
-              <a:rPr sz="1400" i="0" b="0">
-                <a:solidFill>
-                  <a:srgbClr val="D4D4D4"/>
-                </a:solidFill>
-                <a:latin typeface="Consolas"/>
-              </a:rPr>
-              <a:t> + </a:t>
-            </a:r>
-            <a:r>
-              <a:rPr sz="1400" i="0" b="0">
-                <a:solidFill>
-                  <a:srgbClr val="CE9178"/>
-                </a:solidFill>
-                <a:latin typeface="Consolas"/>
-              </a:rPr>
-              <a:t>" filas"</a:t>
-            </a:r>
-            <a:r>
-              <a:rPr sz="1400" i="0" b="0">
-                <a:solidFill>
-                  <a:srgbClr val="D4D4D4"/>
-                </a:solidFill>
-                <a:latin typeface="Consolas"/>
-              </a:rPr>
-              <a:t>);</a:t>
-            </a:r>
-          </a:p>
-          <a:p>
-            <a:pPr>
+              <a:rPr sz="1100" i="0" b="0">
+                <a:solidFill>
+                  <a:srgbClr val="858585"/>
+                </a:solidFill>
+                <a:latin typeface="Consolas"/>
+              </a:rPr>
+              <a:t>8</a:t>
+            </a:r>
+          </a:p>
+          <a:p>
+            <a:pPr algn="r">
               <a:spcAft>
-                <a:spcPts val="300"/>
+                <a:spcPts val="235"/>
               </a:spcAft>
             </a:pPr>
             <a:r>
-              <a:rPr sz="1400" i="0" b="0">
-                <a:solidFill>
-                  <a:srgbClr val="D4D4D4"/>
-                </a:solidFill>
-                <a:latin typeface="Consolas"/>
-              </a:rPr>
-              <a:t>        </a:t>
-            </a:r>
-            <a:r>
-              <a:rPr sz="1400" i="0" b="0">
-                <a:solidFill>
-                  <a:srgbClr val="569CD6"/>
-                </a:solidFill>
-                <a:latin typeface="Consolas"/>
-              </a:rPr>
-              <a:t>if</a:t>
-            </a:r>
-            <a:r>
-              <a:rPr sz="1400" i="0" b="0">
-                <a:solidFill>
-                  <a:srgbClr val="D4D4D4"/>
-                </a:solidFill>
-                <a:latin typeface="Consolas"/>
-              </a:rPr>
-              <a:t> (</a:t>
-            </a:r>
-            <a:r>
-              <a:rPr sz="1400" i="0" b="0">
-                <a:solidFill>
-                  <a:srgbClr val="D4D4D4"/>
-                </a:solidFill>
-                <a:latin typeface="Consolas"/>
-              </a:rPr>
-              <a:t>filas</a:t>
-            </a:r>
-            <a:r>
-              <a:rPr sz="1400" i="0" b="0">
-                <a:solidFill>
-                  <a:srgbClr val="D4D4D4"/>
-                </a:solidFill>
-                <a:latin typeface="Consolas"/>
-              </a:rPr>
-              <a:t> == </a:t>
-            </a:r>
-            <a:r>
-              <a:rPr sz="1400" i="0" b="0">
-                <a:solidFill>
-                  <a:srgbClr val="B5CEA8"/>
-                </a:solidFill>
-                <a:latin typeface="Consolas"/>
-              </a:rPr>
-              <a:t>0</a:t>
-            </a:r>
-            <a:r>
-              <a:rPr sz="1400" i="0" b="0">
-                <a:solidFill>
-                  <a:srgbClr val="D4D4D4"/>
-                </a:solidFill>
-                <a:latin typeface="Consolas"/>
-              </a:rPr>
-              <a:t>) {</a:t>
-            </a:r>
-          </a:p>
-          <a:p>
-            <a:pPr>
+              <a:rPr sz="1100" i="0" b="0">
+                <a:solidFill>
+                  <a:srgbClr val="858585"/>
+                </a:solidFill>
+                <a:latin typeface="Consolas"/>
+              </a:rPr>
+              <a:t>9</a:t>
+            </a:r>
+          </a:p>
+          <a:p>
+            <a:pPr algn="r">
               <a:spcAft>
-                <a:spcPts val="300"/>
+                <a:spcPts val="235"/>
               </a:spcAft>
             </a:pPr>
             <a:r>
-              <a:rPr sz="1400" i="0" b="0">
-                <a:solidFill>
-                  <a:srgbClr val="D4D4D4"/>
-                </a:solidFill>
-                <a:latin typeface="Consolas"/>
-              </a:rPr>
-              <a:t>            </a:t>
-            </a:r>
-            <a:r>
-              <a:rPr sz="1400" i="0" b="0">
-                <a:solidFill>
-                  <a:srgbClr val="D4D4D4"/>
-                </a:solidFill>
-                <a:latin typeface="Consolas"/>
-              </a:rPr>
-              <a:t>listo</a:t>
-            </a:r>
-            <a:r>
-              <a:rPr sz="1400" i="0" b="0">
-                <a:solidFill>
-                  <a:srgbClr val="D4D4D4"/>
-                </a:solidFill>
-                <a:latin typeface="Consolas"/>
-              </a:rPr>
-              <a:t> = </a:t>
-            </a:r>
-            <a:r>
-              <a:rPr sz="1400" i="0" b="0">
-                <a:solidFill>
-                  <a:srgbClr val="569CD6"/>
-                </a:solidFill>
-                <a:latin typeface="Consolas"/>
-              </a:rPr>
-              <a:t>false</a:t>
-            </a:r>
-            <a:r>
-              <a:rPr sz="1400" i="0" b="0">
-                <a:solidFill>
-                  <a:srgbClr val="D4D4D4"/>
-                </a:solidFill>
-                <a:latin typeface="Consolas"/>
-              </a:rPr>
-              <a:t>;</a:t>
-            </a:r>
-          </a:p>
-          <a:p>
-            <a:pPr>
+              <a:rPr sz="1100" i="0" b="0">
+                <a:solidFill>
+                  <a:srgbClr val="858585"/>
+                </a:solidFill>
+                <a:latin typeface="Consolas"/>
+              </a:rPr>
+              <a:t>10</a:t>
+            </a:r>
+          </a:p>
+          <a:p>
+            <a:pPr algn="r">
               <a:spcAft>
-                <a:spcPts val="300"/>
+                <a:spcPts val="235"/>
               </a:spcAft>
             </a:pPr>
             <a:r>
-              <a:rPr sz="1400" i="0" b="0">
-                <a:solidFill>
-                  <a:srgbClr val="D4D4D4"/>
-                </a:solidFill>
-                <a:latin typeface="Consolas"/>
-              </a:rPr>
-              <a:t>        }</a:t>
-            </a:r>
-          </a:p>
-          <a:p>
-            <a:pPr>
+              <a:rPr sz="1100" i="0" b="0">
+                <a:solidFill>
+                  <a:srgbClr val="858585"/>
+                </a:solidFill>
+                <a:latin typeface="Consolas"/>
+              </a:rPr>
+              <a:t>11</a:t>
+            </a:r>
+          </a:p>
+          <a:p>
+            <a:pPr algn="r">
               <a:spcAft>
-                <a:spcPts val="300"/>
+                <a:spcPts val="235"/>
               </a:spcAft>
             </a:pPr>
             <a:r>
-              <a:rPr sz="1400" i="0" b="0">
-                <a:solidFill>
-                  <a:srgbClr val="D4D4D4"/>
-                </a:solidFill>
-                <a:latin typeface="Consolas"/>
-              </a:rPr>
-              <a:t>    }</a:t>
-            </a:r>
-          </a:p>
-          <a:p>
-            <a:pPr>
+              <a:rPr sz="1100" i="0" b="0">
+                <a:solidFill>
+                  <a:srgbClr val="858585"/>
+                </a:solidFill>
+                <a:latin typeface="Consolas"/>
+              </a:rPr>
+              <a:t>12</a:t>
+            </a:r>
+          </a:p>
+          <a:p>
+            <a:pPr algn="r">
               <a:spcAft>
-                <a:spcPts val="300"/>
+                <a:spcPts val="235"/>
               </a:spcAft>
             </a:pPr>
             <a:r>
-              <a:rPr sz="1400" i="0" b="0">
-                <a:solidFill>
-                  <a:srgbClr val="D4D4D4"/>
-                </a:solidFill>
-                <a:latin typeface="Consolas"/>
-              </a:rPr>
-              <a:t>    </a:t>
-            </a:r>
-            <a:r>
-              <a:rPr sz="1400" i="0" b="0">
-                <a:solidFill>
-                  <a:srgbClr val="DCDCAA"/>
-                </a:solidFill>
-                <a:latin typeface="Consolas"/>
-              </a:rPr>
-              <a:t>System.out.println</a:t>
-            </a:r>
-            <a:r>
-              <a:rPr sz="1400" i="0" b="0">
-                <a:solidFill>
-                  <a:srgbClr val="D4D4D4"/>
-                </a:solidFill>
-                <a:latin typeface="Consolas"/>
-              </a:rPr>
-              <a:t>(</a:t>
-            </a:r>
-            <a:r>
-              <a:rPr sz="1400" i="0" b="0">
-                <a:solidFill>
-                  <a:srgbClr val="D4D4D4"/>
-                </a:solidFill>
-                <a:latin typeface="Consolas"/>
-              </a:rPr>
-              <a:t>listo</a:t>
-            </a:r>
-            <a:r>
-              <a:rPr sz="1400" i="0" b="0">
-                <a:solidFill>
-                  <a:srgbClr val="D4D4D4"/>
-                </a:solidFill>
-                <a:latin typeface="Consolas"/>
-              </a:rPr>
-              <a:t> ? </a:t>
-            </a:r>
-            <a:r>
-              <a:rPr sz="1400" i="0" b="0">
-                <a:solidFill>
-                  <a:srgbClr val="CE9178"/>
-                </a:solidFill>
-                <a:latin typeface="Consolas"/>
-              </a:rPr>
-              <a:t>"  Listos para la demo en vivo."</a:t>
-            </a:r>
-            <a:r>
-              <a:rPr sz="1400" i="0" b="0">
-                <a:solidFill>
-                  <a:srgbClr val="D4D4D4"/>
-                </a:solidFill>
-                <a:latin typeface="Consolas"/>
-              </a:rPr>
-              <a:t> : </a:t>
-            </a:r>
-            <a:r>
-              <a:rPr sz="1400" i="0" b="0">
-                <a:solidFill>
-                  <a:srgbClr val="CE9178"/>
-                </a:solidFill>
-                <a:latin typeface="Consolas"/>
-              </a:rPr>
-              <a:t>"  Siembre los datos con la opcion 1 antes de continuar."</a:t>
-            </a:r>
-            <a:r>
-              <a:rPr sz="1400" i="0" b="0">
-                <a:solidFill>
-                  <a:srgbClr val="D4D4D4"/>
-                </a:solidFill>
-                <a:latin typeface="Consolas"/>
-              </a:rPr>
-              <a:t>);</a:t>
-            </a:r>
-          </a:p>
-          <a:p>
-            <a:pPr>
+              <a:rPr sz="1100" i="0" b="0">
+                <a:solidFill>
+                  <a:srgbClr val="858585"/>
+                </a:solidFill>
+                <a:latin typeface="Consolas"/>
+              </a:rPr>
+              <a:t>13</a:t>
+            </a:r>
+          </a:p>
+          <a:p>
+            <a:pPr algn="r">
               <a:spcAft>
-                <a:spcPts val="300"/>
+                <a:spcPts val="235"/>
               </a:spcAft>
             </a:pPr>
             <a:r>
-              <a:rPr sz="1400" i="0" b="0">
-                <a:solidFill>
-                  <a:srgbClr val="D4D4D4"/>
-                </a:solidFill>
-                <a:latin typeface="Consolas"/>
-              </a:rPr>
-              <a:t>    </a:t>
-            </a:r>
-            <a:r>
-              <a:rPr sz="1400" i="0" b="0">
-                <a:solidFill>
-                  <a:srgbClr val="569CD6"/>
-                </a:solidFill>
-                <a:latin typeface="Consolas"/>
-              </a:rPr>
-              <a:t>return</a:t>
-            </a:r>
-            <a:r>
-              <a:rPr sz="1400" i="0" b="0">
-                <a:solidFill>
-                  <a:srgbClr val="D4D4D4"/>
-                </a:solidFill>
-                <a:latin typeface="Consolas"/>
-              </a:rPr>
-              <a:t> </a:t>
-            </a:r>
-            <a:r>
-              <a:rPr sz="1400" i="0" b="0">
-                <a:solidFill>
-                  <a:srgbClr val="D4D4D4"/>
-                </a:solidFill>
-                <a:latin typeface="Consolas"/>
-              </a:rPr>
-              <a:t>listo</a:t>
-            </a:r>
-            <a:r>
-              <a:rPr sz="1400" i="0" b="0">
-                <a:solidFill>
-                  <a:srgbClr val="D4D4D4"/>
-                </a:solidFill>
-                <a:latin typeface="Consolas"/>
-              </a:rPr>
-              <a:t>;</a:t>
-            </a:r>
-          </a:p>
-          <a:p>
-            <a:pPr>
+              <a:rPr sz="1100" i="0" b="0">
+                <a:solidFill>
+                  <a:srgbClr val="858585"/>
+                </a:solidFill>
+                <a:latin typeface="Consolas"/>
+              </a:rPr>
+              <a:t>14</a:t>
+            </a:r>
+          </a:p>
+          <a:p>
+            <a:pPr algn="r">
               <a:spcAft>
-                <a:spcPts val="300"/>
+                <a:spcPts val="235"/>
               </a:spcAft>
             </a:pPr>
             <a:r>
-              <a:rPr sz="1400" i="0" b="0">
-                <a:solidFill>
-                  <a:srgbClr val="D4D4D4"/>
-                </a:solidFill>
-                <a:latin typeface="Consolas"/>
-              </a:rPr>
-              <a:t>}</a:t>
+              <a:rPr sz="1100" i="0" b="0">
+                <a:solidFill>
+                  <a:srgbClr val="858585"/>
+                </a:solidFill>
+                <a:latin typeface="Consolas"/>
+              </a:rPr>
+              <a:t>15</a:t>
             </a:r>
           </a:p>
         </p:txBody>
@@ -13746,8 +13311,8 @@
         </p:nvSpPr>
         <p:spPr>
           <a:xfrm>
-            <a:off x="457200" y="6035040"/>
-            <a:ext cx="11277295" cy="365760"/>
+            <a:off x="1188720" y="1719072"/>
+            <a:ext cx="10271455" cy="3274263"/>
           </a:xfrm>
           <a:prstGeom prst="rect">
             <a:avLst/>
@@ -13760,6 +13325,1070 @@
           </a:bodyPr>
           <a:lstStyle/>
           <a:p>
+            <a:pPr>
+              <a:spcAft>
+                <a:spcPts val="235"/>
+              </a:spcAft>
+            </a:pPr>
+            <a:r>
+              <a:rPr sz="1100" i="1" b="0">
+                <a:solidFill>
+                  <a:srgbClr val="6A9955"/>
+                </a:solidFill>
+                <a:latin typeface="Consolas"/>
+              </a:rPr>
+              <a:t>/** Si esto no da verde, no se comparte pantalla. */</a:t>
+            </a:r>
+          </a:p>
+          <a:p>
+            <a:pPr>
+              <a:spcAft>
+                <a:spcPts val="235"/>
+              </a:spcAft>
+            </a:pPr>
+            <a:r>
+              <a:rPr sz="1100" i="0" b="0">
+                <a:solidFill>
+                  <a:srgbClr val="569CD6"/>
+                </a:solidFill>
+                <a:latin typeface="Consolas"/>
+              </a:rPr>
+              <a:t>private</a:t>
+            </a:r>
+            <a:r>
+              <a:rPr sz="1100" i="0" b="0">
+                <a:solidFill>
+                  <a:srgbClr val="D4D4D4"/>
+                </a:solidFill>
+                <a:latin typeface="Consolas"/>
+              </a:rPr>
+              <a:t> </a:t>
+            </a:r>
+            <a:r>
+              <a:rPr sz="1100" i="0" b="0">
+                <a:solidFill>
+                  <a:srgbClr val="569CD6"/>
+                </a:solidFill>
+                <a:latin typeface="Consolas"/>
+              </a:rPr>
+              <a:t>static</a:t>
+            </a:r>
+            <a:r>
+              <a:rPr sz="1100" i="0" b="0">
+                <a:solidFill>
+                  <a:srgbClr val="D4D4D4"/>
+                </a:solidFill>
+                <a:latin typeface="Consolas"/>
+              </a:rPr>
+              <a:t> </a:t>
+            </a:r>
+            <a:r>
+              <a:rPr sz="1100" i="0" b="0">
+                <a:solidFill>
+                  <a:srgbClr val="4EC9B0"/>
+                </a:solidFill>
+                <a:latin typeface="Consolas"/>
+              </a:rPr>
+              <a:t>boolean</a:t>
+            </a:r>
+            <a:r>
+              <a:rPr sz="1100" i="0" b="0">
+                <a:solidFill>
+                  <a:srgbClr val="D4D4D4"/>
+                </a:solidFill>
+                <a:latin typeface="Consolas"/>
+              </a:rPr>
+              <a:t> </a:t>
+            </a:r>
+            <a:r>
+              <a:rPr sz="1100" i="0" b="0">
+                <a:solidFill>
+                  <a:srgbClr val="DCDCAA"/>
+                </a:solidFill>
+                <a:latin typeface="Consolas"/>
+              </a:rPr>
+              <a:t>chequeoPreVuelo</a:t>
+            </a:r>
+            <a:r>
+              <a:rPr sz="1100" i="0" b="0">
+                <a:solidFill>
+                  <a:srgbClr val="D4D4D4"/>
+                </a:solidFill>
+                <a:latin typeface="Consolas"/>
+              </a:rPr>
+              <a:t>() {</a:t>
+            </a:r>
+          </a:p>
+          <a:p>
+            <a:pPr>
+              <a:spcAft>
+                <a:spcPts val="235"/>
+              </a:spcAft>
+            </a:pPr>
+            <a:r>
+              <a:rPr sz="1100" i="0" b="0">
+                <a:solidFill>
+                  <a:srgbClr val="D4D4D4"/>
+                </a:solidFill>
+                <a:latin typeface="Consolas"/>
+              </a:rPr>
+              <a:t>    </a:t>
+            </a:r>
+            <a:r>
+              <a:rPr sz="1100" i="0" b="0">
+                <a:solidFill>
+                  <a:srgbClr val="4EC9B0"/>
+                </a:solidFill>
+                <a:latin typeface="Consolas"/>
+              </a:rPr>
+              <a:t>String</a:t>
+            </a:r>
+            <a:r>
+              <a:rPr sz="1100" i="0" b="0">
+                <a:solidFill>
+                  <a:srgbClr val="D4D4D4"/>
+                </a:solidFill>
+                <a:latin typeface="Consolas"/>
+              </a:rPr>
+              <a:t>[] </a:t>
+            </a:r>
+            <a:r>
+              <a:rPr sz="1100" i="0" b="0">
+                <a:solidFill>
+                  <a:srgbClr val="D4D4D4"/>
+                </a:solidFill>
+                <a:latin typeface="Consolas"/>
+              </a:rPr>
+              <a:t>requeridos</a:t>
+            </a:r>
+            <a:r>
+              <a:rPr sz="1100" i="0" b="0">
+                <a:solidFill>
+                  <a:srgbClr val="D4D4D4"/>
+                </a:solidFill>
+                <a:latin typeface="Consolas"/>
+              </a:rPr>
+              <a:t> = {</a:t>
+            </a:r>
+            <a:r>
+              <a:rPr sz="1100" i="0" b="0">
+                <a:solidFill>
+                  <a:srgbClr val="D4D4D4"/>
+                </a:solidFill>
+                <a:latin typeface="Consolas"/>
+              </a:rPr>
+              <a:t>CARPETA</a:t>
+            </a:r>
+            <a:r>
+              <a:rPr sz="1100" i="0" b="0">
+                <a:solidFill>
+                  <a:srgbClr val="D4D4D4"/>
+                </a:solidFill>
+                <a:latin typeface="Consolas"/>
+              </a:rPr>
+              <a:t> + </a:t>
+            </a:r>
+            <a:r>
+              <a:rPr sz="1100" i="0" b="0">
+                <a:solidFill>
+                  <a:srgbClr val="CE9178"/>
+                </a:solidFill>
+                <a:latin typeface="Consolas"/>
+              </a:rPr>
+              <a:t>"/duenos.csv"</a:t>
+            </a:r>
+            <a:r>
+              <a:rPr sz="1100" i="0" b="0">
+                <a:solidFill>
+                  <a:srgbClr val="D4D4D4"/>
+                </a:solidFill>
+                <a:latin typeface="Consolas"/>
+              </a:rPr>
+              <a:t>, </a:t>
+            </a:r>
+            <a:r>
+              <a:rPr sz="1100" i="0" b="0">
+                <a:solidFill>
+                  <a:srgbClr val="D4D4D4"/>
+                </a:solidFill>
+                <a:latin typeface="Consolas"/>
+              </a:rPr>
+              <a:t>CARPETA</a:t>
+            </a:r>
+            <a:r>
+              <a:rPr sz="1100" i="0" b="0">
+                <a:solidFill>
+                  <a:srgbClr val="D4D4D4"/>
+                </a:solidFill>
+                <a:latin typeface="Consolas"/>
+              </a:rPr>
+              <a:t> + </a:t>
+            </a:r>
+            <a:r>
+              <a:rPr sz="1100" i="0" b="0">
+                <a:solidFill>
+                  <a:srgbClr val="CE9178"/>
+                </a:solidFill>
+                <a:latin typeface="Consolas"/>
+              </a:rPr>
+              <a:t>"/mascotas.csv"</a:t>
+            </a:r>
+            <a:r>
+              <a:rPr sz="1100" i="0" b="0">
+                <a:solidFill>
+                  <a:srgbClr val="D4D4D4"/>
+                </a:solidFill>
+                <a:latin typeface="Consolas"/>
+              </a:rPr>
+              <a:t>, </a:t>
+            </a:r>
+            <a:r>
+              <a:rPr sz="1100" i="0" b="0">
+                <a:solidFill>
+                  <a:srgbClr val="D4D4D4"/>
+                </a:solidFill>
+                <a:latin typeface="Consolas"/>
+              </a:rPr>
+              <a:t>CARPETA</a:t>
+            </a:r>
+            <a:r>
+              <a:rPr sz="1100" i="0" b="0">
+                <a:solidFill>
+                  <a:srgbClr val="D4D4D4"/>
+                </a:solidFill>
+                <a:latin typeface="Consolas"/>
+              </a:rPr>
+              <a:t> + </a:t>
+            </a:r>
+            <a:r>
+              <a:rPr sz="1100" i="0" b="0">
+                <a:solidFill>
+                  <a:srgbClr val="CE9178"/>
+                </a:solidFill>
+                <a:latin typeface="Consolas"/>
+              </a:rPr>
+              <a:t>"/citas.csv"</a:t>
+            </a:r>
+            <a:r>
+              <a:rPr sz="1100" i="0" b="0">
+                <a:solidFill>
+                  <a:srgbClr val="D4D4D4"/>
+                </a:solidFill>
+                <a:latin typeface="Consolas"/>
+              </a:rPr>
+              <a:t>};</a:t>
+            </a:r>
+          </a:p>
+          <a:p>
+            <a:pPr>
+              <a:spcAft>
+                <a:spcPts val="235"/>
+              </a:spcAft>
+            </a:pPr>
+            <a:r>
+              <a:rPr sz="1100" i="0" b="0">
+                <a:solidFill>
+                  <a:srgbClr val="D4D4D4"/>
+                </a:solidFill>
+                <a:latin typeface="Consolas"/>
+              </a:rPr>
+              <a:t>    </a:t>
+            </a:r>
+            <a:r>
+              <a:rPr sz="1100" i="0" b="0">
+                <a:solidFill>
+                  <a:srgbClr val="4EC9B0"/>
+                </a:solidFill>
+                <a:latin typeface="Consolas"/>
+              </a:rPr>
+              <a:t>boolean</a:t>
+            </a:r>
+            <a:r>
+              <a:rPr sz="1100" i="0" b="0">
+                <a:solidFill>
+                  <a:srgbClr val="D4D4D4"/>
+                </a:solidFill>
+                <a:latin typeface="Consolas"/>
+              </a:rPr>
+              <a:t> </a:t>
+            </a:r>
+            <a:r>
+              <a:rPr sz="1100" i="0" b="0">
+                <a:solidFill>
+                  <a:srgbClr val="D4D4D4"/>
+                </a:solidFill>
+                <a:latin typeface="Consolas"/>
+              </a:rPr>
+              <a:t>listo</a:t>
+            </a:r>
+            <a:r>
+              <a:rPr sz="1100" i="0" b="0">
+                <a:solidFill>
+                  <a:srgbClr val="D4D4D4"/>
+                </a:solidFill>
+                <a:latin typeface="Consolas"/>
+              </a:rPr>
+              <a:t> = </a:t>
+            </a:r>
+            <a:r>
+              <a:rPr sz="1100" i="0" b="0">
+                <a:solidFill>
+                  <a:srgbClr val="569CD6"/>
+                </a:solidFill>
+                <a:latin typeface="Consolas"/>
+              </a:rPr>
+              <a:t>true</a:t>
+            </a:r>
+            <a:r>
+              <a:rPr sz="1100" i="0" b="0">
+                <a:solidFill>
+                  <a:srgbClr val="D4D4D4"/>
+                </a:solidFill>
+                <a:latin typeface="Consolas"/>
+              </a:rPr>
+              <a:t>;</a:t>
+            </a:r>
+          </a:p>
+          <a:p>
+            <a:pPr>
+              <a:spcAft>
+                <a:spcPts val="235"/>
+              </a:spcAft>
+            </a:pPr>
+            <a:r>
+              <a:rPr sz="1100" i="0" b="0">
+                <a:solidFill>
+                  <a:srgbClr val="D4D4D4"/>
+                </a:solidFill>
+                <a:latin typeface="Consolas"/>
+              </a:rPr>
+              <a:t>    </a:t>
+            </a:r>
+            <a:r>
+              <a:rPr sz="1100" i="0" b="0">
+                <a:solidFill>
+                  <a:srgbClr val="DCDCAA"/>
+                </a:solidFill>
+                <a:latin typeface="Consolas"/>
+              </a:rPr>
+              <a:t>System.out.println</a:t>
+            </a:r>
+            <a:r>
+              <a:rPr sz="1100" i="0" b="0">
+                <a:solidFill>
+                  <a:srgbClr val="D4D4D4"/>
+                </a:solidFill>
+                <a:latin typeface="Consolas"/>
+              </a:rPr>
+              <a:t>(</a:t>
+            </a:r>
+            <a:r>
+              <a:rPr sz="1100" i="0" b="0">
+                <a:solidFill>
+                  <a:srgbClr val="CE9178"/>
+                </a:solidFill>
+                <a:latin typeface="Consolas"/>
+              </a:rPr>
+              <a:t>"--- Chequeo pre-vuelo ---"</a:t>
+            </a:r>
+            <a:r>
+              <a:rPr sz="1100" i="0" b="0">
+                <a:solidFill>
+                  <a:srgbClr val="D4D4D4"/>
+                </a:solidFill>
+                <a:latin typeface="Consolas"/>
+              </a:rPr>
+              <a:t>);</a:t>
+            </a:r>
+          </a:p>
+          <a:p>
+            <a:pPr>
+              <a:spcAft>
+                <a:spcPts val="235"/>
+              </a:spcAft>
+            </a:pPr>
+            <a:r>
+              <a:rPr sz="1100" i="0" b="0">
+                <a:solidFill>
+                  <a:srgbClr val="D4D4D4"/>
+                </a:solidFill>
+                <a:latin typeface="Consolas"/>
+              </a:rPr>
+              <a:t>    </a:t>
+            </a:r>
+            <a:r>
+              <a:rPr sz="1100" i="0" b="0">
+                <a:solidFill>
+                  <a:srgbClr val="569CD6"/>
+                </a:solidFill>
+                <a:latin typeface="Consolas"/>
+              </a:rPr>
+              <a:t>for</a:t>
+            </a:r>
+            <a:r>
+              <a:rPr sz="1100" i="0" b="0">
+                <a:solidFill>
+                  <a:srgbClr val="D4D4D4"/>
+                </a:solidFill>
+                <a:latin typeface="Consolas"/>
+              </a:rPr>
+              <a:t> (</a:t>
+            </a:r>
+            <a:r>
+              <a:rPr sz="1100" i="0" b="0">
+                <a:solidFill>
+                  <a:srgbClr val="4EC9B0"/>
+                </a:solidFill>
+                <a:latin typeface="Consolas"/>
+              </a:rPr>
+              <a:t>String</a:t>
+            </a:r>
+            <a:r>
+              <a:rPr sz="1100" i="0" b="0">
+                <a:solidFill>
+                  <a:srgbClr val="D4D4D4"/>
+                </a:solidFill>
+                <a:latin typeface="Consolas"/>
+              </a:rPr>
+              <a:t> </a:t>
+            </a:r>
+            <a:r>
+              <a:rPr sz="1100" i="0" b="0">
+                <a:solidFill>
+                  <a:srgbClr val="D4D4D4"/>
+                </a:solidFill>
+                <a:latin typeface="Consolas"/>
+              </a:rPr>
+              <a:t>ruta</a:t>
+            </a:r>
+            <a:r>
+              <a:rPr sz="1100" i="0" b="0">
+                <a:solidFill>
+                  <a:srgbClr val="D4D4D4"/>
+                </a:solidFill>
+                <a:latin typeface="Consolas"/>
+              </a:rPr>
+              <a:t> : </a:t>
+            </a:r>
+            <a:r>
+              <a:rPr sz="1100" i="0" b="0">
+                <a:solidFill>
+                  <a:srgbClr val="D4D4D4"/>
+                </a:solidFill>
+                <a:latin typeface="Consolas"/>
+              </a:rPr>
+              <a:t>requeridos</a:t>
+            </a:r>
+            <a:r>
+              <a:rPr sz="1100" i="0" b="0">
+                <a:solidFill>
+                  <a:srgbClr val="D4D4D4"/>
+                </a:solidFill>
+                <a:latin typeface="Consolas"/>
+              </a:rPr>
+              <a:t>) {</a:t>
+            </a:r>
+          </a:p>
+          <a:p>
+            <a:pPr>
+              <a:spcAft>
+                <a:spcPts val="235"/>
+              </a:spcAft>
+            </a:pPr>
+            <a:r>
+              <a:rPr sz="1100" i="0" b="0">
+                <a:solidFill>
+                  <a:srgbClr val="D4D4D4"/>
+                </a:solidFill>
+                <a:latin typeface="Consolas"/>
+              </a:rPr>
+              <a:t>        </a:t>
+            </a:r>
+            <a:r>
+              <a:rPr sz="1100" i="0" b="0">
+                <a:solidFill>
+                  <a:srgbClr val="4EC9B0"/>
+                </a:solidFill>
+                <a:latin typeface="Consolas"/>
+              </a:rPr>
+              <a:t>int</a:t>
+            </a:r>
+            <a:r>
+              <a:rPr sz="1100" i="0" b="0">
+                <a:solidFill>
+                  <a:srgbClr val="D4D4D4"/>
+                </a:solidFill>
+                <a:latin typeface="Consolas"/>
+              </a:rPr>
+              <a:t> </a:t>
+            </a:r>
+            <a:r>
+              <a:rPr sz="1100" i="0" b="0">
+                <a:solidFill>
+                  <a:srgbClr val="D4D4D4"/>
+                </a:solidFill>
+                <a:latin typeface="Consolas"/>
+              </a:rPr>
+              <a:t>filas</a:t>
+            </a:r>
+            <a:r>
+              <a:rPr sz="1100" i="0" b="0">
+                <a:solidFill>
+                  <a:srgbClr val="D4D4D4"/>
+                </a:solidFill>
+                <a:latin typeface="Consolas"/>
+              </a:rPr>
+              <a:t> = </a:t>
+            </a:r>
+            <a:r>
+              <a:rPr sz="1100" i="0" b="0">
+                <a:solidFill>
+                  <a:srgbClr val="DCDCAA"/>
+                </a:solidFill>
+                <a:latin typeface="Consolas"/>
+              </a:rPr>
+              <a:t>contarFilas</a:t>
+            </a:r>
+            <a:r>
+              <a:rPr sz="1100" i="0" b="0">
+                <a:solidFill>
+                  <a:srgbClr val="D4D4D4"/>
+                </a:solidFill>
+                <a:latin typeface="Consolas"/>
+              </a:rPr>
+              <a:t>(</a:t>
+            </a:r>
+            <a:r>
+              <a:rPr sz="1100" i="0" b="0">
+                <a:solidFill>
+                  <a:srgbClr val="D4D4D4"/>
+                </a:solidFill>
+                <a:latin typeface="Consolas"/>
+              </a:rPr>
+              <a:t>ruta</a:t>
+            </a:r>
+            <a:r>
+              <a:rPr sz="1100" i="0" b="0">
+                <a:solidFill>
+                  <a:srgbClr val="D4D4D4"/>
+                </a:solidFill>
+                <a:latin typeface="Consolas"/>
+              </a:rPr>
+              <a:t>);</a:t>
+            </a:r>
+          </a:p>
+          <a:p>
+            <a:pPr>
+              <a:spcAft>
+                <a:spcPts val="235"/>
+              </a:spcAft>
+            </a:pPr>
+            <a:r>
+              <a:rPr sz="1100" i="0" b="0">
+                <a:solidFill>
+                  <a:srgbClr val="D4D4D4"/>
+                </a:solidFill>
+                <a:latin typeface="Consolas"/>
+              </a:rPr>
+              <a:t>        </a:t>
+            </a:r>
+            <a:r>
+              <a:rPr sz="1100" i="0" b="0">
+                <a:solidFill>
+                  <a:srgbClr val="DCDCAA"/>
+                </a:solidFill>
+                <a:latin typeface="Consolas"/>
+              </a:rPr>
+              <a:t>System.out.println</a:t>
+            </a:r>
+            <a:r>
+              <a:rPr sz="1100" i="0" b="0">
+                <a:solidFill>
+                  <a:srgbClr val="D4D4D4"/>
+                </a:solidFill>
+                <a:latin typeface="Consolas"/>
+              </a:rPr>
+              <a:t>((</a:t>
+            </a:r>
+            <a:r>
+              <a:rPr sz="1100" i="0" b="0">
+                <a:solidFill>
+                  <a:srgbClr val="D4D4D4"/>
+                </a:solidFill>
+                <a:latin typeface="Consolas"/>
+              </a:rPr>
+              <a:t>filas</a:t>
+            </a:r>
+            <a:r>
+              <a:rPr sz="1100" i="0" b="0">
+                <a:solidFill>
+                  <a:srgbClr val="D4D4D4"/>
+                </a:solidFill>
+                <a:latin typeface="Consolas"/>
+              </a:rPr>
+              <a:t> &gt; </a:t>
+            </a:r>
+            <a:r>
+              <a:rPr sz="1100" i="0" b="0">
+                <a:solidFill>
+                  <a:srgbClr val="B5CEA8"/>
+                </a:solidFill>
+                <a:latin typeface="Consolas"/>
+              </a:rPr>
+              <a:t>0</a:t>
+            </a:r>
+            <a:r>
+              <a:rPr sz="1100" i="0" b="0">
+                <a:solidFill>
+                  <a:srgbClr val="D4D4D4"/>
+                </a:solidFill>
+                <a:latin typeface="Consolas"/>
+              </a:rPr>
+              <a:t> ? </a:t>
+            </a:r>
+            <a:r>
+              <a:rPr sz="1100" i="0" b="0">
+                <a:solidFill>
+                  <a:srgbClr val="CE9178"/>
+                </a:solidFill>
+                <a:latin typeface="Consolas"/>
+              </a:rPr>
+              <a:t>"  [OK]    "</a:t>
+            </a:r>
+            <a:r>
+              <a:rPr sz="1100" i="0" b="0">
+                <a:solidFill>
+                  <a:srgbClr val="D4D4D4"/>
+                </a:solidFill>
+                <a:latin typeface="Consolas"/>
+              </a:rPr>
+              <a:t> : </a:t>
+            </a:r>
+            <a:r>
+              <a:rPr sz="1100" i="0" b="0">
+                <a:solidFill>
+                  <a:srgbClr val="CE9178"/>
+                </a:solidFill>
+                <a:latin typeface="Consolas"/>
+              </a:rPr>
+              <a:t>"  [FALLA] "</a:t>
+            </a:r>
+            <a:r>
+              <a:rPr sz="1100" i="0" b="0">
+                <a:solidFill>
+                  <a:srgbClr val="D4D4D4"/>
+                </a:solidFill>
+                <a:latin typeface="Consolas"/>
+              </a:rPr>
+              <a:t>) + </a:t>
+            </a:r>
+            <a:r>
+              <a:rPr sz="1100" i="0" b="0">
+                <a:solidFill>
+                  <a:srgbClr val="D4D4D4"/>
+                </a:solidFill>
+                <a:latin typeface="Consolas"/>
+              </a:rPr>
+              <a:t>ruta</a:t>
+            </a:r>
+            <a:r>
+              <a:rPr sz="1100" i="0" b="0">
+                <a:solidFill>
+                  <a:srgbClr val="D4D4D4"/>
+                </a:solidFill>
+                <a:latin typeface="Consolas"/>
+              </a:rPr>
+              <a:t> + </a:t>
+            </a:r>
+            <a:r>
+              <a:rPr sz="1100" i="0" b="0">
+                <a:solidFill>
+                  <a:srgbClr val="CE9178"/>
+                </a:solidFill>
+                <a:latin typeface="Consolas"/>
+              </a:rPr>
+              <a:t>" -&gt; "</a:t>
+            </a:r>
+            <a:r>
+              <a:rPr sz="1100" i="0" b="0">
+                <a:solidFill>
+                  <a:srgbClr val="D4D4D4"/>
+                </a:solidFill>
+                <a:latin typeface="Consolas"/>
+              </a:rPr>
+              <a:t> + </a:t>
+            </a:r>
+            <a:r>
+              <a:rPr sz="1100" i="0" b="0">
+                <a:solidFill>
+                  <a:srgbClr val="D4D4D4"/>
+                </a:solidFill>
+                <a:latin typeface="Consolas"/>
+              </a:rPr>
+              <a:t>filas</a:t>
+            </a:r>
+            <a:r>
+              <a:rPr sz="1100" i="0" b="0">
+                <a:solidFill>
+                  <a:srgbClr val="D4D4D4"/>
+                </a:solidFill>
+                <a:latin typeface="Consolas"/>
+              </a:rPr>
+              <a:t> + </a:t>
+            </a:r>
+            <a:r>
+              <a:rPr sz="1100" i="0" b="0">
+                <a:solidFill>
+                  <a:srgbClr val="CE9178"/>
+                </a:solidFill>
+                <a:latin typeface="Consolas"/>
+              </a:rPr>
+              <a:t>" filas"</a:t>
+            </a:r>
+            <a:r>
+              <a:rPr sz="1100" i="0" b="0">
+                <a:solidFill>
+                  <a:srgbClr val="D4D4D4"/>
+                </a:solidFill>
+                <a:latin typeface="Consolas"/>
+              </a:rPr>
+              <a:t>);</a:t>
+            </a:r>
+          </a:p>
+          <a:p>
+            <a:pPr>
+              <a:spcAft>
+                <a:spcPts val="235"/>
+              </a:spcAft>
+            </a:pPr>
+            <a:r>
+              <a:rPr sz="1100" i="0" b="0">
+                <a:solidFill>
+                  <a:srgbClr val="D4D4D4"/>
+                </a:solidFill>
+                <a:latin typeface="Consolas"/>
+              </a:rPr>
+              <a:t>        </a:t>
+            </a:r>
+            <a:r>
+              <a:rPr sz="1100" i="0" b="0">
+                <a:solidFill>
+                  <a:srgbClr val="569CD6"/>
+                </a:solidFill>
+                <a:latin typeface="Consolas"/>
+              </a:rPr>
+              <a:t>if</a:t>
+            </a:r>
+            <a:r>
+              <a:rPr sz="1100" i="0" b="0">
+                <a:solidFill>
+                  <a:srgbClr val="D4D4D4"/>
+                </a:solidFill>
+                <a:latin typeface="Consolas"/>
+              </a:rPr>
+              <a:t> (</a:t>
+            </a:r>
+            <a:r>
+              <a:rPr sz="1100" i="0" b="0">
+                <a:solidFill>
+                  <a:srgbClr val="D4D4D4"/>
+                </a:solidFill>
+                <a:latin typeface="Consolas"/>
+              </a:rPr>
+              <a:t>filas</a:t>
+            </a:r>
+            <a:r>
+              <a:rPr sz="1100" i="0" b="0">
+                <a:solidFill>
+                  <a:srgbClr val="D4D4D4"/>
+                </a:solidFill>
+                <a:latin typeface="Consolas"/>
+              </a:rPr>
+              <a:t> == </a:t>
+            </a:r>
+            <a:r>
+              <a:rPr sz="1100" i="0" b="0">
+                <a:solidFill>
+                  <a:srgbClr val="B5CEA8"/>
+                </a:solidFill>
+                <a:latin typeface="Consolas"/>
+              </a:rPr>
+              <a:t>0</a:t>
+            </a:r>
+            <a:r>
+              <a:rPr sz="1100" i="0" b="0">
+                <a:solidFill>
+                  <a:srgbClr val="D4D4D4"/>
+                </a:solidFill>
+                <a:latin typeface="Consolas"/>
+              </a:rPr>
+              <a:t>) {</a:t>
+            </a:r>
+          </a:p>
+          <a:p>
+            <a:pPr>
+              <a:spcAft>
+                <a:spcPts val="235"/>
+              </a:spcAft>
+            </a:pPr>
+            <a:r>
+              <a:rPr sz="1100" i="0" b="0">
+                <a:solidFill>
+                  <a:srgbClr val="D4D4D4"/>
+                </a:solidFill>
+                <a:latin typeface="Consolas"/>
+              </a:rPr>
+              <a:t>            </a:t>
+            </a:r>
+            <a:r>
+              <a:rPr sz="1100" i="0" b="0">
+                <a:solidFill>
+                  <a:srgbClr val="D4D4D4"/>
+                </a:solidFill>
+                <a:latin typeface="Consolas"/>
+              </a:rPr>
+              <a:t>listo</a:t>
+            </a:r>
+            <a:r>
+              <a:rPr sz="1100" i="0" b="0">
+                <a:solidFill>
+                  <a:srgbClr val="D4D4D4"/>
+                </a:solidFill>
+                <a:latin typeface="Consolas"/>
+              </a:rPr>
+              <a:t> = </a:t>
+            </a:r>
+            <a:r>
+              <a:rPr sz="1100" i="0" b="0">
+                <a:solidFill>
+                  <a:srgbClr val="569CD6"/>
+                </a:solidFill>
+                <a:latin typeface="Consolas"/>
+              </a:rPr>
+              <a:t>false</a:t>
+            </a:r>
+            <a:r>
+              <a:rPr sz="1100" i="0" b="0">
+                <a:solidFill>
+                  <a:srgbClr val="D4D4D4"/>
+                </a:solidFill>
+                <a:latin typeface="Consolas"/>
+              </a:rPr>
+              <a:t>;</a:t>
+            </a:r>
+          </a:p>
+          <a:p>
+            <a:pPr>
+              <a:spcAft>
+                <a:spcPts val="235"/>
+              </a:spcAft>
+            </a:pPr>
+            <a:r>
+              <a:rPr sz="1100" i="0" b="0">
+                <a:solidFill>
+                  <a:srgbClr val="D4D4D4"/>
+                </a:solidFill>
+                <a:latin typeface="Consolas"/>
+              </a:rPr>
+              <a:t>        }</a:t>
+            </a:r>
+          </a:p>
+          <a:p>
+            <a:pPr>
+              <a:spcAft>
+                <a:spcPts val="235"/>
+              </a:spcAft>
+            </a:pPr>
+            <a:r>
+              <a:rPr sz="1100" i="0" b="0">
+                <a:solidFill>
+                  <a:srgbClr val="D4D4D4"/>
+                </a:solidFill>
+                <a:latin typeface="Consolas"/>
+              </a:rPr>
+              <a:t>    }</a:t>
+            </a:r>
+          </a:p>
+          <a:p>
+            <a:pPr>
+              <a:spcAft>
+                <a:spcPts val="235"/>
+              </a:spcAft>
+            </a:pPr>
+            <a:r>
+              <a:rPr sz="1100" i="0" b="0">
+                <a:solidFill>
+                  <a:srgbClr val="D4D4D4"/>
+                </a:solidFill>
+                <a:latin typeface="Consolas"/>
+              </a:rPr>
+              <a:t>    </a:t>
+            </a:r>
+            <a:r>
+              <a:rPr sz="1100" i="0" b="0">
+                <a:solidFill>
+                  <a:srgbClr val="DCDCAA"/>
+                </a:solidFill>
+                <a:latin typeface="Consolas"/>
+              </a:rPr>
+              <a:t>System.out.println</a:t>
+            </a:r>
+            <a:r>
+              <a:rPr sz="1100" i="0" b="0">
+                <a:solidFill>
+                  <a:srgbClr val="D4D4D4"/>
+                </a:solidFill>
+                <a:latin typeface="Consolas"/>
+              </a:rPr>
+              <a:t>(</a:t>
+            </a:r>
+            <a:r>
+              <a:rPr sz="1100" i="0" b="0">
+                <a:solidFill>
+                  <a:srgbClr val="D4D4D4"/>
+                </a:solidFill>
+                <a:latin typeface="Consolas"/>
+              </a:rPr>
+              <a:t>listo</a:t>
+            </a:r>
+            <a:r>
+              <a:rPr sz="1100" i="0" b="0">
+                <a:solidFill>
+                  <a:srgbClr val="D4D4D4"/>
+                </a:solidFill>
+                <a:latin typeface="Consolas"/>
+              </a:rPr>
+              <a:t> ? </a:t>
+            </a:r>
+            <a:r>
+              <a:rPr sz="1100" i="0" b="0">
+                <a:solidFill>
+                  <a:srgbClr val="CE9178"/>
+                </a:solidFill>
+                <a:latin typeface="Consolas"/>
+              </a:rPr>
+              <a:t>"  Listos para la demo en vivo."</a:t>
+            </a:r>
+            <a:r>
+              <a:rPr sz="1100" i="0" b="0">
+                <a:solidFill>
+                  <a:srgbClr val="D4D4D4"/>
+                </a:solidFill>
+                <a:latin typeface="Consolas"/>
+              </a:rPr>
+              <a:t> : </a:t>
+            </a:r>
+            <a:r>
+              <a:rPr sz="1100" i="0" b="0">
+                <a:solidFill>
+                  <a:srgbClr val="CE9178"/>
+                </a:solidFill>
+                <a:latin typeface="Consolas"/>
+              </a:rPr>
+              <a:t>"  Siembre los datos con la opcion 1 antes de continuar."</a:t>
+            </a:r>
+            <a:r>
+              <a:rPr sz="1100" i="0" b="0">
+                <a:solidFill>
+                  <a:srgbClr val="D4D4D4"/>
+                </a:solidFill>
+                <a:latin typeface="Consolas"/>
+              </a:rPr>
+              <a:t>);</a:t>
+            </a:r>
+          </a:p>
+          <a:p>
+            <a:pPr>
+              <a:spcAft>
+                <a:spcPts val="235"/>
+              </a:spcAft>
+            </a:pPr>
+            <a:r>
+              <a:rPr sz="1100" i="0" b="0">
+                <a:solidFill>
+                  <a:srgbClr val="D4D4D4"/>
+                </a:solidFill>
+                <a:latin typeface="Consolas"/>
+              </a:rPr>
+              <a:t>    </a:t>
+            </a:r>
+            <a:r>
+              <a:rPr sz="1100" i="0" b="0">
+                <a:solidFill>
+                  <a:srgbClr val="569CD6"/>
+                </a:solidFill>
+                <a:latin typeface="Consolas"/>
+              </a:rPr>
+              <a:t>return</a:t>
+            </a:r>
+            <a:r>
+              <a:rPr sz="1100" i="0" b="0">
+                <a:solidFill>
+                  <a:srgbClr val="D4D4D4"/>
+                </a:solidFill>
+                <a:latin typeface="Consolas"/>
+              </a:rPr>
+              <a:t> </a:t>
+            </a:r>
+            <a:r>
+              <a:rPr sz="1100" i="0" b="0">
+                <a:solidFill>
+                  <a:srgbClr val="D4D4D4"/>
+                </a:solidFill>
+                <a:latin typeface="Consolas"/>
+              </a:rPr>
+              <a:t>listo</a:t>
+            </a:r>
+            <a:r>
+              <a:rPr sz="1100" i="0" b="0">
+                <a:solidFill>
+                  <a:srgbClr val="D4D4D4"/>
+                </a:solidFill>
+                <a:latin typeface="Consolas"/>
+              </a:rPr>
+              <a:t>;</a:t>
+            </a:r>
+          </a:p>
+          <a:p>
+            <a:pPr>
+              <a:spcAft>
+                <a:spcPts val="235"/>
+              </a:spcAft>
+            </a:pPr>
+            <a:r>
+              <a:rPr sz="1100" i="0" b="0">
+                <a:solidFill>
+                  <a:srgbClr val="D4D4D4"/>
+                </a:solidFill>
+                <a:latin typeface="Consolas"/>
+              </a:rPr>
+              <a:t>}</a:t>
+            </a:r>
+          </a:p>
+        </p:txBody>
+      </p:sp>
+      <p:sp>
+        <p:nvSpPr>
+          <p:cNvPr id="13" name="TextBox 12"/>
+          <p:cNvSpPr txBox="1"/>
+          <p:nvPr/>
+        </p:nvSpPr>
+        <p:spPr>
+          <a:xfrm>
+            <a:off x="457200" y="6035040"/>
+            <a:ext cx="11277295" cy="365760"/>
+          </a:xfrm>
+          <a:prstGeom prst="rect">
+            <a:avLst/>
+          </a:prstGeom>
+          <a:noFill/>
+        </p:spPr>
+        <p:txBody>
+          <a:bodyPr wrap="square">
+            <a:spAutoFit/>
+          </a:bodyPr>
+          <a:lstStyle/>
+          <a:p>
             <a:pPr algn="ctr"/>
             <a:r>
               <a:rPr sz="1300" b="0" i="1">
@@ -13775,7 +14404,7 @@
       </p:sp>
       <p:sp>
         <p:nvSpPr>
-          <p:cNvPr id="13" name="TextBox 12"/>
+          <p:cNvPr id="14" name="TextBox 13"/>
           <p:cNvSpPr txBox="1"/>
           <p:nvPr/>
         </p:nvSpPr>

--- a/Programacion II/Clases/Clase 14 - Preparacion de la presentacion final/Presentacion.pptx
+++ b/Programacion II/Clases/Clase 14 - Preparacion de la presentacion final/Presentacion.pptx
@@ -685,7 +685,7 @@
           <a:p/>
           <a:p>
             <a:r>
-              <a:t>La sustentacion es una coreografia y hay que repartirla como se reparte una obra de teatro, aunque suba una sola persona. La sustentacion es individual por defecto: el estudiante trocea su exposicion en bloques completos con inicio, final y evidencia en pantalla —no frases sueltas—, define en que momento suelta la diapositiva y toma el mouse, y deja listo un computador de respaldo con el proyecto ya abierto. Las transiciones entre bloques se dicen en voz alta, con una formula corta del tipo 'para mostrar como quedan guardados esos datos, abro de nuevo la aplicacion', porque los silencios incomodos al cambiar de tema son lo que mas se nota. Si el docente autorizo equipo de 2 o 3, cada integrante toma bloques completos, ninguno se queda callado aunque otro domine mas el codigo, y las transiciones se nombran ('sigue Julian'), porque el jurado pregunta quien hizo que y tiene derecho a preguntarle a cualquiera sobre cualquier parte. Un guion escrito, con minutos y evidencia por bloque (y el nombre del responsable si hay equipo), convierte una exposicion nerviosa en algo que se puede ensayar y medir; en el sistema de la clinica ese guion tiene cinco bloques y suma siete minutos, con cuatro dedicados a la demo.</a:t>
+              <a:t>La sustentacion es una coreografia y hay que repartirla como se reparte una obra de teatro, aunque suba una sola persona. La sustentacion es individual por defecto: el estudiante parte su exposicion en bloques completos con inicio, final y evidencia en pantalla —no frases sueltas—, define en que momento suelta la diapositiva y toma el mouse, y deja listo un computador de respaldo con el proyecto ya abierto. Las transiciones entre bloques se dicen en voz alta, con una formula corta del tipo 'para mostrar como quedan guardados esos datos, abro de nuevo la aplicacion', porque los silencios incomodos al cambiar de tema son lo que mas se nota. Si el docente autorizo equipo de 2 o 3, cada integrante toma bloques completos, ninguno se queda callado aunque otro domine mas el codigo, y las transiciones se nombran ('sigue Julian'), porque el jurado pregunta quien hizo que y tiene derecho a preguntarle a cualquiera sobre cualquier parte. Un guion escrito, con minutos y evidencia por bloque (y el nombre del responsable si hay equipo), convierte una exposicion nerviosa en algo que se puede ensayar y medir; en el sistema de la clinica ese guion tiene cinco bloques y suma siete minutos, con cuatro dedicados a la demo.</a:t>
             </a:r>
           </a:p>
         </p:txBody>
@@ -10879,7 +10879,7 @@
                 </a:solidFill>
                 <a:latin typeface="Calibri"/>
               </a:rPr>
-              <a:t>–   La exposición se trocea en bloques completos, con evidencia en pantalla.</a:t>
+              <a:t>–   La exposición se parte en bloques completos, con evidencia en pantalla.</a:t>
             </a:r>
           </a:p>
           <a:p>
